--- a/Projects/Chapter1/community-assembly-edit.pptx
+++ b/Projects/Chapter1/community-assembly-edit.pptx
@@ -5,37 +5,38 @@
     <p:sldMasterId id="2147483648" r:id="rId1"/>
   </p:sldMasterIdLst>
   <p:notesMasterIdLst>
-    <p:notesMasterId r:id="rId30"/>
+    <p:notesMasterId r:id="rId31"/>
   </p:notesMasterIdLst>
   <p:sldIdLst>
     <p:sldId id="256" r:id="rId2"/>
-    <p:sldId id="270" r:id="rId3"/>
-    <p:sldId id="280" r:id="rId4"/>
-    <p:sldId id="281" r:id="rId5"/>
-    <p:sldId id="283" r:id="rId6"/>
-    <p:sldId id="282" r:id="rId7"/>
-    <p:sldId id="287" r:id="rId8"/>
-    <p:sldId id="299" r:id="rId9"/>
-    <p:sldId id="300" r:id="rId10"/>
-    <p:sldId id="301" r:id="rId11"/>
-    <p:sldId id="302" r:id="rId12"/>
-    <p:sldId id="309" r:id="rId13"/>
-    <p:sldId id="310" r:id="rId14"/>
-    <p:sldId id="258" r:id="rId15"/>
-    <p:sldId id="259" r:id="rId16"/>
-    <p:sldId id="261" r:id="rId17"/>
-    <p:sldId id="277" r:id="rId18"/>
-    <p:sldId id="278" r:id="rId19"/>
-    <p:sldId id="293" r:id="rId20"/>
-    <p:sldId id="271" r:id="rId21"/>
-    <p:sldId id="265" r:id="rId22"/>
-    <p:sldId id="260" r:id="rId23"/>
-    <p:sldId id="295" r:id="rId24"/>
-    <p:sldId id="262" r:id="rId25"/>
-    <p:sldId id="294" r:id="rId26"/>
-    <p:sldId id="298" r:id="rId27"/>
-    <p:sldId id="296" r:id="rId28"/>
-    <p:sldId id="297" r:id="rId29"/>
+    <p:sldId id="311" r:id="rId3"/>
+    <p:sldId id="270" r:id="rId4"/>
+    <p:sldId id="280" r:id="rId5"/>
+    <p:sldId id="281" r:id="rId6"/>
+    <p:sldId id="283" r:id="rId7"/>
+    <p:sldId id="282" r:id="rId8"/>
+    <p:sldId id="287" r:id="rId9"/>
+    <p:sldId id="299" r:id="rId10"/>
+    <p:sldId id="300" r:id="rId11"/>
+    <p:sldId id="301" r:id="rId12"/>
+    <p:sldId id="302" r:id="rId13"/>
+    <p:sldId id="309" r:id="rId14"/>
+    <p:sldId id="310" r:id="rId15"/>
+    <p:sldId id="258" r:id="rId16"/>
+    <p:sldId id="259" r:id="rId17"/>
+    <p:sldId id="261" r:id="rId18"/>
+    <p:sldId id="277" r:id="rId19"/>
+    <p:sldId id="278" r:id="rId20"/>
+    <p:sldId id="265" r:id="rId21"/>
+    <p:sldId id="293" r:id="rId22"/>
+    <p:sldId id="271" r:id="rId23"/>
+    <p:sldId id="260" r:id="rId24"/>
+    <p:sldId id="295" r:id="rId25"/>
+    <p:sldId id="262" r:id="rId26"/>
+    <p:sldId id="294" r:id="rId27"/>
+    <p:sldId id="298" r:id="rId28"/>
+    <p:sldId id="296" r:id="rId29"/>
+    <p:sldId id="297" r:id="rId30"/>
   </p:sldIdLst>
   <p:sldSz cx="12192000" cy="6858000"/>
   <p:notesSz cx="6858000" cy="9144000"/>
@@ -3682,6 +3683,813 @@
 </file>
 
 <file path=ppt/diagrams/colors5.xml><?xml version="1.0" encoding="utf-8"?>
+<dgm:colorsDef xmlns:dgm="http://schemas.openxmlformats.org/drawingml/2006/diagram" xmlns:a="http://schemas.openxmlformats.org/drawingml/2006/main" uniqueId="urn:microsoft.com/office/officeart/2005/8/colors/accent4_1">
+  <dgm:title val=""/>
+  <dgm:desc val=""/>
+  <dgm:catLst>
+    <dgm:cat type="accent4" pri="11100"/>
+  </dgm:catLst>
+  <dgm:styleLbl name="node0">
+    <dgm:fillClrLst meth="repeat">
+      <a:schemeClr val="lt1"/>
+    </dgm:fillClrLst>
+    <dgm:linClrLst meth="repeat">
+      <a:schemeClr val="accent4">
+        <a:shade val="80000"/>
+      </a:schemeClr>
+    </dgm:linClrLst>
+    <dgm:effectClrLst/>
+    <dgm:txLinClrLst/>
+    <dgm:txFillClrLst meth="repeat">
+      <a:schemeClr val="dk1"/>
+    </dgm:txFillClrLst>
+    <dgm:txEffectClrLst/>
+  </dgm:styleLbl>
+  <dgm:styleLbl name="node1">
+    <dgm:fillClrLst meth="repeat">
+      <a:schemeClr val="lt1"/>
+    </dgm:fillClrLst>
+    <dgm:linClrLst meth="repeat">
+      <a:schemeClr val="accent4">
+        <a:shade val="80000"/>
+      </a:schemeClr>
+    </dgm:linClrLst>
+    <dgm:effectClrLst/>
+    <dgm:txLinClrLst/>
+    <dgm:txFillClrLst meth="repeat">
+      <a:schemeClr val="dk1"/>
+    </dgm:txFillClrLst>
+    <dgm:txEffectClrLst/>
+  </dgm:styleLbl>
+  <dgm:styleLbl name="alignNode1">
+    <dgm:fillClrLst meth="repeat">
+      <a:schemeClr val="lt1"/>
+    </dgm:fillClrLst>
+    <dgm:linClrLst meth="repeat">
+      <a:schemeClr val="accent4">
+        <a:shade val="80000"/>
+      </a:schemeClr>
+    </dgm:linClrLst>
+    <dgm:effectClrLst/>
+    <dgm:txLinClrLst/>
+    <dgm:txFillClrLst meth="repeat">
+      <a:schemeClr val="dk1"/>
+    </dgm:txFillClrLst>
+    <dgm:txEffectClrLst/>
+  </dgm:styleLbl>
+  <dgm:styleLbl name="lnNode1">
+    <dgm:fillClrLst meth="repeat">
+      <a:schemeClr val="lt1"/>
+    </dgm:fillClrLst>
+    <dgm:linClrLst meth="repeat">
+      <a:schemeClr val="accent4">
+        <a:shade val="80000"/>
+      </a:schemeClr>
+    </dgm:linClrLst>
+    <dgm:effectClrLst/>
+    <dgm:txLinClrLst/>
+    <dgm:txFillClrLst meth="repeat">
+      <a:schemeClr val="dk1"/>
+    </dgm:txFillClrLst>
+    <dgm:txEffectClrLst/>
+  </dgm:styleLbl>
+  <dgm:styleLbl name="vennNode1">
+    <dgm:fillClrLst meth="repeat">
+      <a:schemeClr val="lt1">
+        <a:alpha val="50000"/>
+      </a:schemeClr>
+    </dgm:fillClrLst>
+    <dgm:linClrLst meth="repeat">
+      <a:schemeClr val="accent4">
+        <a:shade val="80000"/>
+      </a:schemeClr>
+    </dgm:linClrLst>
+    <dgm:effectClrLst/>
+    <dgm:txLinClrLst/>
+    <dgm:txFillClrLst/>
+    <dgm:txEffectClrLst/>
+  </dgm:styleLbl>
+  <dgm:styleLbl name="node2">
+    <dgm:fillClrLst meth="repeat">
+      <a:schemeClr val="lt1"/>
+    </dgm:fillClrLst>
+    <dgm:linClrLst meth="repeat">
+      <a:schemeClr val="accent4">
+        <a:shade val="80000"/>
+      </a:schemeClr>
+    </dgm:linClrLst>
+    <dgm:effectClrLst/>
+    <dgm:txLinClrLst/>
+    <dgm:txFillClrLst meth="repeat">
+      <a:schemeClr val="dk1"/>
+    </dgm:txFillClrLst>
+    <dgm:txEffectClrLst/>
+  </dgm:styleLbl>
+  <dgm:styleLbl name="node3">
+    <dgm:fillClrLst meth="repeat">
+      <a:schemeClr val="lt1"/>
+    </dgm:fillClrLst>
+    <dgm:linClrLst meth="repeat">
+      <a:schemeClr val="accent4">
+        <a:shade val="80000"/>
+      </a:schemeClr>
+    </dgm:linClrLst>
+    <dgm:effectClrLst/>
+    <dgm:txLinClrLst/>
+    <dgm:txFillClrLst meth="repeat">
+      <a:schemeClr val="dk1"/>
+    </dgm:txFillClrLst>
+    <dgm:txEffectClrLst/>
+  </dgm:styleLbl>
+  <dgm:styleLbl name="node4">
+    <dgm:fillClrLst meth="repeat">
+      <a:schemeClr val="lt1"/>
+    </dgm:fillClrLst>
+    <dgm:linClrLst meth="repeat">
+      <a:schemeClr val="accent4">
+        <a:shade val="80000"/>
+      </a:schemeClr>
+    </dgm:linClrLst>
+    <dgm:effectClrLst/>
+    <dgm:txLinClrLst/>
+    <dgm:txFillClrLst meth="repeat">
+      <a:schemeClr val="dk1"/>
+    </dgm:txFillClrLst>
+    <dgm:txEffectClrLst/>
+  </dgm:styleLbl>
+  <dgm:styleLbl name="fgImgPlace1">
+    <dgm:fillClrLst meth="repeat">
+      <a:schemeClr val="accent4">
+        <a:tint val="40000"/>
+      </a:schemeClr>
+    </dgm:fillClrLst>
+    <dgm:linClrLst meth="repeat">
+      <a:schemeClr val="accent4">
+        <a:shade val="80000"/>
+      </a:schemeClr>
+    </dgm:linClrLst>
+    <dgm:effectClrLst/>
+    <dgm:txLinClrLst/>
+    <dgm:txFillClrLst meth="repeat">
+      <a:schemeClr val="lt1"/>
+    </dgm:txFillClrLst>
+    <dgm:txEffectClrLst/>
+  </dgm:styleLbl>
+  <dgm:styleLbl name="alignImgPlace1">
+    <dgm:fillClrLst meth="repeat">
+      <a:schemeClr val="accent4">
+        <a:tint val="40000"/>
+      </a:schemeClr>
+    </dgm:fillClrLst>
+    <dgm:linClrLst meth="repeat">
+      <a:schemeClr val="accent4">
+        <a:shade val="80000"/>
+      </a:schemeClr>
+    </dgm:linClrLst>
+    <dgm:effectClrLst/>
+    <dgm:txLinClrLst/>
+    <dgm:txFillClrLst meth="repeat">
+      <a:schemeClr val="lt1"/>
+    </dgm:txFillClrLst>
+    <dgm:txEffectClrLst/>
+  </dgm:styleLbl>
+  <dgm:styleLbl name="bgImgPlace1">
+    <dgm:fillClrLst meth="repeat">
+      <a:schemeClr val="accent4">
+        <a:tint val="40000"/>
+      </a:schemeClr>
+    </dgm:fillClrLst>
+    <dgm:linClrLst meth="repeat">
+      <a:schemeClr val="accent4">
+        <a:shade val="80000"/>
+      </a:schemeClr>
+    </dgm:linClrLst>
+    <dgm:effectClrLst/>
+    <dgm:txLinClrLst/>
+    <dgm:txFillClrLst meth="repeat">
+      <a:schemeClr val="lt1"/>
+    </dgm:txFillClrLst>
+    <dgm:txEffectClrLst/>
+  </dgm:styleLbl>
+  <dgm:styleLbl name="sibTrans2D1">
+    <dgm:fillClrLst meth="repeat">
+      <a:schemeClr val="accent4">
+        <a:tint val="60000"/>
+      </a:schemeClr>
+    </dgm:fillClrLst>
+    <dgm:linClrLst meth="repeat">
+      <a:schemeClr val="accent4">
+        <a:tint val="60000"/>
+      </a:schemeClr>
+    </dgm:linClrLst>
+    <dgm:effectClrLst/>
+    <dgm:txLinClrLst/>
+    <dgm:txFillClrLst meth="repeat">
+      <a:schemeClr val="dk1"/>
+    </dgm:txFillClrLst>
+    <dgm:txEffectClrLst/>
+  </dgm:styleLbl>
+  <dgm:styleLbl name="fgSibTrans2D1">
+    <dgm:fillClrLst meth="repeat">
+      <a:schemeClr val="accent4">
+        <a:tint val="60000"/>
+      </a:schemeClr>
+    </dgm:fillClrLst>
+    <dgm:linClrLst meth="repeat">
+      <a:schemeClr val="accent4">
+        <a:tint val="60000"/>
+      </a:schemeClr>
+    </dgm:linClrLst>
+    <dgm:effectClrLst/>
+    <dgm:txLinClrLst/>
+    <dgm:txFillClrLst meth="repeat">
+      <a:schemeClr val="dk1"/>
+    </dgm:txFillClrLst>
+    <dgm:txEffectClrLst/>
+  </dgm:styleLbl>
+  <dgm:styleLbl name="bgSibTrans2D1">
+    <dgm:fillClrLst meth="repeat">
+      <a:schemeClr val="accent4">
+        <a:tint val="60000"/>
+      </a:schemeClr>
+    </dgm:fillClrLst>
+    <dgm:linClrLst meth="repeat">
+      <a:schemeClr val="accent4">
+        <a:tint val="60000"/>
+      </a:schemeClr>
+    </dgm:linClrLst>
+    <dgm:effectClrLst/>
+    <dgm:txLinClrLst/>
+    <dgm:txFillClrLst meth="repeat">
+      <a:schemeClr val="dk1"/>
+    </dgm:txFillClrLst>
+    <dgm:txEffectClrLst/>
+  </dgm:styleLbl>
+  <dgm:styleLbl name="sibTrans1D1">
+    <dgm:fillClrLst meth="repeat">
+      <a:schemeClr val="accent4"/>
+    </dgm:fillClrLst>
+    <dgm:linClrLst meth="repeat">
+      <a:schemeClr val="accent4"/>
+    </dgm:linClrLst>
+    <dgm:effectClrLst/>
+    <dgm:txLinClrLst/>
+    <dgm:txFillClrLst meth="repeat">
+      <a:schemeClr val="tx1"/>
+    </dgm:txFillClrLst>
+    <dgm:txEffectClrLst/>
+  </dgm:styleLbl>
+  <dgm:styleLbl name="callout">
+    <dgm:fillClrLst meth="repeat">
+      <a:schemeClr val="accent4"/>
+    </dgm:fillClrLst>
+    <dgm:linClrLst meth="repeat">
+      <a:schemeClr val="accent4"/>
+    </dgm:linClrLst>
+    <dgm:effectClrLst/>
+    <dgm:txLinClrLst/>
+    <dgm:txFillClrLst meth="repeat">
+      <a:schemeClr val="tx1"/>
+    </dgm:txFillClrLst>
+    <dgm:txEffectClrLst/>
+  </dgm:styleLbl>
+  <dgm:styleLbl name="asst0">
+    <dgm:fillClrLst meth="repeat">
+      <a:schemeClr val="lt1"/>
+    </dgm:fillClrLst>
+    <dgm:linClrLst meth="repeat">
+      <a:schemeClr val="accent4">
+        <a:shade val="80000"/>
+      </a:schemeClr>
+    </dgm:linClrLst>
+    <dgm:effectClrLst/>
+    <dgm:txLinClrLst/>
+    <dgm:txFillClrLst meth="repeat">
+      <a:schemeClr val="dk1"/>
+    </dgm:txFillClrLst>
+    <dgm:txEffectClrLst/>
+  </dgm:styleLbl>
+  <dgm:styleLbl name="asst1">
+    <dgm:fillClrLst meth="repeat">
+      <a:schemeClr val="lt1"/>
+    </dgm:fillClrLst>
+    <dgm:linClrLst meth="repeat">
+      <a:schemeClr val="accent4">
+        <a:shade val="80000"/>
+      </a:schemeClr>
+    </dgm:linClrLst>
+    <dgm:effectClrLst/>
+    <dgm:txLinClrLst/>
+    <dgm:txFillClrLst meth="repeat">
+      <a:schemeClr val="dk1"/>
+    </dgm:txFillClrLst>
+    <dgm:txEffectClrLst/>
+  </dgm:styleLbl>
+  <dgm:styleLbl name="asst2">
+    <dgm:fillClrLst meth="repeat">
+      <a:schemeClr val="lt1"/>
+    </dgm:fillClrLst>
+    <dgm:linClrLst meth="repeat">
+      <a:schemeClr val="accent4">
+        <a:shade val="80000"/>
+      </a:schemeClr>
+    </dgm:linClrLst>
+    <dgm:effectClrLst/>
+    <dgm:txLinClrLst/>
+    <dgm:txFillClrLst meth="repeat">
+      <a:schemeClr val="dk1"/>
+    </dgm:txFillClrLst>
+    <dgm:txEffectClrLst/>
+  </dgm:styleLbl>
+  <dgm:styleLbl name="asst3">
+    <dgm:fillClrLst meth="repeat">
+      <a:schemeClr val="lt1"/>
+    </dgm:fillClrLst>
+    <dgm:linClrLst meth="repeat">
+      <a:schemeClr val="accent4">
+        <a:shade val="80000"/>
+      </a:schemeClr>
+    </dgm:linClrLst>
+    <dgm:effectClrLst/>
+    <dgm:txLinClrLst/>
+    <dgm:txFillClrLst meth="repeat">
+      <a:schemeClr val="dk1"/>
+    </dgm:txFillClrLst>
+    <dgm:txEffectClrLst/>
+  </dgm:styleLbl>
+  <dgm:styleLbl name="asst4">
+    <dgm:fillClrLst meth="repeat">
+      <a:schemeClr val="lt1"/>
+    </dgm:fillClrLst>
+    <dgm:linClrLst meth="repeat">
+      <a:schemeClr val="accent4">
+        <a:shade val="80000"/>
+      </a:schemeClr>
+    </dgm:linClrLst>
+    <dgm:effectClrLst/>
+    <dgm:txLinClrLst/>
+    <dgm:txFillClrLst meth="repeat">
+      <a:schemeClr val="dk1"/>
+    </dgm:txFillClrLst>
+    <dgm:txEffectClrLst/>
+  </dgm:styleLbl>
+  <dgm:styleLbl name="parChTrans2D1">
+    <dgm:fillClrLst meth="repeat">
+      <a:schemeClr val="accent4">
+        <a:tint val="60000"/>
+      </a:schemeClr>
+    </dgm:fillClrLst>
+    <dgm:linClrLst meth="repeat">
+      <a:schemeClr val="accent4">
+        <a:tint val="60000"/>
+      </a:schemeClr>
+    </dgm:linClrLst>
+    <dgm:effectClrLst/>
+    <dgm:txLinClrLst/>
+    <dgm:txFillClrLst/>
+    <dgm:txEffectClrLst/>
+  </dgm:styleLbl>
+  <dgm:styleLbl name="parChTrans2D2">
+    <dgm:fillClrLst meth="repeat">
+      <a:schemeClr val="accent4"/>
+    </dgm:fillClrLst>
+    <dgm:linClrLst meth="repeat">
+      <a:schemeClr val="accent4"/>
+    </dgm:linClrLst>
+    <dgm:effectClrLst/>
+    <dgm:txLinClrLst/>
+    <dgm:txFillClrLst/>
+    <dgm:txEffectClrLst/>
+  </dgm:styleLbl>
+  <dgm:styleLbl name="parChTrans2D3">
+    <dgm:fillClrLst meth="repeat">
+      <a:schemeClr val="accent4"/>
+    </dgm:fillClrLst>
+    <dgm:linClrLst meth="repeat">
+      <a:schemeClr val="accent4"/>
+    </dgm:linClrLst>
+    <dgm:effectClrLst/>
+    <dgm:txLinClrLst/>
+    <dgm:txFillClrLst/>
+    <dgm:txEffectClrLst/>
+  </dgm:styleLbl>
+  <dgm:styleLbl name="parChTrans2D4">
+    <dgm:fillClrLst meth="repeat">
+      <a:schemeClr val="accent4"/>
+    </dgm:fillClrLst>
+    <dgm:linClrLst meth="repeat">
+      <a:schemeClr val="accent4"/>
+    </dgm:linClrLst>
+    <dgm:effectClrLst/>
+    <dgm:txLinClrLst/>
+    <dgm:txFillClrLst meth="repeat">
+      <a:schemeClr val="lt1"/>
+    </dgm:txFillClrLst>
+    <dgm:txEffectClrLst/>
+  </dgm:styleLbl>
+  <dgm:styleLbl name="parChTrans1D1">
+    <dgm:fillClrLst meth="repeat">
+      <a:schemeClr val="accent4"/>
+    </dgm:fillClrLst>
+    <dgm:linClrLst meth="repeat">
+      <a:schemeClr val="accent4">
+        <a:shade val="60000"/>
+      </a:schemeClr>
+    </dgm:linClrLst>
+    <dgm:effectClrLst/>
+    <dgm:txLinClrLst/>
+    <dgm:txFillClrLst meth="repeat">
+      <a:schemeClr val="tx1"/>
+    </dgm:txFillClrLst>
+    <dgm:txEffectClrLst/>
+  </dgm:styleLbl>
+  <dgm:styleLbl name="parChTrans1D2">
+    <dgm:fillClrLst meth="repeat">
+      <a:schemeClr val="accent4"/>
+    </dgm:fillClrLst>
+    <dgm:linClrLst meth="repeat">
+      <a:schemeClr val="accent4">
+        <a:shade val="60000"/>
+      </a:schemeClr>
+    </dgm:linClrLst>
+    <dgm:effectClrLst/>
+    <dgm:txLinClrLst/>
+    <dgm:txFillClrLst meth="repeat">
+      <a:schemeClr val="tx1"/>
+    </dgm:txFillClrLst>
+    <dgm:txEffectClrLst/>
+  </dgm:styleLbl>
+  <dgm:styleLbl name="parChTrans1D3">
+    <dgm:fillClrLst meth="repeat">
+      <a:schemeClr val="accent4"/>
+    </dgm:fillClrLst>
+    <dgm:linClrLst meth="repeat">
+      <a:schemeClr val="accent4">
+        <a:shade val="80000"/>
+      </a:schemeClr>
+    </dgm:linClrLst>
+    <dgm:effectClrLst/>
+    <dgm:txLinClrLst/>
+    <dgm:txFillClrLst meth="repeat">
+      <a:schemeClr val="tx1"/>
+    </dgm:txFillClrLst>
+    <dgm:txEffectClrLst/>
+  </dgm:styleLbl>
+  <dgm:styleLbl name="parChTrans1D4">
+    <dgm:fillClrLst meth="repeat">
+      <a:schemeClr val="accent4"/>
+    </dgm:fillClrLst>
+    <dgm:linClrLst meth="repeat">
+      <a:schemeClr val="accent4">
+        <a:shade val="80000"/>
+      </a:schemeClr>
+    </dgm:linClrLst>
+    <dgm:effectClrLst/>
+    <dgm:txLinClrLst/>
+    <dgm:txFillClrLst meth="repeat">
+      <a:schemeClr val="tx1"/>
+    </dgm:txFillClrLst>
+    <dgm:txEffectClrLst/>
+  </dgm:styleLbl>
+  <dgm:styleLbl name="fgAcc1">
+    <dgm:fillClrLst meth="repeat">
+      <a:schemeClr val="accent4">
+        <a:alpha val="90000"/>
+        <a:tint val="40000"/>
+      </a:schemeClr>
+    </dgm:fillClrLst>
+    <dgm:linClrLst meth="repeat">
+      <a:schemeClr val="accent4"/>
+    </dgm:linClrLst>
+    <dgm:effectClrLst/>
+    <dgm:txLinClrLst/>
+    <dgm:txFillClrLst meth="repeat">
+      <a:schemeClr val="dk1"/>
+    </dgm:txFillClrLst>
+    <dgm:txEffectClrLst/>
+  </dgm:styleLbl>
+  <dgm:styleLbl name="conFgAcc1">
+    <dgm:fillClrLst meth="repeat">
+      <a:schemeClr val="accent4">
+        <a:alpha val="90000"/>
+        <a:tint val="40000"/>
+      </a:schemeClr>
+    </dgm:fillClrLst>
+    <dgm:linClrLst meth="repeat">
+      <a:schemeClr val="accent4"/>
+    </dgm:linClrLst>
+    <dgm:effectClrLst/>
+    <dgm:txLinClrLst/>
+    <dgm:txFillClrLst meth="repeat">
+      <a:schemeClr val="dk1"/>
+    </dgm:txFillClrLst>
+    <dgm:txEffectClrLst/>
+  </dgm:styleLbl>
+  <dgm:styleLbl name="alignAcc1">
+    <dgm:fillClrLst meth="repeat">
+      <a:schemeClr val="accent4">
+        <a:alpha val="90000"/>
+        <a:tint val="40000"/>
+      </a:schemeClr>
+    </dgm:fillClrLst>
+    <dgm:linClrLst meth="repeat">
+      <a:schemeClr val="accent4"/>
+    </dgm:linClrLst>
+    <dgm:effectClrLst/>
+    <dgm:txLinClrLst/>
+    <dgm:txFillClrLst meth="repeat">
+      <a:schemeClr val="dk1"/>
+    </dgm:txFillClrLst>
+    <dgm:txEffectClrLst/>
+  </dgm:styleLbl>
+  <dgm:styleLbl name="trAlignAcc1">
+    <dgm:fillClrLst meth="repeat">
+      <a:schemeClr val="accent4">
+        <a:alpha val="40000"/>
+        <a:tint val="40000"/>
+      </a:schemeClr>
+    </dgm:fillClrLst>
+    <dgm:linClrLst meth="repeat">
+      <a:schemeClr val="accent4"/>
+    </dgm:linClrLst>
+    <dgm:effectClrLst/>
+    <dgm:txLinClrLst/>
+    <dgm:txFillClrLst meth="repeat">
+      <a:schemeClr val="dk1"/>
+    </dgm:txFillClrLst>
+    <dgm:txEffectClrLst/>
+  </dgm:styleLbl>
+  <dgm:styleLbl name="bgAcc1">
+    <dgm:fillClrLst meth="repeat">
+      <a:schemeClr val="accent4">
+        <a:alpha val="90000"/>
+        <a:tint val="40000"/>
+      </a:schemeClr>
+    </dgm:fillClrLst>
+    <dgm:linClrLst meth="repeat">
+      <a:schemeClr val="accent4"/>
+    </dgm:linClrLst>
+    <dgm:effectClrLst/>
+    <dgm:txLinClrLst/>
+    <dgm:txFillClrLst meth="repeat">
+      <a:schemeClr val="dk1"/>
+    </dgm:txFillClrLst>
+    <dgm:txEffectClrLst/>
+  </dgm:styleLbl>
+  <dgm:styleLbl name="solidFgAcc1">
+    <dgm:fillClrLst meth="repeat">
+      <a:schemeClr val="lt1"/>
+    </dgm:fillClrLst>
+    <dgm:linClrLst meth="repeat">
+      <a:schemeClr val="accent4"/>
+    </dgm:linClrLst>
+    <dgm:effectClrLst/>
+    <dgm:txLinClrLst/>
+    <dgm:txFillClrLst meth="repeat">
+      <a:schemeClr val="dk1"/>
+    </dgm:txFillClrLst>
+    <dgm:txEffectClrLst/>
+  </dgm:styleLbl>
+  <dgm:styleLbl name="solidAlignAcc1">
+    <dgm:fillClrLst meth="repeat">
+      <a:schemeClr val="lt1"/>
+    </dgm:fillClrLst>
+    <dgm:linClrLst meth="repeat">
+      <a:schemeClr val="accent4"/>
+    </dgm:linClrLst>
+    <dgm:effectClrLst/>
+    <dgm:txLinClrLst/>
+    <dgm:txFillClrLst meth="repeat">
+      <a:schemeClr val="dk1"/>
+    </dgm:txFillClrLst>
+    <dgm:txEffectClrLst/>
+  </dgm:styleLbl>
+  <dgm:styleLbl name="solidBgAcc1">
+    <dgm:fillClrLst meth="repeat">
+      <a:schemeClr val="lt1"/>
+    </dgm:fillClrLst>
+    <dgm:linClrLst meth="repeat">
+      <a:schemeClr val="accent4"/>
+    </dgm:linClrLst>
+    <dgm:effectClrLst/>
+    <dgm:txLinClrLst/>
+    <dgm:txFillClrLst meth="repeat">
+      <a:schemeClr val="dk1"/>
+    </dgm:txFillClrLst>
+    <dgm:txEffectClrLst/>
+  </dgm:styleLbl>
+  <dgm:styleLbl name="fgAccFollowNode1">
+    <dgm:fillClrLst meth="repeat">
+      <a:schemeClr val="lt1">
+        <a:alpha val="90000"/>
+        <a:tint val="40000"/>
+      </a:schemeClr>
+    </dgm:fillClrLst>
+    <dgm:linClrLst meth="repeat">
+      <a:schemeClr val="accent4">
+        <a:alpha val="90000"/>
+      </a:schemeClr>
+    </dgm:linClrLst>
+    <dgm:effectClrLst/>
+    <dgm:txLinClrLst/>
+    <dgm:txFillClrLst meth="repeat">
+      <a:schemeClr val="dk1"/>
+    </dgm:txFillClrLst>
+    <dgm:txEffectClrLst/>
+  </dgm:styleLbl>
+  <dgm:styleLbl name="alignAccFollowNode1">
+    <dgm:fillClrLst meth="repeat">
+      <a:schemeClr val="lt1">
+        <a:alpha val="90000"/>
+        <a:tint val="40000"/>
+      </a:schemeClr>
+    </dgm:fillClrLst>
+    <dgm:linClrLst meth="repeat">
+      <a:schemeClr val="accent4">
+        <a:alpha val="90000"/>
+      </a:schemeClr>
+    </dgm:linClrLst>
+    <dgm:effectClrLst/>
+    <dgm:txLinClrLst/>
+    <dgm:txFillClrLst meth="repeat">
+      <a:schemeClr val="dk1"/>
+    </dgm:txFillClrLst>
+    <dgm:txEffectClrLst/>
+  </dgm:styleLbl>
+  <dgm:styleLbl name="bgAccFollowNode1">
+    <dgm:fillClrLst meth="repeat">
+      <a:schemeClr val="lt1">
+        <a:alpha val="90000"/>
+        <a:tint val="40000"/>
+      </a:schemeClr>
+    </dgm:fillClrLst>
+    <dgm:linClrLst meth="repeat">
+      <a:schemeClr val="accent4">
+        <a:alpha val="90000"/>
+      </a:schemeClr>
+    </dgm:linClrLst>
+    <dgm:effectClrLst/>
+    <dgm:txLinClrLst/>
+    <dgm:txFillClrLst meth="repeat">
+      <a:schemeClr val="dk1"/>
+    </dgm:txFillClrLst>
+    <dgm:txEffectClrLst/>
+  </dgm:styleLbl>
+  <dgm:styleLbl name="fgAcc0">
+    <dgm:fillClrLst meth="repeat">
+      <a:schemeClr val="accent4">
+        <a:alpha val="90000"/>
+        <a:tint val="40000"/>
+      </a:schemeClr>
+    </dgm:fillClrLst>
+    <dgm:linClrLst meth="repeat">
+      <a:schemeClr val="accent4"/>
+    </dgm:linClrLst>
+    <dgm:effectClrLst/>
+    <dgm:txLinClrLst/>
+    <dgm:txFillClrLst meth="repeat">
+      <a:schemeClr val="dk1"/>
+    </dgm:txFillClrLst>
+    <dgm:txEffectClrLst/>
+  </dgm:styleLbl>
+  <dgm:styleLbl name="fgAcc2">
+    <dgm:fillClrLst meth="repeat">
+      <a:schemeClr val="accent4">
+        <a:alpha val="90000"/>
+        <a:tint val="40000"/>
+      </a:schemeClr>
+    </dgm:fillClrLst>
+    <dgm:linClrLst meth="repeat">
+      <a:schemeClr val="accent4"/>
+    </dgm:linClrLst>
+    <dgm:effectClrLst/>
+    <dgm:txLinClrLst/>
+    <dgm:txFillClrLst meth="repeat">
+      <a:schemeClr val="dk1"/>
+    </dgm:txFillClrLst>
+    <dgm:txEffectClrLst/>
+  </dgm:styleLbl>
+  <dgm:styleLbl name="fgAcc3">
+    <dgm:fillClrLst meth="repeat">
+      <a:schemeClr val="accent4">
+        <a:alpha val="90000"/>
+        <a:tint val="40000"/>
+      </a:schemeClr>
+    </dgm:fillClrLst>
+    <dgm:linClrLst meth="repeat">
+      <a:schemeClr val="accent4"/>
+    </dgm:linClrLst>
+    <dgm:effectClrLst/>
+    <dgm:txLinClrLst/>
+    <dgm:txFillClrLst meth="repeat">
+      <a:schemeClr val="dk1"/>
+    </dgm:txFillClrLst>
+    <dgm:txEffectClrLst/>
+  </dgm:styleLbl>
+  <dgm:styleLbl name="fgAcc4">
+    <dgm:fillClrLst meth="repeat">
+      <a:schemeClr val="accent4">
+        <a:alpha val="90000"/>
+        <a:tint val="40000"/>
+      </a:schemeClr>
+    </dgm:fillClrLst>
+    <dgm:linClrLst meth="repeat">
+      <a:schemeClr val="accent4"/>
+    </dgm:linClrLst>
+    <dgm:effectClrLst/>
+    <dgm:txLinClrLst/>
+    <dgm:txFillClrLst meth="repeat">
+      <a:schemeClr val="dk1"/>
+    </dgm:txFillClrLst>
+    <dgm:txEffectClrLst/>
+  </dgm:styleLbl>
+  <dgm:styleLbl name="bgShp">
+    <dgm:fillClrLst meth="repeat">
+      <a:schemeClr val="accent4">
+        <a:tint val="40000"/>
+      </a:schemeClr>
+    </dgm:fillClrLst>
+    <dgm:linClrLst meth="repeat">
+      <a:schemeClr val="accent4"/>
+    </dgm:linClrLst>
+    <dgm:effectClrLst/>
+    <dgm:txLinClrLst/>
+    <dgm:txFillClrLst meth="repeat">
+      <a:schemeClr val="dk1"/>
+    </dgm:txFillClrLst>
+    <dgm:txEffectClrLst/>
+  </dgm:styleLbl>
+  <dgm:styleLbl name="dkBgShp">
+    <dgm:fillClrLst meth="repeat">
+      <a:schemeClr val="accent4">
+        <a:shade val="80000"/>
+      </a:schemeClr>
+    </dgm:fillClrLst>
+    <dgm:linClrLst meth="repeat">
+      <a:schemeClr val="accent4"/>
+    </dgm:linClrLst>
+    <dgm:effectClrLst/>
+    <dgm:txLinClrLst/>
+    <dgm:txFillClrLst meth="repeat">
+      <a:schemeClr val="lt1"/>
+    </dgm:txFillClrLst>
+    <dgm:txEffectClrLst/>
+  </dgm:styleLbl>
+  <dgm:styleLbl name="trBgShp">
+    <dgm:fillClrLst meth="repeat">
+      <a:schemeClr val="accent4">
+        <a:tint val="50000"/>
+        <a:alpha val="40000"/>
+      </a:schemeClr>
+    </dgm:fillClrLst>
+    <dgm:linClrLst meth="repeat">
+      <a:schemeClr val="accent4"/>
+    </dgm:linClrLst>
+    <dgm:effectClrLst/>
+    <dgm:txLinClrLst/>
+    <dgm:txFillClrLst meth="repeat">
+      <a:schemeClr val="lt1"/>
+    </dgm:txFillClrLst>
+    <dgm:txEffectClrLst/>
+  </dgm:styleLbl>
+  <dgm:styleLbl name="fgShp">
+    <dgm:fillClrLst meth="repeat">
+      <a:schemeClr val="accent4">
+        <a:tint val="60000"/>
+      </a:schemeClr>
+    </dgm:fillClrLst>
+    <dgm:linClrLst meth="repeat">
+      <a:schemeClr val="lt1"/>
+    </dgm:linClrLst>
+    <dgm:effectClrLst/>
+    <dgm:txLinClrLst/>
+    <dgm:txFillClrLst meth="repeat">
+      <a:schemeClr val="dk1"/>
+    </dgm:txFillClrLst>
+    <dgm:txEffectClrLst/>
+  </dgm:styleLbl>
+  <dgm:styleLbl name="revTx">
+    <dgm:fillClrLst meth="repeat">
+      <a:schemeClr val="lt1">
+        <a:alpha val="0"/>
+      </a:schemeClr>
+    </dgm:fillClrLst>
+    <dgm:linClrLst meth="repeat">
+      <a:schemeClr val="dk1">
+        <a:alpha val="0"/>
+      </a:schemeClr>
+    </dgm:linClrLst>
+    <dgm:effectClrLst/>
+    <dgm:txLinClrLst/>
+    <dgm:txFillClrLst meth="repeat">
+      <a:schemeClr val="tx1"/>
+    </dgm:txFillClrLst>
+    <dgm:txEffectClrLst/>
+  </dgm:styleLbl>
+</dgm:colorsDef>
+</file>
+
+<file path=ppt/diagrams/colors6.xml><?xml version="1.0" encoding="utf-8"?>
 <dgm:colorsDef xmlns:dgm="http://schemas.openxmlformats.org/drawingml/2006/diagram" xmlns:a="http://schemas.openxmlformats.org/drawingml/2006/main" uniqueId="urn:microsoft.com/office/officeart/2005/8/colors/colorful1">
   <dgm:title val=""/>
   <dgm:desc val=""/>
@@ -4567,813 +5375,6 @@
     <dgm:fillClrLst meth="repeat">
       <a:schemeClr val="accent2">
         <a:tint val="40000"/>
-      </a:schemeClr>
-    </dgm:fillClrLst>
-    <dgm:linClrLst meth="repeat">
-      <a:schemeClr val="lt1"/>
-    </dgm:linClrLst>
-    <dgm:effectClrLst/>
-    <dgm:txLinClrLst/>
-    <dgm:txFillClrLst meth="repeat">
-      <a:schemeClr val="dk1"/>
-    </dgm:txFillClrLst>
-    <dgm:txEffectClrLst/>
-  </dgm:styleLbl>
-  <dgm:styleLbl name="revTx">
-    <dgm:fillClrLst meth="repeat">
-      <a:schemeClr val="lt1">
-        <a:alpha val="0"/>
-      </a:schemeClr>
-    </dgm:fillClrLst>
-    <dgm:linClrLst meth="repeat">
-      <a:schemeClr val="dk1">
-        <a:alpha val="0"/>
-      </a:schemeClr>
-    </dgm:linClrLst>
-    <dgm:effectClrLst/>
-    <dgm:txLinClrLst/>
-    <dgm:txFillClrLst meth="repeat">
-      <a:schemeClr val="tx1"/>
-    </dgm:txFillClrLst>
-    <dgm:txEffectClrLst/>
-  </dgm:styleLbl>
-</dgm:colorsDef>
-</file>
-
-<file path=ppt/diagrams/colors6.xml><?xml version="1.0" encoding="utf-8"?>
-<dgm:colorsDef xmlns:dgm="http://schemas.openxmlformats.org/drawingml/2006/diagram" xmlns:a="http://schemas.openxmlformats.org/drawingml/2006/main" uniqueId="urn:microsoft.com/office/officeart/2005/8/colors/accent4_1">
-  <dgm:title val=""/>
-  <dgm:desc val=""/>
-  <dgm:catLst>
-    <dgm:cat type="accent4" pri="11100"/>
-  </dgm:catLst>
-  <dgm:styleLbl name="node0">
-    <dgm:fillClrLst meth="repeat">
-      <a:schemeClr val="lt1"/>
-    </dgm:fillClrLst>
-    <dgm:linClrLst meth="repeat">
-      <a:schemeClr val="accent4">
-        <a:shade val="80000"/>
-      </a:schemeClr>
-    </dgm:linClrLst>
-    <dgm:effectClrLst/>
-    <dgm:txLinClrLst/>
-    <dgm:txFillClrLst meth="repeat">
-      <a:schemeClr val="dk1"/>
-    </dgm:txFillClrLst>
-    <dgm:txEffectClrLst/>
-  </dgm:styleLbl>
-  <dgm:styleLbl name="node1">
-    <dgm:fillClrLst meth="repeat">
-      <a:schemeClr val="lt1"/>
-    </dgm:fillClrLst>
-    <dgm:linClrLst meth="repeat">
-      <a:schemeClr val="accent4">
-        <a:shade val="80000"/>
-      </a:schemeClr>
-    </dgm:linClrLst>
-    <dgm:effectClrLst/>
-    <dgm:txLinClrLst/>
-    <dgm:txFillClrLst meth="repeat">
-      <a:schemeClr val="dk1"/>
-    </dgm:txFillClrLst>
-    <dgm:txEffectClrLst/>
-  </dgm:styleLbl>
-  <dgm:styleLbl name="alignNode1">
-    <dgm:fillClrLst meth="repeat">
-      <a:schemeClr val="lt1"/>
-    </dgm:fillClrLst>
-    <dgm:linClrLst meth="repeat">
-      <a:schemeClr val="accent4">
-        <a:shade val="80000"/>
-      </a:schemeClr>
-    </dgm:linClrLst>
-    <dgm:effectClrLst/>
-    <dgm:txLinClrLst/>
-    <dgm:txFillClrLst meth="repeat">
-      <a:schemeClr val="dk1"/>
-    </dgm:txFillClrLst>
-    <dgm:txEffectClrLst/>
-  </dgm:styleLbl>
-  <dgm:styleLbl name="lnNode1">
-    <dgm:fillClrLst meth="repeat">
-      <a:schemeClr val="lt1"/>
-    </dgm:fillClrLst>
-    <dgm:linClrLst meth="repeat">
-      <a:schemeClr val="accent4">
-        <a:shade val="80000"/>
-      </a:schemeClr>
-    </dgm:linClrLst>
-    <dgm:effectClrLst/>
-    <dgm:txLinClrLst/>
-    <dgm:txFillClrLst meth="repeat">
-      <a:schemeClr val="dk1"/>
-    </dgm:txFillClrLst>
-    <dgm:txEffectClrLst/>
-  </dgm:styleLbl>
-  <dgm:styleLbl name="vennNode1">
-    <dgm:fillClrLst meth="repeat">
-      <a:schemeClr val="lt1">
-        <a:alpha val="50000"/>
-      </a:schemeClr>
-    </dgm:fillClrLst>
-    <dgm:linClrLst meth="repeat">
-      <a:schemeClr val="accent4">
-        <a:shade val="80000"/>
-      </a:schemeClr>
-    </dgm:linClrLst>
-    <dgm:effectClrLst/>
-    <dgm:txLinClrLst/>
-    <dgm:txFillClrLst/>
-    <dgm:txEffectClrLst/>
-  </dgm:styleLbl>
-  <dgm:styleLbl name="node2">
-    <dgm:fillClrLst meth="repeat">
-      <a:schemeClr val="lt1"/>
-    </dgm:fillClrLst>
-    <dgm:linClrLst meth="repeat">
-      <a:schemeClr val="accent4">
-        <a:shade val="80000"/>
-      </a:schemeClr>
-    </dgm:linClrLst>
-    <dgm:effectClrLst/>
-    <dgm:txLinClrLst/>
-    <dgm:txFillClrLst meth="repeat">
-      <a:schemeClr val="dk1"/>
-    </dgm:txFillClrLst>
-    <dgm:txEffectClrLst/>
-  </dgm:styleLbl>
-  <dgm:styleLbl name="node3">
-    <dgm:fillClrLst meth="repeat">
-      <a:schemeClr val="lt1"/>
-    </dgm:fillClrLst>
-    <dgm:linClrLst meth="repeat">
-      <a:schemeClr val="accent4">
-        <a:shade val="80000"/>
-      </a:schemeClr>
-    </dgm:linClrLst>
-    <dgm:effectClrLst/>
-    <dgm:txLinClrLst/>
-    <dgm:txFillClrLst meth="repeat">
-      <a:schemeClr val="dk1"/>
-    </dgm:txFillClrLst>
-    <dgm:txEffectClrLst/>
-  </dgm:styleLbl>
-  <dgm:styleLbl name="node4">
-    <dgm:fillClrLst meth="repeat">
-      <a:schemeClr val="lt1"/>
-    </dgm:fillClrLst>
-    <dgm:linClrLst meth="repeat">
-      <a:schemeClr val="accent4">
-        <a:shade val="80000"/>
-      </a:schemeClr>
-    </dgm:linClrLst>
-    <dgm:effectClrLst/>
-    <dgm:txLinClrLst/>
-    <dgm:txFillClrLst meth="repeat">
-      <a:schemeClr val="dk1"/>
-    </dgm:txFillClrLst>
-    <dgm:txEffectClrLst/>
-  </dgm:styleLbl>
-  <dgm:styleLbl name="fgImgPlace1">
-    <dgm:fillClrLst meth="repeat">
-      <a:schemeClr val="accent4">
-        <a:tint val="40000"/>
-      </a:schemeClr>
-    </dgm:fillClrLst>
-    <dgm:linClrLst meth="repeat">
-      <a:schemeClr val="accent4">
-        <a:shade val="80000"/>
-      </a:schemeClr>
-    </dgm:linClrLst>
-    <dgm:effectClrLst/>
-    <dgm:txLinClrLst/>
-    <dgm:txFillClrLst meth="repeat">
-      <a:schemeClr val="lt1"/>
-    </dgm:txFillClrLst>
-    <dgm:txEffectClrLst/>
-  </dgm:styleLbl>
-  <dgm:styleLbl name="alignImgPlace1">
-    <dgm:fillClrLst meth="repeat">
-      <a:schemeClr val="accent4">
-        <a:tint val="40000"/>
-      </a:schemeClr>
-    </dgm:fillClrLst>
-    <dgm:linClrLst meth="repeat">
-      <a:schemeClr val="accent4">
-        <a:shade val="80000"/>
-      </a:schemeClr>
-    </dgm:linClrLst>
-    <dgm:effectClrLst/>
-    <dgm:txLinClrLst/>
-    <dgm:txFillClrLst meth="repeat">
-      <a:schemeClr val="lt1"/>
-    </dgm:txFillClrLst>
-    <dgm:txEffectClrLst/>
-  </dgm:styleLbl>
-  <dgm:styleLbl name="bgImgPlace1">
-    <dgm:fillClrLst meth="repeat">
-      <a:schemeClr val="accent4">
-        <a:tint val="40000"/>
-      </a:schemeClr>
-    </dgm:fillClrLst>
-    <dgm:linClrLst meth="repeat">
-      <a:schemeClr val="accent4">
-        <a:shade val="80000"/>
-      </a:schemeClr>
-    </dgm:linClrLst>
-    <dgm:effectClrLst/>
-    <dgm:txLinClrLst/>
-    <dgm:txFillClrLst meth="repeat">
-      <a:schemeClr val="lt1"/>
-    </dgm:txFillClrLst>
-    <dgm:txEffectClrLst/>
-  </dgm:styleLbl>
-  <dgm:styleLbl name="sibTrans2D1">
-    <dgm:fillClrLst meth="repeat">
-      <a:schemeClr val="accent4">
-        <a:tint val="60000"/>
-      </a:schemeClr>
-    </dgm:fillClrLst>
-    <dgm:linClrLst meth="repeat">
-      <a:schemeClr val="accent4">
-        <a:tint val="60000"/>
-      </a:schemeClr>
-    </dgm:linClrLst>
-    <dgm:effectClrLst/>
-    <dgm:txLinClrLst/>
-    <dgm:txFillClrLst meth="repeat">
-      <a:schemeClr val="dk1"/>
-    </dgm:txFillClrLst>
-    <dgm:txEffectClrLst/>
-  </dgm:styleLbl>
-  <dgm:styleLbl name="fgSibTrans2D1">
-    <dgm:fillClrLst meth="repeat">
-      <a:schemeClr val="accent4">
-        <a:tint val="60000"/>
-      </a:schemeClr>
-    </dgm:fillClrLst>
-    <dgm:linClrLst meth="repeat">
-      <a:schemeClr val="accent4">
-        <a:tint val="60000"/>
-      </a:schemeClr>
-    </dgm:linClrLst>
-    <dgm:effectClrLst/>
-    <dgm:txLinClrLst/>
-    <dgm:txFillClrLst meth="repeat">
-      <a:schemeClr val="dk1"/>
-    </dgm:txFillClrLst>
-    <dgm:txEffectClrLst/>
-  </dgm:styleLbl>
-  <dgm:styleLbl name="bgSibTrans2D1">
-    <dgm:fillClrLst meth="repeat">
-      <a:schemeClr val="accent4">
-        <a:tint val="60000"/>
-      </a:schemeClr>
-    </dgm:fillClrLst>
-    <dgm:linClrLst meth="repeat">
-      <a:schemeClr val="accent4">
-        <a:tint val="60000"/>
-      </a:schemeClr>
-    </dgm:linClrLst>
-    <dgm:effectClrLst/>
-    <dgm:txLinClrLst/>
-    <dgm:txFillClrLst meth="repeat">
-      <a:schemeClr val="dk1"/>
-    </dgm:txFillClrLst>
-    <dgm:txEffectClrLst/>
-  </dgm:styleLbl>
-  <dgm:styleLbl name="sibTrans1D1">
-    <dgm:fillClrLst meth="repeat">
-      <a:schemeClr val="accent4"/>
-    </dgm:fillClrLst>
-    <dgm:linClrLst meth="repeat">
-      <a:schemeClr val="accent4"/>
-    </dgm:linClrLst>
-    <dgm:effectClrLst/>
-    <dgm:txLinClrLst/>
-    <dgm:txFillClrLst meth="repeat">
-      <a:schemeClr val="tx1"/>
-    </dgm:txFillClrLst>
-    <dgm:txEffectClrLst/>
-  </dgm:styleLbl>
-  <dgm:styleLbl name="callout">
-    <dgm:fillClrLst meth="repeat">
-      <a:schemeClr val="accent4"/>
-    </dgm:fillClrLst>
-    <dgm:linClrLst meth="repeat">
-      <a:schemeClr val="accent4"/>
-    </dgm:linClrLst>
-    <dgm:effectClrLst/>
-    <dgm:txLinClrLst/>
-    <dgm:txFillClrLst meth="repeat">
-      <a:schemeClr val="tx1"/>
-    </dgm:txFillClrLst>
-    <dgm:txEffectClrLst/>
-  </dgm:styleLbl>
-  <dgm:styleLbl name="asst0">
-    <dgm:fillClrLst meth="repeat">
-      <a:schemeClr val="lt1"/>
-    </dgm:fillClrLst>
-    <dgm:linClrLst meth="repeat">
-      <a:schemeClr val="accent4">
-        <a:shade val="80000"/>
-      </a:schemeClr>
-    </dgm:linClrLst>
-    <dgm:effectClrLst/>
-    <dgm:txLinClrLst/>
-    <dgm:txFillClrLst meth="repeat">
-      <a:schemeClr val="dk1"/>
-    </dgm:txFillClrLst>
-    <dgm:txEffectClrLst/>
-  </dgm:styleLbl>
-  <dgm:styleLbl name="asst1">
-    <dgm:fillClrLst meth="repeat">
-      <a:schemeClr val="lt1"/>
-    </dgm:fillClrLst>
-    <dgm:linClrLst meth="repeat">
-      <a:schemeClr val="accent4">
-        <a:shade val="80000"/>
-      </a:schemeClr>
-    </dgm:linClrLst>
-    <dgm:effectClrLst/>
-    <dgm:txLinClrLst/>
-    <dgm:txFillClrLst meth="repeat">
-      <a:schemeClr val="dk1"/>
-    </dgm:txFillClrLst>
-    <dgm:txEffectClrLst/>
-  </dgm:styleLbl>
-  <dgm:styleLbl name="asst2">
-    <dgm:fillClrLst meth="repeat">
-      <a:schemeClr val="lt1"/>
-    </dgm:fillClrLst>
-    <dgm:linClrLst meth="repeat">
-      <a:schemeClr val="accent4">
-        <a:shade val="80000"/>
-      </a:schemeClr>
-    </dgm:linClrLst>
-    <dgm:effectClrLst/>
-    <dgm:txLinClrLst/>
-    <dgm:txFillClrLst meth="repeat">
-      <a:schemeClr val="dk1"/>
-    </dgm:txFillClrLst>
-    <dgm:txEffectClrLst/>
-  </dgm:styleLbl>
-  <dgm:styleLbl name="asst3">
-    <dgm:fillClrLst meth="repeat">
-      <a:schemeClr val="lt1"/>
-    </dgm:fillClrLst>
-    <dgm:linClrLst meth="repeat">
-      <a:schemeClr val="accent4">
-        <a:shade val="80000"/>
-      </a:schemeClr>
-    </dgm:linClrLst>
-    <dgm:effectClrLst/>
-    <dgm:txLinClrLst/>
-    <dgm:txFillClrLst meth="repeat">
-      <a:schemeClr val="dk1"/>
-    </dgm:txFillClrLst>
-    <dgm:txEffectClrLst/>
-  </dgm:styleLbl>
-  <dgm:styleLbl name="asst4">
-    <dgm:fillClrLst meth="repeat">
-      <a:schemeClr val="lt1"/>
-    </dgm:fillClrLst>
-    <dgm:linClrLst meth="repeat">
-      <a:schemeClr val="accent4">
-        <a:shade val="80000"/>
-      </a:schemeClr>
-    </dgm:linClrLst>
-    <dgm:effectClrLst/>
-    <dgm:txLinClrLst/>
-    <dgm:txFillClrLst meth="repeat">
-      <a:schemeClr val="dk1"/>
-    </dgm:txFillClrLst>
-    <dgm:txEffectClrLst/>
-  </dgm:styleLbl>
-  <dgm:styleLbl name="parChTrans2D1">
-    <dgm:fillClrLst meth="repeat">
-      <a:schemeClr val="accent4">
-        <a:tint val="60000"/>
-      </a:schemeClr>
-    </dgm:fillClrLst>
-    <dgm:linClrLst meth="repeat">
-      <a:schemeClr val="accent4">
-        <a:tint val="60000"/>
-      </a:schemeClr>
-    </dgm:linClrLst>
-    <dgm:effectClrLst/>
-    <dgm:txLinClrLst/>
-    <dgm:txFillClrLst/>
-    <dgm:txEffectClrLst/>
-  </dgm:styleLbl>
-  <dgm:styleLbl name="parChTrans2D2">
-    <dgm:fillClrLst meth="repeat">
-      <a:schemeClr val="accent4"/>
-    </dgm:fillClrLst>
-    <dgm:linClrLst meth="repeat">
-      <a:schemeClr val="accent4"/>
-    </dgm:linClrLst>
-    <dgm:effectClrLst/>
-    <dgm:txLinClrLst/>
-    <dgm:txFillClrLst/>
-    <dgm:txEffectClrLst/>
-  </dgm:styleLbl>
-  <dgm:styleLbl name="parChTrans2D3">
-    <dgm:fillClrLst meth="repeat">
-      <a:schemeClr val="accent4"/>
-    </dgm:fillClrLst>
-    <dgm:linClrLst meth="repeat">
-      <a:schemeClr val="accent4"/>
-    </dgm:linClrLst>
-    <dgm:effectClrLst/>
-    <dgm:txLinClrLst/>
-    <dgm:txFillClrLst/>
-    <dgm:txEffectClrLst/>
-  </dgm:styleLbl>
-  <dgm:styleLbl name="parChTrans2D4">
-    <dgm:fillClrLst meth="repeat">
-      <a:schemeClr val="accent4"/>
-    </dgm:fillClrLst>
-    <dgm:linClrLst meth="repeat">
-      <a:schemeClr val="accent4"/>
-    </dgm:linClrLst>
-    <dgm:effectClrLst/>
-    <dgm:txLinClrLst/>
-    <dgm:txFillClrLst meth="repeat">
-      <a:schemeClr val="lt1"/>
-    </dgm:txFillClrLst>
-    <dgm:txEffectClrLst/>
-  </dgm:styleLbl>
-  <dgm:styleLbl name="parChTrans1D1">
-    <dgm:fillClrLst meth="repeat">
-      <a:schemeClr val="accent4"/>
-    </dgm:fillClrLst>
-    <dgm:linClrLst meth="repeat">
-      <a:schemeClr val="accent4">
-        <a:shade val="60000"/>
-      </a:schemeClr>
-    </dgm:linClrLst>
-    <dgm:effectClrLst/>
-    <dgm:txLinClrLst/>
-    <dgm:txFillClrLst meth="repeat">
-      <a:schemeClr val="tx1"/>
-    </dgm:txFillClrLst>
-    <dgm:txEffectClrLst/>
-  </dgm:styleLbl>
-  <dgm:styleLbl name="parChTrans1D2">
-    <dgm:fillClrLst meth="repeat">
-      <a:schemeClr val="accent4"/>
-    </dgm:fillClrLst>
-    <dgm:linClrLst meth="repeat">
-      <a:schemeClr val="accent4">
-        <a:shade val="60000"/>
-      </a:schemeClr>
-    </dgm:linClrLst>
-    <dgm:effectClrLst/>
-    <dgm:txLinClrLst/>
-    <dgm:txFillClrLst meth="repeat">
-      <a:schemeClr val="tx1"/>
-    </dgm:txFillClrLst>
-    <dgm:txEffectClrLst/>
-  </dgm:styleLbl>
-  <dgm:styleLbl name="parChTrans1D3">
-    <dgm:fillClrLst meth="repeat">
-      <a:schemeClr val="accent4"/>
-    </dgm:fillClrLst>
-    <dgm:linClrLst meth="repeat">
-      <a:schemeClr val="accent4">
-        <a:shade val="80000"/>
-      </a:schemeClr>
-    </dgm:linClrLst>
-    <dgm:effectClrLst/>
-    <dgm:txLinClrLst/>
-    <dgm:txFillClrLst meth="repeat">
-      <a:schemeClr val="tx1"/>
-    </dgm:txFillClrLst>
-    <dgm:txEffectClrLst/>
-  </dgm:styleLbl>
-  <dgm:styleLbl name="parChTrans1D4">
-    <dgm:fillClrLst meth="repeat">
-      <a:schemeClr val="accent4"/>
-    </dgm:fillClrLst>
-    <dgm:linClrLst meth="repeat">
-      <a:schemeClr val="accent4">
-        <a:shade val="80000"/>
-      </a:schemeClr>
-    </dgm:linClrLst>
-    <dgm:effectClrLst/>
-    <dgm:txLinClrLst/>
-    <dgm:txFillClrLst meth="repeat">
-      <a:schemeClr val="tx1"/>
-    </dgm:txFillClrLst>
-    <dgm:txEffectClrLst/>
-  </dgm:styleLbl>
-  <dgm:styleLbl name="fgAcc1">
-    <dgm:fillClrLst meth="repeat">
-      <a:schemeClr val="accent4">
-        <a:alpha val="90000"/>
-        <a:tint val="40000"/>
-      </a:schemeClr>
-    </dgm:fillClrLst>
-    <dgm:linClrLst meth="repeat">
-      <a:schemeClr val="accent4"/>
-    </dgm:linClrLst>
-    <dgm:effectClrLst/>
-    <dgm:txLinClrLst/>
-    <dgm:txFillClrLst meth="repeat">
-      <a:schemeClr val="dk1"/>
-    </dgm:txFillClrLst>
-    <dgm:txEffectClrLst/>
-  </dgm:styleLbl>
-  <dgm:styleLbl name="conFgAcc1">
-    <dgm:fillClrLst meth="repeat">
-      <a:schemeClr val="accent4">
-        <a:alpha val="90000"/>
-        <a:tint val="40000"/>
-      </a:schemeClr>
-    </dgm:fillClrLst>
-    <dgm:linClrLst meth="repeat">
-      <a:schemeClr val="accent4"/>
-    </dgm:linClrLst>
-    <dgm:effectClrLst/>
-    <dgm:txLinClrLst/>
-    <dgm:txFillClrLst meth="repeat">
-      <a:schemeClr val="dk1"/>
-    </dgm:txFillClrLst>
-    <dgm:txEffectClrLst/>
-  </dgm:styleLbl>
-  <dgm:styleLbl name="alignAcc1">
-    <dgm:fillClrLst meth="repeat">
-      <a:schemeClr val="accent4">
-        <a:alpha val="90000"/>
-        <a:tint val="40000"/>
-      </a:schemeClr>
-    </dgm:fillClrLst>
-    <dgm:linClrLst meth="repeat">
-      <a:schemeClr val="accent4"/>
-    </dgm:linClrLst>
-    <dgm:effectClrLst/>
-    <dgm:txLinClrLst/>
-    <dgm:txFillClrLst meth="repeat">
-      <a:schemeClr val="dk1"/>
-    </dgm:txFillClrLst>
-    <dgm:txEffectClrLst/>
-  </dgm:styleLbl>
-  <dgm:styleLbl name="trAlignAcc1">
-    <dgm:fillClrLst meth="repeat">
-      <a:schemeClr val="accent4">
-        <a:alpha val="40000"/>
-        <a:tint val="40000"/>
-      </a:schemeClr>
-    </dgm:fillClrLst>
-    <dgm:linClrLst meth="repeat">
-      <a:schemeClr val="accent4"/>
-    </dgm:linClrLst>
-    <dgm:effectClrLst/>
-    <dgm:txLinClrLst/>
-    <dgm:txFillClrLst meth="repeat">
-      <a:schemeClr val="dk1"/>
-    </dgm:txFillClrLst>
-    <dgm:txEffectClrLst/>
-  </dgm:styleLbl>
-  <dgm:styleLbl name="bgAcc1">
-    <dgm:fillClrLst meth="repeat">
-      <a:schemeClr val="accent4">
-        <a:alpha val="90000"/>
-        <a:tint val="40000"/>
-      </a:schemeClr>
-    </dgm:fillClrLst>
-    <dgm:linClrLst meth="repeat">
-      <a:schemeClr val="accent4"/>
-    </dgm:linClrLst>
-    <dgm:effectClrLst/>
-    <dgm:txLinClrLst/>
-    <dgm:txFillClrLst meth="repeat">
-      <a:schemeClr val="dk1"/>
-    </dgm:txFillClrLst>
-    <dgm:txEffectClrLst/>
-  </dgm:styleLbl>
-  <dgm:styleLbl name="solidFgAcc1">
-    <dgm:fillClrLst meth="repeat">
-      <a:schemeClr val="lt1"/>
-    </dgm:fillClrLst>
-    <dgm:linClrLst meth="repeat">
-      <a:schemeClr val="accent4"/>
-    </dgm:linClrLst>
-    <dgm:effectClrLst/>
-    <dgm:txLinClrLst/>
-    <dgm:txFillClrLst meth="repeat">
-      <a:schemeClr val="dk1"/>
-    </dgm:txFillClrLst>
-    <dgm:txEffectClrLst/>
-  </dgm:styleLbl>
-  <dgm:styleLbl name="solidAlignAcc1">
-    <dgm:fillClrLst meth="repeat">
-      <a:schemeClr val="lt1"/>
-    </dgm:fillClrLst>
-    <dgm:linClrLst meth="repeat">
-      <a:schemeClr val="accent4"/>
-    </dgm:linClrLst>
-    <dgm:effectClrLst/>
-    <dgm:txLinClrLst/>
-    <dgm:txFillClrLst meth="repeat">
-      <a:schemeClr val="dk1"/>
-    </dgm:txFillClrLst>
-    <dgm:txEffectClrLst/>
-  </dgm:styleLbl>
-  <dgm:styleLbl name="solidBgAcc1">
-    <dgm:fillClrLst meth="repeat">
-      <a:schemeClr val="lt1"/>
-    </dgm:fillClrLst>
-    <dgm:linClrLst meth="repeat">
-      <a:schemeClr val="accent4"/>
-    </dgm:linClrLst>
-    <dgm:effectClrLst/>
-    <dgm:txLinClrLst/>
-    <dgm:txFillClrLst meth="repeat">
-      <a:schemeClr val="dk1"/>
-    </dgm:txFillClrLst>
-    <dgm:txEffectClrLst/>
-  </dgm:styleLbl>
-  <dgm:styleLbl name="fgAccFollowNode1">
-    <dgm:fillClrLst meth="repeat">
-      <a:schemeClr val="lt1">
-        <a:alpha val="90000"/>
-        <a:tint val="40000"/>
-      </a:schemeClr>
-    </dgm:fillClrLst>
-    <dgm:linClrLst meth="repeat">
-      <a:schemeClr val="accent4">
-        <a:alpha val="90000"/>
-      </a:schemeClr>
-    </dgm:linClrLst>
-    <dgm:effectClrLst/>
-    <dgm:txLinClrLst/>
-    <dgm:txFillClrLst meth="repeat">
-      <a:schemeClr val="dk1"/>
-    </dgm:txFillClrLst>
-    <dgm:txEffectClrLst/>
-  </dgm:styleLbl>
-  <dgm:styleLbl name="alignAccFollowNode1">
-    <dgm:fillClrLst meth="repeat">
-      <a:schemeClr val="lt1">
-        <a:alpha val="90000"/>
-        <a:tint val="40000"/>
-      </a:schemeClr>
-    </dgm:fillClrLst>
-    <dgm:linClrLst meth="repeat">
-      <a:schemeClr val="accent4">
-        <a:alpha val="90000"/>
-      </a:schemeClr>
-    </dgm:linClrLst>
-    <dgm:effectClrLst/>
-    <dgm:txLinClrLst/>
-    <dgm:txFillClrLst meth="repeat">
-      <a:schemeClr val="dk1"/>
-    </dgm:txFillClrLst>
-    <dgm:txEffectClrLst/>
-  </dgm:styleLbl>
-  <dgm:styleLbl name="bgAccFollowNode1">
-    <dgm:fillClrLst meth="repeat">
-      <a:schemeClr val="lt1">
-        <a:alpha val="90000"/>
-        <a:tint val="40000"/>
-      </a:schemeClr>
-    </dgm:fillClrLst>
-    <dgm:linClrLst meth="repeat">
-      <a:schemeClr val="accent4">
-        <a:alpha val="90000"/>
-      </a:schemeClr>
-    </dgm:linClrLst>
-    <dgm:effectClrLst/>
-    <dgm:txLinClrLst/>
-    <dgm:txFillClrLst meth="repeat">
-      <a:schemeClr val="dk1"/>
-    </dgm:txFillClrLst>
-    <dgm:txEffectClrLst/>
-  </dgm:styleLbl>
-  <dgm:styleLbl name="fgAcc0">
-    <dgm:fillClrLst meth="repeat">
-      <a:schemeClr val="accent4">
-        <a:alpha val="90000"/>
-        <a:tint val="40000"/>
-      </a:schemeClr>
-    </dgm:fillClrLst>
-    <dgm:linClrLst meth="repeat">
-      <a:schemeClr val="accent4"/>
-    </dgm:linClrLst>
-    <dgm:effectClrLst/>
-    <dgm:txLinClrLst/>
-    <dgm:txFillClrLst meth="repeat">
-      <a:schemeClr val="dk1"/>
-    </dgm:txFillClrLst>
-    <dgm:txEffectClrLst/>
-  </dgm:styleLbl>
-  <dgm:styleLbl name="fgAcc2">
-    <dgm:fillClrLst meth="repeat">
-      <a:schemeClr val="accent4">
-        <a:alpha val="90000"/>
-        <a:tint val="40000"/>
-      </a:schemeClr>
-    </dgm:fillClrLst>
-    <dgm:linClrLst meth="repeat">
-      <a:schemeClr val="accent4"/>
-    </dgm:linClrLst>
-    <dgm:effectClrLst/>
-    <dgm:txLinClrLst/>
-    <dgm:txFillClrLst meth="repeat">
-      <a:schemeClr val="dk1"/>
-    </dgm:txFillClrLst>
-    <dgm:txEffectClrLst/>
-  </dgm:styleLbl>
-  <dgm:styleLbl name="fgAcc3">
-    <dgm:fillClrLst meth="repeat">
-      <a:schemeClr val="accent4">
-        <a:alpha val="90000"/>
-        <a:tint val="40000"/>
-      </a:schemeClr>
-    </dgm:fillClrLst>
-    <dgm:linClrLst meth="repeat">
-      <a:schemeClr val="accent4"/>
-    </dgm:linClrLst>
-    <dgm:effectClrLst/>
-    <dgm:txLinClrLst/>
-    <dgm:txFillClrLst meth="repeat">
-      <a:schemeClr val="dk1"/>
-    </dgm:txFillClrLst>
-    <dgm:txEffectClrLst/>
-  </dgm:styleLbl>
-  <dgm:styleLbl name="fgAcc4">
-    <dgm:fillClrLst meth="repeat">
-      <a:schemeClr val="accent4">
-        <a:alpha val="90000"/>
-        <a:tint val="40000"/>
-      </a:schemeClr>
-    </dgm:fillClrLst>
-    <dgm:linClrLst meth="repeat">
-      <a:schemeClr val="accent4"/>
-    </dgm:linClrLst>
-    <dgm:effectClrLst/>
-    <dgm:txLinClrLst/>
-    <dgm:txFillClrLst meth="repeat">
-      <a:schemeClr val="dk1"/>
-    </dgm:txFillClrLst>
-    <dgm:txEffectClrLst/>
-  </dgm:styleLbl>
-  <dgm:styleLbl name="bgShp">
-    <dgm:fillClrLst meth="repeat">
-      <a:schemeClr val="accent4">
-        <a:tint val="40000"/>
-      </a:schemeClr>
-    </dgm:fillClrLst>
-    <dgm:linClrLst meth="repeat">
-      <a:schemeClr val="accent4"/>
-    </dgm:linClrLst>
-    <dgm:effectClrLst/>
-    <dgm:txLinClrLst/>
-    <dgm:txFillClrLst meth="repeat">
-      <a:schemeClr val="dk1"/>
-    </dgm:txFillClrLst>
-    <dgm:txEffectClrLst/>
-  </dgm:styleLbl>
-  <dgm:styleLbl name="dkBgShp">
-    <dgm:fillClrLst meth="repeat">
-      <a:schemeClr val="accent4">
-        <a:shade val="80000"/>
-      </a:schemeClr>
-    </dgm:fillClrLst>
-    <dgm:linClrLst meth="repeat">
-      <a:schemeClr val="accent4"/>
-    </dgm:linClrLst>
-    <dgm:effectClrLst/>
-    <dgm:txLinClrLst/>
-    <dgm:txFillClrLst meth="repeat">
-      <a:schemeClr val="lt1"/>
-    </dgm:txFillClrLst>
-    <dgm:txEffectClrLst/>
-  </dgm:styleLbl>
-  <dgm:styleLbl name="trBgShp">
-    <dgm:fillClrLst meth="repeat">
-      <a:schemeClr val="accent4">
-        <a:tint val="50000"/>
-        <a:alpha val="40000"/>
-      </a:schemeClr>
-    </dgm:fillClrLst>
-    <dgm:linClrLst meth="repeat">
-      <a:schemeClr val="accent4"/>
-    </dgm:linClrLst>
-    <dgm:effectClrLst/>
-    <dgm:txLinClrLst/>
-    <dgm:txFillClrLst meth="repeat">
-      <a:schemeClr val="lt1"/>
-    </dgm:txFillClrLst>
-    <dgm:txEffectClrLst/>
-  </dgm:styleLbl>
-  <dgm:styleLbl name="fgShp">
-    <dgm:fillClrLst meth="repeat">
-      <a:schemeClr val="accent4">
-        <a:tint val="60000"/>
       </a:schemeClr>
     </dgm:fillClrLst>
     <dgm:linClrLst meth="repeat">
@@ -6638,7 +6639,7 @@
         <a:p>
           <a:r>
             <a:rPr lang="en-US" dirty="0"/>
-            <a:t>Calculate the size of the metacommunity (</a:t>
+            <a:t>Calculate </a:t>
           </a:r>
           <a:r>
             <a:rPr lang="en-US" i="1" dirty="0"/>
@@ -6646,7 +6647,7 @@
           </a:r>
           <a:r>
             <a:rPr lang="en-US" dirty="0"/>
-            <a:t>) by finding the mean number of reads per sample. We also find the limit of detection (</a:t>
+            <a:t> by finding the mean number of reads per sample. We also find the limit of detection (</a:t>
           </a:r>
           <a:r>
             <a:rPr lang="en-US" i="1" dirty="0"/>
@@ -6935,260 +6936,6 @@
 </file>
 
 <file path=ppt/diagrams/data5.xml><?xml version="1.0" encoding="utf-8"?>
-<dgm:dataModel xmlns:dgm="http://schemas.openxmlformats.org/drawingml/2006/diagram" xmlns:a="http://schemas.openxmlformats.org/drawingml/2006/main">
-  <dgm:ptLst>
-    <dgm:pt modelId="{CB88F0E7-4140-1B4D-A33B-6563FB2E1C23}" type="doc">
-      <dgm:prSet loTypeId="urn:microsoft.com/office/officeart/2005/8/layout/process2" loCatId="" qsTypeId="urn:microsoft.com/office/officeart/2005/8/quickstyle/simple1" qsCatId="simple" csTypeId="urn:microsoft.com/office/officeart/2005/8/colors/colorful1" csCatId="colorful" phldr="1"/>
-      <dgm:spPr/>
-    </dgm:pt>
-    <dgm:pt modelId="{B5498DE5-7CDC-0347-BA87-FB91FE15E435}">
-      <dgm:prSet phldrT="[Text]"/>
-      <dgm:spPr/>
-      <dgm:t>
-        <a:bodyPr/>
-        <a:lstStyle/>
-        <a:p>
-          <a:r>
-            <a:rPr lang="en-US" dirty="0"/>
-            <a:t>Find phylogenetic distances between ASVs</a:t>
-          </a:r>
-        </a:p>
-      </dgm:t>
-    </dgm:pt>
-    <dgm:pt modelId="{A4B182FE-28CF-CC4A-A857-D974481A212A}" type="parTrans" cxnId="{6F8A8218-A43D-754D-AC34-7D7A44CB7D31}">
-      <dgm:prSet/>
-      <dgm:spPr/>
-      <dgm:t>
-        <a:bodyPr/>
-        <a:lstStyle/>
-        <a:p>
-          <a:endParaRPr lang="en-US"/>
-        </a:p>
-      </dgm:t>
-    </dgm:pt>
-    <dgm:pt modelId="{30256DA3-2063-6145-A40C-3F213F51F903}" type="sibTrans" cxnId="{6F8A8218-A43D-754D-AC34-7D7A44CB7D31}">
-      <dgm:prSet/>
-      <dgm:spPr/>
-      <dgm:t>
-        <a:bodyPr/>
-        <a:lstStyle/>
-        <a:p>
-          <a:endParaRPr lang="en-US"/>
-        </a:p>
-      </dgm:t>
-    </dgm:pt>
-    <dgm:pt modelId="{99CAAEDC-6392-D343-9A6F-7F5A17C79600}">
-      <dgm:prSet/>
-      <dgm:spPr/>
-      <dgm:t>
-        <a:bodyPr/>
-        <a:lstStyle/>
-        <a:p>
-          <a:r>
-            <a:rPr lang="en-US" dirty="0"/>
-            <a:t>Plot results of the mantel correlograms against phylogenetic distance classes for each environmental parameter to check for significant relationships</a:t>
-          </a:r>
-        </a:p>
-      </dgm:t>
-    </dgm:pt>
-    <dgm:pt modelId="{E9E523D2-25B5-CD4B-9629-508B4D79D50B}" type="sibTrans" cxnId="{850E1FA5-AA48-724C-8558-F11B12C530EE}">
-      <dgm:prSet/>
-      <dgm:spPr/>
-      <dgm:t>
-        <a:bodyPr/>
-        <a:lstStyle/>
-        <a:p>
-          <a:endParaRPr lang="en-US"/>
-        </a:p>
-      </dgm:t>
-    </dgm:pt>
-    <dgm:pt modelId="{C17FB67C-707B-D74A-80D6-94F7481B177D}" type="parTrans" cxnId="{850E1FA5-AA48-724C-8558-F11B12C530EE}">
-      <dgm:prSet/>
-      <dgm:spPr/>
-      <dgm:t>
-        <a:bodyPr/>
-        <a:lstStyle/>
-        <a:p>
-          <a:endParaRPr lang="en-US"/>
-        </a:p>
-      </dgm:t>
-    </dgm:pt>
-    <dgm:pt modelId="{3AAD80AB-86BA-354D-A91B-40CE06269A51}">
-      <dgm:prSet phldrT="[Text]"/>
-      <dgm:spPr/>
-      <dgm:t>
-        <a:bodyPr/>
-        <a:lstStyle/>
-        <a:p>
-          <a:r>
-            <a:rPr lang="en-US" dirty="0"/>
-            <a:t>Calculate mantel correlograms for each environmental parameter </a:t>
-          </a:r>
-        </a:p>
-      </dgm:t>
-    </dgm:pt>
-    <dgm:pt modelId="{C215D862-A291-E848-A659-5797AEF6E6A2}" type="sibTrans" cxnId="{6CC7BC8F-A4DC-3E43-A468-7FE509ECF895}">
-      <dgm:prSet/>
-      <dgm:spPr/>
-      <dgm:t>
-        <a:bodyPr/>
-        <a:lstStyle/>
-        <a:p>
-          <a:endParaRPr lang="en-US"/>
-        </a:p>
-      </dgm:t>
-    </dgm:pt>
-    <dgm:pt modelId="{3035F67B-CB08-4446-AE7D-48C039F6D2DF}" type="parTrans" cxnId="{6CC7BC8F-A4DC-3E43-A468-7FE509ECF895}">
-      <dgm:prSet/>
-      <dgm:spPr/>
-      <dgm:t>
-        <a:bodyPr/>
-        <a:lstStyle/>
-        <a:p>
-          <a:endParaRPr lang="en-US"/>
-        </a:p>
-      </dgm:t>
-    </dgm:pt>
-    <dgm:pt modelId="{6D80D72C-DBB2-D94A-BCBD-1B0C1C35E98A}">
-      <dgm:prSet phldrT="[Text]"/>
-      <dgm:spPr/>
-      <dgm:t>
-        <a:bodyPr/>
-        <a:lstStyle/>
-        <a:p>
-          <a:r>
-            <a:rPr lang="en-US" dirty="0"/>
-            <a:t>Find the weighted mean environmental parameters for each ASV = niche preferences </a:t>
-          </a:r>
-          <a:endParaRPr lang="en-US" i="1" dirty="0"/>
-        </a:p>
-      </dgm:t>
-    </dgm:pt>
-    <dgm:pt modelId="{ECF5917A-5A86-4945-92ED-C3A30B725FE7}" type="sibTrans" cxnId="{A399560D-2686-BB49-BEC8-16E0E59F898C}">
-      <dgm:prSet/>
-      <dgm:spPr/>
-      <dgm:t>
-        <a:bodyPr/>
-        <a:lstStyle/>
-        <a:p>
-          <a:endParaRPr lang="en-US"/>
-        </a:p>
-      </dgm:t>
-    </dgm:pt>
-    <dgm:pt modelId="{7A0A85DE-826D-F943-B70A-C309B2E35E00}" type="parTrans" cxnId="{A399560D-2686-BB49-BEC8-16E0E59F898C}">
-      <dgm:prSet/>
-      <dgm:spPr/>
-      <dgm:t>
-        <a:bodyPr/>
-        <a:lstStyle/>
-        <a:p>
-          <a:endParaRPr lang="en-US"/>
-        </a:p>
-      </dgm:t>
-    </dgm:pt>
-    <dgm:pt modelId="{55F5C254-F149-8D49-B068-DD2BB6700AB1}" type="pres">
-      <dgm:prSet presAssocID="{CB88F0E7-4140-1B4D-A33B-6563FB2E1C23}" presName="linearFlow" presStyleCnt="0">
-        <dgm:presLayoutVars>
-          <dgm:resizeHandles val="exact"/>
-        </dgm:presLayoutVars>
-      </dgm:prSet>
-      <dgm:spPr/>
-    </dgm:pt>
-    <dgm:pt modelId="{381AA547-A4ED-3840-A5BF-F16754F7DE5F}" type="pres">
-      <dgm:prSet presAssocID="{B5498DE5-7CDC-0347-BA87-FB91FE15E435}" presName="node" presStyleLbl="node1" presStyleIdx="0" presStyleCnt="4" custScaleX="266769">
-        <dgm:presLayoutVars>
-          <dgm:bulletEnabled val="1"/>
-        </dgm:presLayoutVars>
-      </dgm:prSet>
-      <dgm:spPr/>
-    </dgm:pt>
-    <dgm:pt modelId="{91DA19BA-A0AB-564A-8A9E-322DF18B64CF}" type="pres">
-      <dgm:prSet presAssocID="{30256DA3-2063-6145-A40C-3F213F51F903}" presName="sibTrans" presStyleLbl="sibTrans2D1" presStyleIdx="0" presStyleCnt="3"/>
-      <dgm:spPr/>
-    </dgm:pt>
-    <dgm:pt modelId="{93A03A25-0C23-0B49-A801-B6DF4800FF1C}" type="pres">
-      <dgm:prSet presAssocID="{30256DA3-2063-6145-A40C-3F213F51F903}" presName="connectorText" presStyleLbl="sibTrans2D1" presStyleIdx="0" presStyleCnt="3"/>
-      <dgm:spPr/>
-    </dgm:pt>
-    <dgm:pt modelId="{43D2067A-91F6-8745-98BA-D6A10B24950A}" type="pres">
-      <dgm:prSet presAssocID="{6D80D72C-DBB2-D94A-BCBD-1B0C1C35E98A}" presName="node" presStyleLbl="node1" presStyleIdx="1" presStyleCnt="4" custScaleX="264923" custLinFactNeighborX="1148">
-        <dgm:presLayoutVars>
-          <dgm:bulletEnabled val="1"/>
-        </dgm:presLayoutVars>
-      </dgm:prSet>
-      <dgm:spPr/>
-    </dgm:pt>
-    <dgm:pt modelId="{D067C965-9057-9C4A-A1D2-4912C14C50F7}" type="pres">
-      <dgm:prSet presAssocID="{ECF5917A-5A86-4945-92ED-C3A30B725FE7}" presName="sibTrans" presStyleLbl="sibTrans2D1" presStyleIdx="1" presStyleCnt="3"/>
-      <dgm:spPr/>
-    </dgm:pt>
-    <dgm:pt modelId="{5030DE2C-F3D5-7E44-98C9-D5A5317CA56C}" type="pres">
-      <dgm:prSet presAssocID="{ECF5917A-5A86-4945-92ED-C3A30B725FE7}" presName="connectorText" presStyleLbl="sibTrans2D1" presStyleIdx="1" presStyleCnt="3"/>
-      <dgm:spPr/>
-    </dgm:pt>
-    <dgm:pt modelId="{80C05A4E-2A0A-294C-8DDC-052E97D834DA}" type="pres">
-      <dgm:prSet presAssocID="{3AAD80AB-86BA-354D-A91B-40CE06269A51}" presName="node" presStyleLbl="node1" presStyleIdx="2" presStyleCnt="4" custScaleX="263077">
-        <dgm:presLayoutVars>
-          <dgm:bulletEnabled val="1"/>
-        </dgm:presLayoutVars>
-      </dgm:prSet>
-      <dgm:spPr/>
-    </dgm:pt>
-    <dgm:pt modelId="{B3C2DB7A-EC33-6544-A09D-B1205728770A}" type="pres">
-      <dgm:prSet presAssocID="{C215D862-A291-E848-A659-5797AEF6E6A2}" presName="sibTrans" presStyleLbl="sibTrans2D1" presStyleIdx="2" presStyleCnt="3"/>
-      <dgm:spPr/>
-    </dgm:pt>
-    <dgm:pt modelId="{14D2D5CD-E619-2C4C-83EC-B8786FE7D09C}" type="pres">
-      <dgm:prSet presAssocID="{C215D862-A291-E848-A659-5797AEF6E6A2}" presName="connectorText" presStyleLbl="sibTrans2D1" presStyleIdx="2" presStyleCnt="3"/>
-      <dgm:spPr/>
-    </dgm:pt>
-    <dgm:pt modelId="{6F6C8E07-FBAD-3F4D-A906-27ECCF26E70E}" type="pres">
-      <dgm:prSet presAssocID="{99CAAEDC-6392-D343-9A6F-7F5A17C79600}" presName="node" presStyleLbl="node1" presStyleIdx="3" presStyleCnt="4" custScaleX="262154">
-        <dgm:presLayoutVars>
-          <dgm:bulletEnabled val="1"/>
-        </dgm:presLayoutVars>
-      </dgm:prSet>
-      <dgm:spPr/>
-    </dgm:pt>
-  </dgm:ptLst>
-  <dgm:cxnLst>
-    <dgm:cxn modelId="{D6131E09-85B8-A64C-B70F-332DBD927645}" type="presOf" srcId="{30256DA3-2063-6145-A40C-3F213F51F903}" destId="{93A03A25-0C23-0B49-A801-B6DF4800FF1C}" srcOrd="1" destOrd="0" presId="urn:microsoft.com/office/officeart/2005/8/layout/process2"/>
-    <dgm:cxn modelId="{5904A30C-0CB9-7441-8EE9-02853E905445}" type="presOf" srcId="{ECF5917A-5A86-4945-92ED-C3A30B725FE7}" destId="{5030DE2C-F3D5-7E44-98C9-D5A5317CA56C}" srcOrd="1" destOrd="0" presId="urn:microsoft.com/office/officeart/2005/8/layout/process2"/>
-    <dgm:cxn modelId="{A399560D-2686-BB49-BEC8-16E0E59F898C}" srcId="{CB88F0E7-4140-1B4D-A33B-6563FB2E1C23}" destId="{6D80D72C-DBB2-D94A-BCBD-1B0C1C35E98A}" srcOrd="1" destOrd="0" parTransId="{7A0A85DE-826D-F943-B70A-C309B2E35E00}" sibTransId="{ECF5917A-5A86-4945-92ED-C3A30B725FE7}"/>
-    <dgm:cxn modelId="{78350D13-8018-2442-8F21-2B5DA59CB55B}" type="presOf" srcId="{99CAAEDC-6392-D343-9A6F-7F5A17C79600}" destId="{6F6C8E07-FBAD-3F4D-A906-27ECCF26E70E}" srcOrd="0" destOrd="0" presId="urn:microsoft.com/office/officeart/2005/8/layout/process2"/>
-    <dgm:cxn modelId="{6F8A8218-A43D-754D-AC34-7D7A44CB7D31}" srcId="{CB88F0E7-4140-1B4D-A33B-6563FB2E1C23}" destId="{B5498DE5-7CDC-0347-BA87-FB91FE15E435}" srcOrd="0" destOrd="0" parTransId="{A4B182FE-28CF-CC4A-A857-D974481A212A}" sibTransId="{30256DA3-2063-6145-A40C-3F213F51F903}"/>
-    <dgm:cxn modelId="{4E285119-2459-8646-A275-E2ED993B432A}" type="presOf" srcId="{C215D862-A291-E848-A659-5797AEF6E6A2}" destId="{14D2D5CD-E619-2C4C-83EC-B8786FE7D09C}" srcOrd="1" destOrd="0" presId="urn:microsoft.com/office/officeart/2005/8/layout/process2"/>
-    <dgm:cxn modelId="{85095E25-989E-8644-8FAC-8BF624EEEE21}" type="presOf" srcId="{C215D862-A291-E848-A659-5797AEF6E6A2}" destId="{B3C2DB7A-EC33-6544-A09D-B1205728770A}" srcOrd="0" destOrd="0" presId="urn:microsoft.com/office/officeart/2005/8/layout/process2"/>
-    <dgm:cxn modelId="{4CDBD944-8E38-3E46-8153-1E412D1822B3}" type="presOf" srcId="{6D80D72C-DBB2-D94A-BCBD-1B0C1C35E98A}" destId="{43D2067A-91F6-8745-98BA-D6A10B24950A}" srcOrd="0" destOrd="0" presId="urn:microsoft.com/office/officeart/2005/8/layout/process2"/>
-    <dgm:cxn modelId="{81A8B549-091C-3746-9E41-0841544AE411}" type="presOf" srcId="{3AAD80AB-86BA-354D-A91B-40CE06269A51}" destId="{80C05A4E-2A0A-294C-8DDC-052E97D834DA}" srcOrd="0" destOrd="0" presId="urn:microsoft.com/office/officeart/2005/8/layout/process2"/>
-    <dgm:cxn modelId="{31B7676C-5E13-6240-8873-94CFD48BF4D4}" type="presOf" srcId="{ECF5917A-5A86-4945-92ED-C3A30B725FE7}" destId="{D067C965-9057-9C4A-A1D2-4912C14C50F7}" srcOrd="0" destOrd="0" presId="urn:microsoft.com/office/officeart/2005/8/layout/process2"/>
-    <dgm:cxn modelId="{6CC7BC8F-A4DC-3E43-A468-7FE509ECF895}" srcId="{CB88F0E7-4140-1B4D-A33B-6563FB2E1C23}" destId="{3AAD80AB-86BA-354D-A91B-40CE06269A51}" srcOrd="2" destOrd="0" parTransId="{3035F67B-CB08-4446-AE7D-48C039F6D2DF}" sibTransId="{C215D862-A291-E848-A659-5797AEF6E6A2}"/>
-    <dgm:cxn modelId="{94FC48A0-733E-B74A-8978-25792B03521A}" type="presOf" srcId="{B5498DE5-7CDC-0347-BA87-FB91FE15E435}" destId="{381AA547-A4ED-3840-A5BF-F16754F7DE5F}" srcOrd="0" destOrd="0" presId="urn:microsoft.com/office/officeart/2005/8/layout/process2"/>
-    <dgm:cxn modelId="{850E1FA5-AA48-724C-8558-F11B12C530EE}" srcId="{CB88F0E7-4140-1B4D-A33B-6563FB2E1C23}" destId="{99CAAEDC-6392-D343-9A6F-7F5A17C79600}" srcOrd="3" destOrd="0" parTransId="{C17FB67C-707B-D74A-80D6-94F7481B177D}" sibTransId="{E9E523D2-25B5-CD4B-9629-508B4D79D50B}"/>
-    <dgm:cxn modelId="{4B8D3CDA-C71C-8644-BEF2-25F7C84E26CD}" type="presOf" srcId="{CB88F0E7-4140-1B4D-A33B-6563FB2E1C23}" destId="{55F5C254-F149-8D49-B068-DD2BB6700AB1}" srcOrd="0" destOrd="0" presId="urn:microsoft.com/office/officeart/2005/8/layout/process2"/>
-    <dgm:cxn modelId="{86204DF7-69DC-6847-B172-56BDA05E8683}" type="presOf" srcId="{30256DA3-2063-6145-A40C-3F213F51F903}" destId="{91DA19BA-A0AB-564A-8A9E-322DF18B64CF}" srcOrd="0" destOrd="0" presId="urn:microsoft.com/office/officeart/2005/8/layout/process2"/>
-    <dgm:cxn modelId="{89CC1CC3-BE64-AB44-A616-37735F71B013}" type="presParOf" srcId="{55F5C254-F149-8D49-B068-DD2BB6700AB1}" destId="{381AA547-A4ED-3840-A5BF-F16754F7DE5F}" srcOrd="0" destOrd="0" presId="urn:microsoft.com/office/officeart/2005/8/layout/process2"/>
-    <dgm:cxn modelId="{98CD7474-430F-C64D-B064-F9944BCE1FFC}" type="presParOf" srcId="{55F5C254-F149-8D49-B068-DD2BB6700AB1}" destId="{91DA19BA-A0AB-564A-8A9E-322DF18B64CF}" srcOrd="1" destOrd="0" presId="urn:microsoft.com/office/officeart/2005/8/layout/process2"/>
-    <dgm:cxn modelId="{F77B03C0-3B99-DA44-ACA7-106E5F115049}" type="presParOf" srcId="{91DA19BA-A0AB-564A-8A9E-322DF18B64CF}" destId="{93A03A25-0C23-0B49-A801-B6DF4800FF1C}" srcOrd="0" destOrd="0" presId="urn:microsoft.com/office/officeart/2005/8/layout/process2"/>
-    <dgm:cxn modelId="{E0361171-1004-814D-9384-11011E7DBAFA}" type="presParOf" srcId="{55F5C254-F149-8D49-B068-DD2BB6700AB1}" destId="{43D2067A-91F6-8745-98BA-D6A10B24950A}" srcOrd="2" destOrd="0" presId="urn:microsoft.com/office/officeart/2005/8/layout/process2"/>
-    <dgm:cxn modelId="{9E89FA7B-6EC5-3D4F-A2E9-0489975E5A87}" type="presParOf" srcId="{55F5C254-F149-8D49-B068-DD2BB6700AB1}" destId="{D067C965-9057-9C4A-A1D2-4912C14C50F7}" srcOrd="3" destOrd="0" presId="urn:microsoft.com/office/officeart/2005/8/layout/process2"/>
-    <dgm:cxn modelId="{99622694-B90F-7546-938F-69663FCB7B51}" type="presParOf" srcId="{D067C965-9057-9C4A-A1D2-4912C14C50F7}" destId="{5030DE2C-F3D5-7E44-98C9-D5A5317CA56C}" srcOrd="0" destOrd="0" presId="urn:microsoft.com/office/officeart/2005/8/layout/process2"/>
-    <dgm:cxn modelId="{8CBAB055-23C9-2546-9DAF-CEC39B7D6480}" type="presParOf" srcId="{55F5C254-F149-8D49-B068-DD2BB6700AB1}" destId="{80C05A4E-2A0A-294C-8DDC-052E97D834DA}" srcOrd="4" destOrd="0" presId="urn:microsoft.com/office/officeart/2005/8/layout/process2"/>
-    <dgm:cxn modelId="{4A5400AB-6FEE-0949-A825-32DFDDF5C5FC}" type="presParOf" srcId="{55F5C254-F149-8D49-B068-DD2BB6700AB1}" destId="{B3C2DB7A-EC33-6544-A09D-B1205728770A}" srcOrd="5" destOrd="0" presId="urn:microsoft.com/office/officeart/2005/8/layout/process2"/>
-    <dgm:cxn modelId="{F55D1266-0549-5F47-A020-0AE4C6A8F5F8}" type="presParOf" srcId="{B3C2DB7A-EC33-6544-A09D-B1205728770A}" destId="{14D2D5CD-E619-2C4C-83EC-B8786FE7D09C}" srcOrd="0" destOrd="0" presId="urn:microsoft.com/office/officeart/2005/8/layout/process2"/>
-    <dgm:cxn modelId="{9670566E-C6A8-EB46-A599-ADE70B5EED77}" type="presParOf" srcId="{55F5C254-F149-8D49-B068-DD2BB6700AB1}" destId="{6F6C8E07-FBAD-3F4D-A906-27ECCF26E70E}" srcOrd="6" destOrd="0" presId="urn:microsoft.com/office/officeart/2005/8/layout/process2"/>
-  </dgm:cxnLst>
-  <dgm:bg/>
-  <dgm:whole/>
-  <dgm:extLst>
-    <a:ext uri="http://schemas.microsoft.com/office/drawing/2008/diagram">
-      <dsp:dataModelExt xmlns:dsp="http://schemas.microsoft.com/office/drawing/2008/diagram" relId="rId6" minVer="http://schemas.openxmlformats.org/drawingml/2006/diagram"/>
-    </a:ext>
-  </dgm:extLst>
-</dgm:dataModel>
-</file>
-
-<file path=ppt/diagrams/data6.xml><?xml version="1.0" encoding="utf-8"?>
 <dgm:dataModel xmlns:dgm="http://schemas.openxmlformats.org/drawingml/2006/diagram" xmlns:a="http://schemas.openxmlformats.org/drawingml/2006/main">
   <dgm:ptLst>
     <dgm:pt modelId="{26577B4F-8805-7F47-9A82-2379E9B73B62}" type="doc">
@@ -8487,6 +8234,260 @@
     </a:ext>
     <a:ext uri="{C62137D5-CB1D-491B-B009-E17868A290BF}">
       <dgm14:recolorImg xmlns:dgm14="http://schemas.microsoft.com/office/drawing/2010/diagram" val="1"/>
+    </a:ext>
+  </dgm:extLst>
+</dgm:dataModel>
+</file>
+
+<file path=ppt/diagrams/data6.xml><?xml version="1.0" encoding="utf-8"?>
+<dgm:dataModel xmlns:dgm="http://schemas.openxmlformats.org/drawingml/2006/diagram" xmlns:a="http://schemas.openxmlformats.org/drawingml/2006/main">
+  <dgm:ptLst>
+    <dgm:pt modelId="{CB88F0E7-4140-1B4D-A33B-6563FB2E1C23}" type="doc">
+      <dgm:prSet loTypeId="urn:microsoft.com/office/officeart/2005/8/layout/process2" loCatId="" qsTypeId="urn:microsoft.com/office/officeart/2005/8/quickstyle/simple1" qsCatId="simple" csTypeId="urn:microsoft.com/office/officeart/2005/8/colors/colorful1" csCatId="colorful" phldr="1"/>
+      <dgm:spPr/>
+    </dgm:pt>
+    <dgm:pt modelId="{B5498DE5-7CDC-0347-BA87-FB91FE15E435}">
+      <dgm:prSet phldrT="[Text]"/>
+      <dgm:spPr/>
+      <dgm:t>
+        <a:bodyPr/>
+        <a:lstStyle/>
+        <a:p>
+          <a:r>
+            <a:rPr lang="en-US" dirty="0"/>
+            <a:t>Find phylogenetic distances between ASVs</a:t>
+          </a:r>
+        </a:p>
+      </dgm:t>
+    </dgm:pt>
+    <dgm:pt modelId="{A4B182FE-28CF-CC4A-A857-D974481A212A}" type="parTrans" cxnId="{6F8A8218-A43D-754D-AC34-7D7A44CB7D31}">
+      <dgm:prSet/>
+      <dgm:spPr/>
+      <dgm:t>
+        <a:bodyPr/>
+        <a:lstStyle/>
+        <a:p>
+          <a:endParaRPr lang="en-US"/>
+        </a:p>
+      </dgm:t>
+    </dgm:pt>
+    <dgm:pt modelId="{30256DA3-2063-6145-A40C-3F213F51F903}" type="sibTrans" cxnId="{6F8A8218-A43D-754D-AC34-7D7A44CB7D31}">
+      <dgm:prSet/>
+      <dgm:spPr/>
+      <dgm:t>
+        <a:bodyPr/>
+        <a:lstStyle/>
+        <a:p>
+          <a:endParaRPr lang="en-US"/>
+        </a:p>
+      </dgm:t>
+    </dgm:pt>
+    <dgm:pt modelId="{99CAAEDC-6392-D343-9A6F-7F5A17C79600}">
+      <dgm:prSet/>
+      <dgm:spPr/>
+      <dgm:t>
+        <a:bodyPr/>
+        <a:lstStyle/>
+        <a:p>
+          <a:r>
+            <a:rPr lang="en-US" dirty="0"/>
+            <a:t>Plot results of the mantel correlograms against phylogenetic distance classes for each environmental parameter to check for significant relationships</a:t>
+          </a:r>
+        </a:p>
+      </dgm:t>
+    </dgm:pt>
+    <dgm:pt modelId="{E9E523D2-25B5-CD4B-9629-508B4D79D50B}" type="sibTrans" cxnId="{850E1FA5-AA48-724C-8558-F11B12C530EE}">
+      <dgm:prSet/>
+      <dgm:spPr/>
+      <dgm:t>
+        <a:bodyPr/>
+        <a:lstStyle/>
+        <a:p>
+          <a:endParaRPr lang="en-US"/>
+        </a:p>
+      </dgm:t>
+    </dgm:pt>
+    <dgm:pt modelId="{C17FB67C-707B-D74A-80D6-94F7481B177D}" type="parTrans" cxnId="{850E1FA5-AA48-724C-8558-F11B12C530EE}">
+      <dgm:prSet/>
+      <dgm:spPr/>
+      <dgm:t>
+        <a:bodyPr/>
+        <a:lstStyle/>
+        <a:p>
+          <a:endParaRPr lang="en-US"/>
+        </a:p>
+      </dgm:t>
+    </dgm:pt>
+    <dgm:pt modelId="{3AAD80AB-86BA-354D-A91B-40CE06269A51}">
+      <dgm:prSet phldrT="[Text]"/>
+      <dgm:spPr/>
+      <dgm:t>
+        <a:bodyPr/>
+        <a:lstStyle/>
+        <a:p>
+          <a:r>
+            <a:rPr lang="en-US" dirty="0"/>
+            <a:t>Calculate mantel correlograms for each environmental parameter </a:t>
+          </a:r>
+        </a:p>
+      </dgm:t>
+    </dgm:pt>
+    <dgm:pt modelId="{C215D862-A291-E848-A659-5797AEF6E6A2}" type="sibTrans" cxnId="{6CC7BC8F-A4DC-3E43-A468-7FE509ECF895}">
+      <dgm:prSet/>
+      <dgm:spPr/>
+      <dgm:t>
+        <a:bodyPr/>
+        <a:lstStyle/>
+        <a:p>
+          <a:endParaRPr lang="en-US"/>
+        </a:p>
+      </dgm:t>
+    </dgm:pt>
+    <dgm:pt modelId="{3035F67B-CB08-4446-AE7D-48C039F6D2DF}" type="parTrans" cxnId="{6CC7BC8F-A4DC-3E43-A468-7FE509ECF895}">
+      <dgm:prSet/>
+      <dgm:spPr/>
+      <dgm:t>
+        <a:bodyPr/>
+        <a:lstStyle/>
+        <a:p>
+          <a:endParaRPr lang="en-US"/>
+        </a:p>
+      </dgm:t>
+    </dgm:pt>
+    <dgm:pt modelId="{6D80D72C-DBB2-D94A-BCBD-1B0C1C35E98A}">
+      <dgm:prSet phldrT="[Text]"/>
+      <dgm:spPr/>
+      <dgm:t>
+        <a:bodyPr/>
+        <a:lstStyle/>
+        <a:p>
+          <a:r>
+            <a:rPr lang="en-US" dirty="0"/>
+            <a:t>Find the weighted mean environmental parameters for each ASV = niche preferences </a:t>
+          </a:r>
+          <a:endParaRPr lang="en-US" i="1" dirty="0"/>
+        </a:p>
+      </dgm:t>
+    </dgm:pt>
+    <dgm:pt modelId="{ECF5917A-5A86-4945-92ED-C3A30B725FE7}" type="sibTrans" cxnId="{A399560D-2686-BB49-BEC8-16E0E59F898C}">
+      <dgm:prSet/>
+      <dgm:spPr/>
+      <dgm:t>
+        <a:bodyPr/>
+        <a:lstStyle/>
+        <a:p>
+          <a:endParaRPr lang="en-US"/>
+        </a:p>
+      </dgm:t>
+    </dgm:pt>
+    <dgm:pt modelId="{7A0A85DE-826D-F943-B70A-C309B2E35E00}" type="parTrans" cxnId="{A399560D-2686-BB49-BEC8-16E0E59F898C}">
+      <dgm:prSet/>
+      <dgm:spPr/>
+      <dgm:t>
+        <a:bodyPr/>
+        <a:lstStyle/>
+        <a:p>
+          <a:endParaRPr lang="en-US"/>
+        </a:p>
+      </dgm:t>
+    </dgm:pt>
+    <dgm:pt modelId="{55F5C254-F149-8D49-B068-DD2BB6700AB1}" type="pres">
+      <dgm:prSet presAssocID="{CB88F0E7-4140-1B4D-A33B-6563FB2E1C23}" presName="linearFlow" presStyleCnt="0">
+        <dgm:presLayoutVars>
+          <dgm:resizeHandles val="exact"/>
+        </dgm:presLayoutVars>
+      </dgm:prSet>
+      <dgm:spPr/>
+    </dgm:pt>
+    <dgm:pt modelId="{381AA547-A4ED-3840-A5BF-F16754F7DE5F}" type="pres">
+      <dgm:prSet presAssocID="{B5498DE5-7CDC-0347-BA87-FB91FE15E435}" presName="node" presStyleLbl="node1" presStyleIdx="0" presStyleCnt="4" custScaleX="266769">
+        <dgm:presLayoutVars>
+          <dgm:bulletEnabled val="1"/>
+        </dgm:presLayoutVars>
+      </dgm:prSet>
+      <dgm:spPr/>
+    </dgm:pt>
+    <dgm:pt modelId="{91DA19BA-A0AB-564A-8A9E-322DF18B64CF}" type="pres">
+      <dgm:prSet presAssocID="{30256DA3-2063-6145-A40C-3F213F51F903}" presName="sibTrans" presStyleLbl="sibTrans2D1" presStyleIdx="0" presStyleCnt="3"/>
+      <dgm:spPr/>
+    </dgm:pt>
+    <dgm:pt modelId="{93A03A25-0C23-0B49-A801-B6DF4800FF1C}" type="pres">
+      <dgm:prSet presAssocID="{30256DA3-2063-6145-A40C-3F213F51F903}" presName="connectorText" presStyleLbl="sibTrans2D1" presStyleIdx="0" presStyleCnt="3"/>
+      <dgm:spPr/>
+    </dgm:pt>
+    <dgm:pt modelId="{43D2067A-91F6-8745-98BA-D6A10B24950A}" type="pres">
+      <dgm:prSet presAssocID="{6D80D72C-DBB2-D94A-BCBD-1B0C1C35E98A}" presName="node" presStyleLbl="node1" presStyleIdx="1" presStyleCnt="4" custScaleX="264923" custLinFactNeighborX="1148">
+        <dgm:presLayoutVars>
+          <dgm:bulletEnabled val="1"/>
+        </dgm:presLayoutVars>
+      </dgm:prSet>
+      <dgm:spPr/>
+    </dgm:pt>
+    <dgm:pt modelId="{D067C965-9057-9C4A-A1D2-4912C14C50F7}" type="pres">
+      <dgm:prSet presAssocID="{ECF5917A-5A86-4945-92ED-C3A30B725FE7}" presName="sibTrans" presStyleLbl="sibTrans2D1" presStyleIdx="1" presStyleCnt="3"/>
+      <dgm:spPr/>
+    </dgm:pt>
+    <dgm:pt modelId="{5030DE2C-F3D5-7E44-98C9-D5A5317CA56C}" type="pres">
+      <dgm:prSet presAssocID="{ECF5917A-5A86-4945-92ED-C3A30B725FE7}" presName="connectorText" presStyleLbl="sibTrans2D1" presStyleIdx="1" presStyleCnt="3"/>
+      <dgm:spPr/>
+    </dgm:pt>
+    <dgm:pt modelId="{80C05A4E-2A0A-294C-8DDC-052E97D834DA}" type="pres">
+      <dgm:prSet presAssocID="{3AAD80AB-86BA-354D-A91B-40CE06269A51}" presName="node" presStyleLbl="node1" presStyleIdx="2" presStyleCnt="4" custScaleX="263077">
+        <dgm:presLayoutVars>
+          <dgm:bulletEnabled val="1"/>
+        </dgm:presLayoutVars>
+      </dgm:prSet>
+      <dgm:spPr/>
+    </dgm:pt>
+    <dgm:pt modelId="{B3C2DB7A-EC33-6544-A09D-B1205728770A}" type="pres">
+      <dgm:prSet presAssocID="{C215D862-A291-E848-A659-5797AEF6E6A2}" presName="sibTrans" presStyleLbl="sibTrans2D1" presStyleIdx="2" presStyleCnt="3"/>
+      <dgm:spPr/>
+    </dgm:pt>
+    <dgm:pt modelId="{14D2D5CD-E619-2C4C-83EC-B8786FE7D09C}" type="pres">
+      <dgm:prSet presAssocID="{C215D862-A291-E848-A659-5797AEF6E6A2}" presName="connectorText" presStyleLbl="sibTrans2D1" presStyleIdx="2" presStyleCnt="3"/>
+      <dgm:spPr/>
+    </dgm:pt>
+    <dgm:pt modelId="{6F6C8E07-FBAD-3F4D-A906-27ECCF26E70E}" type="pres">
+      <dgm:prSet presAssocID="{99CAAEDC-6392-D343-9A6F-7F5A17C79600}" presName="node" presStyleLbl="node1" presStyleIdx="3" presStyleCnt="4" custScaleX="262154">
+        <dgm:presLayoutVars>
+          <dgm:bulletEnabled val="1"/>
+        </dgm:presLayoutVars>
+      </dgm:prSet>
+      <dgm:spPr/>
+    </dgm:pt>
+  </dgm:ptLst>
+  <dgm:cxnLst>
+    <dgm:cxn modelId="{D6131E09-85B8-A64C-B70F-332DBD927645}" type="presOf" srcId="{30256DA3-2063-6145-A40C-3F213F51F903}" destId="{93A03A25-0C23-0B49-A801-B6DF4800FF1C}" srcOrd="1" destOrd="0" presId="urn:microsoft.com/office/officeart/2005/8/layout/process2"/>
+    <dgm:cxn modelId="{5904A30C-0CB9-7441-8EE9-02853E905445}" type="presOf" srcId="{ECF5917A-5A86-4945-92ED-C3A30B725FE7}" destId="{5030DE2C-F3D5-7E44-98C9-D5A5317CA56C}" srcOrd="1" destOrd="0" presId="urn:microsoft.com/office/officeart/2005/8/layout/process2"/>
+    <dgm:cxn modelId="{A399560D-2686-BB49-BEC8-16E0E59F898C}" srcId="{CB88F0E7-4140-1B4D-A33B-6563FB2E1C23}" destId="{6D80D72C-DBB2-D94A-BCBD-1B0C1C35E98A}" srcOrd="1" destOrd="0" parTransId="{7A0A85DE-826D-F943-B70A-C309B2E35E00}" sibTransId="{ECF5917A-5A86-4945-92ED-C3A30B725FE7}"/>
+    <dgm:cxn modelId="{78350D13-8018-2442-8F21-2B5DA59CB55B}" type="presOf" srcId="{99CAAEDC-6392-D343-9A6F-7F5A17C79600}" destId="{6F6C8E07-FBAD-3F4D-A906-27ECCF26E70E}" srcOrd="0" destOrd="0" presId="urn:microsoft.com/office/officeart/2005/8/layout/process2"/>
+    <dgm:cxn modelId="{6F8A8218-A43D-754D-AC34-7D7A44CB7D31}" srcId="{CB88F0E7-4140-1B4D-A33B-6563FB2E1C23}" destId="{B5498DE5-7CDC-0347-BA87-FB91FE15E435}" srcOrd="0" destOrd="0" parTransId="{A4B182FE-28CF-CC4A-A857-D974481A212A}" sibTransId="{30256DA3-2063-6145-A40C-3F213F51F903}"/>
+    <dgm:cxn modelId="{4E285119-2459-8646-A275-E2ED993B432A}" type="presOf" srcId="{C215D862-A291-E848-A659-5797AEF6E6A2}" destId="{14D2D5CD-E619-2C4C-83EC-B8786FE7D09C}" srcOrd="1" destOrd="0" presId="urn:microsoft.com/office/officeart/2005/8/layout/process2"/>
+    <dgm:cxn modelId="{85095E25-989E-8644-8FAC-8BF624EEEE21}" type="presOf" srcId="{C215D862-A291-E848-A659-5797AEF6E6A2}" destId="{B3C2DB7A-EC33-6544-A09D-B1205728770A}" srcOrd="0" destOrd="0" presId="urn:microsoft.com/office/officeart/2005/8/layout/process2"/>
+    <dgm:cxn modelId="{4CDBD944-8E38-3E46-8153-1E412D1822B3}" type="presOf" srcId="{6D80D72C-DBB2-D94A-BCBD-1B0C1C35E98A}" destId="{43D2067A-91F6-8745-98BA-D6A10B24950A}" srcOrd="0" destOrd="0" presId="urn:microsoft.com/office/officeart/2005/8/layout/process2"/>
+    <dgm:cxn modelId="{81A8B549-091C-3746-9E41-0841544AE411}" type="presOf" srcId="{3AAD80AB-86BA-354D-A91B-40CE06269A51}" destId="{80C05A4E-2A0A-294C-8DDC-052E97D834DA}" srcOrd="0" destOrd="0" presId="urn:microsoft.com/office/officeart/2005/8/layout/process2"/>
+    <dgm:cxn modelId="{31B7676C-5E13-6240-8873-94CFD48BF4D4}" type="presOf" srcId="{ECF5917A-5A86-4945-92ED-C3A30B725FE7}" destId="{D067C965-9057-9C4A-A1D2-4912C14C50F7}" srcOrd="0" destOrd="0" presId="urn:microsoft.com/office/officeart/2005/8/layout/process2"/>
+    <dgm:cxn modelId="{6CC7BC8F-A4DC-3E43-A468-7FE509ECF895}" srcId="{CB88F0E7-4140-1B4D-A33B-6563FB2E1C23}" destId="{3AAD80AB-86BA-354D-A91B-40CE06269A51}" srcOrd="2" destOrd="0" parTransId="{3035F67B-CB08-4446-AE7D-48C039F6D2DF}" sibTransId="{C215D862-A291-E848-A659-5797AEF6E6A2}"/>
+    <dgm:cxn modelId="{94FC48A0-733E-B74A-8978-25792B03521A}" type="presOf" srcId="{B5498DE5-7CDC-0347-BA87-FB91FE15E435}" destId="{381AA547-A4ED-3840-A5BF-F16754F7DE5F}" srcOrd="0" destOrd="0" presId="urn:microsoft.com/office/officeart/2005/8/layout/process2"/>
+    <dgm:cxn modelId="{850E1FA5-AA48-724C-8558-F11B12C530EE}" srcId="{CB88F0E7-4140-1B4D-A33B-6563FB2E1C23}" destId="{99CAAEDC-6392-D343-9A6F-7F5A17C79600}" srcOrd="3" destOrd="0" parTransId="{C17FB67C-707B-D74A-80D6-94F7481B177D}" sibTransId="{E9E523D2-25B5-CD4B-9629-508B4D79D50B}"/>
+    <dgm:cxn modelId="{4B8D3CDA-C71C-8644-BEF2-25F7C84E26CD}" type="presOf" srcId="{CB88F0E7-4140-1B4D-A33B-6563FB2E1C23}" destId="{55F5C254-F149-8D49-B068-DD2BB6700AB1}" srcOrd="0" destOrd="0" presId="urn:microsoft.com/office/officeart/2005/8/layout/process2"/>
+    <dgm:cxn modelId="{86204DF7-69DC-6847-B172-56BDA05E8683}" type="presOf" srcId="{30256DA3-2063-6145-A40C-3F213F51F903}" destId="{91DA19BA-A0AB-564A-8A9E-322DF18B64CF}" srcOrd="0" destOrd="0" presId="urn:microsoft.com/office/officeart/2005/8/layout/process2"/>
+    <dgm:cxn modelId="{89CC1CC3-BE64-AB44-A616-37735F71B013}" type="presParOf" srcId="{55F5C254-F149-8D49-B068-DD2BB6700AB1}" destId="{381AA547-A4ED-3840-A5BF-F16754F7DE5F}" srcOrd="0" destOrd="0" presId="urn:microsoft.com/office/officeart/2005/8/layout/process2"/>
+    <dgm:cxn modelId="{98CD7474-430F-C64D-B064-F9944BCE1FFC}" type="presParOf" srcId="{55F5C254-F149-8D49-B068-DD2BB6700AB1}" destId="{91DA19BA-A0AB-564A-8A9E-322DF18B64CF}" srcOrd="1" destOrd="0" presId="urn:microsoft.com/office/officeart/2005/8/layout/process2"/>
+    <dgm:cxn modelId="{F77B03C0-3B99-DA44-ACA7-106E5F115049}" type="presParOf" srcId="{91DA19BA-A0AB-564A-8A9E-322DF18B64CF}" destId="{93A03A25-0C23-0B49-A801-B6DF4800FF1C}" srcOrd="0" destOrd="0" presId="urn:microsoft.com/office/officeart/2005/8/layout/process2"/>
+    <dgm:cxn modelId="{E0361171-1004-814D-9384-11011E7DBAFA}" type="presParOf" srcId="{55F5C254-F149-8D49-B068-DD2BB6700AB1}" destId="{43D2067A-91F6-8745-98BA-D6A10B24950A}" srcOrd="2" destOrd="0" presId="urn:microsoft.com/office/officeart/2005/8/layout/process2"/>
+    <dgm:cxn modelId="{9E89FA7B-6EC5-3D4F-A2E9-0489975E5A87}" type="presParOf" srcId="{55F5C254-F149-8D49-B068-DD2BB6700AB1}" destId="{D067C965-9057-9C4A-A1D2-4912C14C50F7}" srcOrd="3" destOrd="0" presId="urn:microsoft.com/office/officeart/2005/8/layout/process2"/>
+    <dgm:cxn modelId="{99622694-B90F-7546-938F-69663FCB7B51}" type="presParOf" srcId="{D067C965-9057-9C4A-A1D2-4912C14C50F7}" destId="{5030DE2C-F3D5-7E44-98C9-D5A5317CA56C}" srcOrd="0" destOrd="0" presId="urn:microsoft.com/office/officeart/2005/8/layout/process2"/>
+    <dgm:cxn modelId="{8CBAB055-23C9-2546-9DAF-CEC39B7D6480}" type="presParOf" srcId="{55F5C254-F149-8D49-B068-DD2BB6700AB1}" destId="{80C05A4E-2A0A-294C-8DDC-052E97D834DA}" srcOrd="4" destOrd="0" presId="urn:microsoft.com/office/officeart/2005/8/layout/process2"/>
+    <dgm:cxn modelId="{4A5400AB-6FEE-0949-A825-32DFDDF5C5FC}" type="presParOf" srcId="{55F5C254-F149-8D49-B068-DD2BB6700AB1}" destId="{B3C2DB7A-EC33-6544-A09D-B1205728770A}" srcOrd="5" destOrd="0" presId="urn:microsoft.com/office/officeart/2005/8/layout/process2"/>
+    <dgm:cxn modelId="{F55D1266-0549-5F47-A020-0AE4C6A8F5F8}" type="presParOf" srcId="{B3C2DB7A-EC33-6544-A09D-B1205728770A}" destId="{14D2D5CD-E619-2C4C-83EC-B8786FE7D09C}" srcOrd="0" destOrd="0" presId="urn:microsoft.com/office/officeart/2005/8/layout/process2"/>
+    <dgm:cxn modelId="{9670566E-C6A8-EB46-A599-ADE70B5EED77}" type="presParOf" srcId="{55F5C254-F149-8D49-B068-DD2BB6700AB1}" destId="{6F6C8E07-FBAD-3F4D-A906-27ECCF26E70E}" srcOrd="6" destOrd="0" presId="urn:microsoft.com/office/officeart/2005/8/layout/process2"/>
+  </dgm:cxnLst>
+  <dgm:bg/>
+  <dgm:whole/>
+  <dgm:extLst>
+    <a:ext uri="http://schemas.microsoft.com/office/drawing/2008/diagram">
+      <dsp:dataModelExt xmlns:dsp="http://schemas.microsoft.com/office/drawing/2008/diagram" relId="rId6" minVer="http://schemas.openxmlformats.org/drawingml/2006/diagram"/>
     </a:ext>
   </dgm:extLst>
 </dgm:dataModel>
@@ -10962,8 +10963,8 @@
       </dsp:nvSpPr>
       <dsp:spPr>
         <a:xfrm>
-          <a:off x="100015" y="661"/>
-          <a:ext cx="8258168" cy="773906"/>
+          <a:off x="1121398" y="497"/>
+          <a:ext cx="6215402" cy="582470"/>
         </a:xfrm>
         <a:prstGeom prst="roundRect">
           <a:avLst>
@@ -11007,12 +11008,12 @@
         </a:fontRef>
       </dsp:style>
       <dsp:txBody>
-        <a:bodyPr spcFirstLastPara="0" vert="horz" wrap="square" lIns="60960" tIns="60960" rIns="60960" bIns="60960" numCol="1" spcCol="1270" anchor="ctr" anchorCtr="0">
+        <a:bodyPr spcFirstLastPara="0" vert="horz" wrap="square" lIns="49530" tIns="49530" rIns="49530" bIns="49530" numCol="1" spcCol="1270" anchor="ctr" anchorCtr="0">
           <a:noAutofit/>
         </a:bodyPr>
         <a:lstStyle/>
         <a:p>
-          <a:pPr marL="0" lvl="0" indent="0" algn="ctr" defTabSz="711200">
+          <a:pPr marL="0" lvl="0" indent="0" algn="ctr" defTabSz="577850">
             <a:lnSpc>
               <a:spcPct val="90000"/>
             </a:lnSpc>
@@ -11025,22 +11026,22 @@
             <a:buNone/>
           </a:pPr>
           <a:r>
-            <a:rPr lang="en-US" sz="1600" kern="1200" dirty="0"/>
+            <a:rPr lang="en-US" sz="1300" kern="1200" dirty="0"/>
             <a:t>Extract ASV table from </a:t>
           </a:r>
           <a:r>
-            <a:rPr lang="en-US" sz="1600" kern="1200" dirty="0" err="1"/>
+            <a:rPr lang="en-US" sz="1300" kern="1200" dirty="0" err="1"/>
             <a:t>phyloseq</a:t>
           </a:r>
           <a:r>
-            <a:rPr lang="en-US" sz="1600" kern="1200" dirty="0"/>
+            <a:rPr lang="en-US" sz="1300" kern="1200" dirty="0"/>
             <a:t> object</a:t>
           </a:r>
         </a:p>
       </dsp:txBody>
       <dsp:txXfrm>
-        <a:off x="122682" y="23328"/>
-        <a:ext cx="8212834" cy="728572"/>
+        <a:off x="1138458" y="17557"/>
+        <a:ext cx="6181282" cy="548350"/>
       </dsp:txXfrm>
     </dsp:sp>
     <dsp:sp modelId="{91DA19BA-A0AB-564A-8A9E-322DF18B64CF}">
@@ -11050,8 +11051,8 @@
       </dsp:nvSpPr>
       <dsp:spPr>
         <a:xfrm rot="5400000">
-          <a:off x="4083992" y="793915"/>
-          <a:ext cx="290214" cy="348257"/>
+          <a:off x="4119886" y="597530"/>
+          <a:ext cx="218426" cy="262111"/>
         </a:xfrm>
         <a:prstGeom prst="rightArrow">
           <a:avLst>
@@ -11092,7 +11093,7 @@
         </a:bodyPr>
         <a:lstStyle/>
         <a:p>
-          <a:pPr marL="0" lvl="0" indent="0" algn="ctr" defTabSz="577850">
+          <a:pPr marL="0" lvl="0" indent="0" algn="ctr" defTabSz="444500">
             <a:lnSpc>
               <a:spcPct val="90000"/>
             </a:lnSpc>
@@ -11104,12 +11105,12 @@
             </a:spcAft>
             <a:buNone/>
           </a:pPr>
-          <a:endParaRPr lang="en-US" sz="1300" kern="1200"/>
+          <a:endParaRPr lang="en-US" sz="1000" kern="1200"/>
         </a:p>
       </dsp:txBody>
       <dsp:txXfrm rot="-5400000">
-        <a:off x="4124622" y="822936"/>
-        <a:ext cx="208955" cy="203150"/>
+        <a:off x="4150466" y="619372"/>
+        <a:ext cx="157267" cy="152898"/>
       </dsp:txXfrm>
     </dsp:sp>
     <dsp:sp modelId="{43D2067A-91F6-8745-98BA-D6A10B24950A}">
@@ -11119,8 +11120,8 @@
       </dsp:nvSpPr>
       <dsp:spPr>
         <a:xfrm>
-          <a:off x="128588" y="1161520"/>
-          <a:ext cx="8201023" cy="773906"/>
+          <a:off x="1142903" y="874203"/>
+          <a:ext cx="6172393" cy="582470"/>
         </a:xfrm>
         <a:prstGeom prst="roundRect">
           <a:avLst>
@@ -11164,12 +11165,12 @@
         </a:fontRef>
       </dsp:style>
       <dsp:txBody>
-        <a:bodyPr spcFirstLastPara="0" vert="horz" wrap="square" lIns="60960" tIns="60960" rIns="60960" bIns="60960" numCol="1" spcCol="1270" anchor="ctr" anchorCtr="0">
+        <a:bodyPr spcFirstLastPara="0" vert="horz" wrap="square" lIns="49530" tIns="49530" rIns="49530" bIns="49530" numCol="1" spcCol="1270" anchor="ctr" anchorCtr="0">
           <a:noAutofit/>
         </a:bodyPr>
         <a:lstStyle/>
         <a:p>
-          <a:pPr marL="0" lvl="0" indent="0" algn="ctr" defTabSz="711200">
+          <a:pPr marL="0" lvl="0" indent="0" algn="ctr" defTabSz="577850">
             <a:lnSpc>
               <a:spcPct val="90000"/>
             </a:lnSpc>
@@ -11182,34 +11183,34 @@
             <a:buNone/>
           </a:pPr>
           <a:r>
-            <a:rPr lang="en-US" sz="1600" kern="1200" dirty="0"/>
-            <a:t>Calculate the size of the metacommunity (</a:t>
+            <a:rPr lang="en-US" sz="1300" kern="1200" dirty="0"/>
+            <a:t>Calculate </a:t>
           </a:r>
           <a:r>
-            <a:rPr lang="en-US" sz="1600" i="1" kern="1200" dirty="0"/>
+            <a:rPr lang="en-US" sz="1300" i="1" kern="1200" dirty="0"/>
             <a:t>N</a:t>
           </a:r>
           <a:r>
-            <a:rPr lang="en-US" sz="1600" kern="1200" dirty="0"/>
-            <a:t>) by finding the mean number of reads per sample. We also find the limit of detection (</a:t>
+            <a:rPr lang="en-US" sz="1300" kern="1200" dirty="0"/>
+            <a:t> by finding the mean number of reads per sample. We also find the limit of detection (</a:t>
           </a:r>
           <a:r>
-            <a:rPr lang="en-US" sz="1600" i="1" kern="1200" dirty="0"/>
+            <a:rPr lang="en-US" sz="1300" i="1" kern="1200" dirty="0"/>
             <a:t>d</a:t>
           </a:r>
           <a:r>
-            <a:rPr lang="en-US" sz="1600" kern="1200" dirty="0"/>
+            <a:rPr lang="en-US" sz="1300" kern="1200" dirty="0"/>
             <a:t>) = </a:t>
           </a:r>
           <a:r>
-            <a:rPr lang="en-US" sz="1600" i="1" kern="1200" dirty="0"/>
+            <a:rPr lang="en-US" sz="1300" i="1" kern="1200" dirty="0"/>
             <a:t>1/N</a:t>
           </a:r>
         </a:p>
       </dsp:txBody>
       <dsp:txXfrm>
-        <a:off x="151255" y="1184187"/>
-        <a:ext cx="8155689" cy="728572"/>
+        <a:off x="1159963" y="891263"/>
+        <a:ext cx="6138273" cy="548350"/>
       </dsp:txXfrm>
     </dsp:sp>
     <dsp:sp modelId="{D067C965-9057-9C4A-A1D2-4912C14C50F7}">
@@ -11219,8 +11220,8 @@
       </dsp:nvSpPr>
       <dsp:spPr>
         <a:xfrm rot="5400000">
-          <a:off x="4083992" y="1954774"/>
-          <a:ext cx="290214" cy="348257"/>
+          <a:off x="4119886" y="1471235"/>
+          <a:ext cx="218426" cy="262111"/>
         </a:xfrm>
         <a:prstGeom prst="rightArrow">
           <a:avLst>
@@ -11261,7 +11262,7 @@
         </a:bodyPr>
         <a:lstStyle/>
         <a:p>
-          <a:pPr marL="0" lvl="0" indent="0" algn="ctr" defTabSz="577850">
+          <a:pPr marL="0" lvl="0" indent="0" algn="ctr" defTabSz="444500">
             <a:lnSpc>
               <a:spcPct val="90000"/>
             </a:lnSpc>
@@ -11273,12 +11274,12 @@
             </a:spcAft>
             <a:buNone/>
           </a:pPr>
-          <a:endParaRPr lang="en-US" sz="1300" kern="1200"/>
+          <a:endParaRPr lang="en-US" sz="1000" kern="1200"/>
         </a:p>
       </dsp:txBody>
       <dsp:txXfrm rot="-5400000">
-        <a:off x="4124622" y="1983795"/>
-        <a:ext cx="208955" cy="203150"/>
+        <a:off x="4150466" y="1493077"/>
+        <a:ext cx="157267" cy="152898"/>
       </dsp:txXfrm>
     </dsp:sp>
     <dsp:sp modelId="{80C05A4E-2A0A-294C-8DDC-052E97D834DA}">
@@ -11288,8 +11289,8 @@
       </dsp:nvSpPr>
       <dsp:spPr>
         <a:xfrm>
-          <a:off x="157161" y="2322380"/>
-          <a:ext cx="8143877" cy="773906"/>
+          <a:off x="1164408" y="1747909"/>
+          <a:ext cx="6129383" cy="582470"/>
         </a:xfrm>
         <a:prstGeom prst="roundRect">
           <a:avLst>
@@ -11333,12 +11334,12 @@
         </a:fontRef>
       </dsp:style>
       <dsp:txBody>
-        <a:bodyPr spcFirstLastPara="0" vert="horz" wrap="square" lIns="60960" tIns="60960" rIns="60960" bIns="60960" numCol="1" spcCol="1270" anchor="ctr" anchorCtr="0">
+        <a:bodyPr spcFirstLastPara="0" vert="horz" wrap="square" lIns="49530" tIns="49530" rIns="49530" bIns="49530" numCol="1" spcCol="1270" anchor="ctr" anchorCtr="0">
           <a:noAutofit/>
         </a:bodyPr>
         <a:lstStyle/>
         <a:p>
-          <a:pPr marL="0" lvl="0" indent="0" algn="ctr" defTabSz="711200">
+          <a:pPr marL="0" lvl="0" indent="0" algn="ctr" defTabSz="577850">
             <a:lnSpc>
               <a:spcPct val="90000"/>
             </a:lnSpc>
@@ -11351,14 +11352,14 @@
             <a:buNone/>
           </a:pPr>
           <a:r>
-            <a:rPr lang="en-US" sz="1600" kern="1200" dirty="0"/>
+            <a:rPr lang="en-US" sz="1300" kern="1200" dirty="0"/>
             <a:t>Calculate the mean observed relative abundance and occurrence frequency of each ASV</a:t>
           </a:r>
         </a:p>
       </dsp:txBody>
       <dsp:txXfrm>
-        <a:off x="179828" y="2345047"/>
-        <a:ext cx="8098543" cy="728572"/>
+        <a:off x="1181468" y="1764969"/>
+        <a:ext cx="6095263" cy="548350"/>
       </dsp:txXfrm>
     </dsp:sp>
     <dsp:sp modelId="{B3C2DB7A-EC33-6544-A09D-B1205728770A}">
@@ -11368,8 +11369,8 @@
       </dsp:nvSpPr>
       <dsp:spPr>
         <a:xfrm rot="5400000">
-          <a:off x="4083992" y="3115634"/>
-          <a:ext cx="290214" cy="348257"/>
+          <a:off x="4119886" y="2344941"/>
+          <a:ext cx="218426" cy="262111"/>
         </a:xfrm>
         <a:prstGeom prst="rightArrow">
           <a:avLst>
@@ -11410,7 +11411,7 @@
         </a:bodyPr>
         <a:lstStyle/>
         <a:p>
-          <a:pPr marL="0" lvl="0" indent="0" algn="ctr" defTabSz="577850">
+          <a:pPr marL="0" lvl="0" indent="0" algn="ctr" defTabSz="444500">
             <a:lnSpc>
               <a:spcPct val="90000"/>
             </a:lnSpc>
@@ -11422,12 +11423,12 @@
             </a:spcAft>
             <a:buNone/>
           </a:pPr>
-          <a:endParaRPr lang="en-US" sz="1300" kern="1200"/>
+          <a:endParaRPr lang="en-US" sz="1000" kern="1200"/>
         </a:p>
       </dsp:txBody>
       <dsp:txXfrm rot="-5400000">
-        <a:off x="4124622" y="3144655"/>
-        <a:ext cx="208955" cy="203150"/>
+        <a:off x="4150466" y="2366783"/>
+        <a:ext cx="157267" cy="152898"/>
       </dsp:txXfrm>
     </dsp:sp>
     <dsp:sp modelId="{6F6C8E07-FBAD-3F4D-A906-27ECCF26E70E}">
@@ -11437,8 +11438,8 @@
       </dsp:nvSpPr>
       <dsp:spPr>
         <a:xfrm>
-          <a:off x="171447" y="3483239"/>
-          <a:ext cx="8115305" cy="773906"/>
+          <a:off x="1175160" y="2621614"/>
+          <a:ext cx="6107878" cy="582470"/>
         </a:xfrm>
         <a:prstGeom prst="roundRect">
           <a:avLst>
@@ -11482,12 +11483,12 @@
         </a:fontRef>
       </dsp:style>
       <dsp:txBody>
-        <a:bodyPr spcFirstLastPara="0" vert="horz" wrap="square" lIns="60960" tIns="60960" rIns="60960" bIns="60960" numCol="1" spcCol="1270" anchor="ctr" anchorCtr="0">
+        <a:bodyPr spcFirstLastPara="0" vert="horz" wrap="square" lIns="49530" tIns="49530" rIns="49530" bIns="49530" numCol="1" spcCol="1270" anchor="ctr" anchorCtr="0">
           <a:noAutofit/>
         </a:bodyPr>
         <a:lstStyle/>
         <a:p>
-          <a:pPr marL="0" lvl="0" indent="0" algn="ctr" defTabSz="711200">
+          <a:pPr marL="0" lvl="0" indent="0" algn="ctr" defTabSz="577850">
             <a:lnSpc>
               <a:spcPct val="90000"/>
             </a:lnSpc>
@@ -11500,22 +11501,22 @@
             <a:buNone/>
           </a:pPr>
           <a:r>
-            <a:rPr lang="en-US" sz="1600" kern="1200" dirty="0"/>
+            <a:rPr lang="en-US" sz="1300" kern="1200" dirty="0"/>
             <a:t>Using non-linear least squares fitting we fit the neutral model to our data to find, finding the probability of dispersal (</a:t>
           </a:r>
           <a:r>
-            <a:rPr lang="en-US" sz="1600" i="1" kern="1200" dirty="0"/>
+            <a:rPr lang="en-US" sz="1300" i="1" kern="1200" dirty="0"/>
             <a:t>m</a:t>
           </a:r>
           <a:r>
-            <a:rPr lang="en-US" sz="1600" kern="1200" dirty="0"/>
+            <a:rPr lang="en-US" sz="1300" kern="1200" dirty="0"/>
             <a:t>)</a:t>
           </a:r>
         </a:p>
       </dsp:txBody>
       <dsp:txXfrm>
-        <a:off x="194114" y="3505906"/>
-        <a:ext cx="8069971" cy="728572"/>
+        <a:off x="1192220" y="2638674"/>
+        <a:ext cx="6073758" cy="548350"/>
       </dsp:txXfrm>
     </dsp:sp>
     <dsp:sp modelId="{48489AC1-89DA-0F48-B940-23505B5798FF}">
@@ -11525,8 +11526,8 @@
       </dsp:nvSpPr>
       <dsp:spPr>
         <a:xfrm rot="5400000">
-          <a:off x="4083992" y="4276493"/>
-          <a:ext cx="290214" cy="348257"/>
+          <a:off x="4119886" y="3218647"/>
+          <a:ext cx="218426" cy="262111"/>
         </a:xfrm>
         <a:prstGeom prst="rightArrow">
           <a:avLst>
@@ -11567,7 +11568,7 @@
         </a:bodyPr>
         <a:lstStyle/>
         <a:p>
-          <a:pPr marL="0" lvl="0" indent="0" algn="ctr" defTabSz="577850">
+          <a:pPr marL="0" lvl="0" indent="0" algn="ctr" defTabSz="444500">
             <a:lnSpc>
               <a:spcPct val="90000"/>
             </a:lnSpc>
@@ -11579,12 +11580,12 @@
             </a:spcAft>
             <a:buNone/>
           </a:pPr>
-          <a:endParaRPr lang="en-US" sz="1300" kern="1200"/>
+          <a:endParaRPr lang="en-US" sz="1000" kern="1200"/>
         </a:p>
       </dsp:txBody>
       <dsp:txXfrm rot="-5400000">
-        <a:off x="4124622" y="4305514"/>
-        <a:ext cx="208955" cy="203150"/>
+        <a:off x="4150466" y="3240489"/>
+        <a:ext cx="157267" cy="152898"/>
       </dsp:txXfrm>
     </dsp:sp>
     <dsp:sp modelId="{80377AF5-BC76-FB40-840E-12C9D1BDB641}">
@@ -11594,8 +11595,8 @@
       </dsp:nvSpPr>
       <dsp:spPr>
         <a:xfrm>
-          <a:off x="157161" y="4644099"/>
-          <a:ext cx="8143877" cy="773906"/>
+          <a:off x="1164408" y="3495320"/>
+          <a:ext cx="6129383" cy="582470"/>
         </a:xfrm>
         <a:prstGeom prst="roundRect">
           <a:avLst>
@@ -11639,179 +11640,7 @@
         </a:fontRef>
       </dsp:style>
       <dsp:txBody>
-        <a:bodyPr spcFirstLastPara="0" vert="horz" wrap="square" lIns="60960" tIns="60960" rIns="60960" bIns="60960" numCol="1" spcCol="1270" anchor="ctr" anchorCtr="0">
-          <a:noAutofit/>
-        </a:bodyPr>
-        <a:lstStyle/>
-        <a:p>
-          <a:pPr marL="0" lvl="0" indent="0" algn="ctr" defTabSz="711200">
-            <a:lnSpc>
-              <a:spcPct val="90000"/>
-            </a:lnSpc>
-            <a:spcBef>
-              <a:spcPct val="0"/>
-            </a:spcBef>
-            <a:spcAft>
-              <a:spcPct val="35000"/>
-            </a:spcAft>
-            <a:buNone/>
-          </a:pPr>
-          <a:r>
-            <a:rPr lang="en-US" sz="1600" kern="1200" dirty="0"/>
-            <a:t>Using the estimated value of </a:t>
-          </a:r>
-          <a:r>
-            <a:rPr lang="en-US" sz="1600" i="1" kern="1200" dirty="0"/>
-            <a:t>m</a:t>
-          </a:r>
-          <a:r>
-            <a:rPr lang="en-US" sz="1600" kern="1200" dirty="0"/>
-            <a:t> we calculate predicted occurrence frequencies and plot predictions from the neutral model against observed frequencies</a:t>
-          </a:r>
-        </a:p>
-      </dsp:txBody>
-      <dsp:txXfrm>
-        <a:off x="179828" y="4666766"/>
-        <a:ext cx="8098543" cy="728572"/>
-      </dsp:txXfrm>
-    </dsp:sp>
-  </dsp:spTree>
-</dsp:drawing>
-</file>
-
-<file path=ppt/diagrams/drawing5.xml><?xml version="1.0" encoding="utf-8"?>
-<dsp:drawing xmlns:dgm="http://schemas.openxmlformats.org/drawingml/2006/diagram" xmlns:dsp="http://schemas.microsoft.com/office/drawing/2008/diagram" xmlns:a="http://schemas.openxmlformats.org/drawingml/2006/main">
-  <dsp:spTree>
-    <dsp:nvGrpSpPr>
-      <dsp:cNvPr id="0" name=""/>
-      <dsp:cNvGrpSpPr/>
-    </dsp:nvGrpSpPr>
-    <dsp:grpSpPr/>
-    <dsp:sp modelId="{381AA547-A4ED-3840-A5BF-F16754F7DE5F}">
-      <dsp:nvSpPr>
-        <dsp:cNvPr id="0" name=""/>
-        <dsp:cNvSpPr/>
-      </dsp:nvSpPr>
-      <dsp:spPr>
-        <a:xfrm>
-          <a:off x="0" y="2127"/>
-          <a:ext cx="7248525" cy="791244"/>
-        </a:xfrm>
-        <a:prstGeom prst="roundRect">
-          <a:avLst>
-            <a:gd name="adj" fmla="val 10000"/>
-          </a:avLst>
-        </a:prstGeom>
-        <a:solidFill>
-          <a:schemeClr val="accent2">
-            <a:hueOff val="0"/>
-            <a:satOff val="0"/>
-            <a:lumOff val="0"/>
-            <a:alphaOff val="0"/>
-          </a:schemeClr>
-        </a:solidFill>
-        <a:ln w="12700" cap="flat" cmpd="sng" algn="ctr">
-          <a:solidFill>
-            <a:schemeClr val="lt1">
-              <a:hueOff val="0"/>
-              <a:satOff val="0"/>
-              <a:lumOff val="0"/>
-              <a:alphaOff val="0"/>
-            </a:schemeClr>
-          </a:solidFill>
-          <a:prstDash val="solid"/>
-          <a:miter lim="800000"/>
-        </a:ln>
-        <a:effectLst/>
-      </dsp:spPr>
-      <dsp:style>
-        <a:lnRef idx="2">
-          <a:scrgbClr r="0" g="0" b="0"/>
-        </a:lnRef>
-        <a:fillRef idx="1">
-          <a:scrgbClr r="0" g="0" b="0"/>
-        </a:fillRef>
-        <a:effectRef idx="0">
-          <a:scrgbClr r="0" g="0" b="0"/>
-        </a:effectRef>
-        <a:fontRef idx="minor">
-          <a:schemeClr val="lt1"/>
-        </a:fontRef>
-      </dsp:style>
-      <dsp:txBody>
-        <a:bodyPr spcFirstLastPara="0" vert="horz" wrap="square" lIns="60960" tIns="60960" rIns="60960" bIns="60960" numCol="1" spcCol="1270" anchor="ctr" anchorCtr="0">
-          <a:noAutofit/>
-        </a:bodyPr>
-        <a:lstStyle/>
-        <a:p>
-          <a:pPr marL="0" lvl="0" indent="0" algn="ctr" defTabSz="711200">
-            <a:lnSpc>
-              <a:spcPct val="90000"/>
-            </a:lnSpc>
-            <a:spcBef>
-              <a:spcPct val="0"/>
-            </a:spcBef>
-            <a:spcAft>
-              <a:spcPct val="35000"/>
-            </a:spcAft>
-            <a:buNone/>
-          </a:pPr>
-          <a:r>
-            <a:rPr lang="en-US" sz="1600" kern="1200" dirty="0"/>
-            <a:t>Find phylogenetic distances between ASVs</a:t>
-          </a:r>
-        </a:p>
-      </dsp:txBody>
-      <dsp:txXfrm>
-        <a:off x="23175" y="25302"/>
-        <a:ext cx="7202175" cy="744894"/>
-      </dsp:txXfrm>
-    </dsp:sp>
-    <dsp:sp modelId="{91DA19BA-A0AB-564A-8A9E-322DF18B64CF}">
-      <dsp:nvSpPr>
-        <dsp:cNvPr id="0" name=""/>
-        <dsp:cNvSpPr/>
-      </dsp:nvSpPr>
-      <dsp:spPr>
-        <a:xfrm rot="5327369">
-          <a:off x="3488410" y="813153"/>
-          <a:ext cx="296783" cy="356060"/>
-        </a:xfrm>
-        <a:prstGeom prst="rightArrow">
-          <a:avLst>
-            <a:gd name="adj1" fmla="val 60000"/>
-            <a:gd name="adj2" fmla="val 50000"/>
-          </a:avLst>
-        </a:prstGeom>
-        <a:solidFill>
-          <a:schemeClr val="accent2">
-            <a:hueOff val="0"/>
-            <a:satOff val="0"/>
-            <a:lumOff val="0"/>
-            <a:alphaOff val="0"/>
-          </a:schemeClr>
-        </a:solidFill>
-        <a:ln>
-          <a:noFill/>
-        </a:ln>
-        <a:effectLst/>
-      </dsp:spPr>
-      <dsp:style>
-        <a:lnRef idx="0">
-          <a:scrgbClr r="0" g="0" b="0"/>
-        </a:lnRef>
-        <a:fillRef idx="1">
-          <a:scrgbClr r="0" g="0" b="0"/>
-        </a:fillRef>
-        <a:effectRef idx="0">
-          <a:scrgbClr r="0" g="0" b="0"/>
-        </a:effectRef>
-        <a:fontRef idx="minor">
-          <a:schemeClr val="lt1"/>
-        </a:fontRef>
-      </dsp:style>
-      <dsp:txBody>
-        <a:bodyPr spcFirstLastPara="0" vert="horz" wrap="square" lIns="0" tIns="0" rIns="0" bIns="0" numCol="1" spcCol="1270" anchor="ctr" anchorCtr="0">
+        <a:bodyPr spcFirstLastPara="0" vert="horz" wrap="square" lIns="49530" tIns="49530" rIns="49530" bIns="49530" numCol="1" spcCol="1270" anchor="ctr" anchorCtr="0">
           <a:noAutofit/>
         </a:bodyPr>
         <a:lstStyle/>
@@ -11828,398 +11657,30 @@
             </a:spcAft>
             <a:buNone/>
           </a:pPr>
-          <a:endParaRPr lang="en-US" sz="1300" kern="1200"/>
-        </a:p>
-      </dsp:txBody>
-      <dsp:txXfrm rot="-5400000">
-        <a:off x="3529043" y="842801"/>
-        <a:ext cx="213636" cy="207748"/>
-      </dsp:txXfrm>
-    </dsp:sp>
-    <dsp:sp modelId="{43D2067A-91F6-8745-98BA-D6A10B24950A}">
-      <dsp:nvSpPr>
-        <dsp:cNvPr id="0" name=""/>
-        <dsp:cNvSpPr/>
-      </dsp:nvSpPr>
-      <dsp:spPr>
-        <a:xfrm>
-          <a:off x="50158" y="1188994"/>
-          <a:ext cx="7198366" cy="791244"/>
-        </a:xfrm>
-        <a:prstGeom prst="roundRect">
-          <a:avLst>
-            <a:gd name="adj" fmla="val 10000"/>
-          </a:avLst>
-        </a:prstGeom>
-        <a:solidFill>
-          <a:schemeClr val="accent3">
-            <a:hueOff val="0"/>
-            <a:satOff val="0"/>
-            <a:lumOff val="0"/>
-            <a:alphaOff val="0"/>
-          </a:schemeClr>
-        </a:solidFill>
-        <a:ln w="12700" cap="flat" cmpd="sng" algn="ctr">
-          <a:solidFill>
-            <a:schemeClr val="lt1">
-              <a:hueOff val="0"/>
-              <a:satOff val="0"/>
-              <a:lumOff val="0"/>
-              <a:alphaOff val="0"/>
-            </a:schemeClr>
-          </a:solidFill>
-          <a:prstDash val="solid"/>
-          <a:miter lim="800000"/>
-        </a:ln>
-        <a:effectLst/>
-      </dsp:spPr>
-      <dsp:style>
-        <a:lnRef idx="2">
-          <a:scrgbClr r="0" g="0" b="0"/>
-        </a:lnRef>
-        <a:fillRef idx="1">
-          <a:scrgbClr r="0" g="0" b="0"/>
-        </a:fillRef>
-        <a:effectRef idx="0">
-          <a:scrgbClr r="0" g="0" b="0"/>
-        </a:effectRef>
-        <a:fontRef idx="minor">
-          <a:schemeClr val="lt1"/>
-        </a:fontRef>
-      </dsp:style>
-      <dsp:txBody>
-        <a:bodyPr spcFirstLastPara="0" vert="horz" wrap="square" lIns="60960" tIns="60960" rIns="60960" bIns="60960" numCol="1" spcCol="1270" anchor="ctr" anchorCtr="0">
-          <a:noAutofit/>
-        </a:bodyPr>
-        <a:lstStyle/>
-        <a:p>
-          <a:pPr marL="0" lvl="0" indent="0" algn="ctr" defTabSz="711200">
-            <a:lnSpc>
-              <a:spcPct val="90000"/>
-            </a:lnSpc>
-            <a:spcBef>
-              <a:spcPct val="0"/>
-            </a:spcBef>
-            <a:spcAft>
-              <a:spcPct val="35000"/>
-            </a:spcAft>
-            <a:buNone/>
-          </a:pPr>
           <a:r>
-            <a:rPr lang="en-US" sz="1600" kern="1200" dirty="0"/>
-            <a:t>Find the weighted mean environmental parameters for each ASV = niche preferences </a:t>
+            <a:rPr lang="en-US" sz="1300" kern="1200" dirty="0"/>
+            <a:t>Using the estimated value of </a:t>
           </a:r>
-          <a:endParaRPr lang="en-US" sz="1600" i="1" kern="1200" dirty="0"/>
-        </a:p>
-      </dsp:txBody>
-      <dsp:txXfrm>
-        <a:off x="73333" y="1212169"/>
-        <a:ext cx="7152016" cy="744894"/>
-      </dsp:txXfrm>
-    </dsp:sp>
-    <dsp:sp modelId="{D067C965-9057-9C4A-A1D2-4912C14C50F7}">
-      <dsp:nvSpPr>
-        <dsp:cNvPr id="0" name=""/>
-        <dsp:cNvSpPr/>
-      </dsp:nvSpPr>
-      <dsp:spPr>
-        <a:xfrm rot="5472631">
-          <a:off x="3488410" y="2000020"/>
-          <a:ext cx="296783" cy="356060"/>
-        </a:xfrm>
-        <a:prstGeom prst="rightArrow">
-          <a:avLst>
-            <a:gd name="adj1" fmla="val 60000"/>
-            <a:gd name="adj2" fmla="val 50000"/>
-          </a:avLst>
-        </a:prstGeom>
-        <a:solidFill>
-          <a:schemeClr val="accent3">
-            <a:hueOff val="0"/>
-            <a:satOff val="0"/>
-            <a:lumOff val="0"/>
-            <a:alphaOff val="0"/>
-          </a:schemeClr>
-        </a:solidFill>
-        <a:ln>
-          <a:noFill/>
-        </a:ln>
-        <a:effectLst/>
-      </dsp:spPr>
-      <dsp:style>
-        <a:lnRef idx="0">
-          <a:scrgbClr r="0" g="0" b="0"/>
-        </a:lnRef>
-        <a:fillRef idx="1">
-          <a:scrgbClr r="0" g="0" b="0"/>
-        </a:fillRef>
-        <a:effectRef idx="0">
-          <a:scrgbClr r="0" g="0" b="0"/>
-        </a:effectRef>
-        <a:fontRef idx="minor">
-          <a:schemeClr val="lt1"/>
-        </a:fontRef>
-      </dsp:style>
-      <dsp:txBody>
-        <a:bodyPr spcFirstLastPara="0" vert="horz" wrap="square" lIns="0" tIns="0" rIns="0" bIns="0" numCol="1" spcCol="1270" anchor="ctr" anchorCtr="0">
-          <a:noAutofit/>
-        </a:bodyPr>
-        <a:lstStyle/>
-        <a:p>
-          <a:pPr marL="0" lvl="0" indent="0" algn="ctr" defTabSz="577850">
-            <a:lnSpc>
-              <a:spcPct val="90000"/>
-            </a:lnSpc>
-            <a:spcBef>
-              <a:spcPct val="0"/>
-            </a:spcBef>
-            <a:spcAft>
-              <a:spcPct val="35000"/>
-            </a:spcAft>
-            <a:buNone/>
-          </a:pPr>
-          <a:endParaRPr lang="en-US" sz="1300" kern="1200"/>
-        </a:p>
-      </dsp:txBody>
-      <dsp:txXfrm rot="-5400000">
-        <a:off x="3530924" y="2029668"/>
-        <a:ext cx="213636" cy="207748"/>
-      </dsp:txXfrm>
-    </dsp:sp>
-    <dsp:sp modelId="{80C05A4E-2A0A-294C-8DDC-052E97D834DA}">
-      <dsp:nvSpPr>
-        <dsp:cNvPr id="0" name=""/>
-        <dsp:cNvSpPr/>
-      </dsp:nvSpPr>
-      <dsp:spPr>
-        <a:xfrm>
-          <a:off x="50158" y="2375861"/>
-          <a:ext cx="7148207" cy="791244"/>
-        </a:xfrm>
-        <a:prstGeom prst="roundRect">
-          <a:avLst>
-            <a:gd name="adj" fmla="val 10000"/>
-          </a:avLst>
-        </a:prstGeom>
-        <a:solidFill>
-          <a:schemeClr val="accent4">
-            <a:hueOff val="0"/>
-            <a:satOff val="0"/>
-            <a:lumOff val="0"/>
-            <a:alphaOff val="0"/>
-          </a:schemeClr>
-        </a:solidFill>
-        <a:ln w="12700" cap="flat" cmpd="sng" algn="ctr">
-          <a:solidFill>
-            <a:schemeClr val="lt1">
-              <a:hueOff val="0"/>
-              <a:satOff val="0"/>
-              <a:lumOff val="0"/>
-              <a:alphaOff val="0"/>
-            </a:schemeClr>
-          </a:solidFill>
-          <a:prstDash val="solid"/>
-          <a:miter lim="800000"/>
-        </a:ln>
-        <a:effectLst/>
-      </dsp:spPr>
-      <dsp:style>
-        <a:lnRef idx="2">
-          <a:scrgbClr r="0" g="0" b="0"/>
-        </a:lnRef>
-        <a:fillRef idx="1">
-          <a:scrgbClr r="0" g="0" b="0"/>
-        </a:fillRef>
-        <a:effectRef idx="0">
-          <a:scrgbClr r="0" g="0" b="0"/>
-        </a:effectRef>
-        <a:fontRef idx="minor">
-          <a:schemeClr val="lt1"/>
-        </a:fontRef>
-      </dsp:style>
-      <dsp:txBody>
-        <a:bodyPr spcFirstLastPara="0" vert="horz" wrap="square" lIns="60960" tIns="60960" rIns="60960" bIns="60960" numCol="1" spcCol="1270" anchor="ctr" anchorCtr="0">
-          <a:noAutofit/>
-        </a:bodyPr>
-        <a:lstStyle/>
-        <a:p>
-          <a:pPr marL="0" lvl="0" indent="0" algn="ctr" defTabSz="711200">
-            <a:lnSpc>
-              <a:spcPct val="90000"/>
-            </a:lnSpc>
-            <a:spcBef>
-              <a:spcPct val="0"/>
-            </a:spcBef>
-            <a:spcAft>
-              <a:spcPct val="35000"/>
-            </a:spcAft>
-            <a:buNone/>
-          </a:pPr>
           <a:r>
-            <a:rPr lang="en-US" sz="1600" kern="1200" dirty="0"/>
-            <a:t>Calculate mantel correlograms for each environmental parameter </a:t>
+            <a:rPr lang="en-US" sz="1300" i="1" kern="1200" dirty="0"/>
+            <a:t>m</a:t>
+          </a:r>
+          <a:r>
+            <a:rPr lang="en-US" sz="1300" kern="1200" dirty="0"/>
+            <a:t> we calculate predicted occurrence frequencies and plot predictions from the neutral model against observed frequencies</a:t>
           </a:r>
         </a:p>
       </dsp:txBody>
       <dsp:txXfrm>
-        <a:off x="73333" y="2399036"/>
-        <a:ext cx="7101857" cy="744894"/>
-      </dsp:txXfrm>
-    </dsp:sp>
-    <dsp:sp modelId="{B3C2DB7A-EC33-6544-A09D-B1205728770A}">
-      <dsp:nvSpPr>
-        <dsp:cNvPr id="0" name=""/>
-        <dsp:cNvSpPr/>
-      </dsp:nvSpPr>
-      <dsp:spPr>
-        <a:xfrm rot="5400000">
-          <a:off x="3475904" y="3186887"/>
-          <a:ext cx="296716" cy="356060"/>
-        </a:xfrm>
-        <a:prstGeom prst="rightArrow">
-          <a:avLst>
-            <a:gd name="adj1" fmla="val 60000"/>
-            <a:gd name="adj2" fmla="val 50000"/>
-          </a:avLst>
-        </a:prstGeom>
-        <a:solidFill>
-          <a:schemeClr val="accent4">
-            <a:hueOff val="0"/>
-            <a:satOff val="0"/>
-            <a:lumOff val="0"/>
-            <a:alphaOff val="0"/>
-          </a:schemeClr>
-        </a:solidFill>
-        <a:ln>
-          <a:noFill/>
-        </a:ln>
-        <a:effectLst/>
-      </dsp:spPr>
-      <dsp:style>
-        <a:lnRef idx="0">
-          <a:scrgbClr r="0" g="0" b="0"/>
-        </a:lnRef>
-        <a:fillRef idx="1">
-          <a:scrgbClr r="0" g="0" b="0"/>
-        </a:fillRef>
-        <a:effectRef idx="0">
-          <a:scrgbClr r="0" g="0" b="0"/>
-        </a:effectRef>
-        <a:fontRef idx="minor">
-          <a:schemeClr val="lt1"/>
-        </a:fontRef>
-      </dsp:style>
-      <dsp:txBody>
-        <a:bodyPr spcFirstLastPara="0" vert="horz" wrap="square" lIns="0" tIns="0" rIns="0" bIns="0" numCol="1" spcCol="1270" anchor="ctr" anchorCtr="0">
-          <a:noAutofit/>
-        </a:bodyPr>
-        <a:lstStyle/>
-        <a:p>
-          <a:pPr marL="0" lvl="0" indent="0" algn="ctr" defTabSz="577850">
-            <a:lnSpc>
-              <a:spcPct val="90000"/>
-            </a:lnSpc>
-            <a:spcBef>
-              <a:spcPct val="0"/>
-            </a:spcBef>
-            <a:spcAft>
-              <a:spcPct val="35000"/>
-            </a:spcAft>
-            <a:buNone/>
-          </a:pPr>
-          <a:endParaRPr lang="en-US" sz="1300" kern="1200"/>
-        </a:p>
-      </dsp:txBody>
-      <dsp:txXfrm rot="-5400000">
-        <a:off x="3517445" y="3216559"/>
-        <a:ext cx="213636" cy="207701"/>
-      </dsp:txXfrm>
-    </dsp:sp>
-    <dsp:sp modelId="{6F6C8E07-FBAD-3F4D-A906-27ECCF26E70E}">
-      <dsp:nvSpPr>
-        <dsp:cNvPr id="0" name=""/>
-        <dsp:cNvSpPr/>
-      </dsp:nvSpPr>
-      <dsp:spPr>
-        <a:xfrm>
-          <a:off x="62698" y="3562729"/>
-          <a:ext cx="7123128" cy="791244"/>
-        </a:xfrm>
-        <a:prstGeom prst="roundRect">
-          <a:avLst>
-            <a:gd name="adj" fmla="val 10000"/>
-          </a:avLst>
-        </a:prstGeom>
-        <a:solidFill>
-          <a:schemeClr val="accent5">
-            <a:hueOff val="0"/>
-            <a:satOff val="0"/>
-            <a:lumOff val="0"/>
-            <a:alphaOff val="0"/>
-          </a:schemeClr>
-        </a:solidFill>
-        <a:ln w="12700" cap="flat" cmpd="sng" algn="ctr">
-          <a:solidFill>
-            <a:schemeClr val="lt1">
-              <a:hueOff val="0"/>
-              <a:satOff val="0"/>
-              <a:lumOff val="0"/>
-              <a:alphaOff val="0"/>
-            </a:schemeClr>
-          </a:solidFill>
-          <a:prstDash val="solid"/>
-          <a:miter lim="800000"/>
-        </a:ln>
-        <a:effectLst/>
-      </dsp:spPr>
-      <dsp:style>
-        <a:lnRef idx="2">
-          <a:scrgbClr r="0" g="0" b="0"/>
-        </a:lnRef>
-        <a:fillRef idx="1">
-          <a:scrgbClr r="0" g="0" b="0"/>
-        </a:fillRef>
-        <a:effectRef idx="0">
-          <a:scrgbClr r="0" g="0" b="0"/>
-        </a:effectRef>
-        <a:fontRef idx="minor">
-          <a:schemeClr val="lt1"/>
-        </a:fontRef>
-      </dsp:style>
-      <dsp:txBody>
-        <a:bodyPr spcFirstLastPara="0" vert="horz" wrap="square" lIns="60960" tIns="60960" rIns="60960" bIns="60960" numCol="1" spcCol="1270" anchor="ctr" anchorCtr="0">
-          <a:noAutofit/>
-        </a:bodyPr>
-        <a:lstStyle/>
-        <a:p>
-          <a:pPr marL="0" lvl="0" indent="0" algn="ctr" defTabSz="711200">
-            <a:lnSpc>
-              <a:spcPct val="90000"/>
-            </a:lnSpc>
-            <a:spcBef>
-              <a:spcPct val="0"/>
-            </a:spcBef>
-            <a:spcAft>
-              <a:spcPct val="35000"/>
-            </a:spcAft>
-            <a:buNone/>
-          </a:pPr>
-          <a:r>
-            <a:rPr lang="en-US" sz="1600" kern="1200" dirty="0"/>
-            <a:t>Plot results of the mantel correlograms against phylogenetic distance classes for each environmental parameter to check for significant relationships</a:t>
-          </a:r>
-        </a:p>
-      </dsp:txBody>
-      <dsp:txXfrm>
-        <a:off x="85873" y="3585904"/>
-        <a:ext cx="7076778" cy="744894"/>
+        <a:off x="1181468" y="3512380"/>
+        <a:ext cx="6095263" cy="548350"/>
       </dsp:txXfrm>
     </dsp:sp>
   </dsp:spTree>
 </dsp:drawing>
 </file>
 
-<file path=ppt/diagrams/drawing6.xml><?xml version="1.0" encoding="utf-8"?>
+<file path=ppt/diagrams/drawing5.xml><?xml version="1.0" encoding="utf-8"?>
 <dsp:drawing xmlns:dgm="http://schemas.openxmlformats.org/drawingml/2006/diagram" xmlns:dsp="http://schemas.microsoft.com/office/drawing/2008/diagram" xmlns:a="http://schemas.openxmlformats.org/drawingml/2006/main">
   <dsp:spTree>
     <dsp:nvGrpSpPr>
@@ -14011,6 +13472,546 @@
 </dsp:drawing>
 </file>
 
+<file path=ppt/diagrams/drawing6.xml><?xml version="1.0" encoding="utf-8"?>
+<dsp:drawing xmlns:dgm="http://schemas.openxmlformats.org/drawingml/2006/diagram" xmlns:dsp="http://schemas.microsoft.com/office/drawing/2008/diagram" xmlns:a="http://schemas.openxmlformats.org/drawingml/2006/main">
+  <dsp:spTree>
+    <dsp:nvGrpSpPr>
+      <dsp:cNvPr id="0" name=""/>
+      <dsp:cNvGrpSpPr/>
+    </dsp:nvGrpSpPr>
+    <dsp:grpSpPr/>
+    <dsp:sp modelId="{381AA547-A4ED-3840-A5BF-F16754F7DE5F}">
+      <dsp:nvSpPr>
+        <dsp:cNvPr id="0" name=""/>
+        <dsp:cNvSpPr/>
+      </dsp:nvSpPr>
+      <dsp:spPr>
+        <a:xfrm>
+          <a:off x="0" y="2127"/>
+          <a:ext cx="7248525" cy="791244"/>
+        </a:xfrm>
+        <a:prstGeom prst="roundRect">
+          <a:avLst>
+            <a:gd name="adj" fmla="val 10000"/>
+          </a:avLst>
+        </a:prstGeom>
+        <a:solidFill>
+          <a:schemeClr val="accent2">
+            <a:hueOff val="0"/>
+            <a:satOff val="0"/>
+            <a:lumOff val="0"/>
+            <a:alphaOff val="0"/>
+          </a:schemeClr>
+        </a:solidFill>
+        <a:ln w="12700" cap="flat" cmpd="sng" algn="ctr">
+          <a:solidFill>
+            <a:schemeClr val="lt1">
+              <a:hueOff val="0"/>
+              <a:satOff val="0"/>
+              <a:lumOff val="0"/>
+              <a:alphaOff val="0"/>
+            </a:schemeClr>
+          </a:solidFill>
+          <a:prstDash val="solid"/>
+          <a:miter lim="800000"/>
+        </a:ln>
+        <a:effectLst/>
+      </dsp:spPr>
+      <dsp:style>
+        <a:lnRef idx="2">
+          <a:scrgbClr r="0" g="0" b="0"/>
+        </a:lnRef>
+        <a:fillRef idx="1">
+          <a:scrgbClr r="0" g="0" b="0"/>
+        </a:fillRef>
+        <a:effectRef idx="0">
+          <a:scrgbClr r="0" g="0" b="0"/>
+        </a:effectRef>
+        <a:fontRef idx="minor">
+          <a:schemeClr val="lt1"/>
+        </a:fontRef>
+      </dsp:style>
+      <dsp:txBody>
+        <a:bodyPr spcFirstLastPara="0" vert="horz" wrap="square" lIns="60960" tIns="60960" rIns="60960" bIns="60960" numCol="1" spcCol="1270" anchor="ctr" anchorCtr="0">
+          <a:noAutofit/>
+        </a:bodyPr>
+        <a:lstStyle/>
+        <a:p>
+          <a:pPr marL="0" lvl="0" indent="0" algn="ctr" defTabSz="711200">
+            <a:lnSpc>
+              <a:spcPct val="90000"/>
+            </a:lnSpc>
+            <a:spcBef>
+              <a:spcPct val="0"/>
+            </a:spcBef>
+            <a:spcAft>
+              <a:spcPct val="35000"/>
+            </a:spcAft>
+            <a:buNone/>
+          </a:pPr>
+          <a:r>
+            <a:rPr lang="en-US" sz="1600" kern="1200" dirty="0"/>
+            <a:t>Find phylogenetic distances between ASVs</a:t>
+          </a:r>
+        </a:p>
+      </dsp:txBody>
+      <dsp:txXfrm>
+        <a:off x="23175" y="25302"/>
+        <a:ext cx="7202175" cy="744894"/>
+      </dsp:txXfrm>
+    </dsp:sp>
+    <dsp:sp modelId="{91DA19BA-A0AB-564A-8A9E-322DF18B64CF}">
+      <dsp:nvSpPr>
+        <dsp:cNvPr id="0" name=""/>
+        <dsp:cNvSpPr/>
+      </dsp:nvSpPr>
+      <dsp:spPr>
+        <a:xfrm rot="5327369">
+          <a:off x="3488410" y="813153"/>
+          <a:ext cx="296783" cy="356060"/>
+        </a:xfrm>
+        <a:prstGeom prst="rightArrow">
+          <a:avLst>
+            <a:gd name="adj1" fmla="val 60000"/>
+            <a:gd name="adj2" fmla="val 50000"/>
+          </a:avLst>
+        </a:prstGeom>
+        <a:solidFill>
+          <a:schemeClr val="accent2">
+            <a:hueOff val="0"/>
+            <a:satOff val="0"/>
+            <a:lumOff val="0"/>
+            <a:alphaOff val="0"/>
+          </a:schemeClr>
+        </a:solidFill>
+        <a:ln>
+          <a:noFill/>
+        </a:ln>
+        <a:effectLst/>
+      </dsp:spPr>
+      <dsp:style>
+        <a:lnRef idx="0">
+          <a:scrgbClr r="0" g="0" b="0"/>
+        </a:lnRef>
+        <a:fillRef idx="1">
+          <a:scrgbClr r="0" g="0" b="0"/>
+        </a:fillRef>
+        <a:effectRef idx="0">
+          <a:scrgbClr r="0" g="0" b="0"/>
+        </a:effectRef>
+        <a:fontRef idx="minor">
+          <a:schemeClr val="lt1"/>
+        </a:fontRef>
+      </dsp:style>
+      <dsp:txBody>
+        <a:bodyPr spcFirstLastPara="0" vert="horz" wrap="square" lIns="0" tIns="0" rIns="0" bIns="0" numCol="1" spcCol="1270" anchor="ctr" anchorCtr="0">
+          <a:noAutofit/>
+        </a:bodyPr>
+        <a:lstStyle/>
+        <a:p>
+          <a:pPr marL="0" lvl="0" indent="0" algn="ctr" defTabSz="577850">
+            <a:lnSpc>
+              <a:spcPct val="90000"/>
+            </a:lnSpc>
+            <a:spcBef>
+              <a:spcPct val="0"/>
+            </a:spcBef>
+            <a:spcAft>
+              <a:spcPct val="35000"/>
+            </a:spcAft>
+            <a:buNone/>
+          </a:pPr>
+          <a:endParaRPr lang="en-US" sz="1300" kern="1200"/>
+        </a:p>
+      </dsp:txBody>
+      <dsp:txXfrm rot="-5400000">
+        <a:off x="3529043" y="842801"/>
+        <a:ext cx="213636" cy="207748"/>
+      </dsp:txXfrm>
+    </dsp:sp>
+    <dsp:sp modelId="{43D2067A-91F6-8745-98BA-D6A10B24950A}">
+      <dsp:nvSpPr>
+        <dsp:cNvPr id="0" name=""/>
+        <dsp:cNvSpPr/>
+      </dsp:nvSpPr>
+      <dsp:spPr>
+        <a:xfrm>
+          <a:off x="50158" y="1188994"/>
+          <a:ext cx="7198366" cy="791244"/>
+        </a:xfrm>
+        <a:prstGeom prst="roundRect">
+          <a:avLst>
+            <a:gd name="adj" fmla="val 10000"/>
+          </a:avLst>
+        </a:prstGeom>
+        <a:solidFill>
+          <a:schemeClr val="accent3">
+            <a:hueOff val="0"/>
+            <a:satOff val="0"/>
+            <a:lumOff val="0"/>
+            <a:alphaOff val="0"/>
+          </a:schemeClr>
+        </a:solidFill>
+        <a:ln w="12700" cap="flat" cmpd="sng" algn="ctr">
+          <a:solidFill>
+            <a:schemeClr val="lt1">
+              <a:hueOff val="0"/>
+              <a:satOff val="0"/>
+              <a:lumOff val="0"/>
+              <a:alphaOff val="0"/>
+            </a:schemeClr>
+          </a:solidFill>
+          <a:prstDash val="solid"/>
+          <a:miter lim="800000"/>
+        </a:ln>
+        <a:effectLst/>
+      </dsp:spPr>
+      <dsp:style>
+        <a:lnRef idx="2">
+          <a:scrgbClr r="0" g="0" b="0"/>
+        </a:lnRef>
+        <a:fillRef idx="1">
+          <a:scrgbClr r="0" g="0" b="0"/>
+        </a:fillRef>
+        <a:effectRef idx="0">
+          <a:scrgbClr r="0" g="0" b="0"/>
+        </a:effectRef>
+        <a:fontRef idx="minor">
+          <a:schemeClr val="lt1"/>
+        </a:fontRef>
+      </dsp:style>
+      <dsp:txBody>
+        <a:bodyPr spcFirstLastPara="0" vert="horz" wrap="square" lIns="60960" tIns="60960" rIns="60960" bIns="60960" numCol="1" spcCol="1270" anchor="ctr" anchorCtr="0">
+          <a:noAutofit/>
+        </a:bodyPr>
+        <a:lstStyle/>
+        <a:p>
+          <a:pPr marL="0" lvl="0" indent="0" algn="ctr" defTabSz="711200">
+            <a:lnSpc>
+              <a:spcPct val="90000"/>
+            </a:lnSpc>
+            <a:spcBef>
+              <a:spcPct val="0"/>
+            </a:spcBef>
+            <a:spcAft>
+              <a:spcPct val="35000"/>
+            </a:spcAft>
+            <a:buNone/>
+          </a:pPr>
+          <a:r>
+            <a:rPr lang="en-US" sz="1600" kern="1200" dirty="0"/>
+            <a:t>Find the weighted mean environmental parameters for each ASV = niche preferences </a:t>
+          </a:r>
+          <a:endParaRPr lang="en-US" sz="1600" i="1" kern="1200" dirty="0"/>
+        </a:p>
+      </dsp:txBody>
+      <dsp:txXfrm>
+        <a:off x="73333" y="1212169"/>
+        <a:ext cx="7152016" cy="744894"/>
+      </dsp:txXfrm>
+    </dsp:sp>
+    <dsp:sp modelId="{D067C965-9057-9C4A-A1D2-4912C14C50F7}">
+      <dsp:nvSpPr>
+        <dsp:cNvPr id="0" name=""/>
+        <dsp:cNvSpPr/>
+      </dsp:nvSpPr>
+      <dsp:spPr>
+        <a:xfrm rot="5472631">
+          <a:off x="3488410" y="2000020"/>
+          <a:ext cx="296783" cy="356060"/>
+        </a:xfrm>
+        <a:prstGeom prst="rightArrow">
+          <a:avLst>
+            <a:gd name="adj1" fmla="val 60000"/>
+            <a:gd name="adj2" fmla="val 50000"/>
+          </a:avLst>
+        </a:prstGeom>
+        <a:solidFill>
+          <a:schemeClr val="accent3">
+            <a:hueOff val="0"/>
+            <a:satOff val="0"/>
+            <a:lumOff val="0"/>
+            <a:alphaOff val="0"/>
+          </a:schemeClr>
+        </a:solidFill>
+        <a:ln>
+          <a:noFill/>
+        </a:ln>
+        <a:effectLst/>
+      </dsp:spPr>
+      <dsp:style>
+        <a:lnRef idx="0">
+          <a:scrgbClr r="0" g="0" b="0"/>
+        </a:lnRef>
+        <a:fillRef idx="1">
+          <a:scrgbClr r="0" g="0" b="0"/>
+        </a:fillRef>
+        <a:effectRef idx="0">
+          <a:scrgbClr r="0" g="0" b="0"/>
+        </a:effectRef>
+        <a:fontRef idx="minor">
+          <a:schemeClr val="lt1"/>
+        </a:fontRef>
+      </dsp:style>
+      <dsp:txBody>
+        <a:bodyPr spcFirstLastPara="0" vert="horz" wrap="square" lIns="0" tIns="0" rIns="0" bIns="0" numCol="1" spcCol="1270" anchor="ctr" anchorCtr="0">
+          <a:noAutofit/>
+        </a:bodyPr>
+        <a:lstStyle/>
+        <a:p>
+          <a:pPr marL="0" lvl="0" indent="0" algn="ctr" defTabSz="577850">
+            <a:lnSpc>
+              <a:spcPct val="90000"/>
+            </a:lnSpc>
+            <a:spcBef>
+              <a:spcPct val="0"/>
+            </a:spcBef>
+            <a:spcAft>
+              <a:spcPct val="35000"/>
+            </a:spcAft>
+            <a:buNone/>
+          </a:pPr>
+          <a:endParaRPr lang="en-US" sz="1300" kern="1200"/>
+        </a:p>
+      </dsp:txBody>
+      <dsp:txXfrm rot="-5400000">
+        <a:off x="3530924" y="2029668"/>
+        <a:ext cx="213636" cy="207748"/>
+      </dsp:txXfrm>
+    </dsp:sp>
+    <dsp:sp modelId="{80C05A4E-2A0A-294C-8DDC-052E97D834DA}">
+      <dsp:nvSpPr>
+        <dsp:cNvPr id="0" name=""/>
+        <dsp:cNvSpPr/>
+      </dsp:nvSpPr>
+      <dsp:spPr>
+        <a:xfrm>
+          <a:off x="50158" y="2375861"/>
+          <a:ext cx="7148207" cy="791244"/>
+        </a:xfrm>
+        <a:prstGeom prst="roundRect">
+          <a:avLst>
+            <a:gd name="adj" fmla="val 10000"/>
+          </a:avLst>
+        </a:prstGeom>
+        <a:solidFill>
+          <a:schemeClr val="accent4">
+            <a:hueOff val="0"/>
+            <a:satOff val="0"/>
+            <a:lumOff val="0"/>
+            <a:alphaOff val="0"/>
+          </a:schemeClr>
+        </a:solidFill>
+        <a:ln w="12700" cap="flat" cmpd="sng" algn="ctr">
+          <a:solidFill>
+            <a:schemeClr val="lt1">
+              <a:hueOff val="0"/>
+              <a:satOff val="0"/>
+              <a:lumOff val="0"/>
+              <a:alphaOff val="0"/>
+            </a:schemeClr>
+          </a:solidFill>
+          <a:prstDash val="solid"/>
+          <a:miter lim="800000"/>
+        </a:ln>
+        <a:effectLst/>
+      </dsp:spPr>
+      <dsp:style>
+        <a:lnRef idx="2">
+          <a:scrgbClr r="0" g="0" b="0"/>
+        </a:lnRef>
+        <a:fillRef idx="1">
+          <a:scrgbClr r="0" g="0" b="0"/>
+        </a:fillRef>
+        <a:effectRef idx="0">
+          <a:scrgbClr r="0" g="0" b="0"/>
+        </a:effectRef>
+        <a:fontRef idx="minor">
+          <a:schemeClr val="lt1"/>
+        </a:fontRef>
+      </dsp:style>
+      <dsp:txBody>
+        <a:bodyPr spcFirstLastPara="0" vert="horz" wrap="square" lIns="60960" tIns="60960" rIns="60960" bIns="60960" numCol="1" spcCol="1270" anchor="ctr" anchorCtr="0">
+          <a:noAutofit/>
+        </a:bodyPr>
+        <a:lstStyle/>
+        <a:p>
+          <a:pPr marL="0" lvl="0" indent="0" algn="ctr" defTabSz="711200">
+            <a:lnSpc>
+              <a:spcPct val="90000"/>
+            </a:lnSpc>
+            <a:spcBef>
+              <a:spcPct val="0"/>
+            </a:spcBef>
+            <a:spcAft>
+              <a:spcPct val="35000"/>
+            </a:spcAft>
+            <a:buNone/>
+          </a:pPr>
+          <a:r>
+            <a:rPr lang="en-US" sz="1600" kern="1200" dirty="0"/>
+            <a:t>Calculate mantel correlograms for each environmental parameter </a:t>
+          </a:r>
+        </a:p>
+      </dsp:txBody>
+      <dsp:txXfrm>
+        <a:off x="73333" y="2399036"/>
+        <a:ext cx="7101857" cy="744894"/>
+      </dsp:txXfrm>
+    </dsp:sp>
+    <dsp:sp modelId="{B3C2DB7A-EC33-6544-A09D-B1205728770A}">
+      <dsp:nvSpPr>
+        <dsp:cNvPr id="0" name=""/>
+        <dsp:cNvSpPr/>
+      </dsp:nvSpPr>
+      <dsp:spPr>
+        <a:xfrm rot="5400000">
+          <a:off x="3475904" y="3186887"/>
+          <a:ext cx="296716" cy="356060"/>
+        </a:xfrm>
+        <a:prstGeom prst="rightArrow">
+          <a:avLst>
+            <a:gd name="adj1" fmla="val 60000"/>
+            <a:gd name="adj2" fmla="val 50000"/>
+          </a:avLst>
+        </a:prstGeom>
+        <a:solidFill>
+          <a:schemeClr val="accent4">
+            <a:hueOff val="0"/>
+            <a:satOff val="0"/>
+            <a:lumOff val="0"/>
+            <a:alphaOff val="0"/>
+          </a:schemeClr>
+        </a:solidFill>
+        <a:ln>
+          <a:noFill/>
+        </a:ln>
+        <a:effectLst/>
+      </dsp:spPr>
+      <dsp:style>
+        <a:lnRef idx="0">
+          <a:scrgbClr r="0" g="0" b="0"/>
+        </a:lnRef>
+        <a:fillRef idx="1">
+          <a:scrgbClr r="0" g="0" b="0"/>
+        </a:fillRef>
+        <a:effectRef idx="0">
+          <a:scrgbClr r="0" g="0" b="0"/>
+        </a:effectRef>
+        <a:fontRef idx="minor">
+          <a:schemeClr val="lt1"/>
+        </a:fontRef>
+      </dsp:style>
+      <dsp:txBody>
+        <a:bodyPr spcFirstLastPara="0" vert="horz" wrap="square" lIns="0" tIns="0" rIns="0" bIns="0" numCol="1" spcCol="1270" anchor="ctr" anchorCtr="0">
+          <a:noAutofit/>
+        </a:bodyPr>
+        <a:lstStyle/>
+        <a:p>
+          <a:pPr marL="0" lvl="0" indent="0" algn="ctr" defTabSz="577850">
+            <a:lnSpc>
+              <a:spcPct val="90000"/>
+            </a:lnSpc>
+            <a:spcBef>
+              <a:spcPct val="0"/>
+            </a:spcBef>
+            <a:spcAft>
+              <a:spcPct val="35000"/>
+            </a:spcAft>
+            <a:buNone/>
+          </a:pPr>
+          <a:endParaRPr lang="en-US" sz="1300" kern="1200"/>
+        </a:p>
+      </dsp:txBody>
+      <dsp:txXfrm rot="-5400000">
+        <a:off x="3517445" y="3216559"/>
+        <a:ext cx="213636" cy="207701"/>
+      </dsp:txXfrm>
+    </dsp:sp>
+    <dsp:sp modelId="{6F6C8E07-FBAD-3F4D-A906-27ECCF26E70E}">
+      <dsp:nvSpPr>
+        <dsp:cNvPr id="0" name=""/>
+        <dsp:cNvSpPr/>
+      </dsp:nvSpPr>
+      <dsp:spPr>
+        <a:xfrm>
+          <a:off x="62698" y="3562729"/>
+          <a:ext cx="7123128" cy="791244"/>
+        </a:xfrm>
+        <a:prstGeom prst="roundRect">
+          <a:avLst>
+            <a:gd name="adj" fmla="val 10000"/>
+          </a:avLst>
+        </a:prstGeom>
+        <a:solidFill>
+          <a:schemeClr val="accent5">
+            <a:hueOff val="0"/>
+            <a:satOff val="0"/>
+            <a:lumOff val="0"/>
+            <a:alphaOff val="0"/>
+          </a:schemeClr>
+        </a:solidFill>
+        <a:ln w="12700" cap="flat" cmpd="sng" algn="ctr">
+          <a:solidFill>
+            <a:schemeClr val="lt1">
+              <a:hueOff val="0"/>
+              <a:satOff val="0"/>
+              <a:lumOff val="0"/>
+              <a:alphaOff val="0"/>
+            </a:schemeClr>
+          </a:solidFill>
+          <a:prstDash val="solid"/>
+          <a:miter lim="800000"/>
+        </a:ln>
+        <a:effectLst/>
+      </dsp:spPr>
+      <dsp:style>
+        <a:lnRef idx="2">
+          <a:scrgbClr r="0" g="0" b="0"/>
+        </a:lnRef>
+        <a:fillRef idx="1">
+          <a:scrgbClr r="0" g="0" b="0"/>
+        </a:fillRef>
+        <a:effectRef idx="0">
+          <a:scrgbClr r="0" g="0" b="0"/>
+        </a:effectRef>
+        <a:fontRef idx="minor">
+          <a:schemeClr val="lt1"/>
+        </a:fontRef>
+      </dsp:style>
+      <dsp:txBody>
+        <a:bodyPr spcFirstLastPara="0" vert="horz" wrap="square" lIns="60960" tIns="60960" rIns="60960" bIns="60960" numCol="1" spcCol="1270" anchor="ctr" anchorCtr="0">
+          <a:noAutofit/>
+        </a:bodyPr>
+        <a:lstStyle/>
+        <a:p>
+          <a:pPr marL="0" lvl="0" indent="0" algn="ctr" defTabSz="711200">
+            <a:lnSpc>
+              <a:spcPct val="90000"/>
+            </a:lnSpc>
+            <a:spcBef>
+              <a:spcPct val="0"/>
+            </a:spcBef>
+            <a:spcAft>
+              <a:spcPct val="35000"/>
+            </a:spcAft>
+            <a:buNone/>
+          </a:pPr>
+          <a:r>
+            <a:rPr lang="en-US" sz="1600" kern="1200" dirty="0"/>
+            <a:t>Plot results of the mantel correlograms against phylogenetic distance classes for each environmental parameter to check for significant relationships</a:t>
+          </a:r>
+        </a:p>
+      </dsp:txBody>
+      <dsp:txXfrm>
+        <a:off x="85873" y="3585904"/>
+        <a:ext cx="7076778" cy="744894"/>
+      </dsp:txXfrm>
+    </dsp:sp>
+  </dsp:spTree>
+</dsp:drawing>
+</file>
+
 <file path=ppt/diagrams/layout1.xml><?xml version="1.0" encoding="utf-8"?>
 <dgm:layoutDef xmlns:dgm="http://schemas.openxmlformats.org/drawingml/2006/diagram" xmlns:a="http://schemas.openxmlformats.org/drawingml/2006/main" uniqueId="urn:microsoft.com/office/officeart/2005/8/layout/chevron1">
   <dgm:title val=""/>
@@ -14742,155 +14743,6 @@
 </file>
 
 <file path=ppt/diagrams/layout5.xml><?xml version="1.0" encoding="utf-8"?>
-<dgm:layoutDef xmlns:dgm="http://schemas.openxmlformats.org/drawingml/2006/diagram" xmlns:a="http://schemas.openxmlformats.org/drawingml/2006/main" uniqueId="urn:microsoft.com/office/officeart/2005/8/layout/process2">
-  <dgm:title val=""/>
-  <dgm:desc val=""/>
-  <dgm:catLst>
-    <dgm:cat type="process" pri="13000"/>
-  </dgm:catLst>
-  <dgm:sampData useDef="1">
-    <dgm:dataModel>
-      <dgm:ptLst/>
-      <dgm:bg/>
-      <dgm:whole/>
-    </dgm:dataModel>
-  </dgm:sampData>
-  <dgm:styleData>
-    <dgm:dataModel>
-      <dgm:ptLst>
-        <dgm:pt modelId="0" type="doc"/>
-        <dgm:pt modelId="1"/>
-        <dgm:pt modelId="2"/>
-      </dgm:ptLst>
-      <dgm:cxnLst>
-        <dgm:cxn modelId="3" srcId="0" destId="1" srcOrd="0" destOrd="0"/>
-        <dgm:cxn modelId="4" srcId="0" destId="2" srcOrd="1" destOrd="0"/>
-      </dgm:cxnLst>
-      <dgm:bg/>
-      <dgm:whole/>
-    </dgm:dataModel>
-  </dgm:styleData>
-  <dgm:clrData>
-    <dgm:dataModel>
-      <dgm:ptLst>
-        <dgm:pt modelId="0" type="doc"/>
-        <dgm:pt modelId="1"/>
-        <dgm:pt modelId="2"/>
-        <dgm:pt modelId="3"/>
-        <dgm:pt modelId="4"/>
-      </dgm:ptLst>
-      <dgm:cxnLst>
-        <dgm:cxn modelId="5" srcId="0" destId="1" srcOrd="0" destOrd="0"/>
-        <dgm:cxn modelId="6" srcId="0" destId="2" srcOrd="1" destOrd="0"/>
-        <dgm:cxn modelId="7" srcId="0" destId="3" srcOrd="2" destOrd="0"/>
-        <dgm:cxn modelId="8" srcId="0" destId="4" srcOrd="3" destOrd="0"/>
-      </dgm:cxnLst>
-      <dgm:bg/>
-      <dgm:whole/>
-    </dgm:dataModel>
-  </dgm:clrData>
-  <dgm:layoutNode name="linearFlow">
-    <dgm:varLst>
-      <dgm:resizeHandles val="exact"/>
-    </dgm:varLst>
-    <dgm:alg type="lin">
-      <dgm:param type="linDir" val="fromT"/>
-    </dgm:alg>
-    <dgm:shape xmlns:r="http://schemas.openxmlformats.org/officeDocument/2006/relationships" r:blip="">
-      <dgm:adjLst/>
-    </dgm:shape>
-    <dgm:presOf/>
-    <dgm:constrLst>
-      <dgm:constr type="h" for="ch" ptType="node" refType="h"/>
-      <dgm:constr type="h" for="ch" ptType="sibTrans" refType="h" refFor="ch" refPtType="node" fact="0.5"/>
-      <dgm:constr type="w" for="ch" ptType="node" op="equ"/>
-      <dgm:constr type="primFontSz" for="ch" ptType="node" op="equ" val="65"/>
-      <dgm:constr type="primFontSz" for="des" forName="connectorText" op="equ" val="55"/>
-      <dgm:constr type="primFontSz" for="des" forName="connectorText" refType="primFontSz" refFor="ch" refPtType="node" op="lte" fact="0.8"/>
-    </dgm:constrLst>
-    <dgm:ruleLst/>
-    <dgm:forEach name="nodesForEach" axis="ch" ptType="node">
-      <dgm:layoutNode name="node">
-        <dgm:varLst>
-          <dgm:bulletEnabled val="1"/>
-        </dgm:varLst>
-        <dgm:choose name="Name0">
-          <dgm:if name="Name1" axis="root des" ptType="all node" func="maxDepth" op="gt" val="1">
-            <dgm:alg type="tx">
-              <dgm:param type="parTxLTRAlign" val="l"/>
-              <dgm:param type="parTxRTLAlign" val="r"/>
-              <dgm:param type="txAnchorVertCh" val="mid"/>
-            </dgm:alg>
-          </dgm:if>
-          <dgm:else name="Name2">
-            <dgm:alg type="tx"/>
-          </dgm:else>
-        </dgm:choose>
-        <dgm:shape xmlns:r="http://schemas.openxmlformats.org/officeDocument/2006/relationships" type="roundRect" r:blip="">
-          <dgm:adjLst>
-            <dgm:adj idx="1" val="0.1"/>
-          </dgm:adjLst>
-        </dgm:shape>
-        <dgm:presOf axis="desOrSelf" ptType="node"/>
-        <dgm:constrLst>
-          <dgm:constr type="w" refType="h" fact="1.8"/>
-          <dgm:constr type="tMarg" refType="primFontSz" fact="0.3"/>
-          <dgm:constr type="bMarg" refType="primFontSz" fact="0.3"/>
-          <dgm:constr type="lMarg" refType="primFontSz" fact="0.3"/>
-          <dgm:constr type="rMarg" refType="primFontSz" fact="0.3"/>
-        </dgm:constrLst>
-        <dgm:ruleLst>
-          <dgm:rule type="primFontSz" val="18" fact="NaN" max="NaN"/>
-          <dgm:rule type="w" val="NaN" fact="4" max="NaN"/>
-          <dgm:rule type="primFontSz" val="5" fact="NaN" max="NaN"/>
-        </dgm:ruleLst>
-      </dgm:layoutNode>
-      <dgm:forEach name="sibTransForEach" axis="followSib" ptType="sibTrans" cnt="1">
-        <dgm:layoutNode name="sibTrans">
-          <dgm:alg type="conn">
-            <dgm:param type="begPts" val="auto"/>
-            <dgm:param type="endPts" val="auto"/>
-          </dgm:alg>
-          <dgm:shape xmlns:r="http://schemas.openxmlformats.org/officeDocument/2006/relationships" type="conn" r:blip="">
-            <dgm:adjLst/>
-          </dgm:shape>
-          <dgm:presOf axis="self"/>
-          <dgm:constrLst>
-            <dgm:constr type="w" refType="h" fact="0.9"/>
-            <dgm:constr type="connDist"/>
-            <dgm:constr type="wArH" refType="w" fact="0.5"/>
-            <dgm:constr type="hArH" refType="w"/>
-            <dgm:constr type="stemThick" refType="w" fact="0.6"/>
-            <dgm:constr type="begPad" refType="connDist" fact="0.125"/>
-            <dgm:constr type="endPad" refType="connDist" fact="0.125"/>
-          </dgm:constrLst>
-          <dgm:ruleLst/>
-          <dgm:layoutNode name="connectorText">
-            <dgm:alg type="tx">
-              <dgm:param type="autoTxRot" val="upr"/>
-            </dgm:alg>
-            <dgm:shape xmlns:r="http://schemas.openxmlformats.org/officeDocument/2006/relationships" type="conn" r:blip="" hideGeom="1">
-              <dgm:adjLst/>
-            </dgm:shape>
-            <dgm:presOf axis="self"/>
-            <dgm:constrLst>
-              <dgm:constr type="lMarg"/>
-              <dgm:constr type="rMarg"/>
-              <dgm:constr type="tMarg"/>
-              <dgm:constr type="bMarg"/>
-            </dgm:constrLst>
-            <dgm:ruleLst>
-              <dgm:rule type="primFontSz" val="5" fact="NaN" max="NaN"/>
-            </dgm:ruleLst>
-          </dgm:layoutNode>
-        </dgm:layoutNode>
-      </dgm:forEach>
-    </dgm:forEach>
-  </dgm:layoutNode>
-</dgm:layoutDef>
-</file>
-
-<file path=ppt/diagrams/layout6.xml><?xml version="1.0" encoding="utf-8"?>
 <dgm:layoutDef xmlns:dgm="http://schemas.openxmlformats.org/drawingml/2006/diagram" xmlns:a="http://schemas.openxmlformats.org/drawingml/2006/main" uniqueId="urn:microsoft.com/office/officeart/2005/8/layout/orgChart1">
   <dgm:title val=""/>
   <dgm:desc val=""/>
@@ -16036,6 +15888,155 @@
 </dgm:layoutDef>
 </file>
 
+<file path=ppt/diagrams/layout6.xml><?xml version="1.0" encoding="utf-8"?>
+<dgm:layoutDef xmlns:dgm="http://schemas.openxmlformats.org/drawingml/2006/diagram" xmlns:a="http://schemas.openxmlformats.org/drawingml/2006/main" uniqueId="urn:microsoft.com/office/officeart/2005/8/layout/process2">
+  <dgm:title val=""/>
+  <dgm:desc val=""/>
+  <dgm:catLst>
+    <dgm:cat type="process" pri="13000"/>
+  </dgm:catLst>
+  <dgm:sampData useDef="1">
+    <dgm:dataModel>
+      <dgm:ptLst/>
+      <dgm:bg/>
+      <dgm:whole/>
+    </dgm:dataModel>
+  </dgm:sampData>
+  <dgm:styleData>
+    <dgm:dataModel>
+      <dgm:ptLst>
+        <dgm:pt modelId="0" type="doc"/>
+        <dgm:pt modelId="1"/>
+        <dgm:pt modelId="2"/>
+      </dgm:ptLst>
+      <dgm:cxnLst>
+        <dgm:cxn modelId="3" srcId="0" destId="1" srcOrd="0" destOrd="0"/>
+        <dgm:cxn modelId="4" srcId="0" destId="2" srcOrd="1" destOrd="0"/>
+      </dgm:cxnLst>
+      <dgm:bg/>
+      <dgm:whole/>
+    </dgm:dataModel>
+  </dgm:styleData>
+  <dgm:clrData>
+    <dgm:dataModel>
+      <dgm:ptLst>
+        <dgm:pt modelId="0" type="doc"/>
+        <dgm:pt modelId="1"/>
+        <dgm:pt modelId="2"/>
+        <dgm:pt modelId="3"/>
+        <dgm:pt modelId="4"/>
+      </dgm:ptLst>
+      <dgm:cxnLst>
+        <dgm:cxn modelId="5" srcId="0" destId="1" srcOrd="0" destOrd="0"/>
+        <dgm:cxn modelId="6" srcId="0" destId="2" srcOrd="1" destOrd="0"/>
+        <dgm:cxn modelId="7" srcId="0" destId="3" srcOrd="2" destOrd="0"/>
+        <dgm:cxn modelId="8" srcId="0" destId="4" srcOrd="3" destOrd="0"/>
+      </dgm:cxnLst>
+      <dgm:bg/>
+      <dgm:whole/>
+    </dgm:dataModel>
+  </dgm:clrData>
+  <dgm:layoutNode name="linearFlow">
+    <dgm:varLst>
+      <dgm:resizeHandles val="exact"/>
+    </dgm:varLst>
+    <dgm:alg type="lin">
+      <dgm:param type="linDir" val="fromT"/>
+    </dgm:alg>
+    <dgm:shape xmlns:r="http://schemas.openxmlformats.org/officeDocument/2006/relationships" r:blip="">
+      <dgm:adjLst/>
+    </dgm:shape>
+    <dgm:presOf/>
+    <dgm:constrLst>
+      <dgm:constr type="h" for="ch" ptType="node" refType="h"/>
+      <dgm:constr type="h" for="ch" ptType="sibTrans" refType="h" refFor="ch" refPtType="node" fact="0.5"/>
+      <dgm:constr type="w" for="ch" ptType="node" op="equ"/>
+      <dgm:constr type="primFontSz" for="ch" ptType="node" op="equ" val="65"/>
+      <dgm:constr type="primFontSz" for="des" forName="connectorText" op="equ" val="55"/>
+      <dgm:constr type="primFontSz" for="des" forName="connectorText" refType="primFontSz" refFor="ch" refPtType="node" op="lte" fact="0.8"/>
+    </dgm:constrLst>
+    <dgm:ruleLst/>
+    <dgm:forEach name="nodesForEach" axis="ch" ptType="node">
+      <dgm:layoutNode name="node">
+        <dgm:varLst>
+          <dgm:bulletEnabled val="1"/>
+        </dgm:varLst>
+        <dgm:choose name="Name0">
+          <dgm:if name="Name1" axis="root des" ptType="all node" func="maxDepth" op="gt" val="1">
+            <dgm:alg type="tx">
+              <dgm:param type="parTxLTRAlign" val="l"/>
+              <dgm:param type="parTxRTLAlign" val="r"/>
+              <dgm:param type="txAnchorVertCh" val="mid"/>
+            </dgm:alg>
+          </dgm:if>
+          <dgm:else name="Name2">
+            <dgm:alg type="tx"/>
+          </dgm:else>
+        </dgm:choose>
+        <dgm:shape xmlns:r="http://schemas.openxmlformats.org/officeDocument/2006/relationships" type="roundRect" r:blip="">
+          <dgm:adjLst>
+            <dgm:adj idx="1" val="0.1"/>
+          </dgm:adjLst>
+        </dgm:shape>
+        <dgm:presOf axis="desOrSelf" ptType="node"/>
+        <dgm:constrLst>
+          <dgm:constr type="w" refType="h" fact="1.8"/>
+          <dgm:constr type="tMarg" refType="primFontSz" fact="0.3"/>
+          <dgm:constr type="bMarg" refType="primFontSz" fact="0.3"/>
+          <dgm:constr type="lMarg" refType="primFontSz" fact="0.3"/>
+          <dgm:constr type="rMarg" refType="primFontSz" fact="0.3"/>
+        </dgm:constrLst>
+        <dgm:ruleLst>
+          <dgm:rule type="primFontSz" val="18" fact="NaN" max="NaN"/>
+          <dgm:rule type="w" val="NaN" fact="4" max="NaN"/>
+          <dgm:rule type="primFontSz" val="5" fact="NaN" max="NaN"/>
+        </dgm:ruleLst>
+      </dgm:layoutNode>
+      <dgm:forEach name="sibTransForEach" axis="followSib" ptType="sibTrans" cnt="1">
+        <dgm:layoutNode name="sibTrans">
+          <dgm:alg type="conn">
+            <dgm:param type="begPts" val="auto"/>
+            <dgm:param type="endPts" val="auto"/>
+          </dgm:alg>
+          <dgm:shape xmlns:r="http://schemas.openxmlformats.org/officeDocument/2006/relationships" type="conn" r:blip="">
+            <dgm:adjLst/>
+          </dgm:shape>
+          <dgm:presOf axis="self"/>
+          <dgm:constrLst>
+            <dgm:constr type="w" refType="h" fact="0.9"/>
+            <dgm:constr type="connDist"/>
+            <dgm:constr type="wArH" refType="w" fact="0.5"/>
+            <dgm:constr type="hArH" refType="w"/>
+            <dgm:constr type="stemThick" refType="w" fact="0.6"/>
+            <dgm:constr type="begPad" refType="connDist" fact="0.125"/>
+            <dgm:constr type="endPad" refType="connDist" fact="0.125"/>
+          </dgm:constrLst>
+          <dgm:ruleLst/>
+          <dgm:layoutNode name="connectorText">
+            <dgm:alg type="tx">
+              <dgm:param type="autoTxRot" val="upr"/>
+            </dgm:alg>
+            <dgm:shape xmlns:r="http://schemas.openxmlformats.org/officeDocument/2006/relationships" type="conn" r:blip="" hideGeom="1">
+              <dgm:adjLst/>
+            </dgm:shape>
+            <dgm:presOf axis="self"/>
+            <dgm:constrLst>
+              <dgm:constr type="lMarg"/>
+              <dgm:constr type="rMarg"/>
+              <dgm:constr type="tMarg"/>
+              <dgm:constr type="bMarg"/>
+            </dgm:constrLst>
+            <dgm:ruleLst>
+              <dgm:rule type="primFontSz" val="5" fact="NaN" max="NaN"/>
+            </dgm:ruleLst>
+          </dgm:layoutNode>
+        </dgm:layoutNode>
+      </dgm:forEach>
+    </dgm:forEach>
+  </dgm:layoutNode>
+</dgm:layoutDef>
+</file>
+
 <file path=ppt/diagrams/quickStyle1.xml><?xml version="1.0" encoding="utf-8"?>
 <dgm:styleDef xmlns:dgm="http://schemas.openxmlformats.org/drawingml/2006/diagram" xmlns:a="http://schemas.openxmlformats.org/drawingml/2006/main" uniqueId="urn:microsoft.com/office/officeart/2005/8/quickstyle/simple1">
   <dgm:title val=""/>
@@ -22322,7 +22323,7 @@
           <a:p>
             <a:fld id="{50055017-D10A-7E41-A628-FFBA6D86E32F}" type="datetimeFigureOut">
               <a:rPr lang="en-US" smtClean="0"/>
-              <a:t>4/20/21</a:t>
+              <a:t>4/22/21</a:t>
             </a:fld>
             <a:endParaRPr lang="en-US"/>
           </a:p>
@@ -22781,49 +22782,15 @@
           <a:p>
             <a:r>
               <a:rPr lang="en-US" dirty="0"/>
-              <a:t>Sloan’s Neutral Model states that the probability of species </a:t>
-            </a:r>
-            <a:r>
-              <a:rPr lang="en-US" i="1" dirty="0" err="1"/>
-              <a:t>i</a:t>
+              <a:t>DDR doesn’t work for this dataset as most of the holes are reported to have the same long </a:t>
+            </a:r>
+            <a:r>
+              <a:rPr lang="en-US" dirty="0" err="1"/>
+              <a:t>lat</a:t>
             </a:r>
             <a:r>
               <a:rPr lang="en-US" dirty="0"/>
-              <a:t> occurring within a sample at abundance (x</a:t>
-            </a:r>
-            <a:r>
-              <a:rPr lang="en-US" i="0" baseline="-25000" dirty="0"/>
-              <a:t>i</a:t>
-            </a:r>
-            <a:r>
-              <a:rPr lang="en-US" dirty="0"/>
-              <a:t>) above a detection threshold (d) </a:t>
-            </a:r>
-          </a:p>
-          <a:p>
-            <a:endParaRPr lang="en-US" dirty="0"/>
-          </a:p>
-          <a:p>
-            <a:r>
-              <a:rPr lang="en-US" dirty="0"/>
-              <a:t>Model results are compared to the observed data. Deviation of observed data from model results is assumed to be evidence of deterministic community assembly.</a:t>
-            </a:r>
-          </a:p>
-          <a:p>
-            <a:endParaRPr lang="en-US" dirty="0"/>
-          </a:p>
-          <a:p>
-            <a:r>
-              <a:rPr lang="en-US" dirty="0"/>
-              <a:t>The abundance of each ASV in the metacommunity (p</a:t>
-            </a:r>
-            <a:r>
-              <a:rPr lang="en-US" i="1" dirty="0"/>
-              <a:t>i</a:t>
-            </a:r>
-            <a:r>
-              <a:rPr lang="en-US" dirty="0"/>
-              <a:t>) is estimated by averaging it’s relative abundance across all samples.</a:t>
+              <a:t> coordinates.</a:t>
             </a:r>
           </a:p>
         </p:txBody>
@@ -22854,7 +22821,7 @@
     </p:spTree>
     <p:extLst>
       <p:ext uri="{BB962C8B-B14F-4D97-AF65-F5344CB8AC3E}">
-        <p14:creationId xmlns:p14="http://schemas.microsoft.com/office/powerpoint/2010/main" val="1811139538"/>
+        <p14:creationId xmlns:p14="http://schemas.microsoft.com/office/powerpoint/2010/main" val="2176052354"/>
       </p:ext>
     </p:extLst>
   </p:cSld>
@@ -22910,24 +22877,234 @@
           <a:p>
             <a:r>
               <a:rPr lang="en-US" dirty="0"/>
-              <a:t>Code developed from Barnett et al., (2020) Soil characteristics and land-use drive bacterial community assembly patterns (https://</a:t>
+              <a:t>Sloan’s Neutral Model states that the probability of species </a:t>
+            </a:r>
+            <a:r>
+              <a:rPr lang="en-US" i="1" dirty="0" err="1"/>
+              <a:t>i</a:t>
+            </a:r>
+            <a:r>
+              <a:rPr lang="en-US" dirty="0"/>
+              <a:t> occurring within a sample at abundance (x</a:t>
+            </a:r>
+            <a:r>
+              <a:rPr lang="en-US" i="0" baseline="-25000" dirty="0"/>
+              <a:t>i</a:t>
+            </a:r>
+            <a:r>
+              <a:rPr lang="en-US" dirty="0"/>
+              <a:t>) above a detection threshold (d) </a:t>
+            </a:r>
+          </a:p>
+          <a:p>
+            <a:endParaRPr lang="en-US" dirty="0"/>
+          </a:p>
+          <a:p>
+            <a:r>
+              <a:rPr lang="en-US" dirty="0"/>
+              <a:t>Model results are compared to the observed data. Deviation of observed data from model results is assumed to be evidence of deterministic community assembly.</a:t>
+            </a:r>
+          </a:p>
+          <a:p>
+            <a:endParaRPr lang="en-US" dirty="0"/>
+          </a:p>
+          <a:p>
+            <a:r>
+              <a:rPr lang="en-US" dirty="0"/>
+              <a:t>The abundance of each ASV in the metacommunity (p</a:t>
+            </a:r>
+            <a:r>
+              <a:rPr lang="en-US" i="1" dirty="0"/>
+              <a:t>i</a:t>
+            </a:r>
+            <a:r>
+              <a:rPr lang="en-US" dirty="0"/>
+              <a:t>) is estimated by averaging it’s relative abundance across all samples.</a:t>
+            </a:r>
+          </a:p>
+          <a:p>
+            <a:endParaRPr lang="en-US" dirty="0"/>
+          </a:p>
+          <a:p>
+            <a:r>
+              <a:rPr lang="en-US" b="1" dirty="0"/>
+              <a:t>Why is Sloan's Neutral Model important? (Sloan et al., 2006)</a:t>
+            </a:r>
+          </a:p>
+          <a:p>
+            <a:r>
+              <a:rPr lang="en-US" dirty="0"/>
+              <a:t>Microbial organisms are essential for life on earth.</a:t>
+            </a:r>
+          </a:p>
+          <a:p>
+            <a:r>
+              <a:rPr lang="en-US" dirty="0"/>
+              <a:t>The rules that govern their community assembly are poorly understood.</a:t>
+            </a:r>
+          </a:p>
+          <a:p>
+            <a:r>
+              <a:rPr lang="en-US" dirty="0"/>
+              <a:t>We need mathematical tools to describe these processes.</a:t>
+            </a:r>
+          </a:p>
+          <a:p>
+            <a:r>
+              <a:rPr lang="en-US" dirty="0"/>
+              <a:t>Typically microbial community structure has been thought to be shaped by deterministic processes (abiotic and biotic selection).</a:t>
+            </a:r>
+          </a:p>
+          <a:p>
+            <a:r>
+              <a:rPr lang="en-US" dirty="0"/>
+              <a:t>Despite this, the relative abundances and frequencies of taxa observed can be described using a neutral community model.</a:t>
+            </a:r>
+          </a:p>
+          <a:p>
+            <a:r>
+              <a:rPr lang="en-US" dirty="0"/>
+              <a:t>Sloan’s neutral community model includes stochastic birth-death events (or ecological drift) and immigration.</a:t>
+            </a:r>
+          </a:p>
+          <a:p>
+            <a:r>
+              <a:rPr lang="en-US" dirty="0"/>
+              <a:t>The neutral community model DOES NOT include any deterministic processes and is not supposed to be a complete description of microbial community assembly processes.</a:t>
+            </a:r>
+          </a:p>
+          <a:p>
+            <a:r>
+              <a:rPr lang="en-US" dirty="0"/>
+              <a:t>Despite this, the successful application of the model in describing patterns of community structure suggests that stochastic processes of ecological drift and dispersal are important processes in microbial community assembly.</a:t>
+            </a:r>
+          </a:p>
+          <a:p>
+            <a:r>
+              <a:rPr lang="en-US" dirty="0"/>
+              <a:t>Neutral models allow us to quantify processes which are difficult to directly observe (dispersal) yet that are important to microbial communities.</a:t>
+            </a:r>
+          </a:p>
+          <a:p>
+            <a:endParaRPr lang="en-US" dirty="0"/>
+          </a:p>
+          <a:p>
+            <a:endParaRPr lang="en-US" dirty="0"/>
+          </a:p>
+          <a:p>
+            <a:r>
+              <a:rPr lang="en-US" dirty="0"/>
+              <a:t>To test if stochastic processes play a key role in shaping microbial community structure we need:</a:t>
+            </a:r>
+          </a:p>
+          <a:p>
+            <a:pPr marL="228600" indent="-228600">
+              <a:buAutoNum type="arabicPeriod"/>
+            </a:pPr>
+            <a:r>
+              <a:rPr lang="en-US" dirty="0"/>
+              <a:t>Evidence of random community assembly</a:t>
+            </a:r>
+          </a:p>
+          <a:p>
+            <a:pPr marL="228600" indent="-228600">
+              <a:buAutoNum type="arabicPeriod"/>
+            </a:pPr>
+            <a:r>
+              <a:rPr lang="en-US" dirty="0"/>
+              <a:t>A neutral model for microbes that can deal with large populations</a:t>
+            </a:r>
+          </a:p>
+          <a:p>
+            <a:pPr marL="228600" indent="-228600">
+              <a:buAutoNum type="arabicPeriod"/>
+            </a:pPr>
+            <a:r>
+              <a:rPr lang="en-US" dirty="0"/>
+              <a:t>A method for </a:t>
             </a:r>
             <a:r>
               <a:rPr lang="en-US" dirty="0" err="1"/>
-              <a:t>github.com</a:t>
+              <a:t>paramaterisation</a:t>
             </a:r>
             <a:r>
               <a:rPr lang="en-US" dirty="0"/>
-              <a:t>/seb369/</a:t>
+              <a:t> that does not rely on observed species abundance distributions or assumptions about source community patterns</a:t>
+            </a:r>
+          </a:p>
+          <a:p>
+            <a:pPr marL="228600" indent="-228600">
+              <a:buAutoNum type="arabicPeriod"/>
+            </a:pPr>
+            <a:r>
+              <a:rPr lang="en-US" dirty="0"/>
+              <a:t>Data that support the model</a:t>
+            </a:r>
+          </a:p>
+          <a:p>
+            <a:pPr marL="228600" indent="-228600">
+              <a:buAutoNum type="arabicPeriod"/>
+            </a:pPr>
+            <a:r>
+              <a:rPr lang="en-US" dirty="0"/>
+              <a:t>A model robust to departures from the assumption of neutrality</a:t>
+            </a:r>
+          </a:p>
+          <a:p>
+            <a:endParaRPr lang="en-US" b="1" dirty="0"/>
+          </a:p>
+          <a:p>
+            <a:r>
+              <a:rPr lang="en-US" b="1" dirty="0"/>
+              <a:t>Explain how Sloan's Neutral Model works.</a:t>
+            </a:r>
+          </a:p>
+          <a:p>
+            <a:pPr marL="228600" indent="-228600">
+              <a:buAutoNum type="arabicParenR"/>
+            </a:pPr>
+            <a:r>
+              <a:rPr lang="en-US" dirty="0"/>
+              <a:t>The community is saturated with </a:t>
             </a:r>
             <a:r>
               <a:rPr lang="en-US" dirty="0" err="1"/>
-              <a:t>landuse_comm_assembly</a:t>
+              <a:t>Nt</a:t>
             </a:r>
             <a:r>
               <a:rPr lang="en-US" dirty="0"/>
-              <a:t>)</a:t>
-            </a:r>
+              <a:t> individuals. For the assemblage to change an individual must die or leave the system. The rate of change within the system is species independent.</a:t>
+            </a:r>
+          </a:p>
+          <a:p>
+            <a:pPr marL="228600" indent="-228600">
+              <a:buAutoNum type="arabicParenR"/>
+            </a:pPr>
+            <a:r>
+              <a:rPr lang="en-US" dirty="0"/>
+              <a:t>The dead individual is replace with probability m by an immigrant from the metacommunity, or replaced by reproduction of a member of the local community with probability 1-m. </a:t>
+            </a:r>
+          </a:p>
+          <a:p>
+            <a:pPr marL="228600" indent="-228600">
+              <a:buAutoNum type="arabicParenR"/>
+            </a:pPr>
+            <a:r>
+              <a:rPr lang="en-US" dirty="0"/>
+              <a:t>The community changed through a cycle of death, birth and immigration only.</a:t>
+            </a:r>
+          </a:p>
+          <a:p>
+            <a:pPr marL="228600" indent="-228600">
+              <a:buAutoNum type="arabicParenR"/>
+            </a:pPr>
+            <a:endParaRPr lang="en-US" dirty="0"/>
+          </a:p>
+          <a:p>
+            <a:pPr marL="228600" indent="-228600">
+              <a:buAutoNum type="arabicParenR"/>
+            </a:pPr>
+            <a:endParaRPr lang="en-US" dirty="0"/>
           </a:p>
         </p:txBody>
       </p:sp>
@@ -22957,7 +23134,7 @@
     </p:spTree>
     <p:extLst>
       <p:ext uri="{BB962C8B-B14F-4D97-AF65-F5344CB8AC3E}">
-        <p14:creationId xmlns:p14="http://schemas.microsoft.com/office/powerpoint/2010/main" val="2263901205"/>
+        <p14:creationId xmlns:p14="http://schemas.microsoft.com/office/powerpoint/2010/main" val="1811139538"/>
       </p:ext>
     </p:extLst>
   </p:cSld>
@@ -23013,84 +23190,108 @@
           <a:p>
             <a:r>
               <a:rPr lang="en-US" dirty="0"/>
-              <a:t>This is the result of the model fitting with the Sommers dataset (not reduced).</a:t>
-            </a:r>
-          </a:p>
-          <a:p>
+              <a:t>Code developed from Barnett et al., (2020) Soil characteristics and land-use drive bacterial community assembly patterns (https://</a:t>
+            </a:r>
+            <a:r>
+              <a:rPr lang="en-US" dirty="0" err="1"/>
+              <a:t>github.com</a:t>
+            </a:r>
             <a:r>
               <a:rPr lang="en-US" dirty="0"/>
-              <a:t>X axis = log mean relative abundances of each ASV</a:t>
-            </a:r>
-          </a:p>
-          <a:p>
+              <a:t>/seb369/</a:t>
+            </a:r>
+            <a:r>
+              <a:rPr lang="en-US" dirty="0" err="1"/>
+              <a:t>landuse_comm_assembly</a:t>
+            </a:r>
             <a:r>
               <a:rPr lang="en-US" dirty="0"/>
-              <a:t>Y axis = mean occurrence frequency of each ASV </a:t>
-            </a:r>
+              <a:t>)</a:t>
+            </a:r>
+          </a:p>
+          <a:p>
+            <a:endParaRPr lang="en-US" dirty="0"/>
           </a:p>
           <a:p>
             <a:r>
               <a:rPr lang="en-US" dirty="0"/>
-              <a:t>Points = observed log relative abundances against occurrence frequencies</a:t>
+              <a:t>So we:</a:t>
             </a:r>
           </a:p>
           <a:p>
             <a:r>
               <a:rPr lang="en-US" dirty="0"/>
-              <a:t>Solid line = predicted log relative abundances plotted against occurrence frequencies</a:t>
-            </a:r>
+              <a:t>Fit the model to the observed frequency of occurrences of ASVs (in what proportion of the samples is each ASV detected?) and their abundance in the metacommunity (estimated as the mean relative abundance across all samples).</a:t>
+            </a:r>
+          </a:p>
+          <a:p>
+            <a:endParaRPr lang="en-US" dirty="0"/>
+          </a:p>
+          <a:p>
+            <a:pPr marL="0" marR="0" lvl="0" indent="0" algn="l" defTabSz="914400" rtl="0" eaLnBrk="1" fontAlgn="auto" latinLnBrk="0" hangingPunct="1">
+              <a:lnSpc>
+                <a:spcPct val="100000"/>
+              </a:lnSpc>
+              <a:spcBef>
+                <a:spcPts val="0"/>
+              </a:spcBef>
+              <a:spcAft>
+                <a:spcPts val="0"/>
+              </a:spcAft>
+              <a:buClrTx/>
+              <a:buSzTx/>
+              <a:buFontTx/>
+              <a:buNone/>
+              <a:tabLst/>
+              <a:defRPr/>
+            </a:pPr>
+            <a:r>
+              <a:rPr lang="en-US" b="1" dirty="0"/>
+              <a:t>Explain how Sloan's Neutral Model works.</a:t>
+            </a:r>
+            <a:endParaRPr lang="en-US" dirty="0"/>
           </a:p>
           <a:p>
             <a:r>
               <a:rPr lang="en-US" dirty="0"/>
-              <a:t>Dotted lines = 95% confidence intervals</a:t>
-            </a:r>
-          </a:p>
-          <a:p>
-            <a:endParaRPr lang="en-US" dirty="0"/>
+              <a:t>1. Calculate N as the mean read count within samples</a:t>
+            </a:r>
           </a:p>
           <a:p>
             <a:r>
               <a:rPr lang="en-US" dirty="0"/>
-              <a:t>This allows us to assess to what degree observed community structure can be explained by stochastic processes within each sample.</a:t>
+              <a:t>2. Calculate the average relative abundance of each ASV across samples</a:t>
             </a:r>
           </a:p>
           <a:p>
             <a:r>
               <a:rPr lang="en-US" dirty="0"/>
-              <a:t>The Sloan neutral model is applied here. This model does not take into account phylogenetic distance. </a:t>
+              <a:t>3. Calculate the occurrence frequency of each ASV</a:t>
             </a:r>
           </a:p>
           <a:p>
             <a:r>
               <a:rPr lang="en-US" dirty="0"/>
-              <a:t>ASV occurrence frequency is explained as a function of ASV abundance within the metacommunity (i.e. the more abundant an ASV is in the metacommunity, the more frequently it will be detected in the local community by chance). </a:t>
+              <a:t>4. Calculate the limit of detection </a:t>
             </a:r>
           </a:p>
           <a:p>
             <a:r>
               <a:rPr lang="en-US" dirty="0"/>
-              <a:t>The neutral model performed well, explaining 77% of variation in ASV detection frequency with an estimated migration factor of 0.02 between sites.</a:t>
+              <a:t>5. Fit the model parameter (m – probability that a dead individual is replaced by an immigrant) using non-linear least squares fitting</a:t>
             </a:r>
           </a:p>
           <a:p>
             <a:r>
               <a:rPr lang="en-US" dirty="0"/>
-              <a:t>These results suggest that neutral assembly processes can explain the pattern of observed ASV occurrence frequencies </a:t>
-            </a:r>
-            <a:r>
-              <a:rPr lang="en-US" strike="sngStrike" dirty="0"/>
-              <a:t>and that the the regional species pool is a driving factor in the community composition of these samples. </a:t>
-            </a:r>
-          </a:p>
-          <a:p>
-            <a:r>
-              <a:rPr lang="en-US" strike="noStrike" dirty="0"/>
-              <a:t>The deviation of predicted occurrence frequencies from observed occurrence frequencies suggests that there are also deterministic processes driving community composition.</a:t>
-            </a:r>
-          </a:p>
-          <a:p>
-            <a:endParaRPr lang="en-US" dirty="0"/>
+              <a:t>6. Use the fitted m parameter to calculate predicted ASV frequencies under stochastic processes.</a:t>
+            </a:r>
+          </a:p>
+          <a:p>
+            <a:r>
+              <a:rPr lang="en-US" dirty="0"/>
+              <a:t>10. Plot the predicted ASV frequencies (percentage of samples we expect to see an ASV) with the observed ASV frequencies against their mean relative abundance across all samples</a:t>
+            </a:r>
           </a:p>
         </p:txBody>
       </p:sp>
@@ -23120,7 +23321,7 @@
     </p:spTree>
     <p:extLst>
       <p:ext uri="{BB962C8B-B14F-4D97-AF65-F5344CB8AC3E}">
-        <p14:creationId xmlns:p14="http://schemas.microsoft.com/office/powerpoint/2010/main" val="1669585764"/>
+        <p14:creationId xmlns:p14="http://schemas.microsoft.com/office/powerpoint/2010/main" val="2263901205"/>
       </p:ext>
     </p:extLst>
   </p:cSld>
@@ -23176,8 +23377,257 @@
           <a:p>
             <a:r>
               <a:rPr lang="en-US" dirty="0"/>
-              <a:t>Here there is only one significant relationship between phylogenetic distance and environmental variable – so the null model may not be appropriate for this data – however, we must consider that this dataset was drastically reduced to allow the correlograms to process on my local computer. With that in mind, we continue with the null model analysis.</a:t>
-            </a:r>
+              <a:t>This is the result of the model fitting with the Sommers dataset (not reduced).</a:t>
+            </a:r>
+          </a:p>
+          <a:p>
+            <a:endParaRPr lang="en-US" dirty="0"/>
+          </a:p>
+          <a:p>
+            <a:r>
+              <a:rPr lang="en-US" dirty="0"/>
+              <a:t>X axis = log average relative abundances of each ASV across all samples (</a:t>
+            </a:r>
+            <a:r>
+              <a:rPr lang="en-GB" dirty="0"/>
+              <a:t>percent composition of an ASV </a:t>
+            </a:r>
+            <a:r>
+              <a:rPr lang="en-GB" b="1" dirty="0"/>
+              <a:t>relative</a:t>
+            </a:r>
+            <a:r>
+              <a:rPr lang="en-GB" dirty="0"/>
+              <a:t> to the total number of ASVs across all samples)</a:t>
+            </a:r>
+          </a:p>
+          <a:p>
+            <a:endParaRPr lang="en-US" dirty="0"/>
+          </a:p>
+          <a:p>
+            <a:r>
+              <a:rPr lang="en-US" dirty="0"/>
+              <a:t>Y axis = mean occurrence frequency of each ASV (in what percentage of samples will each ASV occur)</a:t>
+            </a:r>
+          </a:p>
+          <a:p>
+            <a:endParaRPr lang="en-US" dirty="0"/>
+          </a:p>
+          <a:p>
+            <a:r>
+              <a:rPr lang="en-US" dirty="0"/>
+              <a:t>Points = observed log relative abundances against occurrence frequencies</a:t>
+            </a:r>
+          </a:p>
+          <a:p>
+            <a:r>
+              <a:rPr lang="en-US" dirty="0"/>
+              <a:t>Solid line = predicted log relative abundances plotted against occurrence frequencies</a:t>
+            </a:r>
+          </a:p>
+          <a:p>
+            <a:r>
+              <a:rPr lang="en-US" dirty="0"/>
+              <a:t>Dotted lines = 95% confidence intervals</a:t>
+            </a:r>
+          </a:p>
+          <a:p>
+            <a:endParaRPr lang="en-US" dirty="0"/>
+          </a:p>
+          <a:p>
+            <a:r>
+              <a:rPr lang="en-US" dirty="0"/>
+              <a:t>This allows us to assess to what degree observed community structure can be explained by stochastic processes within each sample.</a:t>
+            </a:r>
+          </a:p>
+          <a:p>
+            <a:r>
+              <a:rPr lang="en-US" dirty="0"/>
+              <a:t>The Sloan neutral model is applied here. This model does not take into account phylogenetic distance. </a:t>
+            </a:r>
+          </a:p>
+          <a:p>
+            <a:r>
+              <a:rPr lang="en-US" dirty="0"/>
+              <a:t>ASV occurrence frequency is explained as a function of ASV abundance within the metacommunity (i.e. the more abundant an ASV is in the metacommunity, the more frequently it will be detected in the local community by chance). </a:t>
+            </a:r>
+          </a:p>
+          <a:p>
+            <a:r>
+              <a:rPr lang="en-US" dirty="0"/>
+              <a:t>The neutral model performed well, explaining 77% of variation in ASV detection frequency with an estimated migration factor of 0.02 between sites.</a:t>
+            </a:r>
+          </a:p>
+          <a:p>
+            <a:r>
+              <a:rPr lang="en-US" dirty="0"/>
+              <a:t>These results suggest that neutral assembly processes can explain the pattern of observed ASV occurrence frequencies </a:t>
+            </a:r>
+            <a:r>
+              <a:rPr lang="en-US" strike="sngStrike" dirty="0"/>
+              <a:t>and that the the regional species pool is a driving factor in the community composition of these samples. </a:t>
+            </a:r>
+          </a:p>
+          <a:p>
+            <a:r>
+              <a:rPr lang="en-US" strike="noStrike" dirty="0"/>
+              <a:t>The deviation of predicted occurrence frequencies from observed occurrence frequencies suggests that there are also deterministic processes driving community composition.</a:t>
+            </a:r>
+          </a:p>
+          <a:p>
+            <a:endParaRPr lang="en-US" strike="noStrike" dirty="0"/>
+          </a:p>
+          <a:p>
+            <a:r>
+              <a:rPr lang="en-US" b="1" strike="noStrike" dirty="0"/>
+              <a:t>WHAT CAN WE INTERPRET FROM THESE RESULTS?</a:t>
+            </a:r>
+          </a:p>
+          <a:p>
+            <a:r>
+              <a:rPr lang="en-US" strike="noStrike" dirty="0"/>
+              <a:t>I have assessed the degree to which stochastic processes explain community assembly within these samples.</a:t>
+            </a:r>
+          </a:p>
+          <a:p>
+            <a:r>
+              <a:rPr lang="en-US" strike="noStrike" dirty="0"/>
+              <a:t>This model ignores phylogenetic distance and explains the frequency of ASV detection across samples as a function of their abundance in the metacommunity (the more individuals of ASV </a:t>
+            </a:r>
+            <a:r>
+              <a:rPr lang="en-US" strike="noStrike" dirty="0" err="1"/>
+              <a:t>i</a:t>
+            </a:r>
+            <a:r>
+              <a:rPr lang="en-US" strike="noStrike" dirty="0"/>
+              <a:t> are present in the metacommunity, the more likely you are to find them in any given sample).</a:t>
+            </a:r>
+          </a:p>
+          <a:p>
+            <a:r>
+              <a:rPr lang="en-US" strike="noStrike" dirty="0"/>
+              <a:t>The neutral model performed well, explaining 77% of the variation in ASV detection frequency with an estimated migration factor of 0.017 between sites (this means there is ~2% chance of a local death being replaced by an immigrant which is very low – lower than reported for other studies that hover around 16-25%).</a:t>
+            </a:r>
+          </a:p>
+          <a:p>
+            <a:r>
+              <a:rPr lang="en-US" strike="noStrike" dirty="0"/>
+              <a:t>These results indicate that, for the majority of ASVs, neutral assembly processes of ecological drift and dispersal can explain their within sample occurrence patterns across an area, and the composition of the species pool of the area drives community assembly.</a:t>
+            </a:r>
+          </a:p>
+          <a:p>
+            <a:r>
+              <a:rPr lang="en-US" strike="noStrike" dirty="0"/>
+              <a:t>However, the model is not a perfect fit to the data and beta diversity ordination has shown that communities vary significantly between glaciers, suggesting that deterministic processes also play an important role.</a:t>
+            </a:r>
+          </a:p>
+          <a:p>
+            <a:endParaRPr lang="en-US" strike="noStrike" dirty="0"/>
+          </a:p>
+          <a:p>
+            <a:r>
+              <a:rPr lang="en-US" strike="noStrike" dirty="0"/>
+              <a:t>NULL hypothesis: cryoconite bacterial community composition is completely stochastic. Neutral model results (high R2) mean I am unable to reject the null hypothesis. Significant variable in ASV frequency across samples is explained by their relative abundance in the metacommunity. The results suggest that local selection is weak and dispersal is low, indicating that ecological drift is the dominant community assembly process.</a:t>
+            </a:r>
+          </a:p>
+          <a:p>
+            <a:endParaRPr lang="en-US" strike="noStrike" dirty="0"/>
+          </a:p>
+          <a:p>
+            <a:pPr marL="0" marR="0" lvl="0" indent="0" algn="l" defTabSz="914400" rtl="0" eaLnBrk="1" fontAlgn="auto" latinLnBrk="0" hangingPunct="1">
+              <a:lnSpc>
+                <a:spcPct val="100000"/>
+              </a:lnSpc>
+              <a:spcBef>
+                <a:spcPts val="0"/>
+              </a:spcBef>
+              <a:spcAft>
+                <a:spcPts val="0"/>
+              </a:spcAft>
+              <a:buClrTx/>
+              <a:buSzTx/>
+              <a:buFontTx/>
+              <a:buNone/>
+              <a:tabLst/>
+              <a:defRPr/>
+            </a:pPr>
+            <a:r>
+              <a:rPr lang="en-US" dirty="0"/>
+              <a:t>Estimates of beta diversity based on phylogenetic dissimilarity show significant variation between glaciers. This supports the results that dispersal is limited. We might suggest that variation in beta diversity is a result of local ecological drift and limited dispersal rather than selection.</a:t>
+            </a:r>
+            <a:endParaRPr lang="en-US" strike="noStrike" dirty="0"/>
+          </a:p>
+          <a:p>
+            <a:endParaRPr lang="en-US" strike="noStrike" dirty="0"/>
+          </a:p>
+          <a:p>
+            <a:r>
+              <a:rPr lang="en-US" strike="noStrike" dirty="0"/>
+              <a:t>The distribution of ASVs across samples (in the metacommunity) followed the basic pattern of more abundant data being widespread – this is consistent with predictions of neutral theory. Despite the good fit of the model and the low m rate, there was significant difference between the communities on each glacier, illustrating the important point that variation among microbial communities does not need to be the result of environmental differences. Neutral processes can generate diversity on their own!</a:t>
+            </a:r>
+          </a:p>
+          <a:p>
+            <a:endParaRPr lang="en-US" strike="noStrike" dirty="0"/>
+          </a:p>
+          <a:p>
+            <a:r>
+              <a:rPr lang="en-US" b="1" strike="noStrike" dirty="0"/>
+              <a:t>What would I expect to see for abundant/rare, active/bulk communities? What would I infer from this?</a:t>
+            </a:r>
+          </a:p>
+          <a:p>
+            <a:endParaRPr lang="en-US" strike="noStrike" dirty="0"/>
+          </a:p>
+          <a:p>
+            <a:r>
+              <a:rPr lang="en-US" strike="noStrike" dirty="0"/>
+              <a:t>I want to repeat this analysis for abundant/rare taxa and active/bulk groups to see if stochastic processes are as important for each group, as well as to see how chance of immigration changes.</a:t>
+            </a:r>
+          </a:p>
+          <a:p>
+            <a:endParaRPr lang="en-US" strike="noStrike" dirty="0"/>
+          </a:p>
+          <a:p>
+            <a:r>
+              <a:rPr lang="en-US" strike="noStrike" dirty="0"/>
+              <a:t>Previous studies into soil microbial community assembly processes found:</a:t>
+            </a:r>
+          </a:p>
+          <a:p>
+            <a:r>
+              <a:rPr lang="en-US" strike="noStrike" dirty="0"/>
+              <a:t>Neutral model explained more variation in abundant sub-community than rare sub-community.</a:t>
+            </a:r>
+          </a:p>
+          <a:p>
+            <a:r>
+              <a:rPr lang="en-US" strike="noStrike" dirty="0"/>
+              <a:t>Neutral model also predicted lower m values for abundant sub-communities than rare sub-communities.</a:t>
+            </a:r>
+          </a:p>
+          <a:p>
+            <a:endParaRPr lang="en-US" strike="noStrike" dirty="0"/>
+          </a:p>
+          <a:p>
+            <a:r>
+              <a:rPr lang="en-US" strike="noStrike" dirty="0"/>
+              <a:t>Abundant species likely utilize an array of resources and occupy more broad niches, which rare taxa may occupy more specific niches – we would expect rare sub-communities to be more strongly shaped by deterministic processes.</a:t>
+            </a:r>
+          </a:p>
+          <a:p>
+            <a:endParaRPr lang="en-US" strike="noStrike" dirty="0"/>
+          </a:p>
+          <a:p>
+            <a:r>
+              <a:rPr lang="en-US" strike="noStrike" dirty="0"/>
+              <a:t>I predict that the neutral model will describe more variation in the bulk community than the active community as selection will only occur on active species. I also predict that migration rates will be higher for bulk communities because migration requires that an individual successfully transfer to a new habitat – where a dormant individual doesn’t need to worry about selection. </a:t>
+            </a:r>
+          </a:p>
+          <a:p>
+            <a:endParaRPr lang="en-US" strike="noStrike" dirty="0"/>
+          </a:p>
+          <a:p>
+            <a:endParaRPr lang="en-US" dirty="0"/>
           </a:p>
         </p:txBody>
       </p:sp>
@@ -23198,7 +23648,7 @@
           <a:p>
             <a:fld id="{91AE2140-D502-214A-B76B-E0784B2C949B}" type="slidenum">
               <a:rPr lang="en-US" smtClean="0"/>
-              <a:t>20</a:t>
+              <a:t>19</a:t>
             </a:fld>
             <a:endParaRPr lang="en-US"/>
           </a:p>
@@ -23207,7 +23657,7 @@
     </p:spTree>
     <p:extLst>
       <p:ext uri="{BB962C8B-B14F-4D97-AF65-F5344CB8AC3E}">
-        <p14:creationId xmlns:p14="http://schemas.microsoft.com/office/powerpoint/2010/main" val="1424753429"/>
+        <p14:creationId xmlns:p14="http://schemas.microsoft.com/office/powerpoint/2010/main" val="1669585764"/>
       </p:ext>
     </p:extLst>
   </p:cSld>
@@ -23262,6 +23712,96 @@
           <a:lstStyle/>
           <a:p>
             <a:r>
+              <a:rPr lang="en-US" b="1" dirty="0"/>
+              <a:t>Why is </a:t>
+            </a:r>
+            <a:r>
+              <a:rPr lang="en-US" b="1" dirty="0" err="1"/>
+              <a:t>Stegen's</a:t>
+            </a:r>
+            <a:r>
+              <a:rPr lang="en-US" b="1" dirty="0"/>
+              <a:t> Phylogenetic Null Model important?</a:t>
+            </a:r>
+          </a:p>
+          <a:p>
+            <a:r>
+              <a:rPr lang="en-US" b="0" dirty="0"/>
+              <a:t>Ecological community assembly is shaped by:</a:t>
+            </a:r>
+          </a:p>
+          <a:p>
+            <a:r>
+              <a:rPr lang="en-US" b="0" dirty="0"/>
+              <a:t>Selection from among-taxa differences in fitness (this can be homogenous or variable)</a:t>
+            </a:r>
+          </a:p>
+          <a:p>
+            <a:r>
+              <a:rPr lang="en-US" b="0" dirty="0"/>
+              <a:t>Dispersal (is a rate that may be limited when there is limited dispersal between communities, or homogenizing dispersal when there is high dispersal between communities)</a:t>
+            </a:r>
+          </a:p>
+          <a:p>
+            <a:r>
+              <a:rPr lang="en-US" b="0" dirty="0"/>
+              <a:t>Ecological drift</a:t>
+            </a:r>
+          </a:p>
+          <a:p>
+            <a:r>
+              <a:rPr lang="en-US" b="0" dirty="0"/>
+              <a:t>The relative importance of these processes varies. </a:t>
+            </a:r>
+          </a:p>
+          <a:p>
+            <a:endParaRPr lang="en-US" b="0" dirty="0"/>
+          </a:p>
+          <a:p>
+            <a:r>
+              <a:rPr lang="en-US" b="0" dirty="0"/>
+              <a:t>If environmental conditions are homogenous through space there will be constant selective pressure resulting in homogenous selection.</a:t>
+            </a:r>
+          </a:p>
+          <a:p>
+            <a:r>
+              <a:rPr lang="en-US" b="0" dirty="0"/>
+              <a:t>If environmental conditions vary across space, the fitness differences of taxa will vary across space and there will be variable selection.</a:t>
+            </a:r>
+          </a:p>
+          <a:p>
+            <a:r>
+              <a:rPr lang="en-US" b="0" dirty="0"/>
+              <a:t>High dispersal rates between communities lead to homogenous community composition if those dispersal rates overcome selective pressures, leading to homogenizing dispersal.</a:t>
+            </a:r>
+          </a:p>
+          <a:p>
+            <a:r>
+              <a:rPr lang="en-US" b="0" dirty="0"/>
+              <a:t>If selection is weak and dispersal between communities is low, ecological drift can generate significant changes in community composition. </a:t>
+            </a:r>
+          </a:p>
+          <a:p>
+            <a:r>
+              <a:rPr lang="en-US" b="0" dirty="0"/>
+              <a:t>Dispersal limitation is the situation in which low dispersal rates are the primary contributor to high community turnover.</a:t>
+            </a:r>
+          </a:p>
+          <a:p>
+            <a:r>
+              <a:rPr lang="en-US" b="0" dirty="0"/>
+              <a:t>Ecological drift is the situation in which there is a combination of moderate selection and moderate dispersal, neither process dominates so community turnover is a result of a mixture of dispersal and random birth/death events. Essentially this is where community assembly is not dominated by a particular process.</a:t>
+            </a:r>
+            <a:endParaRPr lang="en-US" b="1" dirty="0"/>
+          </a:p>
+          <a:p>
+            <a:endParaRPr lang="en-US" b="1" dirty="0"/>
+          </a:p>
+          <a:p>
+            <a:endParaRPr lang="en-US" dirty="0"/>
+          </a:p>
+          <a:p>
+            <a:r>
               <a:rPr lang="en-US" dirty="0"/>
               <a:t>Stochastic processes can produce complex spatial community patterns. </a:t>
             </a:r>
@@ -23325,6 +23865,165 @@
               <a:rPr lang="en-US" dirty="0"/>
               <a:t>Ecological drift – stochastic ecological drift is driving variable composition between communities</a:t>
             </a:r>
+          </a:p>
+          <a:p>
+            <a:endParaRPr lang="en-US" dirty="0"/>
+          </a:p>
+          <a:p>
+            <a:r>
+              <a:rPr lang="en-US" b="1" dirty="0"/>
+              <a:t>Explain how </a:t>
+            </a:r>
+            <a:r>
+              <a:rPr lang="en-US" b="1" dirty="0" err="1"/>
+              <a:t>Stegen's</a:t>
+            </a:r>
+            <a:r>
+              <a:rPr lang="en-US" b="1" dirty="0"/>
+              <a:t> Null Model works.</a:t>
+            </a:r>
+          </a:p>
+          <a:p>
+            <a:r>
+              <a:rPr lang="en-US" b="0" dirty="0"/>
+              <a:t>This framework uses the phylogenetic differences between communities to infer ecological selection. </a:t>
+            </a:r>
+          </a:p>
+          <a:p>
+            <a:endParaRPr lang="en-US" b="0" dirty="0"/>
+          </a:p>
+          <a:p>
+            <a:r>
+              <a:rPr lang="en-US" b="1" dirty="0"/>
+              <a:t>Why is phylogenetic signal important?</a:t>
+            </a:r>
+          </a:p>
+          <a:p>
+            <a:pPr marL="0" marR="0" lvl="0" indent="0" algn="l" defTabSz="914400" rtl="0" eaLnBrk="1" fontAlgn="auto" latinLnBrk="0" hangingPunct="1">
+              <a:lnSpc>
+                <a:spcPct val="100000"/>
+              </a:lnSpc>
+              <a:spcBef>
+                <a:spcPts val="0"/>
+              </a:spcBef>
+              <a:spcAft>
+                <a:spcPts val="0"/>
+              </a:spcAft>
+              <a:buClrTx/>
+              <a:buSzTx/>
+              <a:buFontTx/>
+              <a:buNone/>
+              <a:tabLst/>
+              <a:defRPr/>
+            </a:pPr>
+            <a:r>
+              <a:rPr lang="en-US" b="0" dirty="0"/>
+              <a:t>For this method to work there need to be significant phylogenetic signal – that is, taxa that are more closely phylogenetically related, exhibit ecological similarities/niche similarities. If more closely related taxa are not more ecologically similar then we cannot use their relatedness to infer if selection or stochastic processes are occurring.</a:t>
+            </a:r>
+          </a:p>
+          <a:p>
+            <a:pPr marL="0" marR="0" lvl="0" indent="0" algn="l" defTabSz="914400" rtl="0" eaLnBrk="1" fontAlgn="auto" latinLnBrk="0" hangingPunct="1">
+              <a:lnSpc>
+                <a:spcPct val="100000"/>
+              </a:lnSpc>
+              <a:spcBef>
+                <a:spcPts val="0"/>
+              </a:spcBef>
+              <a:spcAft>
+                <a:spcPts val="0"/>
+              </a:spcAft>
+              <a:buClrTx/>
+              <a:buSzTx/>
+              <a:buFontTx/>
+              <a:buNone/>
+              <a:tabLst/>
+              <a:defRPr/>
+            </a:pPr>
+            <a:endParaRPr lang="en-US" b="0" dirty="0"/>
+          </a:p>
+          <a:p>
+            <a:pPr marL="0" marR="0" lvl="0" indent="0" algn="l" defTabSz="914400" rtl="0" eaLnBrk="1" fontAlgn="auto" latinLnBrk="0" hangingPunct="1">
+              <a:lnSpc>
+                <a:spcPct val="100000"/>
+              </a:lnSpc>
+              <a:spcBef>
+                <a:spcPts val="0"/>
+              </a:spcBef>
+              <a:spcAft>
+                <a:spcPts val="0"/>
+              </a:spcAft>
+              <a:buClrTx/>
+              <a:buSzTx/>
+              <a:buFontTx/>
+              <a:buNone/>
+              <a:tabLst/>
+              <a:defRPr/>
+            </a:pPr>
+            <a:r>
+              <a:rPr lang="en-US" b="1" dirty="0"/>
+              <a:t>The process</a:t>
+            </a:r>
+            <a:endParaRPr lang="en-US" b="0" dirty="0"/>
+          </a:p>
+          <a:p>
+            <a:r>
+              <a:rPr lang="en-US" b="0" dirty="0"/>
+              <a:t>To quantify phylogenetic turnover between communities we first calculate the between-community mean-nearest-taxon-distance metric (βMNTD). This quantifies the distance between each species in one community and it’s closest relative in a second community.</a:t>
+            </a:r>
+          </a:p>
+          <a:p>
+            <a:r>
+              <a:rPr lang="en-US" b="0" dirty="0"/>
+              <a:t>For each pair of community we generate the βMNTD is selection was not driving community assembly by randomly shuffling the tips of the phylogeny and recalculating the βMNTD (repeat 999 times to get distribution of null values).</a:t>
+            </a:r>
+          </a:p>
+          <a:p>
+            <a:r>
+              <a:rPr lang="en-US" b="0" dirty="0"/>
+              <a:t>We use the observed βMNTD and the null βMNTD to generate our β-nearest-taxon-index (βNTI).</a:t>
+            </a:r>
+          </a:p>
+          <a:p>
+            <a:r>
+              <a:rPr lang="en-US" b="0" dirty="0"/>
+              <a:t>If the observed βMNTD is significantly less (i.e. βNTI &lt;-2) or greater than the null expectation (i.e. βNTI &gt;2) we would infer that homogenous selection or variable selection is shaping community assembly respectively.</a:t>
+            </a:r>
+          </a:p>
+          <a:p>
+            <a:r>
+              <a:rPr lang="en-US" b="0" dirty="0"/>
+              <a:t>If the absolute value of βNTI  is less than 2 we suggest that stochastic processes are predominantly driving community assembly.  </a:t>
+            </a:r>
+          </a:p>
+          <a:p>
+            <a:endParaRPr lang="en-US" b="0" dirty="0"/>
+          </a:p>
+          <a:p>
+            <a:r>
+              <a:rPr lang="en-US" b="0" dirty="0"/>
+              <a:t>To distinguish between homogenizing dispersal, limited dispersal and lack of dominance between selection and dispersal, we use the </a:t>
+            </a:r>
+            <a:r>
+              <a:rPr lang="en-US" b="0" dirty="0" err="1"/>
+              <a:t>Raup</a:t>
+            </a:r>
+            <a:r>
+              <a:rPr lang="en-US" b="0"/>
+              <a:t>-Crick metric</a:t>
+            </a:r>
+            <a:endParaRPr lang="en-US" b="0" dirty="0"/>
+          </a:p>
+          <a:p>
+            <a:endParaRPr lang="en-US" b="0" dirty="0"/>
+          </a:p>
+          <a:p>
+            <a:endParaRPr lang="en-US" b="0" dirty="0"/>
+          </a:p>
+          <a:p>
+            <a:endParaRPr lang="en-US" b="1" dirty="0"/>
+          </a:p>
+          <a:p>
+            <a:endParaRPr lang="en-US" b="1" dirty="0"/>
           </a:p>
           <a:p>
             <a:endParaRPr lang="en-US" dirty="0"/>
@@ -23348,7 +24047,7 @@
           <a:p>
             <a:fld id="{91AE2140-D502-214A-B76B-E0784B2C949B}" type="slidenum">
               <a:rPr lang="en-US" smtClean="0"/>
-              <a:t>21</a:t>
+              <a:t>20</a:t>
             </a:fld>
             <a:endParaRPr lang="en-US"/>
           </a:p>
@@ -23411,7 +24110,10 @@
           <a:bodyPr/>
           <a:lstStyle/>
           <a:p>
-            <a:endParaRPr lang="en-US" dirty="0"/>
+            <a:r>
+              <a:rPr lang="en-US" dirty="0"/>
+              <a:t>Here there is only one significant relationship between phylogenetic distance and environmental variable – so the null model may not be appropriate for this data – however, we must consider that this dataset was drastically reduced to allow the correlograms to process on my local computer. With that in mind, we continue with the null model analysis.</a:t>
+            </a:r>
           </a:p>
         </p:txBody>
       </p:sp>
@@ -23432,7 +24134,7 @@
           <a:p>
             <a:fld id="{91AE2140-D502-214A-B76B-E0784B2C949B}" type="slidenum">
               <a:rPr lang="en-US" smtClean="0"/>
-              <a:t>23</a:t>
+              <a:t>22</a:t>
             </a:fld>
             <a:endParaRPr lang="en-US"/>
           </a:p>
@@ -23441,7 +24143,7 @@
     </p:spTree>
     <p:extLst>
       <p:ext uri="{BB962C8B-B14F-4D97-AF65-F5344CB8AC3E}">
-        <p14:creationId xmlns:p14="http://schemas.microsoft.com/office/powerpoint/2010/main" val="2121078948"/>
+        <p14:creationId xmlns:p14="http://schemas.microsoft.com/office/powerpoint/2010/main" val="1424753429"/>
       </p:ext>
     </p:extLst>
   </p:cSld>
@@ -23497,7 +24199,7 @@
           <a:p>
             <a:r>
               <a:rPr lang="en-US" dirty="0"/>
-              <a:t>Whilst multivariate analysis can assist us in investigating abiotic selection, microbial community assembly is also shaped by biotic selection. </a:t>
+              <a:t>Analysis of phylogenetic turnover between samples provides significant evidence that stochastic processes, specifically ecological drift and dispersal limitation, are driving community assembly.</a:t>
             </a:r>
           </a:p>
           <a:p>
@@ -23506,42 +24208,19 @@
           <a:p>
             <a:r>
               <a:rPr lang="en-US" dirty="0"/>
-              <a:t>Biotic interactions may include top-down control through viral lysis and grazing, as well as microbe-microbe interactions.</a:t>
-            </a:r>
-          </a:p>
-          <a:p>
-            <a:endParaRPr lang="en-US" dirty="0"/>
+              <a:t>Previous studies of community assembly for abundant and rare taxa have found:</a:t>
+            </a:r>
           </a:p>
           <a:p>
             <a:r>
               <a:rPr lang="en-US" dirty="0"/>
-              <a:t>Due to technological restrictions, investigations of microbe-microbe interactions have typically been limited. With access to high-throughout sequencing, we can now construct co-occurrence networks in an attempt to decipher intra- and inter-specific interactions within communities.</a:t>
-            </a:r>
-          </a:p>
-          <a:p>
-            <a:endParaRPr lang="en-US" dirty="0"/>
+              <a:t>Increased homogenous selection for rare taxa.</a:t>
+            </a:r>
           </a:p>
           <a:p>
             <a:r>
               <a:rPr lang="en-US" dirty="0"/>
-              <a:t>Previous research has indicated that microbial communities exhibit non-random co-occurrence patterns and module structures, suggesting that biotic selection plays a strong role in shaping community assembly.</a:t>
-            </a:r>
-          </a:p>
-          <a:p>
-            <a:endParaRPr lang="en-US" dirty="0"/>
-          </a:p>
-          <a:p>
-            <a:r>
-              <a:rPr lang="en-US" dirty="0"/>
-              <a:t>Communities may even </a:t>
-            </a:r>
-            <a:r>
-              <a:rPr lang="en-US" dirty="0" err="1"/>
-              <a:t>centre</a:t>
-            </a:r>
-            <a:r>
-              <a:rPr lang="en-US" dirty="0"/>
-              <a:t> around keystone species, that maintain the functioning of the community as a whole. </a:t>
+              <a:t>Increased dispersal limitation and variable selection for abundant taxa.</a:t>
             </a:r>
           </a:p>
         </p:txBody>
@@ -23563,7 +24242,7 @@
           <a:p>
             <a:fld id="{91AE2140-D502-214A-B76B-E0784B2C949B}" type="slidenum">
               <a:rPr lang="en-US" smtClean="0"/>
-              <a:t>24</a:t>
+              <a:t>23</a:t>
             </a:fld>
             <a:endParaRPr lang="en-US"/>
           </a:p>
@@ -23572,7 +24251,7 @@
     </p:spTree>
     <p:extLst>
       <p:ext uri="{BB962C8B-B14F-4D97-AF65-F5344CB8AC3E}">
-        <p14:creationId xmlns:p14="http://schemas.microsoft.com/office/powerpoint/2010/main" val="2107534487"/>
+        <p14:creationId xmlns:p14="http://schemas.microsoft.com/office/powerpoint/2010/main" val="1369074605"/>
       </p:ext>
     </p:extLst>
   </p:cSld>
@@ -23626,77 +24305,6 @@
           <a:bodyPr/>
           <a:lstStyle/>
           <a:p>
-            <a:r>
-              <a:rPr lang="en-US" dirty="0"/>
-              <a:t>Centrality – how close is a node to the network as a whole </a:t>
-            </a:r>
-          </a:p>
-          <a:p>
-            <a:pPr marL="0" marR="0" lvl="0" indent="0" algn="l" defTabSz="914400" rtl="0" eaLnBrk="1" fontAlgn="auto" latinLnBrk="0" hangingPunct="1">
-              <a:lnSpc>
-                <a:spcPct val="100000"/>
-              </a:lnSpc>
-              <a:spcBef>
-                <a:spcPts val="0"/>
-              </a:spcBef>
-              <a:spcAft>
-                <a:spcPts val="0"/>
-              </a:spcAft>
-              <a:buClrTx/>
-              <a:buSzTx/>
-              <a:buFontTx/>
-              <a:buNone/>
-              <a:tabLst/>
-              <a:defRPr/>
-            </a:pPr>
-            <a:r>
-              <a:rPr lang="en-US" dirty="0"/>
-              <a:t>Degree Centrality – number of links connected to a node (who has the most friends?)</a:t>
-            </a:r>
-          </a:p>
-          <a:p>
-            <a:r>
-              <a:rPr lang="en-US" dirty="0"/>
-              <a:t>Closeness Centrality -  average length of the shortest path between the node and all other nodes in the graph (how long does it take me on average to reach another node)</a:t>
-            </a:r>
-          </a:p>
-          <a:p>
-            <a:r>
-              <a:rPr lang="en-US" dirty="0"/>
-              <a:t>Betweenness Centrality – the number of times a node is crossed by each of the shortest routes between nodes (between any two nodes there is a shortest distance to travel. How many shortest distances is the node of interest within?)</a:t>
-            </a:r>
-          </a:p>
-          <a:p>
-            <a:endParaRPr lang="en-US" dirty="0"/>
-          </a:p>
-          <a:p>
-            <a:r>
-              <a:rPr lang="en-US" dirty="0"/>
-              <a:t>Clustering</a:t>
-            </a:r>
-          </a:p>
-          <a:p>
-            <a:r>
-              <a:rPr lang="en-US" dirty="0"/>
-              <a:t>What groups are within the network?</a:t>
-            </a:r>
-          </a:p>
-          <a:p>
-            <a:r>
-              <a:rPr lang="en-US" dirty="0"/>
-              <a:t>Clustering coefficient – how many connections are there to other nodes, compared to the POTENTIAL number of connections to other nodes within the group?</a:t>
-            </a:r>
-          </a:p>
-          <a:p>
-            <a:r>
-              <a:rPr lang="en-US" dirty="0"/>
-              <a:t>Clustering coefficient = 1 means there is a clique, so all nodes are connected to each other in a group</a:t>
-            </a:r>
-          </a:p>
-          <a:p>
-            <a:endParaRPr lang="en-US" dirty="0"/>
-          </a:p>
-          <a:p>
             <a:endParaRPr lang="en-US" dirty="0"/>
           </a:p>
         </p:txBody>
@@ -23718,7 +24326,7 @@
           <a:p>
             <a:fld id="{91AE2140-D502-214A-B76B-E0784B2C949B}" type="slidenum">
               <a:rPr lang="en-US" smtClean="0"/>
-              <a:t>25</a:t>
+              <a:t>24</a:t>
             </a:fld>
             <a:endParaRPr lang="en-US"/>
           </a:p>
@@ -23727,7 +24335,7 @@
     </p:spTree>
     <p:extLst>
       <p:ext uri="{BB962C8B-B14F-4D97-AF65-F5344CB8AC3E}">
-        <p14:creationId xmlns:p14="http://schemas.microsoft.com/office/powerpoint/2010/main" val="553393038"/>
+        <p14:creationId xmlns:p14="http://schemas.microsoft.com/office/powerpoint/2010/main" val="2121078948"/>
       </p:ext>
     </p:extLst>
   </p:cSld>
@@ -23782,76 +24390,53 @@
           <a:lstStyle/>
           <a:p>
             <a:r>
-              <a:rPr lang="en-GB" dirty="0"/>
-              <a:t>Based on correlation analysis, for the positive co-occurrence network, 6526 edges, which depict significant and strong pairwise correlations between species (Spearman's </a:t>
-            </a:r>
-            <a:r>
-              <a:rPr lang="el-GR" i="1" dirty="0"/>
-              <a:t>ρ</a:t>
-            </a:r>
-            <a:r>
-              <a:rPr lang="el-GR" dirty="0"/>
-              <a:t> ≥ 0.6, </a:t>
-            </a:r>
-            <a:r>
-              <a:rPr lang="en-GB" i="1" dirty="0"/>
-              <a:t>P</a:t>
-            </a:r>
-            <a:r>
-              <a:rPr lang="en-GB" dirty="0"/>
-              <a:t> &lt; 0.01), were captured between 554 nodes (i.e. ASVs).</a:t>
-            </a:r>
-          </a:p>
-          <a:p>
-            <a:endParaRPr lang="en-GB" dirty="0"/>
-          </a:p>
-          <a:p>
-            <a:pPr marL="0" marR="0" lvl="0" indent="0" algn="l" defTabSz="914400" rtl="0" eaLnBrk="1" fontAlgn="auto" latinLnBrk="0" hangingPunct="1">
-              <a:lnSpc>
-                <a:spcPct val="100000"/>
-              </a:lnSpc>
-              <a:spcBef>
-                <a:spcPts val="0"/>
-              </a:spcBef>
-              <a:spcAft>
-                <a:spcPts val="0"/>
-              </a:spcAft>
-              <a:buClrTx/>
-              <a:buSzTx/>
-              <a:buFontTx/>
-              <a:buNone/>
-              <a:tabLst/>
-              <a:defRPr/>
-            </a:pPr>
-            <a:r>
-              <a:rPr lang="en-GB" dirty="0"/>
-              <a:t>Based on correlation analysis, for the negative co-occurrence network, 1780 edges, which depict significant and strong pairwise correlations between species (Spearman's </a:t>
-            </a:r>
-            <a:r>
-              <a:rPr lang="el-GR" i="1" dirty="0"/>
-              <a:t>ρ</a:t>
-            </a:r>
-            <a:r>
-              <a:rPr lang="el-GR" dirty="0"/>
-              <a:t> ≥ 0.6, </a:t>
-            </a:r>
-            <a:r>
-              <a:rPr lang="en-GB" i="1" dirty="0"/>
-              <a:t>P</a:t>
-            </a:r>
-            <a:r>
-              <a:rPr lang="en-GB" dirty="0"/>
-              <a:t> &lt; 0.01), were captured between 299 nodes (i.e. ASVs).</a:t>
-            </a:r>
-          </a:p>
-          <a:p>
-            <a:endParaRPr lang="en-GB" dirty="0"/>
-          </a:p>
-          <a:p>
-            <a:endParaRPr lang="en-GB" dirty="0"/>
+              <a:rPr lang="en-US" dirty="0"/>
+              <a:t>Whilst multivariate analysis can assist us in investigating abiotic selection, microbial community assembly is also shaped by biotic selection. </a:t>
+            </a:r>
           </a:p>
           <a:p>
             <a:endParaRPr lang="en-US" dirty="0"/>
+          </a:p>
+          <a:p>
+            <a:r>
+              <a:rPr lang="en-US" dirty="0"/>
+              <a:t>Biotic interactions may include top-down control through viral lysis and grazing, as well as microbe-microbe interactions.</a:t>
+            </a:r>
+          </a:p>
+          <a:p>
+            <a:endParaRPr lang="en-US" dirty="0"/>
+          </a:p>
+          <a:p>
+            <a:r>
+              <a:rPr lang="en-US" dirty="0"/>
+              <a:t>Due to technological restrictions, investigations of microbe-microbe interactions have typically been limited. With access to high-throughout sequencing, we can now construct co-occurrence networks in an attempt to decipher intra- and inter-specific interactions within communities.</a:t>
+            </a:r>
+          </a:p>
+          <a:p>
+            <a:endParaRPr lang="en-US" dirty="0"/>
+          </a:p>
+          <a:p>
+            <a:r>
+              <a:rPr lang="en-US" dirty="0"/>
+              <a:t>Previous research has indicated that microbial communities exhibit non-random co-occurrence patterns and module structures, suggesting that biotic selection plays a strong role in shaping community assembly.</a:t>
+            </a:r>
+          </a:p>
+          <a:p>
+            <a:endParaRPr lang="en-US" dirty="0"/>
+          </a:p>
+          <a:p>
+            <a:r>
+              <a:rPr lang="en-US" dirty="0"/>
+              <a:t>Communities may even </a:t>
+            </a:r>
+            <a:r>
+              <a:rPr lang="en-US" dirty="0" err="1"/>
+              <a:t>centre</a:t>
+            </a:r>
+            <a:r>
+              <a:rPr lang="en-US" dirty="0"/>
+              <a:t> around keystone species, that maintain the functioning of the community as a whole. </a:t>
+            </a:r>
           </a:p>
         </p:txBody>
       </p:sp>
@@ -23872,7 +24457,7 @@
           <a:p>
             <a:fld id="{91AE2140-D502-214A-B76B-E0784B2C949B}" type="slidenum">
               <a:rPr lang="en-US" smtClean="0"/>
-              <a:t>26</a:t>
+              <a:t>25</a:t>
             </a:fld>
             <a:endParaRPr lang="en-US"/>
           </a:p>
@@ -23881,7 +24466,7 @@
     </p:spTree>
     <p:extLst>
       <p:ext uri="{BB962C8B-B14F-4D97-AF65-F5344CB8AC3E}">
-        <p14:creationId xmlns:p14="http://schemas.microsoft.com/office/powerpoint/2010/main" val="301421177"/>
+        <p14:creationId xmlns:p14="http://schemas.microsoft.com/office/powerpoint/2010/main" val="2107534487"/>
       </p:ext>
     </p:extLst>
   </p:cSld>
@@ -23937,54 +24522,75 @@
           <a:p>
             <a:r>
               <a:rPr lang="en-US" dirty="0"/>
-              <a:t>Packages:</a:t>
-            </a:r>
-          </a:p>
-          <a:p>
+              <a:t>Centrality – how close is a node to the network as a whole </a:t>
+            </a:r>
+          </a:p>
+          <a:p>
+            <a:pPr marL="0" marR="0" lvl="0" indent="0" algn="l" defTabSz="914400" rtl="0" eaLnBrk="1" fontAlgn="auto" latinLnBrk="0" hangingPunct="1">
+              <a:lnSpc>
+                <a:spcPct val="100000"/>
+              </a:lnSpc>
+              <a:spcBef>
+                <a:spcPts val="0"/>
+              </a:spcBef>
+              <a:spcAft>
+                <a:spcPts val="0"/>
+              </a:spcAft>
+              <a:buClrTx/>
+              <a:buSzTx/>
+              <a:buFontTx/>
+              <a:buNone/>
+              <a:tabLst/>
+              <a:defRPr/>
+            </a:pPr>
             <a:r>
               <a:rPr lang="en-US" dirty="0"/>
-              <a:t>Vegan</a:t>
-            </a:r>
-          </a:p>
-          <a:p>
-            <a:r>
-              <a:rPr lang="en-US" dirty="0" err="1"/>
-              <a:t>Igraph</a:t>
-            </a:r>
+              <a:t>Degree Centrality – number of links connected to a node (who has the most friends?)</a:t>
+            </a:r>
+          </a:p>
+          <a:p>
+            <a:r>
+              <a:rPr lang="en-US" dirty="0"/>
+              <a:t>Closeness Centrality -  average length of the shortest path between the node and all other nodes in the graph (how long does it take me on average to reach another node)</a:t>
+            </a:r>
+          </a:p>
+          <a:p>
+            <a:r>
+              <a:rPr lang="en-US" dirty="0"/>
+              <a:t>Betweenness Centrality – the number of times a node is crossed by each of the shortest routes between nodes (between any two nodes there is a shortest distance to travel. How many shortest distances is the node of interest within?)</a:t>
+            </a:r>
+          </a:p>
+          <a:p>
             <a:endParaRPr lang="en-US" dirty="0"/>
           </a:p>
           <a:p>
             <a:r>
-              <a:rPr lang="en-US" dirty="0" err="1"/>
-              <a:t>Hmisc</a:t>
-            </a:r>
+              <a:rPr lang="en-US" dirty="0"/>
+              <a:t>Clustering</a:t>
+            </a:r>
+          </a:p>
+          <a:p>
+            <a:r>
+              <a:rPr lang="en-US" dirty="0"/>
+              <a:t>What groups are within the network?</a:t>
+            </a:r>
+          </a:p>
+          <a:p>
+            <a:r>
+              <a:rPr lang="en-US" dirty="0"/>
+              <a:t>Clustering coefficient – how many connections are there to other nodes, compared to the POTENTIAL number of connections to other nodes within the group?</a:t>
+            </a:r>
+          </a:p>
+          <a:p>
+            <a:r>
+              <a:rPr lang="en-US" dirty="0"/>
+              <a:t>Clustering coefficient = 1 means there is a clique, so all nodes are connected to each other in a group</a:t>
+            </a:r>
+          </a:p>
+          <a:p>
             <a:endParaRPr lang="en-US" dirty="0"/>
           </a:p>
           <a:p>
-            <a:endParaRPr lang="en-US" dirty="0"/>
-          </a:p>
-          <a:p>
-            <a:r>
-              <a:rPr lang="en-US" dirty="0"/>
-              <a:t>1) Defines functions for co-occurrence network analysis. Function needs a matrix with samples as columns and ASVs as rows, as well as the </a:t>
-            </a:r>
-            <a:r>
-              <a:rPr lang="en-GB" dirty="0" err="1"/>
-              <a:t>cutoffs</a:t>
-            </a:r>
-            <a:r>
-              <a:rPr lang="en-GB" dirty="0"/>
-              <a:t> for clustering coefficient and cut off for FDR-adjusted P-value. </a:t>
-            </a:r>
-          </a:p>
-          <a:p>
-            <a:endParaRPr lang="en-GB" dirty="0"/>
-          </a:p>
-          <a:p>
-            <a:r>
-              <a:rPr lang="en-GB" dirty="0"/>
-              <a:t>2) </a:t>
-            </a:r>
             <a:endParaRPr lang="en-US" dirty="0"/>
           </a:p>
         </p:txBody>
@@ -24006,7 +24612,7 @@
           <a:p>
             <a:fld id="{91AE2140-D502-214A-B76B-E0784B2C949B}" type="slidenum">
               <a:rPr lang="en-US" smtClean="0"/>
-              <a:t>27</a:t>
+              <a:t>26</a:t>
             </a:fld>
             <a:endParaRPr lang="en-US"/>
           </a:p>
@@ -24015,7 +24621,7 @@
     </p:spTree>
     <p:extLst>
       <p:ext uri="{BB962C8B-B14F-4D97-AF65-F5344CB8AC3E}">
-        <p14:creationId xmlns:p14="http://schemas.microsoft.com/office/powerpoint/2010/main" val="1986868823"/>
+        <p14:creationId xmlns:p14="http://schemas.microsoft.com/office/powerpoint/2010/main" val="553393038"/>
       </p:ext>
     </p:extLst>
   </p:cSld>
@@ -24166,7 +24772,7 @@
           <a:p>
             <a:fld id="{91AE2140-D502-214A-B76B-E0784B2C949B}" type="slidenum">
               <a:rPr lang="en-US" smtClean="0"/>
-              <a:t>4</a:t>
+              <a:t>5</a:t>
             </a:fld>
             <a:endParaRPr lang="en-US"/>
           </a:p>
@@ -24176,6 +24782,294 @@
     <p:extLst>
       <p:ext uri="{BB962C8B-B14F-4D97-AF65-F5344CB8AC3E}">
         <p14:creationId xmlns:p14="http://schemas.microsoft.com/office/powerpoint/2010/main" val="29509610"/>
+      </p:ext>
+    </p:extLst>
+  </p:cSld>
+  <p:clrMapOvr>
+    <a:masterClrMapping/>
+  </p:clrMapOvr>
+</p:notes>
+</file>
+
+<file path=ppt/notesSlides/notesSlide20.xml><?xml version="1.0" encoding="utf-8"?>
+<p:notes xmlns:a="http://schemas.openxmlformats.org/drawingml/2006/main" xmlns:r="http://schemas.openxmlformats.org/officeDocument/2006/relationships" xmlns:p="http://schemas.openxmlformats.org/presentationml/2006/main">
+  <p:cSld>
+    <p:spTree>
+      <p:nvGrpSpPr>
+        <p:cNvPr id="1" name=""/>
+        <p:cNvGrpSpPr/>
+        <p:nvPr/>
+      </p:nvGrpSpPr>
+      <p:grpSpPr>
+        <a:xfrm>
+          <a:off x="0" y="0"/>
+          <a:ext cx="0" cy="0"/>
+          <a:chOff x="0" y="0"/>
+          <a:chExt cx="0" cy="0"/>
+        </a:xfrm>
+      </p:grpSpPr>
+      <p:sp>
+        <p:nvSpPr>
+          <p:cNvPr id="2" name="Slide Image Placeholder 1"/>
+          <p:cNvSpPr>
+            <a:spLocks noGrp="1" noRot="1" noChangeAspect="1"/>
+          </p:cNvSpPr>
+          <p:nvPr>
+            <p:ph type="sldImg"/>
+          </p:nvPr>
+        </p:nvSpPr>
+        <p:spPr/>
+      </p:sp>
+      <p:sp>
+        <p:nvSpPr>
+          <p:cNvPr id="3" name="Notes Placeholder 2"/>
+          <p:cNvSpPr>
+            <a:spLocks noGrp="1"/>
+          </p:cNvSpPr>
+          <p:nvPr>
+            <p:ph type="body" idx="1"/>
+          </p:nvPr>
+        </p:nvSpPr>
+        <p:spPr/>
+        <p:txBody>
+          <a:bodyPr/>
+          <a:lstStyle/>
+          <a:p>
+            <a:r>
+              <a:rPr lang="en-GB" dirty="0"/>
+              <a:t>Based on correlation analysis, for the positive co-occurrence network, 6526 edges, which depict significant and strong pairwise correlations between species (Spearman's </a:t>
+            </a:r>
+            <a:r>
+              <a:rPr lang="el-GR" i="1" dirty="0"/>
+              <a:t>ρ</a:t>
+            </a:r>
+            <a:r>
+              <a:rPr lang="el-GR" dirty="0"/>
+              <a:t> ≥ 0.6, </a:t>
+            </a:r>
+            <a:r>
+              <a:rPr lang="en-GB" i="1" dirty="0"/>
+              <a:t>P</a:t>
+            </a:r>
+            <a:r>
+              <a:rPr lang="en-GB" dirty="0"/>
+              <a:t> &lt; 0.01), were captured between 554 nodes (i.e. ASVs).</a:t>
+            </a:r>
+          </a:p>
+          <a:p>
+            <a:endParaRPr lang="en-GB" dirty="0"/>
+          </a:p>
+          <a:p>
+            <a:pPr marL="0" marR="0" lvl="0" indent="0" algn="l" defTabSz="914400" rtl="0" eaLnBrk="1" fontAlgn="auto" latinLnBrk="0" hangingPunct="1">
+              <a:lnSpc>
+                <a:spcPct val="100000"/>
+              </a:lnSpc>
+              <a:spcBef>
+                <a:spcPts val="0"/>
+              </a:spcBef>
+              <a:spcAft>
+                <a:spcPts val="0"/>
+              </a:spcAft>
+              <a:buClrTx/>
+              <a:buSzTx/>
+              <a:buFontTx/>
+              <a:buNone/>
+              <a:tabLst/>
+              <a:defRPr/>
+            </a:pPr>
+            <a:r>
+              <a:rPr lang="en-GB" dirty="0"/>
+              <a:t>Based on correlation analysis, for the negative co-occurrence network, 1780 edges, which depict significant and strong pairwise correlations between species (Spearman's </a:t>
+            </a:r>
+            <a:r>
+              <a:rPr lang="el-GR" i="1" dirty="0"/>
+              <a:t>ρ</a:t>
+            </a:r>
+            <a:r>
+              <a:rPr lang="el-GR" dirty="0"/>
+              <a:t> ≥ 0.6, </a:t>
+            </a:r>
+            <a:r>
+              <a:rPr lang="en-GB" i="1" dirty="0"/>
+              <a:t>P</a:t>
+            </a:r>
+            <a:r>
+              <a:rPr lang="en-GB" dirty="0"/>
+              <a:t> &lt; 0.01), were captured between 299 nodes (i.e. ASVs).</a:t>
+            </a:r>
+          </a:p>
+          <a:p>
+            <a:endParaRPr lang="en-GB" dirty="0"/>
+          </a:p>
+          <a:p>
+            <a:endParaRPr lang="en-GB" dirty="0"/>
+          </a:p>
+          <a:p>
+            <a:endParaRPr lang="en-US" dirty="0"/>
+          </a:p>
+        </p:txBody>
+      </p:sp>
+      <p:sp>
+        <p:nvSpPr>
+          <p:cNvPr id="4" name="Slide Number Placeholder 3"/>
+          <p:cNvSpPr>
+            <a:spLocks noGrp="1"/>
+          </p:cNvSpPr>
+          <p:nvPr>
+            <p:ph type="sldNum" sz="quarter" idx="5"/>
+          </p:nvPr>
+        </p:nvSpPr>
+        <p:spPr/>
+        <p:txBody>
+          <a:bodyPr/>
+          <a:lstStyle/>
+          <a:p>
+            <a:fld id="{91AE2140-D502-214A-B76B-E0784B2C949B}" type="slidenum">
+              <a:rPr lang="en-US" smtClean="0"/>
+              <a:t>27</a:t>
+            </a:fld>
+            <a:endParaRPr lang="en-US"/>
+          </a:p>
+        </p:txBody>
+      </p:sp>
+    </p:spTree>
+    <p:extLst>
+      <p:ext uri="{BB962C8B-B14F-4D97-AF65-F5344CB8AC3E}">
+        <p14:creationId xmlns:p14="http://schemas.microsoft.com/office/powerpoint/2010/main" val="301421177"/>
+      </p:ext>
+    </p:extLst>
+  </p:cSld>
+  <p:clrMapOvr>
+    <a:masterClrMapping/>
+  </p:clrMapOvr>
+</p:notes>
+</file>
+
+<file path=ppt/notesSlides/notesSlide21.xml><?xml version="1.0" encoding="utf-8"?>
+<p:notes xmlns:a="http://schemas.openxmlformats.org/drawingml/2006/main" xmlns:r="http://schemas.openxmlformats.org/officeDocument/2006/relationships" xmlns:p="http://schemas.openxmlformats.org/presentationml/2006/main">
+  <p:cSld>
+    <p:spTree>
+      <p:nvGrpSpPr>
+        <p:cNvPr id="1" name=""/>
+        <p:cNvGrpSpPr/>
+        <p:nvPr/>
+      </p:nvGrpSpPr>
+      <p:grpSpPr>
+        <a:xfrm>
+          <a:off x="0" y="0"/>
+          <a:ext cx="0" cy="0"/>
+          <a:chOff x="0" y="0"/>
+          <a:chExt cx="0" cy="0"/>
+        </a:xfrm>
+      </p:grpSpPr>
+      <p:sp>
+        <p:nvSpPr>
+          <p:cNvPr id="2" name="Slide Image Placeholder 1"/>
+          <p:cNvSpPr>
+            <a:spLocks noGrp="1" noRot="1" noChangeAspect="1"/>
+          </p:cNvSpPr>
+          <p:nvPr>
+            <p:ph type="sldImg"/>
+          </p:nvPr>
+        </p:nvSpPr>
+        <p:spPr/>
+      </p:sp>
+      <p:sp>
+        <p:nvSpPr>
+          <p:cNvPr id="3" name="Notes Placeholder 2"/>
+          <p:cNvSpPr>
+            <a:spLocks noGrp="1"/>
+          </p:cNvSpPr>
+          <p:nvPr>
+            <p:ph type="body" idx="1"/>
+          </p:nvPr>
+        </p:nvSpPr>
+        <p:spPr/>
+        <p:txBody>
+          <a:bodyPr/>
+          <a:lstStyle/>
+          <a:p>
+            <a:r>
+              <a:rPr lang="en-US" dirty="0"/>
+              <a:t>Packages:</a:t>
+            </a:r>
+          </a:p>
+          <a:p>
+            <a:r>
+              <a:rPr lang="en-US" dirty="0"/>
+              <a:t>Vegan</a:t>
+            </a:r>
+          </a:p>
+          <a:p>
+            <a:r>
+              <a:rPr lang="en-US" dirty="0" err="1"/>
+              <a:t>Igraph</a:t>
+            </a:r>
+            <a:endParaRPr lang="en-US" dirty="0"/>
+          </a:p>
+          <a:p>
+            <a:r>
+              <a:rPr lang="en-US" dirty="0" err="1"/>
+              <a:t>Hmisc</a:t>
+            </a:r>
+            <a:endParaRPr lang="en-US" dirty="0"/>
+          </a:p>
+          <a:p>
+            <a:endParaRPr lang="en-US" dirty="0"/>
+          </a:p>
+          <a:p>
+            <a:r>
+              <a:rPr lang="en-US" dirty="0"/>
+              <a:t>1) Defines functions for co-occurrence network analysis. Function needs a matrix with samples as columns and ASVs as rows, as well as the </a:t>
+            </a:r>
+            <a:r>
+              <a:rPr lang="en-GB" dirty="0" err="1"/>
+              <a:t>cutoffs</a:t>
+            </a:r>
+            <a:r>
+              <a:rPr lang="en-GB" dirty="0"/>
+              <a:t> for clustering coefficient and cut off for FDR-adjusted P-value. </a:t>
+            </a:r>
+          </a:p>
+          <a:p>
+            <a:endParaRPr lang="en-GB" dirty="0"/>
+          </a:p>
+          <a:p>
+            <a:r>
+              <a:rPr lang="en-GB" dirty="0"/>
+              <a:t>2) </a:t>
+            </a:r>
+            <a:endParaRPr lang="en-US" dirty="0"/>
+          </a:p>
+        </p:txBody>
+      </p:sp>
+      <p:sp>
+        <p:nvSpPr>
+          <p:cNvPr id="4" name="Slide Number Placeholder 3"/>
+          <p:cNvSpPr>
+            <a:spLocks noGrp="1"/>
+          </p:cNvSpPr>
+          <p:nvPr>
+            <p:ph type="sldNum" sz="quarter" idx="5"/>
+          </p:nvPr>
+        </p:nvSpPr>
+        <p:spPr/>
+        <p:txBody>
+          <a:bodyPr/>
+          <a:lstStyle/>
+          <a:p>
+            <a:fld id="{91AE2140-D502-214A-B76B-E0784B2C949B}" type="slidenum">
+              <a:rPr lang="en-US" smtClean="0"/>
+              <a:t>28</a:t>
+            </a:fld>
+            <a:endParaRPr lang="en-US"/>
+          </a:p>
+        </p:txBody>
+      </p:sp>
+    </p:spTree>
+    <p:extLst>
+      <p:ext uri="{BB962C8B-B14F-4D97-AF65-F5344CB8AC3E}">
+        <p14:creationId xmlns:p14="http://schemas.microsoft.com/office/powerpoint/2010/main" val="1986868823"/>
       </p:ext>
     </p:extLst>
   </p:cSld>
@@ -24953,7 +25847,7 @@
           <a:p>
             <a:fld id="{91AE2140-D502-214A-B76B-E0784B2C949B}" type="slidenum">
               <a:rPr lang="en-US" smtClean="0"/>
-              <a:t>5</a:t>
+              <a:t>6</a:t>
             </a:fld>
             <a:endParaRPr lang="en-US"/>
           </a:p>
@@ -25037,7 +25931,7 @@
           <a:p>
             <a:fld id="{91AE2140-D502-214A-B76B-E0784B2C949B}" type="slidenum">
               <a:rPr lang="en-US" smtClean="0"/>
-              <a:t>6</a:t>
+              <a:t>7</a:t>
             </a:fld>
             <a:endParaRPr lang="en-US"/>
           </a:p>
@@ -25167,7 +26061,7 @@
           <a:p>
             <a:fld id="{91AE2140-D502-214A-B76B-E0784B2C949B}" type="slidenum">
               <a:rPr lang="en-US" smtClean="0"/>
-              <a:t>8</a:t>
+              <a:t>9</a:t>
             </a:fld>
             <a:endParaRPr lang="en-US"/>
           </a:p>
@@ -25257,6 +26151,15 @@
               <a:t>I used permutational multivariate analysis of variance (PERMANOVA) to find if community composition significantly varied between glaciers using 999 permutations</a:t>
             </a:r>
           </a:p>
+          <a:p>
+            <a:endParaRPr lang="en-US" dirty="0"/>
+          </a:p>
+          <a:p>
+            <a:r>
+              <a:rPr lang="en-US" dirty="0"/>
+              <a:t>Estimates of beta diversity based on phylogenetic dissimilarity show significant variation between glaciers.</a:t>
+            </a:r>
+          </a:p>
         </p:txBody>
       </p:sp>
       <p:sp>
@@ -25276,7 +26179,7 @@
           <a:p>
             <a:fld id="{91AE2140-D502-214A-B76B-E0784B2C949B}" type="slidenum">
               <a:rPr lang="en-US" smtClean="0"/>
-              <a:t>9</a:t>
+              <a:t>10</a:t>
             </a:fld>
             <a:endParaRPr lang="en-US"/>
           </a:p>
@@ -25455,7 +26358,7 @@
           <a:p>
             <a:fld id="{91AE2140-D502-214A-B76B-E0784B2C949B}" type="slidenum">
               <a:rPr lang="en-US" smtClean="0"/>
-              <a:t>12</a:t>
+              <a:t>13</a:t>
             </a:fld>
             <a:endParaRPr lang="en-US"/>
           </a:p>
@@ -25542,7 +26445,7 @@
           <a:p>
             <a:fld id="{91AE2140-D502-214A-B76B-E0784B2C949B}" type="slidenum">
               <a:rPr lang="en-US" smtClean="0"/>
-              <a:t>13</a:t>
+              <a:t>14</a:t>
             </a:fld>
             <a:endParaRPr lang="en-US"/>
           </a:p>
@@ -25607,15 +26510,83 @@
           <a:p>
             <a:r>
               <a:rPr lang="en-US" dirty="0"/>
-              <a:t>DDR doesn’t work for this dataset as most of the holes are reported to have the same long </a:t>
-            </a:r>
-            <a:r>
-              <a:rPr lang="en-US" dirty="0" err="1"/>
-              <a:t>lat</a:t>
-            </a:r>
-            <a:r>
-              <a:rPr lang="en-US" dirty="0"/>
-              <a:t> coordinates.</a:t>
+              <a:t>Sloan et al., (2006)</a:t>
+            </a:r>
+          </a:p>
+          <a:p>
+            <a:r>
+              <a:rPr lang="en-US" i="1" dirty="0"/>
+              <a:t>‘The microbial world is hard to observe. It is only recently</a:t>
+            </a:r>
+          </a:p>
+          <a:p>
+            <a:r>
+              <a:rPr lang="en-US" i="1" dirty="0"/>
+              <a:t>that the techniques in microbial ecology have advanced</a:t>
+            </a:r>
+          </a:p>
+          <a:p>
+            <a:r>
+              <a:rPr lang="en-US" i="1" dirty="0"/>
+              <a:t>to the point that patterns such as species area curves</a:t>
+            </a:r>
+          </a:p>
+          <a:p>
+            <a:r>
+              <a:rPr lang="en-US" i="1" dirty="0"/>
+              <a:t>have been reported for prokaryotic communities (Green</a:t>
+            </a:r>
+          </a:p>
+          <a:p>
+            <a:r>
+              <a:rPr lang="en-US" i="1" dirty="0"/>
+              <a:t>et al</a:t>
+            </a:r>
+          </a:p>
+          <a:p>
+            <a:r>
+              <a:rPr lang="en-US" i="1" dirty="0"/>
+              <a:t>., 2004; Horner-Devine </a:t>
+            </a:r>
+          </a:p>
+          <a:p>
+            <a:r>
+              <a:rPr lang="en-US" i="1" dirty="0"/>
+              <a:t>et al</a:t>
+            </a:r>
+          </a:p>
+          <a:p>
+            <a:r>
+              <a:rPr lang="en-US" i="1" dirty="0"/>
+              <a:t>., 2004), at least 83 years</a:t>
+            </a:r>
+          </a:p>
+          <a:p>
+            <a:r>
+              <a:rPr lang="en-US" i="1" dirty="0"/>
+              <a:t>after the observation was ﬁrst made in communities of</a:t>
+            </a:r>
+          </a:p>
+          <a:p>
+            <a:r>
+              <a:rPr lang="en-US" i="1" dirty="0" err="1"/>
+              <a:t>arger</a:t>
+            </a:r>
+            <a:r>
+              <a:rPr lang="en-US" i="1" dirty="0"/>
+              <a:t> organisms. Species area curves led directly to the</a:t>
+            </a:r>
+          </a:p>
+          <a:p>
+            <a:r>
+              <a:rPr lang="en-US" i="1" dirty="0"/>
+              <a:t>development of the ﬁrst theories of community assembly</a:t>
+            </a:r>
+          </a:p>
+          <a:p>
+            <a:r>
+              <a:rPr lang="en-US" i="1" dirty="0"/>
+              <a:t>(MacArthur and Wilson, 1967). ‘</a:t>
             </a:r>
           </a:p>
         </p:txBody>
@@ -25646,7 +26617,7 @@
     </p:spTree>
     <p:extLst>
       <p:ext uri="{BB962C8B-B14F-4D97-AF65-F5344CB8AC3E}">
-        <p14:creationId xmlns:p14="http://schemas.microsoft.com/office/powerpoint/2010/main" val="2176052354"/>
+        <p14:creationId xmlns:p14="http://schemas.microsoft.com/office/powerpoint/2010/main" val="776258569"/>
       </p:ext>
     </p:extLst>
   </p:cSld>
@@ -25803,7 +26774,7 @@
           <a:p>
             <a:fld id="{630F8F96-A0AC-FA40-A1E6-5325FF9AFD7F}" type="datetimeFigureOut">
               <a:rPr lang="en-US" smtClean="0"/>
-              <a:t>4/20/21</a:t>
+              <a:t>4/22/21</a:t>
             </a:fld>
             <a:endParaRPr lang="en-US"/>
           </a:p>
@@ -26001,7 +26972,7 @@
           <a:p>
             <a:fld id="{630F8F96-A0AC-FA40-A1E6-5325FF9AFD7F}" type="datetimeFigureOut">
               <a:rPr lang="en-US" smtClean="0"/>
-              <a:t>4/20/21</a:t>
+              <a:t>4/22/21</a:t>
             </a:fld>
             <a:endParaRPr lang="en-US"/>
           </a:p>
@@ -26209,7 +27180,7 @@
           <a:p>
             <a:fld id="{630F8F96-A0AC-FA40-A1E6-5325FF9AFD7F}" type="datetimeFigureOut">
               <a:rPr lang="en-US" smtClean="0"/>
-              <a:t>4/20/21</a:t>
+              <a:t>4/22/21</a:t>
             </a:fld>
             <a:endParaRPr lang="en-US"/>
           </a:p>
@@ -26407,7 +27378,7 @@
           <a:p>
             <a:fld id="{630F8F96-A0AC-FA40-A1E6-5325FF9AFD7F}" type="datetimeFigureOut">
               <a:rPr lang="en-US" smtClean="0"/>
-              <a:t>4/20/21</a:t>
+              <a:t>4/22/21</a:t>
             </a:fld>
             <a:endParaRPr lang="en-US"/>
           </a:p>
@@ -26682,7 +27653,7 @@
           <a:p>
             <a:fld id="{630F8F96-A0AC-FA40-A1E6-5325FF9AFD7F}" type="datetimeFigureOut">
               <a:rPr lang="en-US" smtClean="0"/>
-              <a:t>4/20/21</a:t>
+              <a:t>4/22/21</a:t>
             </a:fld>
             <a:endParaRPr lang="en-US"/>
           </a:p>
@@ -26947,7 +27918,7 @@
           <a:p>
             <a:fld id="{630F8F96-A0AC-FA40-A1E6-5325FF9AFD7F}" type="datetimeFigureOut">
               <a:rPr lang="en-US" smtClean="0"/>
-              <a:t>4/20/21</a:t>
+              <a:t>4/22/21</a:t>
             </a:fld>
             <a:endParaRPr lang="en-US"/>
           </a:p>
@@ -27359,7 +28330,7 @@
           <a:p>
             <a:fld id="{630F8F96-A0AC-FA40-A1E6-5325FF9AFD7F}" type="datetimeFigureOut">
               <a:rPr lang="en-US" smtClean="0"/>
-              <a:t>4/20/21</a:t>
+              <a:t>4/22/21</a:t>
             </a:fld>
             <a:endParaRPr lang="en-US"/>
           </a:p>
@@ -27500,7 +28471,7 @@
           <a:p>
             <a:fld id="{630F8F96-A0AC-FA40-A1E6-5325FF9AFD7F}" type="datetimeFigureOut">
               <a:rPr lang="en-US" smtClean="0"/>
-              <a:t>4/20/21</a:t>
+              <a:t>4/22/21</a:t>
             </a:fld>
             <a:endParaRPr lang="en-US"/>
           </a:p>
@@ -27613,7 +28584,7 @@
           <a:p>
             <a:fld id="{630F8F96-A0AC-FA40-A1E6-5325FF9AFD7F}" type="datetimeFigureOut">
               <a:rPr lang="en-US" smtClean="0"/>
-              <a:t>4/20/21</a:t>
+              <a:t>4/22/21</a:t>
             </a:fld>
             <a:endParaRPr lang="en-US"/>
           </a:p>
@@ -27924,7 +28895,7 @@
           <a:p>
             <a:fld id="{630F8F96-A0AC-FA40-A1E6-5325FF9AFD7F}" type="datetimeFigureOut">
               <a:rPr lang="en-US" smtClean="0"/>
-              <a:t>4/20/21</a:t>
+              <a:t>4/22/21</a:t>
             </a:fld>
             <a:endParaRPr lang="en-US"/>
           </a:p>
@@ -28212,7 +29183,7 @@
           <a:p>
             <a:fld id="{630F8F96-A0AC-FA40-A1E6-5325FF9AFD7F}" type="datetimeFigureOut">
               <a:rPr lang="en-US" smtClean="0"/>
-              <a:t>4/20/21</a:t>
+              <a:t>4/22/21</a:t>
             </a:fld>
             <a:endParaRPr lang="en-US"/>
           </a:p>
@@ -28453,7 +29424,7 @@
           <a:p>
             <a:fld id="{630F8F96-A0AC-FA40-A1E6-5325FF9AFD7F}" type="datetimeFigureOut">
               <a:rPr lang="en-US" smtClean="0"/>
-              <a:t>4/20/21</a:t>
+              <a:t>4/22/21</a:t>
             </a:fld>
             <a:endParaRPr lang="en-US"/>
           </a:p>
@@ -28978,6 +29949,177 @@
           <p:cNvPr id="2" name="Title 1">
             <a:extLst>
               <a:ext uri="{FF2B5EF4-FFF2-40B4-BE49-F238E27FC236}">
+                <a16:creationId xmlns:a16="http://schemas.microsoft.com/office/drawing/2014/main" id="{B782A0EB-033A-2548-B24B-9258C1B51CB6}"/>
+              </a:ext>
+            </a:extLst>
+          </p:cNvPr>
+          <p:cNvSpPr>
+            <a:spLocks noGrp="1"/>
+          </p:cNvSpPr>
+          <p:nvPr>
+            <p:ph type="title"/>
+          </p:nvPr>
+        </p:nvSpPr>
+        <p:spPr>
+          <a:solidFill>
+            <a:srgbClr val="FFC003"/>
+          </a:solidFill>
+        </p:spPr>
+        <p:txBody>
+          <a:bodyPr/>
+          <a:lstStyle/>
+          <a:p>
+            <a:r>
+              <a:rPr lang="en-US" dirty="0">
+                <a:solidFill>
+                  <a:schemeClr val="bg1"/>
+                </a:solidFill>
+              </a:rPr>
+              <a:t>Beta Diversity &amp; Ordination: Weighted </a:t>
+            </a:r>
+            <a:r>
+              <a:rPr lang="en-US" dirty="0" err="1">
+                <a:solidFill>
+                  <a:schemeClr val="bg1"/>
+                </a:solidFill>
+              </a:rPr>
+              <a:t>UniFrac</a:t>
+            </a:r>
+            <a:endParaRPr lang="en-US" dirty="0">
+              <a:solidFill>
+                <a:schemeClr val="bg1"/>
+              </a:solidFill>
+            </a:endParaRPr>
+          </a:p>
+        </p:txBody>
+      </p:sp>
+      <p:sp>
+        <p:nvSpPr>
+          <p:cNvPr id="3" name="Content Placeholder 2">
+            <a:extLst>
+              <a:ext uri="{FF2B5EF4-FFF2-40B4-BE49-F238E27FC236}">
+                <a16:creationId xmlns:a16="http://schemas.microsoft.com/office/drawing/2014/main" id="{AA3D5702-1A30-E248-80BA-2F3C6F41D3BA}"/>
+              </a:ext>
+            </a:extLst>
+          </p:cNvPr>
+          <p:cNvSpPr>
+            <a:spLocks noGrp="1"/>
+          </p:cNvSpPr>
+          <p:nvPr>
+            <p:ph idx="1"/>
+          </p:nvPr>
+        </p:nvSpPr>
+        <p:spPr>
+          <a:xfrm>
+            <a:off x="838200" y="5786437"/>
+            <a:ext cx="10515600" cy="800101"/>
+          </a:xfrm>
+        </p:spPr>
+        <p:txBody>
+          <a:bodyPr>
+            <a:normAutofit fontScale="92500" lnSpcReduction="10000"/>
+          </a:bodyPr>
+          <a:lstStyle/>
+          <a:p>
+            <a:pPr marL="0" indent="0" algn="ctr">
+              <a:buNone/>
+            </a:pPr>
+            <a:r>
+              <a:rPr lang="en-US" sz="2000" dirty="0"/>
+              <a:t>Figure : Beta diversity calculated using weighted </a:t>
+            </a:r>
+            <a:r>
+              <a:rPr lang="en-US" sz="2000" dirty="0" err="1"/>
+              <a:t>UniFrac</a:t>
+            </a:r>
+            <a:r>
+              <a:rPr lang="en-US" sz="2000" dirty="0"/>
+              <a:t> distances, visualized use </a:t>
+            </a:r>
+            <a:r>
+              <a:rPr lang="en-US" sz="2000" dirty="0" err="1"/>
+              <a:t>PCoA</a:t>
+            </a:r>
+            <a:r>
+              <a:rPr lang="en-US" sz="2000" dirty="0"/>
+              <a:t> (blue is Taylor Glacier and orange is Canada Glacier). This plot shows significant beta diversity variation between glaciers (PERMANOVA: F = 12.539, </a:t>
+            </a:r>
+            <a:r>
+              <a:rPr lang="en-US" sz="2000" dirty="0" err="1"/>
+              <a:t>df</a:t>
+            </a:r>
+            <a:r>
+              <a:rPr lang="en-US" sz="2000" dirty="0"/>
+              <a:t>=1, P = 0.0001).</a:t>
+            </a:r>
+          </a:p>
+        </p:txBody>
+      </p:sp>
+      <p:pic>
+        <p:nvPicPr>
+          <p:cNvPr id="5" name="Picture 4">
+            <a:extLst>
+              <a:ext uri="{FF2B5EF4-FFF2-40B4-BE49-F238E27FC236}">
+                <a16:creationId xmlns:a16="http://schemas.microsoft.com/office/drawing/2014/main" id="{9C1FC389-8FED-4D4B-AE7E-C8C819B547F0}"/>
+              </a:ext>
+            </a:extLst>
+          </p:cNvPr>
+          <p:cNvPicPr>
+            <a:picLocks noChangeAspect="1"/>
+          </p:cNvPicPr>
+          <p:nvPr/>
+        </p:nvPicPr>
+        <p:blipFill>
+          <a:blip r:embed="rId3"/>
+          <a:stretch>
+            <a:fillRect/>
+          </a:stretch>
+        </p:blipFill>
+        <p:spPr>
+          <a:xfrm>
+            <a:off x="2438400" y="1909762"/>
+            <a:ext cx="7315200" cy="3657600"/>
+          </a:xfrm>
+          <a:prstGeom prst="rect">
+            <a:avLst/>
+          </a:prstGeom>
+        </p:spPr>
+      </p:pic>
+    </p:spTree>
+    <p:extLst>
+      <p:ext uri="{BB962C8B-B14F-4D97-AF65-F5344CB8AC3E}">
+        <p14:creationId xmlns:p14="http://schemas.microsoft.com/office/powerpoint/2010/main" val="495349475"/>
+      </p:ext>
+    </p:extLst>
+  </p:cSld>
+  <p:clrMapOvr>
+    <a:masterClrMapping/>
+  </p:clrMapOvr>
+</p:sld>
+</file>
+
+<file path=ppt/slides/slide11.xml><?xml version="1.0" encoding="utf-8"?>
+<p:sld xmlns:a="http://schemas.openxmlformats.org/drawingml/2006/main" xmlns:r="http://schemas.openxmlformats.org/officeDocument/2006/relationships" xmlns:p="http://schemas.openxmlformats.org/presentationml/2006/main">
+  <p:cSld>
+    <p:spTree>
+      <p:nvGrpSpPr>
+        <p:cNvPr id="1" name=""/>
+        <p:cNvGrpSpPr/>
+        <p:nvPr/>
+      </p:nvGrpSpPr>
+      <p:grpSpPr>
+        <a:xfrm>
+          <a:off x="0" y="0"/>
+          <a:ext cx="0" cy="0"/>
+          <a:chOff x="0" y="0"/>
+          <a:chExt cx="0" cy="0"/>
+        </a:xfrm>
+      </p:grpSpPr>
+      <p:sp>
+        <p:nvSpPr>
+          <p:cNvPr id="2" name="Title 1">
+            <a:extLst>
+              <a:ext uri="{FF2B5EF4-FFF2-40B4-BE49-F238E27FC236}">
                 <a16:creationId xmlns:a16="http://schemas.microsoft.com/office/drawing/2014/main" id="{BF697597-8752-BB4F-8014-E3B32D5A4471}"/>
               </a:ext>
             </a:extLst>
@@ -29123,7 +30265,7 @@
 </p:sld>
 </file>
 
-<file path=ppt/slides/slide11.xml><?xml version="1.0" encoding="utf-8"?>
+<file path=ppt/slides/slide12.xml><?xml version="1.0" encoding="utf-8"?>
 <p:sld xmlns:a="http://schemas.openxmlformats.org/drawingml/2006/main" xmlns:r="http://schemas.openxmlformats.org/officeDocument/2006/relationships" xmlns:p="http://schemas.openxmlformats.org/presentationml/2006/main">
   <p:cSld>
     <p:spTree>
@@ -29266,7 +30408,7 @@
 </p:sld>
 </file>
 
-<file path=ppt/slides/slide12.xml><?xml version="1.0" encoding="utf-8"?>
+<file path=ppt/slides/slide13.xml><?xml version="1.0" encoding="utf-8"?>
 <p:sld xmlns:a="http://schemas.openxmlformats.org/drawingml/2006/main" xmlns:r="http://schemas.openxmlformats.org/officeDocument/2006/relationships" xmlns:p="http://schemas.openxmlformats.org/presentationml/2006/main">
   <p:cSld>
     <p:spTree>
@@ -29362,7 +30504,7 @@
 </p:sld>
 </file>
 
-<file path=ppt/slides/slide13.xml><?xml version="1.0" encoding="utf-8"?>
+<file path=ppt/slides/slide14.xml><?xml version="1.0" encoding="utf-8"?>
 <p:sld xmlns:a="http://schemas.openxmlformats.org/drawingml/2006/main" xmlns:r="http://schemas.openxmlformats.org/officeDocument/2006/relationships" xmlns:p="http://schemas.openxmlformats.org/presentationml/2006/main">
   <p:cSld>
     <p:spTree>
@@ -29493,7 +30635,7 @@
 </p:sld>
 </file>
 
-<file path=ppt/slides/slide14.xml><?xml version="1.0" encoding="utf-8"?>
+<file path=ppt/slides/slide15.xml><?xml version="1.0" encoding="utf-8"?>
 <p:sld xmlns:a="http://schemas.openxmlformats.org/drawingml/2006/main" xmlns:r="http://schemas.openxmlformats.org/officeDocument/2006/relationships" xmlns:p="http://schemas.openxmlformats.org/presentationml/2006/main">
   <p:cSld>
     <p:spTree>
@@ -29525,7 +30667,7 @@
           <p:nvPr/>
         </p:nvPicPr>
         <p:blipFill>
-          <a:blip r:embed="rId2"/>
+          <a:blip r:embed="rId3"/>
           <a:stretch>
             <a:fillRect/>
           </a:stretch>
@@ -29591,7 +30733,7 @@
           <p:nvPr/>
         </p:nvPicPr>
         <p:blipFill>
-          <a:blip r:embed="rId3"/>
+          <a:blip r:embed="rId4"/>
           <a:stretch>
             <a:fillRect/>
           </a:stretch>
@@ -29656,7 +30798,7 @@
           <p:nvPr/>
         </p:nvPicPr>
         <p:blipFill>
-          <a:blip r:embed="rId4"/>
+          <a:blip r:embed="rId5"/>
           <a:stretch>
             <a:fillRect/>
           </a:stretch>
@@ -29719,7 +30861,7 @@
 </p:sld>
 </file>
 
-<file path=ppt/slides/slide15.xml><?xml version="1.0" encoding="utf-8"?>
+<file path=ppt/slides/slide16.xml><?xml version="1.0" encoding="utf-8"?>
 <p:sld xmlns:a="http://schemas.openxmlformats.org/drawingml/2006/main" xmlns:r="http://schemas.openxmlformats.org/officeDocument/2006/relationships" xmlns:p="http://schemas.openxmlformats.org/presentationml/2006/main">
   <p:cSld>
     <p:spTree>
@@ -29785,7 +30927,7 @@
 </p:sld>
 </file>
 
-<file path=ppt/slides/slide16.xml><?xml version="1.0" encoding="utf-8"?>
+<file path=ppt/slides/slide17.xml><?xml version="1.0" encoding="utf-8"?>
 <p:sld xmlns:a="http://schemas.openxmlformats.org/drawingml/2006/main" xmlns:r="http://schemas.openxmlformats.org/officeDocument/2006/relationships" xmlns:p="http://schemas.openxmlformats.org/presentationml/2006/main">
   <p:cSld>
     <p:spTree>
@@ -29833,7 +30975,7 @@
                   <a:schemeClr val="bg1"/>
                 </a:solidFill>
               </a:rPr>
-              <a:t>Sloan’s Neutral Model</a:t>
+              <a:t>Sloan’s Neutral Community Model</a:t>
             </a:r>
           </a:p>
         </p:txBody>
@@ -30509,8 +31651,8 @@
         </p:nvSpPr>
         <p:spPr>
           <a:xfrm>
-            <a:off x="6308667" y="847024"/>
-            <a:ext cx="1616826" cy="1754326"/>
+            <a:off x="6308667" y="1631176"/>
+            <a:ext cx="2697455" cy="923330"/>
           </a:xfrm>
           <a:prstGeom prst="rect">
             <a:avLst/>
@@ -30585,7 +31727,7 @@
         </p:nvSpPr>
         <p:spPr>
           <a:xfrm>
-            <a:off x="7610397" y="1348724"/>
+            <a:off x="9149909" y="1827570"/>
             <a:ext cx="1750522" cy="1200329"/>
           </a:xfrm>
           <a:prstGeom prst="rect">
@@ -30630,8 +31772,8 @@
         </p:nvCxnSpPr>
         <p:spPr>
           <a:xfrm flipH="1">
-            <a:off x="7117081" y="2601350"/>
-            <a:ext cx="844635" cy="557486"/>
+            <a:off x="7117082" y="2695038"/>
+            <a:ext cx="1889040" cy="463798"/>
           </a:xfrm>
           <a:prstGeom prst="straightConnector1">
             <a:avLst/>
@@ -30669,7 +31811,7 @@
         </p:nvSpPr>
         <p:spPr>
           <a:xfrm rot="5400000">
-            <a:off x="5500231" y="124763"/>
+            <a:off x="5490807" y="-162213"/>
             <a:ext cx="515389" cy="10352069"/>
           </a:xfrm>
           <a:prstGeom prst="rightBrace">
@@ -30699,8 +31841,8 @@
           </a:p>
         </p:txBody>
       </p:sp>
-      <mc:AlternateContent xmlns:mc="http://schemas.openxmlformats.org/markup-compatibility/2006" xmlns:a14="http://schemas.microsoft.com/office/drawing/2010/main">
-        <mc:Choice Requires="a14">
+      <mc:AlternateContent xmlns:mc="http://schemas.openxmlformats.org/markup-compatibility/2006">
+        <mc:Choice xmlns:a14="http://schemas.microsoft.com/office/drawing/2010/main" Requires="a14">
           <p:sp>
             <p:nvSpPr>
               <p:cNvPr id="39" name="TextBox 38">
@@ -30715,7 +31857,7 @@
             </p:nvSpPr>
             <p:spPr>
               <a:xfrm>
-                <a:off x="2078182" y="5785658"/>
+                <a:off x="2160616" y="5498326"/>
                 <a:ext cx="8296102" cy="369332"/>
               </a:xfrm>
               <a:prstGeom prst="rect">
@@ -30806,7 +31948,7 @@
             </p:txBody>
           </p:sp>
         </mc:Choice>
-        <mc:Fallback xmlns="">
+        <mc:Fallback>
           <p:sp>
             <p:nvSpPr>
               <p:cNvPr id="39" name="TextBox 38">
@@ -30823,7 +31965,7 @@
             </p:nvSpPr>
             <p:spPr>
               <a:xfrm>
-                <a:off x="2078182" y="5785658"/>
+                <a:off x="2160616" y="5498326"/>
                 <a:ext cx="8296102" cy="369332"/>
               </a:xfrm>
               <a:prstGeom prst="rect">
@@ -30832,7 +31974,7 @@
               <a:blipFill>
                 <a:blip r:embed="rId4"/>
                 <a:stretch>
-                  <a:fillRect t="-10345" b="-24138"/>
+                  <a:fillRect t="-6667" b="-23333"/>
                 </a:stretch>
               </a:blipFill>
             </p:spPr>
@@ -30851,6 +31993,41 @@
           </p:sp>
         </mc:Fallback>
       </mc:AlternateContent>
+      <p:sp>
+        <p:nvSpPr>
+          <p:cNvPr id="3" name="TextBox 2">
+            <a:extLst>
+              <a:ext uri="{FF2B5EF4-FFF2-40B4-BE49-F238E27FC236}">
+                <a16:creationId xmlns:a16="http://schemas.microsoft.com/office/drawing/2014/main" id="{D64287FF-DCC5-4F4E-8947-0EFAF1DAA135}"/>
+              </a:ext>
+            </a:extLst>
+          </p:cNvPr>
+          <p:cNvSpPr txBox="1"/>
+          <p:nvPr/>
+        </p:nvSpPr>
+        <p:spPr>
+          <a:xfrm>
+            <a:off x="838200" y="6239319"/>
+            <a:ext cx="10787743" cy="369332"/>
+          </a:xfrm>
+          <a:prstGeom prst="rect">
+            <a:avLst/>
+          </a:prstGeom>
+          <a:noFill/>
+        </p:spPr>
+        <p:txBody>
+          <a:bodyPr wrap="square" rtlCol="0">
+            <a:spAutoFit/>
+          </a:bodyPr>
+          <a:lstStyle/>
+          <a:p>
+            <a:r>
+              <a:rPr lang="en-US" dirty="0"/>
+              <a:t>Sloan et al., (2006) Quantifying the roles of immigration and chance in shaping prokaryote community structure</a:t>
+            </a:r>
+          </a:p>
+        </p:txBody>
+      </p:sp>
     </p:spTree>
     <p:extLst>
       <p:ext uri="{BB962C8B-B14F-4D97-AF65-F5344CB8AC3E}">
@@ -30864,7 +32041,7 @@
 </p:sld>
 </file>
 
-<file path=ppt/slides/slide17.xml><?xml version="1.0" encoding="utf-8"?>
+<file path=ppt/slides/slide18.xml><?xml version="1.0" encoding="utf-8"?>
 <p:sld xmlns:a="http://schemas.openxmlformats.org/drawingml/2006/main" xmlns:r="http://schemas.openxmlformats.org/officeDocument/2006/relationships" xmlns:p="http://schemas.openxmlformats.org/presentationml/2006/main">
   <p:cSld>
     <p:spTree>
@@ -30930,14 +32107,14 @@
           <p:nvPr>
             <p:extLst>
               <p:ext uri="{D42A27DB-BD31-4B8C-83A1-F6EECF244321}">
-                <p14:modId xmlns:p14="http://schemas.microsoft.com/office/powerpoint/2010/main" val="755050813"/>
+                <p14:modId xmlns:p14="http://schemas.microsoft.com/office/powerpoint/2010/main" val="2289447671"/>
               </p:ext>
             </p:extLst>
           </p:nvPr>
         </p:nvGraphicFramePr>
         <p:xfrm>
-          <a:off x="3200400" y="623359"/>
-          <a:ext cx="8458200" cy="5418667"/>
+          <a:off x="3200400" y="1963737"/>
+          <a:ext cx="8458200" cy="4078289"/>
         </p:xfrm>
         <a:graphic>
           <a:graphicData uri="http://schemas.openxmlformats.org/drawingml/2006/diagram">
@@ -31223,7 +32400,7 @@
 </p:sld>
 </file>
 
-<file path=ppt/slides/slide18.xml><?xml version="1.0" encoding="utf-8"?>
+<file path=ppt/slides/slide19.xml><?xml version="1.0" encoding="utf-8"?>
 <p:sld xmlns:a="http://schemas.openxmlformats.org/drawingml/2006/main" xmlns:r="http://schemas.openxmlformats.org/officeDocument/2006/relationships" xmlns:p="http://schemas.openxmlformats.org/presentationml/2006/main">
   <p:cSld>
     <p:spTree>
@@ -31319,7 +32496,264 @@
 </p:sld>
 </file>
 
-<file path=ppt/slides/slide19.xml><?xml version="1.0" encoding="utf-8"?>
+<file path=ppt/slides/slide2.xml><?xml version="1.0" encoding="utf-8"?>
+<p:sld xmlns:a="http://schemas.openxmlformats.org/drawingml/2006/main" xmlns:r="http://schemas.openxmlformats.org/officeDocument/2006/relationships" xmlns:p="http://schemas.openxmlformats.org/presentationml/2006/main">
+  <p:cSld>
+    <p:spTree>
+      <p:nvGrpSpPr>
+        <p:cNvPr id="1" name=""/>
+        <p:cNvGrpSpPr/>
+        <p:nvPr/>
+      </p:nvGrpSpPr>
+      <p:grpSpPr>
+        <a:xfrm>
+          <a:off x="0" y="0"/>
+          <a:ext cx="0" cy="0"/>
+          <a:chOff x="0" y="0"/>
+          <a:chExt cx="0" cy="0"/>
+        </a:xfrm>
+      </p:grpSpPr>
+      <p:sp>
+        <p:nvSpPr>
+          <p:cNvPr id="2" name="Title 1">
+            <a:extLst>
+              <a:ext uri="{FF2B5EF4-FFF2-40B4-BE49-F238E27FC236}">
+                <a16:creationId xmlns:a16="http://schemas.microsoft.com/office/drawing/2014/main" id="{45EBAA57-4779-4A41-AFFB-BF6247B0B39E}"/>
+              </a:ext>
+            </a:extLst>
+          </p:cNvPr>
+          <p:cNvSpPr>
+            <a:spLocks noGrp="1"/>
+          </p:cNvSpPr>
+          <p:nvPr>
+            <p:ph type="title"/>
+          </p:nvPr>
+        </p:nvSpPr>
+        <p:spPr/>
+        <p:txBody>
+          <a:bodyPr/>
+          <a:lstStyle/>
+          <a:p>
+            <a:r>
+              <a:rPr lang="en-US" dirty="0"/>
+              <a:t>Neutral Theory</a:t>
+            </a:r>
+          </a:p>
+        </p:txBody>
+      </p:sp>
+      <p:sp>
+        <p:nvSpPr>
+          <p:cNvPr id="4" name="TextBox 3">
+            <a:extLst>
+              <a:ext uri="{FF2B5EF4-FFF2-40B4-BE49-F238E27FC236}">
+                <a16:creationId xmlns:a16="http://schemas.microsoft.com/office/drawing/2014/main" id="{DD47A41A-0904-514B-99DB-4E5E573D0747}"/>
+              </a:ext>
+            </a:extLst>
+          </p:cNvPr>
+          <p:cNvSpPr txBox="1"/>
+          <p:nvPr/>
+        </p:nvSpPr>
+        <p:spPr>
+          <a:xfrm>
+            <a:off x="838200" y="6239319"/>
+            <a:ext cx="10787743" cy="369332"/>
+          </a:xfrm>
+          <a:prstGeom prst="rect">
+            <a:avLst/>
+          </a:prstGeom>
+          <a:noFill/>
+        </p:spPr>
+        <p:txBody>
+          <a:bodyPr wrap="square" rtlCol="0">
+            <a:spAutoFit/>
+          </a:bodyPr>
+          <a:lstStyle/>
+          <a:p>
+            <a:r>
+              <a:rPr lang="en-US" dirty="0"/>
+              <a:t>Sloan et al., (2006) Quantifying the roles of immigration and chance in shaping prokaryote community structure</a:t>
+            </a:r>
+          </a:p>
+        </p:txBody>
+      </p:sp>
+    </p:spTree>
+    <p:extLst>
+      <p:ext uri="{BB962C8B-B14F-4D97-AF65-F5344CB8AC3E}">
+        <p14:creationId xmlns:p14="http://schemas.microsoft.com/office/powerpoint/2010/main" val="2186134876"/>
+      </p:ext>
+    </p:extLst>
+  </p:cSld>
+  <p:clrMapOvr>
+    <a:masterClrMapping/>
+  </p:clrMapOvr>
+</p:sld>
+</file>
+
+<file path=ppt/slides/slide20.xml><?xml version="1.0" encoding="utf-8"?>
+<p:sld xmlns:a="http://schemas.openxmlformats.org/drawingml/2006/main" xmlns:r="http://schemas.openxmlformats.org/officeDocument/2006/relationships" xmlns:p="http://schemas.openxmlformats.org/presentationml/2006/main">
+  <p:cSld>
+    <p:spTree>
+      <p:nvGrpSpPr>
+        <p:cNvPr id="1" name=""/>
+        <p:cNvGrpSpPr/>
+        <p:nvPr/>
+      </p:nvGrpSpPr>
+      <p:grpSpPr>
+        <a:xfrm>
+          <a:off x="0" y="0"/>
+          <a:ext cx="0" cy="0"/>
+          <a:chOff x="0" y="0"/>
+          <a:chExt cx="0" cy="0"/>
+        </a:xfrm>
+      </p:grpSpPr>
+      <p:sp>
+        <p:nvSpPr>
+          <p:cNvPr id="2" name="Title 1">
+            <a:extLst>
+              <a:ext uri="{FF2B5EF4-FFF2-40B4-BE49-F238E27FC236}">
+                <a16:creationId xmlns:a16="http://schemas.microsoft.com/office/drawing/2014/main" id="{E31E3458-3266-244D-BCB1-9A7BADC0BE83}"/>
+              </a:ext>
+            </a:extLst>
+          </p:cNvPr>
+          <p:cNvSpPr>
+            <a:spLocks noGrp="1"/>
+          </p:cNvSpPr>
+          <p:nvPr>
+            <p:ph type="title"/>
+          </p:nvPr>
+        </p:nvSpPr>
+        <p:spPr>
+          <a:solidFill>
+            <a:srgbClr val="3CE29B"/>
+          </a:solidFill>
+        </p:spPr>
+        <p:txBody>
+          <a:bodyPr/>
+          <a:lstStyle/>
+          <a:p>
+            <a:r>
+              <a:rPr lang="en-US" dirty="0" err="1">
+                <a:solidFill>
+                  <a:schemeClr val="bg1"/>
+                </a:solidFill>
+              </a:rPr>
+              <a:t>Stegen</a:t>
+            </a:r>
+            <a:r>
+              <a:rPr lang="en-US" dirty="0">
+                <a:solidFill>
+                  <a:schemeClr val="bg1"/>
+                </a:solidFill>
+              </a:rPr>
+              <a:t> </a:t>
+            </a:r>
+            <a:r>
+              <a:rPr lang="en-US" i="1" dirty="0">
+                <a:solidFill>
+                  <a:schemeClr val="bg1"/>
+                </a:solidFill>
+              </a:rPr>
+              <a:t>et al., </a:t>
+            </a:r>
+            <a:r>
+              <a:rPr lang="en-US" dirty="0">
+                <a:solidFill>
+                  <a:schemeClr val="bg1"/>
+                </a:solidFill>
+              </a:rPr>
+              <a:t>(2015) Phylogenetic Null Model</a:t>
+            </a:r>
+          </a:p>
+        </p:txBody>
+      </p:sp>
+      <p:graphicFrame>
+        <p:nvGraphicFramePr>
+          <p:cNvPr id="8" name="Diagram 7">
+            <a:extLst>
+              <a:ext uri="{FF2B5EF4-FFF2-40B4-BE49-F238E27FC236}">
+                <a16:creationId xmlns:a16="http://schemas.microsoft.com/office/drawing/2014/main" id="{8AE007E0-E98F-624F-A585-6E129FB1664C}"/>
+              </a:ext>
+            </a:extLst>
+          </p:cNvPr>
+          <p:cNvGraphicFramePr/>
+          <p:nvPr>
+            <p:extLst>
+              <p:ext uri="{D42A27DB-BD31-4B8C-83A1-F6EECF244321}">
+                <p14:modId xmlns:p14="http://schemas.microsoft.com/office/powerpoint/2010/main" val="291247793"/>
+              </p:ext>
+            </p:extLst>
+          </p:nvPr>
+        </p:nvGraphicFramePr>
+        <p:xfrm>
+          <a:off x="2032000" y="1843087"/>
+          <a:ext cx="8128000" cy="4623858"/>
+        </p:xfrm>
+        <a:graphic>
+          <a:graphicData uri="http://schemas.openxmlformats.org/drawingml/2006/diagram">
+            <dgm:relIds xmlns:dgm="http://schemas.openxmlformats.org/drawingml/2006/diagram" xmlns:r="http://schemas.openxmlformats.org/officeDocument/2006/relationships" r:dm="rId3" r:lo="rId4" r:qs="rId5" r:cs="rId6"/>
+          </a:graphicData>
+        </a:graphic>
+      </p:graphicFrame>
+      <p:sp>
+        <p:nvSpPr>
+          <p:cNvPr id="3" name="TextBox 2">
+            <a:extLst>
+              <a:ext uri="{FF2B5EF4-FFF2-40B4-BE49-F238E27FC236}">
+                <a16:creationId xmlns:a16="http://schemas.microsoft.com/office/drawing/2014/main" id="{8868AF34-E172-3B49-8783-B1313C7CCE0A}"/>
+              </a:ext>
+            </a:extLst>
+          </p:cNvPr>
+          <p:cNvSpPr txBox="1"/>
+          <p:nvPr/>
+        </p:nvSpPr>
+        <p:spPr>
+          <a:xfrm>
+            <a:off x="8386354" y="2037806"/>
+            <a:ext cx="3187337" cy="1477328"/>
+          </a:xfrm>
+          <a:prstGeom prst="rect">
+            <a:avLst/>
+          </a:prstGeom>
+          <a:noFill/>
+        </p:spPr>
+        <p:txBody>
+          <a:bodyPr wrap="square" rtlCol="0">
+            <a:spAutoFit/>
+          </a:bodyPr>
+          <a:lstStyle/>
+          <a:p>
+            <a:r>
+              <a:rPr lang="en-US" dirty="0" err="1"/>
+              <a:t>Stegen</a:t>
+            </a:r>
+            <a:r>
+              <a:rPr lang="en-US" dirty="0"/>
+              <a:t> et al., (2015) </a:t>
+            </a:r>
+            <a:r>
+              <a:rPr lang="en-GB" dirty="0"/>
+              <a:t>Estimating and mapping ecological processes influencing microbial community assembly</a:t>
+            </a:r>
+          </a:p>
+          <a:p>
+            <a:endParaRPr lang="en-US" dirty="0"/>
+          </a:p>
+        </p:txBody>
+      </p:sp>
+    </p:spTree>
+    <p:extLst>
+      <p:ext uri="{BB962C8B-B14F-4D97-AF65-F5344CB8AC3E}">
+        <p14:creationId xmlns:p14="http://schemas.microsoft.com/office/powerpoint/2010/main" val="56936835"/>
+      </p:ext>
+    </p:extLst>
+  </p:cSld>
+  <p:clrMapOvr>
+    <a:masterClrMapping/>
+  </p:clrMapOvr>
+</p:sld>
+</file>
+
+<file path=ppt/slides/slide21.xml><?xml version="1.0" encoding="utf-8"?>
 <p:sld xmlns:a="http://schemas.openxmlformats.org/drawingml/2006/main" xmlns:r="http://schemas.openxmlformats.org/officeDocument/2006/relationships" xmlns:p="http://schemas.openxmlformats.org/presentationml/2006/main">
   <p:cSld>
     <p:spTree>
@@ -31417,122 +32851,7 @@
 </p:sld>
 </file>
 
-<file path=ppt/slides/slide2.xml><?xml version="1.0" encoding="utf-8"?>
-<p:sld xmlns:a="http://schemas.openxmlformats.org/drawingml/2006/main" xmlns:r="http://schemas.openxmlformats.org/officeDocument/2006/relationships" xmlns:p="http://schemas.openxmlformats.org/presentationml/2006/main">
-  <p:cSld>
-    <p:spTree>
-      <p:nvGrpSpPr>
-        <p:cNvPr id="1" name=""/>
-        <p:cNvGrpSpPr/>
-        <p:nvPr/>
-      </p:nvGrpSpPr>
-      <p:grpSpPr>
-        <a:xfrm>
-          <a:off x="0" y="0"/>
-          <a:ext cx="0" cy="0"/>
-          <a:chOff x="0" y="0"/>
-          <a:chExt cx="0" cy="0"/>
-        </a:xfrm>
-      </p:grpSpPr>
-      <p:sp>
-        <p:nvSpPr>
-          <p:cNvPr id="2" name="Title 1">
-            <a:extLst>
-              <a:ext uri="{FF2B5EF4-FFF2-40B4-BE49-F238E27FC236}">
-                <a16:creationId xmlns:a16="http://schemas.microsoft.com/office/drawing/2014/main" id="{B63CC106-A16C-4843-9F85-7D221F98A36E}"/>
-              </a:ext>
-            </a:extLst>
-          </p:cNvPr>
-          <p:cNvSpPr>
-            <a:spLocks noGrp="1"/>
-          </p:cNvSpPr>
-          <p:nvPr>
-            <p:ph type="title"/>
-          </p:nvPr>
-        </p:nvSpPr>
-        <p:spPr/>
-        <p:txBody>
-          <a:bodyPr/>
-          <a:lstStyle/>
-          <a:p>
-            <a:r>
-              <a:rPr lang="en-US" dirty="0"/>
-              <a:t>Hypotheses</a:t>
-            </a:r>
-          </a:p>
-        </p:txBody>
-      </p:sp>
-      <p:sp>
-        <p:nvSpPr>
-          <p:cNvPr id="3" name="Content Placeholder 2">
-            <a:extLst>
-              <a:ext uri="{FF2B5EF4-FFF2-40B4-BE49-F238E27FC236}">
-                <a16:creationId xmlns:a16="http://schemas.microsoft.com/office/drawing/2014/main" id="{CB3584D2-37E7-F041-BDE2-7B1BFF03B4C6}"/>
-              </a:ext>
-            </a:extLst>
-          </p:cNvPr>
-          <p:cNvSpPr>
-            <a:spLocks noGrp="1"/>
-          </p:cNvSpPr>
-          <p:nvPr>
-            <p:ph idx="1"/>
-          </p:nvPr>
-        </p:nvSpPr>
-        <p:spPr/>
-        <p:txBody>
-          <a:bodyPr>
-            <a:normAutofit fontScale="92500" lnSpcReduction="20000"/>
-          </a:bodyPr>
-          <a:lstStyle/>
-          <a:p>
-            <a:r>
-              <a:rPr lang="en-US" u="sng" dirty="0"/>
-              <a:t>Microbial community composition in the supraglacial environment is explained by both deterministic and stochastic processes.</a:t>
-            </a:r>
-          </a:p>
-          <a:p>
-            <a:r>
-              <a:rPr lang="en-US" u="sng" dirty="0"/>
-              <a:t>Community assembly processes will differ between abundant and rare taxa. </a:t>
-            </a:r>
-          </a:p>
-          <a:p>
-            <a:r>
-              <a:rPr lang="en-US" u="sng" dirty="0"/>
-              <a:t>Biogeographic patterns (ISAR, DDR) will differ between abundant and rare taxa.</a:t>
-            </a:r>
-          </a:p>
-          <a:p>
-            <a:r>
-              <a:rPr lang="en-US" dirty="0"/>
-              <a:t>Community assembly processes will differ between bulk and active microbial communities. That is, active communities will be more strongly influenced by deterministic processes and bulk communities will be more strongly influenced by stochastic processes.</a:t>
-            </a:r>
-          </a:p>
-          <a:p>
-            <a:r>
-              <a:rPr lang="en-US" dirty="0"/>
-              <a:t>Biogeographic patterns (ISAR, DDR) will differ between bulk and active communities. That is, active communities will exhibit stronger biogeographic patterns than bulk communities.</a:t>
-            </a:r>
-          </a:p>
-          <a:p>
-            <a:endParaRPr lang="en-US" dirty="0"/>
-          </a:p>
-        </p:txBody>
-      </p:sp>
-    </p:spTree>
-    <p:extLst>
-      <p:ext uri="{BB962C8B-B14F-4D97-AF65-F5344CB8AC3E}">
-        <p14:creationId xmlns:p14="http://schemas.microsoft.com/office/powerpoint/2010/main" val="3966638715"/>
-      </p:ext>
-    </p:extLst>
-  </p:cSld>
-  <p:clrMapOvr>
-    <a:masterClrMapping/>
-  </p:clrMapOvr>
-</p:sld>
-</file>
-
-<file path=ppt/slides/slide20.xml><?xml version="1.0" encoding="utf-8"?>
+<file path=ppt/slides/slide22.xml><?xml version="1.0" encoding="utf-8"?>
 <p:sld xmlns:a="http://schemas.openxmlformats.org/drawingml/2006/main" xmlns:r="http://schemas.openxmlformats.org/officeDocument/2006/relationships" xmlns:p="http://schemas.openxmlformats.org/presentationml/2006/main">
   <p:cSld>
     <p:spTree>
@@ -31627,125 +32946,7 @@
 </p:sld>
 </file>
 
-<file path=ppt/slides/slide21.xml><?xml version="1.0" encoding="utf-8"?>
-<p:sld xmlns:a="http://schemas.openxmlformats.org/drawingml/2006/main" xmlns:r="http://schemas.openxmlformats.org/officeDocument/2006/relationships" xmlns:p="http://schemas.openxmlformats.org/presentationml/2006/main">
-  <p:cSld>
-    <p:spTree>
-      <p:nvGrpSpPr>
-        <p:cNvPr id="1" name=""/>
-        <p:cNvGrpSpPr/>
-        <p:nvPr/>
-      </p:nvGrpSpPr>
-      <p:grpSpPr>
-        <a:xfrm>
-          <a:off x="0" y="0"/>
-          <a:ext cx="0" cy="0"/>
-          <a:chOff x="0" y="0"/>
-          <a:chExt cx="0" cy="0"/>
-        </a:xfrm>
-      </p:grpSpPr>
-      <p:sp>
-        <p:nvSpPr>
-          <p:cNvPr id="2" name="Title 1">
-            <a:extLst>
-              <a:ext uri="{FF2B5EF4-FFF2-40B4-BE49-F238E27FC236}">
-                <a16:creationId xmlns:a16="http://schemas.microsoft.com/office/drawing/2014/main" id="{E31E3458-3266-244D-BCB1-9A7BADC0BE83}"/>
-              </a:ext>
-            </a:extLst>
-          </p:cNvPr>
-          <p:cNvSpPr>
-            <a:spLocks noGrp="1"/>
-          </p:cNvSpPr>
-          <p:nvPr>
-            <p:ph type="title"/>
-          </p:nvPr>
-        </p:nvSpPr>
-        <p:spPr>
-          <a:solidFill>
-            <a:srgbClr val="3CE29B"/>
-          </a:solidFill>
-        </p:spPr>
-        <p:txBody>
-          <a:bodyPr/>
-          <a:lstStyle/>
-          <a:p>
-            <a:r>
-              <a:rPr lang="en-US" dirty="0" err="1">
-                <a:solidFill>
-                  <a:schemeClr val="bg1"/>
-                </a:solidFill>
-              </a:rPr>
-              <a:t>Stegen</a:t>
-            </a:r>
-            <a:r>
-              <a:rPr lang="en-US" dirty="0">
-                <a:solidFill>
-                  <a:schemeClr val="bg1"/>
-                </a:solidFill>
-              </a:rPr>
-              <a:t> </a:t>
-            </a:r>
-            <a:r>
-              <a:rPr lang="en-US" i="1" dirty="0">
-                <a:solidFill>
-                  <a:schemeClr val="bg1"/>
-                </a:solidFill>
-              </a:rPr>
-              <a:t>et al., </a:t>
-            </a:r>
-            <a:r>
-              <a:rPr lang="en-US" dirty="0">
-                <a:solidFill>
-                  <a:schemeClr val="bg1"/>
-                </a:solidFill>
-              </a:rPr>
-              <a:t>(2013) Phylogenetic Null Model</a:t>
-            </a:r>
-          </a:p>
-        </p:txBody>
-      </p:sp>
-      <p:graphicFrame>
-        <p:nvGraphicFramePr>
-          <p:cNvPr id="8" name="Diagram 7">
-            <a:extLst>
-              <a:ext uri="{FF2B5EF4-FFF2-40B4-BE49-F238E27FC236}">
-                <a16:creationId xmlns:a16="http://schemas.microsoft.com/office/drawing/2014/main" id="{8AE007E0-E98F-624F-A585-6E129FB1664C}"/>
-              </a:ext>
-            </a:extLst>
-          </p:cNvPr>
-          <p:cNvGraphicFramePr/>
-          <p:nvPr>
-            <p:extLst>
-              <p:ext uri="{D42A27DB-BD31-4B8C-83A1-F6EECF244321}">
-                <p14:modId xmlns:p14="http://schemas.microsoft.com/office/powerpoint/2010/main" val="291247793"/>
-              </p:ext>
-            </p:extLst>
-          </p:nvPr>
-        </p:nvGraphicFramePr>
-        <p:xfrm>
-          <a:off x="2032000" y="1843087"/>
-          <a:ext cx="8128000" cy="4623858"/>
-        </p:xfrm>
-        <a:graphic>
-          <a:graphicData uri="http://schemas.openxmlformats.org/drawingml/2006/diagram">
-            <dgm:relIds xmlns:dgm="http://schemas.openxmlformats.org/drawingml/2006/diagram" xmlns:r="http://schemas.openxmlformats.org/officeDocument/2006/relationships" r:dm="rId3" r:lo="rId4" r:qs="rId5" r:cs="rId6"/>
-          </a:graphicData>
-        </a:graphic>
-      </p:graphicFrame>
-    </p:spTree>
-    <p:extLst>
-      <p:ext uri="{BB962C8B-B14F-4D97-AF65-F5344CB8AC3E}">
-        <p14:creationId xmlns:p14="http://schemas.microsoft.com/office/powerpoint/2010/main" val="56936835"/>
-      </p:ext>
-    </p:extLst>
-  </p:cSld>
-  <p:clrMapOvr>
-    <a:masterClrMapping/>
-  </p:clrMapOvr>
-</p:sld>
-</file>
-
-<file path=ppt/slides/slide22.xml><?xml version="1.0" encoding="utf-8"?>
+<file path=ppt/slides/slide23.xml><?xml version="1.0" encoding="utf-8"?>
 <p:sld xmlns:a="http://schemas.openxmlformats.org/drawingml/2006/main" xmlns:r="http://schemas.openxmlformats.org/officeDocument/2006/relationships" xmlns:p="http://schemas.openxmlformats.org/presentationml/2006/main">
   <p:cSld>
     <p:spTree>
@@ -31813,7 +33014,7 @@
           <p:nvPr/>
         </p:nvPicPr>
         <p:blipFill>
-          <a:blip r:embed="rId2"/>
+          <a:blip r:embed="rId3"/>
           <a:stretch>
             <a:fillRect/>
           </a:stretch>
@@ -31841,7 +33042,7 @@
 </p:sld>
 </file>
 
-<file path=ppt/slides/slide23.xml><?xml version="1.0" encoding="utf-8"?>
+<file path=ppt/slides/slide24.xml><?xml version="1.0" encoding="utf-8"?>
 <p:sld xmlns:a="http://schemas.openxmlformats.org/drawingml/2006/main" xmlns:r="http://schemas.openxmlformats.org/officeDocument/2006/relationships" xmlns:p="http://schemas.openxmlformats.org/presentationml/2006/main">
   <p:cSld>
     <p:spTree>
@@ -31942,7 +33143,7 @@
 </p:sld>
 </file>
 
-<file path=ppt/slides/slide24.xml><?xml version="1.0" encoding="utf-8"?>
+<file path=ppt/slides/slide25.xml><?xml version="1.0" encoding="utf-8"?>
 <p:sld xmlns:a="http://schemas.openxmlformats.org/drawingml/2006/main" xmlns:r="http://schemas.openxmlformats.org/officeDocument/2006/relationships" xmlns:p="http://schemas.openxmlformats.org/presentationml/2006/main">
   <p:cSld>
     <p:spTree>
@@ -32008,7 +33209,7 @@
 </p:sld>
 </file>
 
-<file path=ppt/slides/slide25.xml><?xml version="1.0" encoding="utf-8"?>
+<file path=ppt/slides/slide26.xml><?xml version="1.0" encoding="utf-8"?>
 <p:sld xmlns:a="http://schemas.openxmlformats.org/drawingml/2006/main" xmlns:r="http://schemas.openxmlformats.org/officeDocument/2006/relationships" xmlns:p="http://schemas.openxmlformats.org/presentationml/2006/main">
   <p:cSld>
     <p:spTree>
@@ -32123,7 +33324,7 @@
 </p:sld>
 </file>
 
-<file path=ppt/slides/slide26.xml><?xml version="1.0" encoding="utf-8"?>
+<file path=ppt/slides/slide27.xml><?xml version="1.0" encoding="utf-8"?>
 <p:sld xmlns:a="http://schemas.openxmlformats.org/drawingml/2006/main" xmlns:r="http://schemas.openxmlformats.org/officeDocument/2006/relationships" xmlns:p="http://schemas.openxmlformats.org/presentationml/2006/main">
   <p:cSld>
     <p:spTree>
@@ -32215,7 +33416,7 @@
 </p:sld>
 </file>
 
-<file path=ppt/slides/slide27.xml><?xml version="1.0" encoding="utf-8"?>
+<file path=ppt/slides/slide28.xml><?xml version="1.0" encoding="utf-8"?>
 <p:sld xmlns:a="http://schemas.openxmlformats.org/drawingml/2006/main" xmlns:r="http://schemas.openxmlformats.org/officeDocument/2006/relationships" xmlns:p="http://schemas.openxmlformats.org/presentationml/2006/main">
   <p:cSld>
     <p:spTree>
@@ -32295,7 +33496,7 @@
 </p:sld>
 </file>
 
-<file path=ppt/slides/slide28.xml><?xml version="1.0" encoding="utf-8"?>
+<file path=ppt/slides/slide29.xml><?xml version="1.0" encoding="utf-8"?>
 <p:sld xmlns:a="http://schemas.openxmlformats.org/drawingml/2006/main" xmlns:r="http://schemas.openxmlformats.org/officeDocument/2006/relationships" xmlns:p="http://schemas.openxmlformats.org/presentationml/2006/main">
   <p:cSld>
     <p:spTree>
@@ -32414,6 +33615,115 @@
 </file>
 
 <file path=ppt/slides/slide3.xml><?xml version="1.0" encoding="utf-8"?>
+<p:sld xmlns:a="http://schemas.openxmlformats.org/drawingml/2006/main" xmlns:r="http://schemas.openxmlformats.org/officeDocument/2006/relationships" xmlns:p="http://schemas.openxmlformats.org/presentationml/2006/main">
+  <p:cSld>
+    <p:spTree>
+      <p:nvGrpSpPr>
+        <p:cNvPr id="1" name=""/>
+        <p:cNvGrpSpPr/>
+        <p:nvPr/>
+      </p:nvGrpSpPr>
+      <p:grpSpPr>
+        <a:xfrm>
+          <a:off x="0" y="0"/>
+          <a:ext cx="0" cy="0"/>
+          <a:chOff x="0" y="0"/>
+          <a:chExt cx="0" cy="0"/>
+        </a:xfrm>
+      </p:grpSpPr>
+      <p:sp>
+        <p:nvSpPr>
+          <p:cNvPr id="2" name="Title 1">
+            <a:extLst>
+              <a:ext uri="{FF2B5EF4-FFF2-40B4-BE49-F238E27FC236}">
+                <a16:creationId xmlns:a16="http://schemas.microsoft.com/office/drawing/2014/main" id="{B63CC106-A16C-4843-9F85-7D221F98A36E}"/>
+              </a:ext>
+            </a:extLst>
+          </p:cNvPr>
+          <p:cNvSpPr>
+            <a:spLocks noGrp="1"/>
+          </p:cNvSpPr>
+          <p:nvPr>
+            <p:ph type="title"/>
+          </p:nvPr>
+        </p:nvSpPr>
+        <p:spPr/>
+        <p:txBody>
+          <a:bodyPr/>
+          <a:lstStyle/>
+          <a:p>
+            <a:r>
+              <a:rPr lang="en-US" dirty="0"/>
+              <a:t>Hypotheses</a:t>
+            </a:r>
+          </a:p>
+        </p:txBody>
+      </p:sp>
+      <p:sp>
+        <p:nvSpPr>
+          <p:cNvPr id="3" name="Content Placeholder 2">
+            <a:extLst>
+              <a:ext uri="{FF2B5EF4-FFF2-40B4-BE49-F238E27FC236}">
+                <a16:creationId xmlns:a16="http://schemas.microsoft.com/office/drawing/2014/main" id="{CB3584D2-37E7-F041-BDE2-7B1BFF03B4C6}"/>
+              </a:ext>
+            </a:extLst>
+          </p:cNvPr>
+          <p:cNvSpPr>
+            <a:spLocks noGrp="1"/>
+          </p:cNvSpPr>
+          <p:nvPr>
+            <p:ph idx="1"/>
+          </p:nvPr>
+        </p:nvSpPr>
+        <p:spPr/>
+        <p:txBody>
+          <a:bodyPr>
+            <a:normAutofit fontScale="92500" lnSpcReduction="10000"/>
+          </a:bodyPr>
+          <a:lstStyle/>
+          <a:p>
+            <a:r>
+              <a:rPr lang="en-US" u="sng" dirty="0"/>
+              <a:t>Microbial community composition in the supraglacial environment is explained by both deterministic and stochastic processes.</a:t>
+            </a:r>
+          </a:p>
+          <a:p>
+            <a:r>
+              <a:rPr lang="en-US" u="sng" dirty="0"/>
+              <a:t>Abundant and rare prokaryotic and eukaryotic diversity exhibit distinct biogeographic patterns that are driven by different community assembly processes.</a:t>
+            </a:r>
+          </a:p>
+          <a:p>
+            <a:r>
+              <a:rPr lang="en-US" dirty="0"/>
+              <a:t>Community assembly processes will differ between bulk and active microbial communities. That is, active communities will be more strongly influenced by deterministic processes and bulk communities will be more strongly influenced by stochastic processes.</a:t>
+            </a:r>
+          </a:p>
+          <a:p>
+            <a:r>
+              <a:rPr lang="en-US" dirty="0"/>
+              <a:t>Biogeographic patterns (ISAR, DDR) will differ between bulk and active communities. That is, active communities will exhibit stronger biogeographic patterns than bulk communities.</a:t>
+            </a:r>
+          </a:p>
+          <a:p>
+            <a:endParaRPr lang="en-US" dirty="0"/>
+          </a:p>
+        </p:txBody>
+      </p:sp>
+    </p:spTree>
+    <p:extLst>
+      <p:ext uri="{BB962C8B-B14F-4D97-AF65-F5344CB8AC3E}">
+        <p14:creationId xmlns:p14="http://schemas.microsoft.com/office/powerpoint/2010/main" val="3966638715"/>
+      </p:ext>
+    </p:extLst>
+  </p:cSld>
+  <p:clrMapOvr>
+    <a:masterClrMapping/>
+  </p:clrMapOvr>
+</p:sld>
+</file>
+
+<file path=ppt/slides/slide4.xml><?xml version="1.0" encoding="utf-8"?>
 <p:sld xmlns:a="http://schemas.openxmlformats.org/drawingml/2006/main" xmlns:r="http://schemas.openxmlformats.org/officeDocument/2006/relationships" xmlns:p="http://schemas.openxmlformats.org/presentationml/2006/main">
   <p:cSld>
     <p:spTree>
@@ -32499,7 +33809,7 @@
 </p:sld>
 </file>
 
-<file path=ppt/slides/slide4.xml><?xml version="1.0" encoding="utf-8"?>
+<file path=ppt/slides/slide5.xml><?xml version="1.0" encoding="utf-8"?>
 <p:sld xmlns:a="http://schemas.openxmlformats.org/drawingml/2006/main" xmlns:r="http://schemas.openxmlformats.org/officeDocument/2006/relationships" xmlns:p="http://schemas.openxmlformats.org/presentationml/2006/main">
   <p:cSld>
     <p:spTree>
@@ -32620,7 +33930,7 @@
 </p:sld>
 </file>
 
-<file path=ppt/slides/slide5.xml><?xml version="1.0" encoding="utf-8"?>
+<file path=ppt/slides/slide6.xml><?xml version="1.0" encoding="utf-8"?>
 <p:sld xmlns:a="http://schemas.openxmlformats.org/drawingml/2006/main" xmlns:r="http://schemas.openxmlformats.org/officeDocument/2006/relationships" xmlns:p="http://schemas.openxmlformats.org/presentationml/2006/main">
   <p:cSld>
     <p:spTree>
@@ -32706,7 +34016,7 @@
 </p:sld>
 </file>
 
-<file path=ppt/slides/slide6.xml><?xml version="1.0" encoding="utf-8"?>
+<file path=ppt/slides/slide7.xml><?xml version="1.0" encoding="utf-8"?>
 <p:sld xmlns:a="http://schemas.openxmlformats.org/drawingml/2006/main" xmlns:r="http://schemas.openxmlformats.org/officeDocument/2006/relationships" xmlns:p="http://schemas.openxmlformats.org/presentationml/2006/main">
   <p:cSld>
     <p:spTree>
@@ -32792,7 +34102,7 @@
 </p:sld>
 </file>
 
-<file path=ppt/slides/slide7.xml><?xml version="1.0" encoding="utf-8"?>
+<file path=ppt/slides/slide8.xml><?xml version="1.0" encoding="utf-8"?>
 <p:sld xmlns:a="http://schemas.openxmlformats.org/drawingml/2006/main" xmlns:r="http://schemas.openxmlformats.org/officeDocument/2006/relationships" xmlns:p="http://schemas.openxmlformats.org/presentationml/2006/main">
   <p:cSld>
     <p:spTree>
@@ -32912,7 +34222,7 @@
 </p:sld>
 </file>
 
-<file path=ppt/slides/slide8.xml><?xml version="1.0" encoding="utf-8"?>
+<file path=ppt/slides/slide9.xml><?xml version="1.0" encoding="utf-8"?>
 <p:sld xmlns:a="http://schemas.openxmlformats.org/drawingml/2006/main" xmlns:r="http://schemas.openxmlformats.org/officeDocument/2006/relationships" xmlns:p="http://schemas.openxmlformats.org/presentationml/2006/main">
   <p:cSld>
     <p:spTree>
@@ -33050,177 +34360,6 @@
     <p:extLst>
       <p:ext uri="{BB962C8B-B14F-4D97-AF65-F5344CB8AC3E}">
         <p14:creationId xmlns:p14="http://schemas.microsoft.com/office/powerpoint/2010/main" val="3700840866"/>
-      </p:ext>
-    </p:extLst>
-  </p:cSld>
-  <p:clrMapOvr>
-    <a:masterClrMapping/>
-  </p:clrMapOvr>
-</p:sld>
-</file>
-
-<file path=ppt/slides/slide9.xml><?xml version="1.0" encoding="utf-8"?>
-<p:sld xmlns:a="http://schemas.openxmlformats.org/drawingml/2006/main" xmlns:r="http://schemas.openxmlformats.org/officeDocument/2006/relationships" xmlns:p="http://schemas.openxmlformats.org/presentationml/2006/main">
-  <p:cSld>
-    <p:spTree>
-      <p:nvGrpSpPr>
-        <p:cNvPr id="1" name=""/>
-        <p:cNvGrpSpPr/>
-        <p:nvPr/>
-      </p:nvGrpSpPr>
-      <p:grpSpPr>
-        <a:xfrm>
-          <a:off x="0" y="0"/>
-          <a:ext cx="0" cy="0"/>
-          <a:chOff x="0" y="0"/>
-          <a:chExt cx="0" cy="0"/>
-        </a:xfrm>
-      </p:grpSpPr>
-      <p:sp>
-        <p:nvSpPr>
-          <p:cNvPr id="2" name="Title 1">
-            <a:extLst>
-              <a:ext uri="{FF2B5EF4-FFF2-40B4-BE49-F238E27FC236}">
-                <a16:creationId xmlns:a16="http://schemas.microsoft.com/office/drawing/2014/main" id="{B782A0EB-033A-2548-B24B-9258C1B51CB6}"/>
-              </a:ext>
-            </a:extLst>
-          </p:cNvPr>
-          <p:cNvSpPr>
-            <a:spLocks noGrp="1"/>
-          </p:cNvSpPr>
-          <p:nvPr>
-            <p:ph type="title"/>
-          </p:nvPr>
-        </p:nvSpPr>
-        <p:spPr>
-          <a:solidFill>
-            <a:srgbClr val="FFC003"/>
-          </a:solidFill>
-        </p:spPr>
-        <p:txBody>
-          <a:bodyPr/>
-          <a:lstStyle/>
-          <a:p>
-            <a:r>
-              <a:rPr lang="en-US" dirty="0">
-                <a:solidFill>
-                  <a:schemeClr val="bg1"/>
-                </a:solidFill>
-              </a:rPr>
-              <a:t>Beta Diversity &amp; Ordination: Weighted </a:t>
-            </a:r>
-            <a:r>
-              <a:rPr lang="en-US" dirty="0" err="1">
-                <a:solidFill>
-                  <a:schemeClr val="bg1"/>
-                </a:solidFill>
-              </a:rPr>
-              <a:t>UniFrac</a:t>
-            </a:r>
-            <a:endParaRPr lang="en-US" dirty="0">
-              <a:solidFill>
-                <a:schemeClr val="bg1"/>
-              </a:solidFill>
-            </a:endParaRPr>
-          </a:p>
-        </p:txBody>
-      </p:sp>
-      <p:sp>
-        <p:nvSpPr>
-          <p:cNvPr id="3" name="Content Placeholder 2">
-            <a:extLst>
-              <a:ext uri="{FF2B5EF4-FFF2-40B4-BE49-F238E27FC236}">
-                <a16:creationId xmlns:a16="http://schemas.microsoft.com/office/drawing/2014/main" id="{AA3D5702-1A30-E248-80BA-2F3C6F41D3BA}"/>
-              </a:ext>
-            </a:extLst>
-          </p:cNvPr>
-          <p:cNvSpPr>
-            <a:spLocks noGrp="1"/>
-          </p:cNvSpPr>
-          <p:nvPr>
-            <p:ph idx="1"/>
-          </p:nvPr>
-        </p:nvSpPr>
-        <p:spPr>
-          <a:xfrm>
-            <a:off x="838200" y="5786437"/>
-            <a:ext cx="10515600" cy="800101"/>
-          </a:xfrm>
-        </p:spPr>
-        <p:txBody>
-          <a:bodyPr>
-            <a:normAutofit fontScale="92500" lnSpcReduction="10000"/>
-          </a:bodyPr>
-          <a:lstStyle/>
-          <a:p>
-            <a:pPr marL="0" indent="0" algn="ctr">
-              <a:buNone/>
-            </a:pPr>
-            <a:r>
-              <a:rPr lang="en-US" sz="2000" dirty="0"/>
-              <a:t>Figure : Beta diversity calculated using weighted </a:t>
-            </a:r>
-            <a:r>
-              <a:rPr lang="en-US" sz="2000" dirty="0" err="1"/>
-              <a:t>UniFrac</a:t>
-            </a:r>
-            <a:r>
-              <a:rPr lang="en-US" sz="2000" dirty="0"/>
-              <a:t> distances, visualized use </a:t>
-            </a:r>
-            <a:r>
-              <a:rPr lang="en-US" sz="2000" dirty="0" err="1"/>
-              <a:t>PCoA</a:t>
-            </a:r>
-            <a:r>
-              <a:rPr lang="en-US" sz="2000" dirty="0"/>
-              <a:t> (blue is Taylor Glacier and orange is Canada Glacier). This plot shows significant beta diversity variation between glaciers (PERMANOVA: F = 12.539, </a:t>
-            </a:r>
-            <a:r>
-              <a:rPr lang="en-US" sz="2000" dirty="0" err="1"/>
-              <a:t>df</a:t>
-            </a:r>
-            <a:r>
-              <a:rPr lang="en-US" sz="2000" dirty="0"/>
-              <a:t>=1, P = 0.0001).</a:t>
-            </a:r>
-          </a:p>
-        </p:txBody>
-      </p:sp>
-      <p:pic>
-        <p:nvPicPr>
-          <p:cNvPr id="5" name="Picture 4">
-            <a:extLst>
-              <a:ext uri="{FF2B5EF4-FFF2-40B4-BE49-F238E27FC236}">
-                <a16:creationId xmlns:a16="http://schemas.microsoft.com/office/drawing/2014/main" id="{9C1FC389-8FED-4D4B-AE7E-C8C819B547F0}"/>
-              </a:ext>
-            </a:extLst>
-          </p:cNvPr>
-          <p:cNvPicPr>
-            <a:picLocks noChangeAspect="1"/>
-          </p:cNvPicPr>
-          <p:nvPr/>
-        </p:nvPicPr>
-        <p:blipFill>
-          <a:blip r:embed="rId3"/>
-          <a:stretch>
-            <a:fillRect/>
-          </a:stretch>
-        </p:blipFill>
-        <p:spPr>
-          <a:xfrm>
-            <a:off x="2438400" y="1909762"/>
-            <a:ext cx="7315200" cy="3657600"/>
-          </a:xfrm>
-          <a:prstGeom prst="rect">
-            <a:avLst/>
-          </a:prstGeom>
-        </p:spPr>
-      </p:pic>
-    </p:spTree>
-    <p:extLst>
-      <p:ext uri="{BB962C8B-B14F-4D97-AF65-F5344CB8AC3E}">
-        <p14:creationId xmlns:p14="http://schemas.microsoft.com/office/powerpoint/2010/main" val="495349475"/>
       </p:ext>
     </p:extLst>
   </p:cSld>

--- a/Projects/Chapter1/community-assembly-edit.pptx
+++ b/Projects/Chapter1/community-assembly-edit.pptx
@@ -5644,7 +5644,7 @@
   <dgm:whole/>
   <dgm:extLst>
     <a:ext uri="http://schemas.microsoft.com/office/drawing/2008/diagram">
-      <dsp:dataModelExt xmlns:dsp="http://schemas.microsoft.com/office/drawing/2008/diagram" relId="rId6" minVer="http://schemas.openxmlformats.org/drawingml/2006/diagram"/>
+      <dsp:dataModelExt xmlns:dsp="http://schemas.microsoft.com/office/drawing/2008/diagram" relId="rId7" minVer="http://schemas.openxmlformats.org/drawingml/2006/diagram"/>
     </a:ext>
   </dgm:extLst>
 </dgm:dataModel>
@@ -22782,15 +22782,92 @@
           <a:p>
             <a:r>
               <a:rPr lang="en-US" dirty="0"/>
-              <a:t>DDR doesn’t work for this dataset as most of the holes are reported to have the same long </a:t>
-            </a:r>
-            <a:r>
-              <a:rPr lang="en-US" dirty="0" err="1"/>
-              <a:t>lat</a:t>
-            </a:r>
+              <a:t>I fit the power-law model to cryoconite area and ASV richness data using non-linear least squares. I did this primarily to build my ISAR code and to check if my results mirrored those of Sommers et al., (2020) to make sure my earlier QIIME2/DADA2/Data prep processes had been carried out correctly.</a:t>
+            </a:r>
+          </a:p>
+          <a:p>
+            <a:endParaRPr lang="en-US" dirty="0"/>
+          </a:p>
+          <a:p>
             <a:r>
               <a:rPr lang="en-US" dirty="0"/>
-              <a:t> coordinates.</a:t>
+              <a:t>Sloan et al., (2006)</a:t>
+            </a:r>
+          </a:p>
+          <a:p>
+            <a:r>
+              <a:rPr lang="en-US" i="1" dirty="0"/>
+              <a:t>‘The microbial world is hard to observe. It is only recently</a:t>
+            </a:r>
+          </a:p>
+          <a:p>
+            <a:r>
+              <a:rPr lang="en-US" i="1" dirty="0"/>
+              <a:t>that the techniques in microbial ecology have advanced</a:t>
+            </a:r>
+          </a:p>
+          <a:p>
+            <a:r>
+              <a:rPr lang="en-US" i="1" dirty="0"/>
+              <a:t>to the point that patterns such as species area curves</a:t>
+            </a:r>
+          </a:p>
+          <a:p>
+            <a:r>
+              <a:rPr lang="en-US" i="1" dirty="0"/>
+              <a:t>have been reported for prokaryotic communities (Green</a:t>
+            </a:r>
+          </a:p>
+          <a:p>
+            <a:r>
+              <a:rPr lang="en-US" i="1" dirty="0"/>
+              <a:t>et al</a:t>
+            </a:r>
+          </a:p>
+          <a:p>
+            <a:r>
+              <a:rPr lang="en-US" i="1" dirty="0"/>
+              <a:t>., 2004; Horner-Devine </a:t>
+            </a:r>
+          </a:p>
+          <a:p>
+            <a:r>
+              <a:rPr lang="en-US" i="1" dirty="0"/>
+              <a:t>et al</a:t>
+            </a:r>
+          </a:p>
+          <a:p>
+            <a:r>
+              <a:rPr lang="en-US" i="1" dirty="0"/>
+              <a:t>., 2004), at least 83 years</a:t>
+            </a:r>
+          </a:p>
+          <a:p>
+            <a:r>
+              <a:rPr lang="en-US" i="1" dirty="0"/>
+              <a:t>after the observation was ﬁrst made in communities of</a:t>
+            </a:r>
+          </a:p>
+          <a:p>
+            <a:r>
+              <a:rPr lang="en-US" i="1" dirty="0" err="1"/>
+              <a:t>arger</a:t>
+            </a:r>
+            <a:r>
+              <a:rPr lang="en-US" i="1" dirty="0"/>
+              <a:t> organisms. Species area curves led directly to the</a:t>
+            </a:r>
+          </a:p>
+          <a:p>
+            <a:r>
+              <a:rPr lang="en-US" i="1" dirty="0"/>
+              <a:t>development of the ﬁrst theories of community assembly</a:t>
+            </a:r>
+          </a:p>
+          <a:p>
+            <a:r>
+              <a:rPr lang="en-US" i="1" dirty="0"/>
+              <a:t>(MacArthur and Wilson, 1967). ‘</a:t>
             </a:r>
           </a:p>
         </p:txBody>
@@ -22812,7 +22889,7 @@
           <a:p>
             <a:fld id="{91AE2140-D502-214A-B76B-E0784B2C949B}" type="slidenum">
               <a:rPr lang="en-US" smtClean="0"/>
-              <a:t>16</a:t>
+              <a:t>15</a:t>
             </a:fld>
             <a:endParaRPr lang="en-US"/>
           </a:p>
@@ -22821,7 +22898,7 @@
     </p:spTree>
     <p:extLst>
       <p:ext uri="{BB962C8B-B14F-4D97-AF65-F5344CB8AC3E}">
-        <p14:creationId xmlns:p14="http://schemas.microsoft.com/office/powerpoint/2010/main" val="2176052354"/>
+        <p14:creationId xmlns:p14="http://schemas.microsoft.com/office/powerpoint/2010/main" val="776258569"/>
       </p:ext>
     </p:extLst>
   </p:cSld>
@@ -22877,23 +22954,52 @@
           <a:p>
             <a:r>
               <a:rPr lang="en-US" dirty="0"/>
-              <a:t>Sloan’s Neutral Model states that the probability of species </a:t>
-            </a:r>
-            <a:r>
-              <a:rPr lang="en-US" i="1" dirty="0" err="1"/>
-              <a:t>i</a:t>
+              <a:t>DDR doesn’t work for this dataset as most of the holes are reported to have the same long </a:t>
+            </a:r>
+            <a:r>
+              <a:rPr lang="en-US" dirty="0" err="1"/>
+              <a:t>lat</a:t>
             </a:r>
             <a:r>
               <a:rPr lang="en-US" dirty="0"/>
-              <a:t> occurring within a sample at abundance (x</a:t>
-            </a:r>
-            <a:r>
-              <a:rPr lang="en-US" i="0" baseline="-25000" dirty="0"/>
-              <a:t>i</a:t>
-            </a:r>
+              <a:t> coordinates.</a:t>
+            </a:r>
+          </a:p>
+          <a:p>
+            <a:endParaRPr lang="en-US" dirty="0"/>
+          </a:p>
+          <a:p>
             <a:r>
               <a:rPr lang="en-US" dirty="0"/>
-              <a:t>) above a detection threshold (d) </a:t>
+              <a:t>https://</a:t>
+            </a:r>
+            <a:r>
+              <a:rPr lang="en-US" dirty="0" err="1"/>
+              <a:t>www.sciencedirect.com</a:t>
+            </a:r>
+            <a:r>
+              <a:rPr lang="en-US" dirty="0"/>
+              <a:t>/science/article/</a:t>
+            </a:r>
+            <a:r>
+              <a:rPr lang="en-US" dirty="0" err="1"/>
+              <a:t>pii</a:t>
+            </a:r>
+            <a:r>
+              <a:rPr lang="en-US" dirty="0"/>
+              <a:t>/S0048969720326334?casa_token=_OIfwvA-tuAAAAAA:9hcvTlrLPzo2zS9fFqlKOsVuy2eRuJk32-nf2n04KnadJqfNsY8j35g-cCJR6uBYcm1dJ-HvpQ </a:t>
+            </a:r>
+          </a:p>
+          <a:p>
+            <a:r>
+              <a:rPr lang="en-US" dirty="0"/>
+              <a:t>Previous investigations have found a greater rate of turnover for rare taxa over geographic distance.</a:t>
+            </a:r>
+          </a:p>
+          <a:p>
+            <a:r>
+              <a:rPr lang="en-US" dirty="0"/>
+              <a:t>Abundant taxa exhibited lower rates of turnover over geographic distance.</a:t>
             </a:r>
           </a:p>
           <a:p>
@@ -22902,209 +23008,8 @@
           <a:p>
             <a:r>
               <a:rPr lang="en-US" dirty="0"/>
-              <a:t>Model results are compared to the observed data. Deviation of observed data from model results is assumed to be evidence of deterministic community assembly.</a:t>
-            </a:r>
-          </a:p>
-          <a:p>
-            <a:endParaRPr lang="en-US" dirty="0"/>
-          </a:p>
-          <a:p>
-            <a:r>
-              <a:rPr lang="en-US" dirty="0"/>
-              <a:t>The abundance of each ASV in the metacommunity (p</a:t>
-            </a:r>
-            <a:r>
-              <a:rPr lang="en-US" i="1" dirty="0"/>
-              <a:t>i</a:t>
-            </a:r>
-            <a:r>
-              <a:rPr lang="en-US" dirty="0"/>
-              <a:t>) is estimated by averaging it’s relative abundance across all samples.</a:t>
-            </a:r>
-          </a:p>
-          <a:p>
-            <a:endParaRPr lang="en-US" dirty="0"/>
-          </a:p>
-          <a:p>
-            <a:r>
-              <a:rPr lang="en-US" b="1" dirty="0"/>
-              <a:t>Why is Sloan's Neutral Model important? (Sloan et al., 2006)</a:t>
-            </a:r>
-          </a:p>
-          <a:p>
-            <a:r>
-              <a:rPr lang="en-US" dirty="0"/>
-              <a:t>Microbial organisms are essential for life on earth.</a:t>
-            </a:r>
-          </a:p>
-          <a:p>
-            <a:r>
-              <a:rPr lang="en-US" dirty="0"/>
-              <a:t>The rules that govern their community assembly are poorly understood.</a:t>
-            </a:r>
-          </a:p>
-          <a:p>
-            <a:r>
-              <a:rPr lang="en-US" dirty="0"/>
-              <a:t>We need mathematical tools to describe these processes.</a:t>
-            </a:r>
-          </a:p>
-          <a:p>
-            <a:r>
-              <a:rPr lang="en-US" dirty="0"/>
-              <a:t>Typically microbial community structure has been thought to be shaped by deterministic processes (abiotic and biotic selection).</a:t>
-            </a:r>
-          </a:p>
-          <a:p>
-            <a:r>
-              <a:rPr lang="en-US" dirty="0"/>
-              <a:t>Despite this, the relative abundances and frequencies of taxa observed can be described using a neutral community model.</a:t>
-            </a:r>
-          </a:p>
-          <a:p>
-            <a:r>
-              <a:rPr lang="en-US" dirty="0"/>
-              <a:t>Sloan’s neutral community model includes stochastic birth-death events (or ecological drift) and immigration.</a:t>
-            </a:r>
-          </a:p>
-          <a:p>
-            <a:r>
-              <a:rPr lang="en-US" dirty="0"/>
-              <a:t>The neutral community model DOES NOT include any deterministic processes and is not supposed to be a complete description of microbial community assembly processes.</a:t>
-            </a:r>
-          </a:p>
-          <a:p>
-            <a:r>
-              <a:rPr lang="en-US" dirty="0"/>
-              <a:t>Despite this, the successful application of the model in describing patterns of community structure suggests that stochastic processes of ecological drift and dispersal are important processes in microbial community assembly.</a:t>
-            </a:r>
-          </a:p>
-          <a:p>
-            <a:r>
-              <a:rPr lang="en-US" dirty="0"/>
-              <a:t>Neutral models allow us to quantify processes which are difficult to directly observe (dispersal) yet that are important to microbial communities.</a:t>
-            </a:r>
-          </a:p>
-          <a:p>
-            <a:endParaRPr lang="en-US" dirty="0"/>
-          </a:p>
-          <a:p>
-            <a:endParaRPr lang="en-US" dirty="0"/>
-          </a:p>
-          <a:p>
-            <a:r>
-              <a:rPr lang="en-US" dirty="0"/>
-              <a:t>To test if stochastic processes play a key role in shaping microbial community structure we need:</a:t>
-            </a:r>
-          </a:p>
-          <a:p>
-            <a:pPr marL="228600" indent="-228600">
-              <a:buAutoNum type="arabicPeriod"/>
-            </a:pPr>
-            <a:r>
-              <a:rPr lang="en-US" dirty="0"/>
-              <a:t>Evidence of random community assembly</a:t>
-            </a:r>
-          </a:p>
-          <a:p>
-            <a:pPr marL="228600" indent="-228600">
-              <a:buAutoNum type="arabicPeriod"/>
-            </a:pPr>
-            <a:r>
-              <a:rPr lang="en-US" dirty="0"/>
-              <a:t>A neutral model for microbes that can deal with large populations</a:t>
-            </a:r>
-          </a:p>
-          <a:p>
-            <a:pPr marL="228600" indent="-228600">
-              <a:buAutoNum type="arabicPeriod"/>
-            </a:pPr>
-            <a:r>
-              <a:rPr lang="en-US" dirty="0"/>
-              <a:t>A method for </a:t>
-            </a:r>
-            <a:r>
-              <a:rPr lang="en-US" dirty="0" err="1"/>
-              <a:t>paramaterisation</a:t>
-            </a:r>
-            <a:r>
-              <a:rPr lang="en-US" dirty="0"/>
-              <a:t> that does not rely on observed species abundance distributions or assumptions about source community patterns</a:t>
-            </a:r>
-          </a:p>
-          <a:p>
-            <a:pPr marL="228600" indent="-228600">
-              <a:buAutoNum type="arabicPeriod"/>
-            </a:pPr>
-            <a:r>
-              <a:rPr lang="en-US" dirty="0"/>
-              <a:t>Data that support the model</a:t>
-            </a:r>
-          </a:p>
-          <a:p>
-            <a:pPr marL="228600" indent="-228600">
-              <a:buAutoNum type="arabicPeriod"/>
-            </a:pPr>
-            <a:r>
-              <a:rPr lang="en-US" dirty="0"/>
-              <a:t>A model robust to departures from the assumption of neutrality</a:t>
-            </a:r>
-          </a:p>
-          <a:p>
-            <a:endParaRPr lang="en-US" b="1" dirty="0"/>
-          </a:p>
-          <a:p>
-            <a:r>
-              <a:rPr lang="en-US" b="1" dirty="0"/>
-              <a:t>Explain how Sloan's Neutral Model works.</a:t>
-            </a:r>
-          </a:p>
-          <a:p>
-            <a:pPr marL="228600" indent="-228600">
-              <a:buAutoNum type="arabicParenR"/>
-            </a:pPr>
-            <a:r>
-              <a:rPr lang="en-US" dirty="0"/>
-              <a:t>The community is saturated with </a:t>
-            </a:r>
-            <a:r>
-              <a:rPr lang="en-US" dirty="0" err="1"/>
-              <a:t>Nt</a:t>
-            </a:r>
-            <a:r>
-              <a:rPr lang="en-US" dirty="0"/>
-              <a:t> individuals. For the assemblage to change an individual must die or leave the system. The rate of change within the system is species independent.</a:t>
-            </a:r>
-          </a:p>
-          <a:p>
-            <a:pPr marL="228600" indent="-228600">
-              <a:buAutoNum type="arabicParenR"/>
-            </a:pPr>
-            <a:r>
-              <a:rPr lang="en-US" dirty="0"/>
-              <a:t>The dead individual is replace with probability m by an immigrant from the metacommunity, or replaced by reproduction of a member of the local community with probability 1-m. </a:t>
-            </a:r>
-          </a:p>
-          <a:p>
-            <a:pPr marL="228600" indent="-228600">
-              <a:buAutoNum type="arabicParenR"/>
-            </a:pPr>
-            <a:r>
-              <a:rPr lang="en-US" dirty="0"/>
-              <a:t>The community changed through a cycle of death, birth and immigration only.</a:t>
-            </a:r>
-          </a:p>
-          <a:p>
-            <a:pPr marL="228600" indent="-228600">
-              <a:buAutoNum type="arabicParenR"/>
-            </a:pPr>
-            <a:endParaRPr lang="en-US" dirty="0"/>
-          </a:p>
-          <a:p>
-            <a:pPr marL="228600" indent="-228600">
-              <a:buAutoNum type="arabicParenR"/>
-            </a:pPr>
-            <a:endParaRPr lang="en-US" dirty="0"/>
+              <a:t>Might expect this as low abundance taxa may be less likely by chance to disperse due to their lower numbers.</a:t>
+            </a:r>
           </a:p>
         </p:txBody>
       </p:sp>
@@ -23125,7 +23030,7 @@
           <a:p>
             <a:fld id="{91AE2140-D502-214A-B76B-E0784B2C949B}" type="slidenum">
               <a:rPr lang="en-US" smtClean="0"/>
-              <a:t>17</a:t>
+              <a:t>16</a:t>
             </a:fld>
             <a:endParaRPr lang="en-US"/>
           </a:p>
@@ -23134,7 +23039,7 @@
     </p:spTree>
     <p:extLst>
       <p:ext uri="{BB962C8B-B14F-4D97-AF65-F5344CB8AC3E}">
-        <p14:creationId xmlns:p14="http://schemas.microsoft.com/office/powerpoint/2010/main" val="1811139538"/>
+        <p14:creationId xmlns:p14="http://schemas.microsoft.com/office/powerpoint/2010/main" val="2176052354"/>
       </p:ext>
     </p:extLst>
   </p:cSld>
@@ -23190,108 +23095,234 @@
           <a:p>
             <a:r>
               <a:rPr lang="en-US" dirty="0"/>
-              <a:t>Code developed from Barnett et al., (2020) Soil characteristics and land-use drive bacterial community assembly patterns (https://</a:t>
+              <a:t>Sloan’s Neutral Model states that the probability of species </a:t>
+            </a:r>
+            <a:r>
+              <a:rPr lang="en-US" i="1" dirty="0" err="1"/>
+              <a:t>i</a:t>
+            </a:r>
+            <a:r>
+              <a:rPr lang="en-US" dirty="0"/>
+              <a:t> occurring within a sample at abundance (x</a:t>
+            </a:r>
+            <a:r>
+              <a:rPr lang="en-US" i="0" baseline="-25000" dirty="0"/>
+              <a:t>i</a:t>
+            </a:r>
+            <a:r>
+              <a:rPr lang="en-US" dirty="0"/>
+              <a:t>) above a detection threshold (d) </a:t>
+            </a:r>
+          </a:p>
+          <a:p>
+            <a:endParaRPr lang="en-US" dirty="0"/>
+          </a:p>
+          <a:p>
+            <a:r>
+              <a:rPr lang="en-US" dirty="0"/>
+              <a:t>Model results are compared to the observed data. Deviation of observed data from model results is assumed to be evidence of deterministic community assembly.</a:t>
+            </a:r>
+          </a:p>
+          <a:p>
+            <a:endParaRPr lang="en-US" dirty="0"/>
+          </a:p>
+          <a:p>
+            <a:r>
+              <a:rPr lang="en-US" dirty="0"/>
+              <a:t>The abundance of each ASV in the metacommunity (p</a:t>
+            </a:r>
+            <a:r>
+              <a:rPr lang="en-US" i="1" dirty="0"/>
+              <a:t>i</a:t>
+            </a:r>
+            <a:r>
+              <a:rPr lang="en-US" dirty="0"/>
+              <a:t>) is estimated by averaging it’s relative abundance across all samples.</a:t>
+            </a:r>
+          </a:p>
+          <a:p>
+            <a:endParaRPr lang="en-US" dirty="0"/>
+          </a:p>
+          <a:p>
+            <a:r>
+              <a:rPr lang="en-US" b="1" dirty="0"/>
+              <a:t>Why is Sloan's Neutral Model important? (Sloan et al., 2006)</a:t>
+            </a:r>
+          </a:p>
+          <a:p>
+            <a:r>
+              <a:rPr lang="en-US" dirty="0"/>
+              <a:t>Microbial organisms are essential for life on earth.</a:t>
+            </a:r>
+          </a:p>
+          <a:p>
+            <a:r>
+              <a:rPr lang="en-US" dirty="0"/>
+              <a:t>The rules that govern their community assembly are poorly understood.</a:t>
+            </a:r>
+          </a:p>
+          <a:p>
+            <a:r>
+              <a:rPr lang="en-US" dirty="0"/>
+              <a:t>We need mathematical tools to describe these processes.</a:t>
+            </a:r>
+          </a:p>
+          <a:p>
+            <a:r>
+              <a:rPr lang="en-US" dirty="0"/>
+              <a:t>Typically microbial community structure has been thought to be shaped by deterministic processes (abiotic and biotic selection).</a:t>
+            </a:r>
+          </a:p>
+          <a:p>
+            <a:r>
+              <a:rPr lang="en-US" dirty="0"/>
+              <a:t>Despite this, the relative abundances and frequencies of taxa observed can be described using a neutral community model.</a:t>
+            </a:r>
+          </a:p>
+          <a:p>
+            <a:r>
+              <a:rPr lang="en-US" dirty="0"/>
+              <a:t>Sloan’s neutral community model includes stochastic birth-death events (or ecological drift) and immigration.</a:t>
+            </a:r>
+          </a:p>
+          <a:p>
+            <a:r>
+              <a:rPr lang="en-US" dirty="0"/>
+              <a:t>The neutral community model DOES NOT include any deterministic processes and is not supposed to be a complete description of microbial community assembly processes.</a:t>
+            </a:r>
+          </a:p>
+          <a:p>
+            <a:r>
+              <a:rPr lang="en-US" dirty="0"/>
+              <a:t>Despite this, the successful application of the model in describing patterns of community structure suggests that stochastic processes of ecological drift and dispersal are important processes in microbial community assembly.</a:t>
+            </a:r>
+          </a:p>
+          <a:p>
+            <a:r>
+              <a:rPr lang="en-US" dirty="0"/>
+              <a:t>Neutral models allow us to quantify processes which are difficult to directly observe (dispersal) yet that are important to microbial communities.</a:t>
+            </a:r>
+          </a:p>
+          <a:p>
+            <a:endParaRPr lang="en-US" dirty="0"/>
+          </a:p>
+          <a:p>
+            <a:endParaRPr lang="en-US" dirty="0"/>
+          </a:p>
+          <a:p>
+            <a:r>
+              <a:rPr lang="en-US" dirty="0"/>
+              <a:t>To test if stochastic processes play a key role in shaping microbial community structure we need:</a:t>
+            </a:r>
+          </a:p>
+          <a:p>
+            <a:pPr marL="228600" indent="-228600">
+              <a:buAutoNum type="arabicPeriod"/>
+            </a:pPr>
+            <a:r>
+              <a:rPr lang="en-US" dirty="0"/>
+              <a:t>Evidence of random community assembly</a:t>
+            </a:r>
+          </a:p>
+          <a:p>
+            <a:pPr marL="228600" indent="-228600">
+              <a:buAutoNum type="arabicPeriod"/>
+            </a:pPr>
+            <a:r>
+              <a:rPr lang="en-US" dirty="0"/>
+              <a:t>A neutral model for microbes that can deal with large populations</a:t>
+            </a:r>
+          </a:p>
+          <a:p>
+            <a:pPr marL="228600" indent="-228600">
+              <a:buAutoNum type="arabicPeriod"/>
+            </a:pPr>
+            <a:r>
+              <a:rPr lang="en-US" dirty="0"/>
+              <a:t>A method for </a:t>
             </a:r>
             <a:r>
               <a:rPr lang="en-US" dirty="0" err="1"/>
-              <a:t>github.com</a:t>
+              <a:t>paramaterisation</a:t>
             </a:r>
             <a:r>
               <a:rPr lang="en-US" dirty="0"/>
-              <a:t>/seb369/</a:t>
-            </a:r>
-            <a:r>
-              <a:rPr lang="en-US" dirty="0" err="1"/>
-              <a:t>landuse_comm_assembly</a:t>
-            </a:r>
+              <a:t> that does not rely on observed species abundance distributions or assumptions about source community patterns</a:t>
+            </a:r>
+          </a:p>
+          <a:p>
+            <a:pPr marL="228600" indent="-228600">
+              <a:buAutoNum type="arabicPeriod"/>
+            </a:pPr>
             <a:r>
               <a:rPr lang="en-US" dirty="0"/>
-              <a:t>)</a:t>
-            </a:r>
-          </a:p>
-          <a:p>
-            <a:endParaRPr lang="en-US" dirty="0"/>
-          </a:p>
-          <a:p>
+              <a:t>Data that support the model</a:t>
+            </a:r>
+          </a:p>
+          <a:p>
+            <a:pPr marL="228600" indent="-228600">
+              <a:buAutoNum type="arabicPeriod"/>
+            </a:pPr>
             <a:r>
               <a:rPr lang="en-US" dirty="0"/>
-              <a:t>So we:</a:t>
-            </a:r>
-          </a:p>
-          <a:p>
-            <a:r>
-              <a:rPr lang="en-US" dirty="0"/>
-              <a:t>Fit the model to the observed frequency of occurrences of ASVs (in what proportion of the samples is each ASV detected?) and their abundance in the metacommunity (estimated as the mean relative abundance across all samples).</a:t>
-            </a:r>
-          </a:p>
-          <a:p>
-            <a:endParaRPr lang="en-US" dirty="0"/>
-          </a:p>
-          <a:p>
-            <a:pPr marL="0" marR="0" lvl="0" indent="0" algn="l" defTabSz="914400" rtl="0" eaLnBrk="1" fontAlgn="auto" latinLnBrk="0" hangingPunct="1">
-              <a:lnSpc>
-                <a:spcPct val="100000"/>
-              </a:lnSpc>
-              <a:spcBef>
-                <a:spcPts val="0"/>
-              </a:spcBef>
-              <a:spcAft>
-                <a:spcPts val="0"/>
-              </a:spcAft>
-              <a:buClrTx/>
-              <a:buSzTx/>
-              <a:buFontTx/>
-              <a:buNone/>
-              <a:tabLst/>
-              <a:defRPr/>
-            </a:pPr>
+              <a:t>A model robust to departures from the assumption of neutrality</a:t>
+            </a:r>
+          </a:p>
+          <a:p>
+            <a:endParaRPr lang="en-US" b="1" dirty="0"/>
+          </a:p>
+          <a:p>
             <a:r>
               <a:rPr lang="en-US" b="1" dirty="0"/>
               <a:t>Explain how Sloan's Neutral Model works.</a:t>
             </a:r>
+          </a:p>
+          <a:p>
+            <a:pPr marL="228600" indent="-228600">
+              <a:buAutoNum type="arabicParenR"/>
+            </a:pPr>
+            <a:r>
+              <a:rPr lang="en-US" dirty="0"/>
+              <a:t>The community is saturated with </a:t>
+            </a:r>
+            <a:r>
+              <a:rPr lang="en-US" dirty="0" err="1"/>
+              <a:t>Nt</a:t>
+            </a:r>
+            <a:r>
+              <a:rPr lang="en-US" dirty="0"/>
+              <a:t> individuals. For the assemblage to change an individual must die or leave the system. The rate of change within the system is species independent.</a:t>
+            </a:r>
+          </a:p>
+          <a:p>
+            <a:pPr marL="228600" indent="-228600">
+              <a:buAutoNum type="arabicParenR"/>
+            </a:pPr>
+            <a:r>
+              <a:rPr lang="en-US" dirty="0"/>
+              <a:t>The dead individual is replace with probability m by an immigrant from the metacommunity, or replaced by reproduction of a member of the local community with probability 1-m. </a:t>
+            </a:r>
+          </a:p>
+          <a:p>
+            <a:pPr marL="228600" indent="-228600">
+              <a:buAutoNum type="arabicParenR"/>
+            </a:pPr>
+            <a:r>
+              <a:rPr lang="en-US" dirty="0"/>
+              <a:t>The community changed through a cycle of death, birth and immigration only.</a:t>
+            </a:r>
+          </a:p>
+          <a:p>
+            <a:pPr marL="228600" indent="-228600">
+              <a:buAutoNum type="arabicParenR"/>
+            </a:pPr>
             <a:endParaRPr lang="en-US" dirty="0"/>
           </a:p>
           <a:p>
-            <a:r>
-              <a:rPr lang="en-US" dirty="0"/>
-              <a:t>1. Calculate N as the mean read count within samples</a:t>
-            </a:r>
-          </a:p>
-          <a:p>
-            <a:r>
-              <a:rPr lang="en-US" dirty="0"/>
-              <a:t>2. Calculate the average relative abundance of each ASV across samples</a:t>
-            </a:r>
-          </a:p>
-          <a:p>
-            <a:r>
-              <a:rPr lang="en-US" dirty="0"/>
-              <a:t>3. Calculate the occurrence frequency of each ASV</a:t>
-            </a:r>
-          </a:p>
-          <a:p>
-            <a:r>
-              <a:rPr lang="en-US" dirty="0"/>
-              <a:t>4. Calculate the limit of detection </a:t>
-            </a:r>
-          </a:p>
-          <a:p>
-            <a:r>
-              <a:rPr lang="en-US" dirty="0"/>
-              <a:t>5. Fit the model parameter (m – probability that a dead individual is replaced by an immigrant) using non-linear least squares fitting</a:t>
-            </a:r>
-          </a:p>
-          <a:p>
-            <a:r>
-              <a:rPr lang="en-US" dirty="0"/>
-              <a:t>6. Use the fitted m parameter to calculate predicted ASV frequencies under stochastic processes.</a:t>
-            </a:r>
-          </a:p>
-          <a:p>
-            <a:r>
-              <a:rPr lang="en-US" dirty="0"/>
-              <a:t>10. Plot the predicted ASV frequencies (percentage of samples we expect to see an ASV) with the observed ASV frequencies against their mean relative abundance across all samples</a:t>
-            </a:r>
+            <a:pPr marL="228600" indent="-228600">
+              <a:buAutoNum type="arabicParenR"/>
+            </a:pPr>
+            <a:endParaRPr lang="en-US" dirty="0"/>
           </a:p>
         </p:txBody>
       </p:sp>
@@ -23312,7 +23343,7 @@
           <a:p>
             <a:fld id="{91AE2140-D502-214A-B76B-E0784B2C949B}" type="slidenum">
               <a:rPr lang="en-US" smtClean="0"/>
-              <a:t>18</a:t>
+              <a:t>17</a:t>
             </a:fld>
             <a:endParaRPr lang="en-US"/>
           </a:p>
@@ -23321,7 +23352,7 @@
     </p:spTree>
     <p:extLst>
       <p:ext uri="{BB962C8B-B14F-4D97-AF65-F5344CB8AC3E}">
-        <p14:creationId xmlns:p14="http://schemas.microsoft.com/office/powerpoint/2010/main" val="2263901205"/>
+        <p14:creationId xmlns:p14="http://schemas.microsoft.com/office/powerpoint/2010/main" val="1811139538"/>
       </p:ext>
     </p:extLst>
   </p:cSld>
@@ -23377,7 +23408,23 @@
           <a:p>
             <a:r>
               <a:rPr lang="en-US" dirty="0"/>
-              <a:t>This is the result of the model fitting with the Sommers dataset (not reduced).</a:t>
+              <a:t>Code developed from Barnett et al., (2020) Soil characteristics and land-use drive bacterial community assembly patterns (https://</a:t>
+            </a:r>
+            <a:r>
+              <a:rPr lang="en-US" dirty="0" err="1"/>
+              <a:t>github.com</a:t>
+            </a:r>
+            <a:r>
+              <a:rPr lang="en-US" dirty="0"/>
+              <a:t>/seb369/</a:t>
+            </a:r>
+            <a:r>
+              <a:rPr lang="en-US" dirty="0" err="1"/>
+              <a:t>landuse_comm_assembly</a:t>
+            </a:r>
+            <a:r>
+              <a:rPr lang="en-US" dirty="0"/>
+              <a:t>)</a:t>
             </a:r>
           </a:p>
           <a:p>
@@ -23386,152 +23433,17 @@
           <a:p>
             <a:r>
               <a:rPr lang="en-US" dirty="0"/>
-              <a:t>X axis = log average relative abundances of each ASV across all samples (</a:t>
-            </a:r>
-            <a:r>
-              <a:rPr lang="en-GB" dirty="0"/>
-              <a:t>percent composition of an ASV </a:t>
-            </a:r>
-            <a:r>
-              <a:rPr lang="en-GB" b="1" dirty="0"/>
-              <a:t>relative</a:t>
-            </a:r>
-            <a:r>
-              <a:rPr lang="en-GB" dirty="0"/>
-              <a:t> to the total number of ASVs across all samples)</a:t>
+              <a:t>So we:</a:t>
+            </a:r>
+          </a:p>
+          <a:p>
+            <a:r>
+              <a:rPr lang="en-US" dirty="0"/>
+              <a:t>Fit the model to the observed frequency of occurrences of ASVs (in what proportion of the samples is each ASV detected?) and their abundance in the metacommunity (estimated as the mean relative abundance across all samples).</a:t>
             </a:r>
           </a:p>
           <a:p>
             <a:endParaRPr lang="en-US" dirty="0"/>
-          </a:p>
-          <a:p>
-            <a:r>
-              <a:rPr lang="en-US" dirty="0"/>
-              <a:t>Y axis = mean occurrence frequency of each ASV (in what percentage of samples will each ASV occur)</a:t>
-            </a:r>
-          </a:p>
-          <a:p>
-            <a:endParaRPr lang="en-US" dirty="0"/>
-          </a:p>
-          <a:p>
-            <a:r>
-              <a:rPr lang="en-US" dirty="0"/>
-              <a:t>Points = observed log relative abundances against occurrence frequencies</a:t>
-            </a:r>
-          </a:p>
-          <a:p>
-            <a:r>
-              <a:rPr lang="en-US" dirty="0"/>
-              <a:t>Solid line = predicted log relative abundances plotted against occurrence frequencies</a:t>
-            </a:r>
-          </a:p>
-          <a:p>
-            <a:r>
-              <a:rPr lang="en-US" dirty="0"/>
-              <a:t>Dotted lines = 95% confidence intervals</a:t>
-            </a:r>
-          </a:p>
-          <a:p>
-            <a:endParaRPr lang="en-US" dirty="0"/>
-          </a:p>
-          <a:p>
-            <a:r>
-              <a:rPr lang="en-US" dirty="0"/>
-              <a:t>This allows us to assess to what degree observed community structure can be explained by stochastic processes within each sample.</a:t>
-            </a:r>
-          </a:p>
-          <a:p>
-            <a:r>
-              <a:rPr lang="en-US" dirty="0"/>
-              <a:t>The Sloan neutral model is applied here. This model does not take into account phylogenetic distance. </a:t>
-            </a:r>
-          </a:p>
-          <a:p>
-            <a:r>
-              <a:rPr lang="en-US" dirty="0"/>
-              <a:t>ASV occurrence frequency is explained as a function of ASV abundance within the metacommunity (i.e. the more abundant an ASV is in the metacommunity, the more frequently it will be detected in the local community by chance). </a:t>
-            </a:r>
-          </a:p>
-          <a:p>
-            <a:r>
-              <a:rPr lang="en-US" dirty="0"/>
-              <a:t>The neutral model performed well, explaining 77% of variation in ASV detection frequency with an estimated migration factor of 0.02 between sites.</a:t>
-            </a:r>
-          </a:p>
-          <a:p>
-            <a:r>
-              <a:rPr lang="en-US" dirty="0"/>
-              <a:t>These results suggest that neutral assembly processes can explain the pattern of observed ASV occurrence frequencies </a:t>
-            </a:r>
-            <a:r>
-              <a:rPr lang="en-US" strike="sngStrike" dirty="0"/>
-              <a:t>and that the the regional species pool is a driving factor in the community composition of these samples. </a:t>
-            </a:r>
-          </a:p>
-          <a:p>
-            <a:r>
-              <a:rPr lang="en-US" strike="noStrike" dirty="0"/>
-              <a:t>The deviation of predicted occurrence frequencies from observed occurrence frequencies suggests that there are also deterministic processes driving community composition.</a:t>
-            </a:r>
-          </a:p>
-          <a:p>
-            <a:endParaRPr lang="en-US" strike="noStrike" dirty="0"/>
-          </a:p>
-          <a:p>
-            <a:r>
-              <a:rPr lang="en-US" b="1" strike="noStrike" dirty="0"/>
-              <a:t>WHAT CAN WE INTERPRET FROM THESE RESULTS?</a:t>
-            </a:r>
-          </a:p>
-          <a:p>
-            <a:r>
-              <a:rPr lang="en-US" strike="noStrike" dirty="0"/>
-              <a:t>I have assessed the degree to which stochastic processes explain community assembly within these samples.</a:t>
-            </a:r>
-          </a:p>
-          <a:p>
-            <a:r>
-              <a:rPr lang="en-US" strike="noStrike" dirty="0"/>
-              <a:t>This model ignores phylogenetic distance and explains the frequency of ASV detection across samples as a function of their abundance in the metacommunity (the more individuals of ASV </a:t>
-            </a:r>
-            <a:r>
-              <a:rPr lang="en-US" strike="noStrike" dirty="0" err="1"/>
-              <a:t>i</a:t>
-            </a:r>
-            <a:r>
-              <a:rPr lang="en-US" strike="noStrike" dirty="0"/>
-              <a:t> are present in the metacommunity, the more likely you are to find them in any given sample).</a:t>
-            </a:r>
-          </a:p>
-          <a:p>
-            <a:r>
-              <a:rPr lang="en-US" strike="noStrike" dirty="0"/>
-              <a:t>The neutral model performed well, explaining 77% of the variation in ASV detection frequency with an estimated migration factor of 0.017 between sites (this means there is ~2% chance of a local death being replaced by an immigrant which is very low – lower than reported for other studies that hover around 16-25%).</a:t>
-            </a:r>
-          </a:p>
-          <a:p>
-            <a:r>
-              <a:rPr lang="en-US" strike="noStrike" dirty="0"/>
-              <a:t>These results indicate that, for the majority of ASVs, neutral assembly processes of ecological drift and dispersal can explain their within sample occurrence patterns across an area, and the composition of the species pool of the area drives community assembly.</a:t>
-            </a:r>
-          </a:p>
-          <a:p>
-            <a:r>
-              <a:rPr lang="en-US" strike="noStrike" dirty="0"/>
-              <a:t>However, the model is not a perfect fit to the data and beta diversity ordination has shown that communities vary significantly between glaciers, suggesting that deterministic processes also play an important role.</a:t>
-            </a:r>
-          </a:p>
-          <a:p>
-            <a:endParaRPr lang="en-US" strike="noStrike" dirty="0"/>
-          </a:p>
-          <a:p>
-            <a:r>
-              <a:rPr lang="en-US" strike="noStrike" dirty="0"/>
-              <a:t>NULL hypothesis: cryoconite bacterial community composition is completely stochastic. Neutral model results (high R2) mean I am unable to reject the null hypothesis. Significant variable in ASV frequency across samples is explained by their relative abundance in the metacommunity. The results suggest that local selection is weak and dispersal is low, indicating that ecological drift is the dominant community assembly process.</a:t>
-            </a:r>
-          </a:p>
-          <a:p>
-            <a:endParaRPr lang="en-US" strike="noStrike" dirty="0"/>
           </a:p>
           <a:p>
             <a:pPr marL="0" marR="0" lvl="0" indent="0" algn="l" defTabSz="914400" rtl="0" eaLnBrk="1" fontAlgn="auto" latinLnBrk="0" hangingPunct="1">
@@ -23552,82 +23464,52 @@
               <a:defRPr/>
             </a:pPr>
             <a:r>
+              <a:rPr lang="en-US" b="1" dirty="0"/>
+              <a:t>Explain how Sloan's Neutral Model works.</a:t>
+            </a:r>
+            <a:endParaRPr lang="en-US" dirty="0"/>
+          </a:p>
+          <a:p>
+            <a:r>
               <a:rPr lang="en-US" dirty="0"/>
-              <a:t>Estimates of beta diversity based on phylogenetic dissimilarity show significant variation between glaciers. This supports the results that dispersal is limited. We might suggest that variation in beta diversity is a result of local ecological drift and limited dispersal rather than selection.</a:t>
-            </a:r>
-            <a:endParaRPr lang="en-US" strike="noStrike" dirty="0"/>
-          </a:p>
-          <a:p>
-            <a:endParaRPr lang="en-US" strike="noStrike" dirty="0"/>
-          </a:p>
-          <a:p>
-            <a:r>
-              <a:rPr lang="en-US" strike="noStrike" dirty="0"/>
-              <a:t>The distribution of ASVs across samples (in the metacommunity) followed the basic pattern of more abundant data being widespread – this is consistent with predictions of neutral theory. Despite the good fit of the model and the low m rate, there was significant difference between the communities on each glacier, illustrating the important point that variation among microbial communities does not need to be the result of environmental differences. Neutral processes can generate diversity on their own!</a:t>
-            </a:r>
-          </a:p>
-          <a:p>
-            <a:endParaRPr lang="en-US" strike="noStrike" dirty="0"/>
-          </a:p>
-          <a:p>
-            <a:r>
-              <a:rPr lang="en-US" b="1" strike="noStrike" dirty="0"/>
-              <a:t>What would I expect to see for abundant/rare, active/bulk communities? What would I infer from this?</a:t>
-            </a:r>
-          </a:p>
-          <a:p>
-            <a:endParaRPr lang="en-US" strike="noStrike" dirty="0"/>
-          </a:p>
-          <a:p>
-            <a:r>
-              <a:rPr lang="en-US" strike="noStrike" dirty="0"/>
-              <a:t>I want to repeat this analysis for abundant/rare taxa and active/bulk groups to see if stochastic processes are as important for each group, as well as to see how chance of immigration changes.</a:t>
-            </a:r>
-          </a:p>
-          <a:p>
-            <a:endParaRPr lang="en-US" strike="noStrike" dirty="0"/>
-          </a:p>
-          <a:p>
-            <a:r>
-              <a:rPr lang="en-US" strike="noStrike" dirty="0"/>
-              <a:t>Previous studies into soil microbial community assembly processes found:</a:t>
-            </a:r>
-          </a:p>
-          <a:p>
-            <a:r>
-              <a:rPr lang="en-US" strike="noStrike" dirty="0"/>
-              <a:t>Neutral model explained more variation in abundant sub-community than rare sub-community.</a:t>
-            </a:r>
-          </a:p>
-          <a:p>
-            <a:r>
-              <a:rPr lang="en-US" strike="noStrike" dirty="0"/>
-              <a:t>Neutral model also predicted lower m values for abundant sub-communities than rare sub-communities.</a:t>
-            </a:r>
-          </a:p>
-          <a:p>
-            <a:endParaRPr lang="en-US" strike="noStrike" dirty="0"/>
-          </a:p>
-          <a:p>
-            <a:r>
-              <a:rPr lang="en-US" strike="noStrike" dirty="0"/>
-              <a:t>Abundant species likely utilize an array of resources and occupy more broad niches, which rare taxa may occupy more specific niches – we would expect rare sub-communities to be more strongly shaped by deterministic processes.</a:t>
-            </a:r>
-          </a:p>
-          <a:p>
-            <a:endParaRPr lang="en-US" strike="noStrike" dirty="0"/>
-          </a:p>
-          <a:p>
-            <a:r>
-              <a:rPr lang="en-US" strike="noStrike" dirty="0"/>
-              <a:t>I predict that the neutral model will describe more variation in the bulk community than the active community as selection will only occur on active species. I also predict that migration rates will be higher for bulk communities because migration requires that an individual successfully transfer to a new habitat – where a dormant individual doesn’t need to worry about selection. </a:t>
-            </a:r>
-          </a:p>
-          <a:p>
-            <a:endParaRPr lang="en-US" strike="noStrike" dirty="0"/>
-          </a:p>
-          <a:p>
-            <a:endParaRPr lang="en-US" dirty="0"/>
+              <a:t>1. Calculate N as the mean read count within samples</a:t>
+            </a:r>
+          </a:p>
+          <a:p>
+            <a:r>
+              <a:rPr lang="en-US" dirty="0"/>
+              <a:t>2. Calculate the average relative abundance of each ASV across samples</a:t>
+            </a:r>
+          </a:p>
+          <a:p>
+            <a:r>
+              <a:rPr lang="en-US" dirty="0"/>
+              <a:t>3. Calculate the occurrence frequency of each ASV</a:t>
+            </a:r>
+          </a:p>
+          <a:p>
+            <a:r>
+              <a:rPr lang="en-US" dirty="0"/>
+              <a:t>4. Calculate the limit of detection </a:t>
+            </a:r>
+          </a:p>
+          <a:p>
+            <a:r>
+              <a:rPr lang="en-US" dirty="0"/>
+              <a:t>5. Fit the model parameter (m – probability that a dead individual is replaced by an immigrant) using non-linear least squares fitting</a:t>
+            </a:r>
+          </a:p>
+          <a:p>
+            <a:r>
+              <a:rPr lang="en-US" dirty="0"/>
+              <a:t>6. Use the fitted m parameter to calculate predicted ASV frequencies under stochastic processes.</a:t>
+            </a:r>
+          </a:p>
+          <a:p>
+            <a:r>
+              <a:rPr lang="en-US" dirty="0"/>
+              <a:t>10. Plot the predicted ASV frequencies (percentage of samples we expect to see an ASV) with the observed ASV frequencies against their mean relative abundance across all samples</a:t>
+            </a:r>
           </a:p>
         </p:txBody>
       </p:sp>
@@ -23648,7 +23530,7 @@
           <a:p>
             <a:fld id="{91AE2140-D502-214A-B76B-E0784B2C949B}" type="slidenum">
               <a:rPr lang="en-US" smtClean="0"/>
-              <a:t>19</a:t>
+              <a:t>18</a:t>
             </a:fld>
             <a:endParaRPr lang="en-US"/>
           </a:p>
@@ -23657,7 +23539,7 @@
     </p:spTree>
     <p:extLst>
       <p:ext uri="{BB962C8B-B14F-4D97-AF65-F5344CB8AC3E}">
-        <p14:creationId xmlns:p14="http://schemas.microsoft.com/office/powerpoint/2010/main" val="1669585764"/>
+        <p14:creationId xmlns:p14="http://schemas.microsoft.com/office/powerpoint/2010/main" val="2263901205"/>
       </p:ext>
     </p:extLst>
   </p:cSld>
@@ -23712,90 +23594,9 @@
           <a:lstStyle/>
           <a:p>
             <a:r>
-              <a:rPr lang="en-US" b="1" dirty="0"/>
-              <a:t>Why is </a:t>
-            </a:r>
-            <a:r>
-              <a:rPr lang="en-US" b="1" dirty="0" err="1"/>
-              <a:t>Stegen's</a:t>
-            </a:r>
-            <a:r>
-              <a:rPr lang="en-US" b="1" dirty="0"/>
-              <a:t> Phylogenetic Null Model important?</a:t>
-            </a:r>
-          </a:p>
-          <a:p>
-            <a:r>
-              <a:rPr lang="en-US" b="0" dirty="0"/>
-              <a:t>Ecological community assembly is shaped by:</a:t>
-            </a:r>
-          </a:p>
-          <a:p>
-            <a:r>
-              <a:rPr lang="en-US" b="0" dirty="0"/>
-              <a:t>Selection from among-taxa differences in fitness (this can be homogenous or variable)</a:t>
-            </a:r>
-          </a:p>
-          <a:p>
-            <a:r>
-              <a:rPr lang="en-US" b="0" dirty="0"/>
-              <a:t>Dispersal (is a rate that may be limited when there is limited dispersal between communities, or homogenizing dispersal when there is high dispersal between communities)</a:t>
-            </a:r>
-          </a:p>
-          <a:p>
-            <a:r>
-              <a:rPr lang="en-US" b="0" dirty="0"/>
-              <a:t>Ecological drift</a:t>
-            </a:r>
-          </a:p>
-          <a:p>
-            <a:r>
-              <a:rPr lang="en-US" b="0" dirty="0"/>
-              <a:t>The relative importance of these processes varies. </a:t>
-            </a:r>
-          </a:p>
-          <a:p>
-            <a:endParaRPr lang="en-US" b="0" dirty="0"/>
-          </a:p>
-          <a:p>
-            <a:r>
-              <a:rPr lang="en-US" b="0" dirty="0"/>
-              <a:t>If environmental conditions are homogenous through space there will be constant selective pressure resulting in homogenous selection.</a:t>
-            </a:r>
-          </a:p>
-          <a:p>
-            <a:r>
-              <a:rPr lang="en-US" b="0" dirty="0"/>
-              <a:t>If environmental conditions vary across space, the fitness differences of taxa will vary across space and there will be variable selection.</a:t>
-            </a:r>
-          </a:p>
-          <a:p>
-            <a:r>
-              <a:rPr lang="en-US" b="0" dirty="0"/>
-              <a:t>High dispersal rates between communities lead to homogenous community composition if those dispersal rates overcome selective pressures, leading to homogenizing dispersal.</a:t>
-            </a:r>
-          </a:p>
-          <a:p>
-            <a:r>
-              <a:rPr lang="en-US" b="0" dirty="0"/>
-              <a:t>If selection is weak and dispersal between communities is low, ecological drift can generate significant changes in community composition. </a:t>
-            </a:r>
-          </a:p>
-          <a:p>
-            <a:r>
-              <a:rPr lang="en-US" b="0" dirty="0"/>
-              <a:t>Dispersal limitation is the situation in which low dispersal rates are the primary contributor to high community turnover.</a:t>
-            </a:r>
-          </a:p>
-          <a:p>
-            <a:r>
-              <a:rPr lang="en-US" b="0" dirty="0"/>
-              <a:t>Ecological drift is the situation in which there is a combination of moderate selection and moderate dispersal, neither process dominates so community turnover is a result of a mixture of dispersal and random birth/death events. Essentially this is where community assembly is not dominated by a particular process.</a:t>
-            </a:r>
-            <a:endParaRPr lang="en-US" b="1" dirty="0"/>
-          </a:p>
-          <a:p>
-            <a:endParaRPr lang="en-US" b="1" dirty="0"/>
+              <a:rPr lang="en-US" dirty="0"/>
+              <a:t>This is the result of the model fitting with the Sommers dataset (not reduced).</a:t>
+            </a:r>
           </a:p>
           <a:p>
             <a:endParaRPr lang="en-US" dirty="0"/>
@@ -23803,25 +23604,49 @@
           <a:p>
             <a:r>
               <a:rPr lang="en-US" dirty="0"/>
-              <a:t>Stochastic processes can produce complex spatial community patterns. </a:t>
-            </a:r>
+              <a:t>X axis = log average relative abundances of each ASV across all samples (</a:t>
+            </a:r>
+            <a:r>
+              <a:rPr lang="en-GB" dirty="0"/>
+              <a:t>percent composition of an ASV </a:t>
+            </a:r>
+            <a:r>
+              <a:rPr lang="en-GB" b="1" dirty="0"/>
+              <a:t>relative</a:t>
+            </a:r>
+            <a:r>
+              <a:rPr lang="en-GB" dirty="0"/>
+              <a:t> to the total number of ASVs across all samples)</a:t>
+            </a:r>
+          </a:p>
+          <a:p>
+            <a:endParaRPr lang="en-US" dirty="0"/>
           </a:p>
           <a:p>
             <a:r>
               <a:rPr lang="en-US" dirty="0"/>
-              <a:t>Ecological drift = random birth/death events in a specific area, in the absence of selection. Ecological drift is particularly important when dispersal is limited as illustrated by island biogeography theory.</a:t>
-            </a:r>
+              <a:t>Y axis = mean occurrence frequency of each ASV (in what percentage of samples will each ASV occur)</a:t>
+            </a:r>
+          </a:p>
+          <a:p>
+            <a:endParaRPr lang="en-US" dirty="0"/>
           </a:p>
           <a:p>
             <a:r>
               <a:rPr lang="en-US" dirty="0"/>
-              <a:t>Dispersal limitation between isolated habitats promotes local extinction and ecological drift which causes initially identical communities to diverge. Ecological drift can cause communities to diverge, even when dispersal is high and selection pressure is low.</a:t>
+              <a:t>Points = observed log relative abundances against occurrence frequencies</a:t>
             </a:r>
           </a:p>
           <a:p>
             <a:r>
               <a:rPr lang="en-US" dirty="0"/>
-              <a:t>Homogenizing dispersal = high dispersal rates leading to similar communities between habitats (overcomes the impact of ecological drift and even deterministic processes)</a:t>
+              <a:t>Solid line = predicted log relative abundances plotted against occurrence frequencies</a:t>
+            </a:r>
+          </a:p>
+          <a:p>
+            <a:r>
+              <a:rPr lang="en-US" dirty="0"/>
+              <a:t>Dotted lines = 95% confidence intervals</a:t>
             </a:r>
           </a:p>
           <a:p>
@@ -23830,73 +23655,101 @@
           <a:p>
             <a:r>
               <a:rPr lang="en-US" dirty="0"/>
-              <a:t>Deterministic (deterministic processes commonly mean beta diversity varies as a result of environmental characteristics – i.e. communities are more or less different due to the differences or similarities of the environments)</a:t>
+              <a:t>This allows us to assess to what degree observed community structure can be explained by stochastic processes within each sample.</a:t>
             </a:r>
           </a:p>
           <a:p>
             <a:r>
               <a:rPr lang="en-US" dirty="0"/>
-              <a:t>Variable selection – deterministic processes are driving variable composition between communities. Different areas have different environmental characteristics that select for different species.</a:t>
+              <a:t>The Sloan neutral model is applied here. This model does not take into account phylogenetic distance. </a:t>
             </a:r>
           </a:p>
           <a:p>
             <a:r>
               <a:rPr lang="en-US" dirty="0"/>
-              <a:t>Homogenizing selection – deterministic processes are driving homogenous composition between communities. Different areas have similar environmental characteristics that select for similar species.</a:t>
-            </a:r>
-          </a:p>
-          <a:p>
-            <a:endParaRPr lang="en-US" dirty="0"/>
+              <a:t>ASV occurrence frequency is explained as a function of ASV abundance within the metacommunity (i.e. the more abundant an ASV is in the metacommunity, the more frequently it will be detected in the local community by chance). </a:t>
+            </a:r>
           </a:p>
           <a:p>
             <a:r>
               <a:rPr lang="en-US" dirty="0"/>
-              <a:t>Dispersal limitation – stochastic dispersal limitation is driving variable composition between communities </a:t>
+              <a:t>The neutral model performed well, explaining 77% of variation in ASV detection frequency with an estimated migration factor of 0.02 between sites.</a:t>
             </a:r>
           </a:p>
           <a:p>
             <a:r>
               <a:rPr lang="en-US" dirty="0"/>
-              <a:t>Homogenizing dispersal – stochastic high dispersal is driving homogenous composition between communities</a:t>
-            </a:r>
-          </a:p>
-          <a:p>
-            <a:r>
-              <a:rPr lang="en-US" dirty="0"/>
-              <a:t>Ecological drift – stochastic ecological drift is driving variable composition between communities</a:t>
-            </a:r>
-          </a:p>
-          <a:p>
-            <a:endParaRPr lang="en-US" dirty="0"/>
-          </a:p>
-          <a:p>
-            <a:r>
-              <a:rPr lang="en-US" b="1" dirty="0"/>
-              <a:t>Explain how </a:t>
-            </a:r>
-            <a:r>
-              <a:rPr lang="en-US" b="1" dirty="0" err="1"/>
-              <a:t>Stegen's</a:t>
-            </a:r>
-            <a:r>
-              <a:rPr lang="en-US" b="1" dirty="0"/>
-              <a:t> Null Model works.</a:t>
-            </a:r>
-          </a:p>
-          <a:p>
-            <a:r>
-              <a:rPr lang="en-US" b="0" dirty="0"/>
-              <a:t>This framework uses the phylogenetic differences between communities to infer ecological selection. </a:t>
-            </a:r>
-          </a:p>
-          <a:p>
-            <a:endParaRPr lang="en-US" b="0" dirty="0"/>
-          </a:p>
-          <a:p>
-            <a:r>
-              <a:rPr lang="en-US" b="1" dirty="0"/>
-              <a:t>Why is phylogenetic signal important?</a:t>
-            </a:r>
+              <a:t>These results suggest that neutral assembly processes can explain the pattern of observed ASV occurrence frequencies </a:t>
+            </a:r>
+            <a:r>
+              <a:rPr lang="en-US" strike="sngStrike" dirty="0"/>
+              <a:t>and that the the regional species pool is a driving factor in the community composition of these samples. </a:t>
+            </a:r>
+          </a:p>
+          <a:p>
+            <a:r>
+              <a:rPr lang="en-US" strike="noStrike" dirty="0"/>
+              <a:t>The deviation of predicted occurrence frequencies from observed occurrence frequencies suggests that there are also deterministic processes driving community composition.</a:t>
+            </a:r>
+          </a:p>
+          <a:p>
+            <a:endParaRPr lang="en-US" strike="noStrike" dirty="0"/>
+          </a:p>
+          <a:p>
+            <a:r>
+              <a:rPr lang="en-US" b="1" strike="noStrike" dirty="0"/>
+              <a:t>WHAT CAN WE INTERPRET FROM THESE RESULTS?</a:t>
+            </a:r>
+          </a:p>
+          <a:p>
+            <a:r>
+              <a:rPr lang="en-US" strike="noStrike" dirty="0"/>
+              <a:t>I have assessed the degree to which stochastic processes explain community assembly within these samples.</a:t>
+            </a:r>
+          </a:p>
+          <a:p>
+            <a:r>
+              <a:rPr lang="en-US" strike="noStrike" dirty="0"/>
+              <a:t>This model ignores phylogenetic distance and explains the frequency of ASV detection across samples as a function of their abundance in the metacommunity (the more individuals of ASV </a:t>
+            </a:r>
+            <a:r>
+              <a:rPr lang="en-US" strike="noStrike" dirty="0" err="1"/>
+              <a:t>i</a:t>
+            </a:r>
+            <a:r>
+              <a:rPr lang="en-US" strike="noStrike" dirty="0"/>
+              <a:t> are present in the metacommunity, the more likely you are to find them in any given sample).</a:t>
+            </a:r>
+          </a:p>
+          <a:p>
+            <a:r>
+              <a:rPr lang="en-US" strike="noStrike" dirty="0"/>
+              <a:t>The neutral model performed well, explaining 77% of the variation in ASV detection frequency with an estimated migration factor of 0.017 between sites (this means there is ~2% chance of a local death being replaced by an immigrant which is very low – lower than reported for other studies that hover around 16-25%).</a:t>
+            </a:r>
+          </a:p>
+          <a:p>
+            <a:r>
+              <a:rPr lang="en-US" strike="noStrike" dirty="0"/>
+              <a:t>These results indicate that, for the majority of ASVs, neutral assembly processes of ecological drift and dispersal can explain their within sample occurrence patterns across an area, and the composition of the species pool of the area drives community assembly.</a:t>
+            </a:r>
+          </a:p>
+          <a:p>
+            <a:r>
+              <a:rPr lang="en-US" strike="noStrike" dirty="0"/>
+              <a:t>However, the model is not a perfect fit to the data and beta diversity ordination has shown that communities vary significantly between glaciers, suggesting that deterministic processes also play an important role.</a:t>
+            </a:r>
+          </a:p>
+          <a:p>
+            <a:endParaRPr lang="en-US" strike="noStrike" dirty="0"/>
+          </a:p>
+          <a:p>
+            <a:r>
+              <a:rPr lang="en-US" strike="noStrike" dirty="0"/>
+              <a:t>NULL hypothesis: cryoconite bacterial community composition is completely stochastic. Neutral model results (high R2) mean I am unable to reject the null hypothesis. Significant variable in ASV frequency across samples is explained by their relative abundance in the metacommunity. The results suggest that local selection is weak and dispersal is low, indicating that ecological drift is the dominant community assembly process.</a:t>
+            </a:r>
+          </a:p>
+          <a:p>
+            <a:endParaRPr lang="en-US" strike="noStrike" dirty="0"/>
           </a:p>
           <a:p>
             <a:pPr marL="0" marR="0" lvl="0" indent="0" algn="l" defTabSz="914400" rtl="0" eaLnBrk="1" fontAlgn="auto" latinLnBrk="0" hangingPunct="1">
@@ -23917,113 +23770,79 @@
               <a:defRPr/>
             </a:pPr>
             <a:r>
-              <a:rPr lang="en-US" b="0" dirty="0"/>
-              <a:t>For this method to work there need to be significant phylogenetic signal – that is, taxa that are more closely phylogenetically related, exhibit ecological similarities/niche similarities. If more closely related taxa are not more ecologically similar then we cannot use their relatedness to infer if selection or stochastic processes are occurring.</a:t>
-            </a:r>
-          </a:p>
-          <a:p>
-            <a:pPr marL="0" marR="0" lvl="0" indent="0" algn="l" defTabSz="914400" rtl="0" eaLnBrk="1" fontAlgn="auto" latinLnBrk="0" hangingPunct="1">
-              <a:lnSpc>
-                <a:spcPct val="100000"/>
-              </a:lnSpc>
-              <a:spcBef>
-                <a:spcPts val="0"/>
-              </a:spcBef>
-              <a:spcAft>
-                <a:spcPts val="0"/>
-              </a:spcAft>
-              <a:buClrTx/>
-              <a:buSzTx/>
-              <a:buFontTx/>
-              <a:buNone/>
-              <a:tabLst/>
-              <a:defRPr/>
-            </a:pPr>
-            <a:endParaRPr lang="en-US" b="0" dirty="0"/>
-          </a:p>
-          <a:p>
-            <a:pPr marL="0" marR="0" lvl="0" indent="0" algn="l" defTabSz="914400" rtl="0" eaLnBrk="1" fontAlgn="auto" latinLnBrk="0" hangingPunct="1">
-              <a:lnSpc>
-                <a:spcPct val="100000"/>
-              </a:lnSpc>
-              <a:spcBef>
-                <a:spcPts val="0"/>
-              </a:spcBef>
-              <a:spcAft>
-                <a:spcPts val="0"/>
-              </a:spcAft>
-              <a:buClrTx/>
-              <a:buSzTx/>
-              <a:buFontTx/>
-              <a:buNone/>
-              <a:tabLst/>
-              <a:defRPr/>
-            </a:pPr>
-            <a:r>
-              <a:rPr lang="en-US" b="1" dirty="0"/>
-              <a:t>The process</a:t>
-            </a:r>
-            <a:endParaRPr lang="en-US" b="0" dirty="0"/>
-          </a:p>
-          <a:p>
-            <a:r>
-              <a:rPr lang="en-US" b="0" dirty="0"/>
-              <a:t>To quantify phylogenetic turnover between communities we first calculate the between-community mean-nearest-taxon-distance metric (βMNTD). This quantifies the distance between each species in one community and it’s closest relative in a second community.</a:t>
-            </a:r>
-          </a:p>
-          <a:p>
-            <a:r>
-              <a:rPr lang="en-US" b="0" dirty="0"/>
-              <a:t>For each pair of community we generate the βMNTD is selection was not driving community assembly by randomly shuffling the tips of the phylogeny and recalculating the βMNTD (repeat 999 times to get distribution of null values).</a:t>
-            </a:r>
-          </a:p>
-          <a:p>
-            <a:r>
-              <a:rPr lang="en-US" b="0" dirty="0"/>
-              <a:t>We use the observed βMNTD and the null βMNTD to generate our β-nearest-taxon-index (βNTI).</a:t>
-            </a:r>
-          </a:p>
-          <a:p>
-            <a:r>
-              <a:rPr lang="en-US" b="0" dirty="0"/>
-              <a:t>If the observed βMNTD is significantly less (i.e. βNTI &lt;-2) or greater than the null expectation (i.e. βNTI &gt;2) we would infer that homogenous selection or variable selection is shaping community assembly respectively.</a:t>
-            </a:r>
-          </a:p>
-          <a:p>
-            <a:r>
-              <a:rPr lang="en-US" b="0" dirty="0"/>
-              <a:t>If the absolute value of βNTI  is less than 2 we suggest that stochastic processes are predominantly driving community assembly.  </a:t>
-            </a:r>
-          </a:p>
-          <a:p>
-            <a:endParaRPr lang="en-US" b="0" dirty="0"/>
-          </a:p>
-          <a:p>
-            <a:r>
-              <a:rPr lang="en-US" b="0" dirty="0"/>
-              <a:t>To distinguish between homogenizing dispersal, limited dispersal and lack of dominance between selection and dispersal, we use the </a:t>
-            </a:r>
-            <a:r>
-              <a:rPr lang="en-US" b="0" dirty="0" err="1"/>
-              <a:t>Raup</a:t>
-            </a:r>
-            <a:r>
-              <a:rPr lang="en-US" b="0"/>
-              <a:t>-Crick metric</a:t>
-            </a:r>
-            <a:endParaRPr lang="en-US" b="0" dirty="0"/>
-          </a:p>
-          <a:p>
-            <a:endParaRPr lang="en-US" b="0" dirty="0"/>
-          </a:p>
-          <a:p>
-            <a:endParaRPr lang="en-US" b="0" dirty="0"/>
-          </a:p>
-          <a:p>
-            <a:endParaRPr lang="en-US" b="1" dirty="0"/>
-          </a:p>
-          <a:p>
-            <a:endParaRPr lang="en-US" b="1" dirty="0"/>
+              <a:rPr lang="en-US" dirty="0"/>
+              <a:t>Estimates of beta diversity based on phylogenetic dissimilarity show significant variation between glaciers. This supports the results that dispersal is limited. We might suggest that variation in beta diversity is a result of local ecological drift and limited dispersal rather than selection.</a:t>
+            </a:r>
+            <a:endParaRPr lang="en-US" strike="noStrike" dirty="0"/>
+          </a:p>
+          <a:p>
+            <a:endParaRPr lang="en-US" strike="noStrike" dirty="0"/>
+          </a:p>
+          <a:p>
+            <a:r>
+              <a:rPr lang="en-US" strike="noStrike" dirty="0"/>
+              <a:t>The distribution of ASVs across samples (in the metacommunity) followed the basic pattern of more abundant data being widespread – this is consistent with predictions of neutral theory. Despite the good fit of the model and the low m rate, there was significant difference between the communities on each glacier, illustrating the important point that variation among microbial communities does not need to be the result of environmental differences. Neutral processes can generate diversity on their own!</a:t>
+            </a:r>
+          </a:p>
+          <a:p>
+            <a:endParaRPr lang="en-US" strike="noStrike" dirty="0"/>
+          </a:p>
+          <a:p>
+            <a:r>
+              <a:rPr lang="en-US" b="1" strike="noStrike" dirty="0"/>
+              <a:t>What would I expect to see for abundant/rare, active/bulk communities? What would I infer from this?</a:t>
+            </a:r>
+          </a:p>
+          <a:p>
+            <a:endParaRPr lang="en-US" strike="noStrike" dirty="0"/>
+          </a:p>
+          <a:p>
+            <a:r>
+              <a:rPr lang="en-US" strike="noStrike" dirty="0"/>
+              <a:t>I want to repeat this analysis for abundant/rare taxa and active/bulk groups to see if stochastic processes are as important for each group, as well as to see how chance of immigration changes.</a:t>
+            </a:r>
+          </a:p>
+          <a:p>
+            <a:endParaRPr lang="en-US" strike="noStrike" dirty="0"/>
+          </a:p>
+          <a:p>
+            <a:r>
+              <a:rPr lang="en-US" strike="noStrike" dirty="0"/>
+              <a:t>Previous studies into soil microbial community assembly processes found:</a:t>
+            </a:r>
+          </a:p>
+          <a:p>
+            <a:r>
+              <a:rPr lang="en-US" strike="noStrike" dirty="0"/>
+              <a:t>Neutral model explained more variation in abundant sub-community than rare sub-community.</a:t>
+            </a:r>
+          </a:p>
+          <a:p>
+            <a:r>
+              <a:rPr lang="en-US" strike="noStrike" dirty="0"/>
+              <a:t>Neutral model also predicted lower m values for abundant sub-communities than rare sub-communities.</a:t>
+            </a:r>
+          </a:p>
+          <a:p>
+            <a:endParaRPr lang="en-US" strike="noStrike" dirty="0"/>
+          </a:p>
+          <a:p>
+            <a:r>
+              <a:rPr lang="en-US" strike="noStrike" dirty="0"/>
+              <a:t>Abundant species likely utilize an array of resources and occupy more broad niches, which rare taxa may occupy more specific niches – we would expect rare sub-communities to be more strongly shaped by deterministic processes.</a:t>
+            </a:r>
+          </a:p>
+          <a:p>
+            <a:endParaRPr lang="en-US" strike="noStrike" dirty="0"/>
+          </a:p>
+          <a:p>
+            <a:r>
+              <a:rPr lang="en-US" strike="noStrike" dirty="0"/>
+              <a:t>I predict that the neutral model will describe more variation in the bulk community than the active community as selection will only occur on active species. I also predict that migration rates will be higher for bulk communities because migration requires that an individual successfully transfer to a new habitat – where a dormant individual doesn’t need to worry about selection. </a:t>
+            </a:r>
+          </a:p>
+          <a:p>
+            <a:endParaRPr lang="en-US" strike="noStrike" dirty="0"/>
           </a:p>
           <a:p>
             <a:endParaRPr lang="en-US" dirty="0"/>
@@ -24047,7 +23866,7 @@
           <a:p>
             <a:fld id="{91AE2140-D502-214A-B76B-E0784B2C949B}" type="slidenum">
               <a:rPr lang="en-US" smtClean="0"/>
-              <a:t>20</a:t>
+              <a:t>19</a:t>
             </a:fld>
             <a:endParaRPr lang="en-US"/>
           </a:p>
@@ -24056,7 +23875,7 @@
     </p:spTree>
     <p:extLst>
       <p:ext uri="{BB962C8B-B14F-4D97-AF65-F5344CB8AC3E}">
-        <p14:creationId xmlns:p14="http://schemas.microsoft.com/office/powerpoint/2010/main" val="4270121788"/>
+        <p14:creationId xmlns:p14="http://schemas.microsoft.com/office/powerpoint/2010/main" val="1669585764"/>
       </p:ext>
     </p:extLst>
   </p:cSld>
@@ -24111,9 +23930,379 @@
           <a:lstStyle/>
           <a:p>
             <a:r>
+              <a:rPr lang="en-US" b="1" dirty="0"/>
+              <a:t>Why is </a:t>
+            </a:r>
+            <a:r>
+              <a:rPr lang="en-US" b="1" dirty="0" err="1"/>
+              <a:t>Stegen's</a:t>
+            </a:r>
+            <a:r>
+              <a:rPr lang="en-US" b="1" dirty="0"/>
+              <a:t> Phylogenetic Null Model important?</a:t>
+            </a:r>
+          </a:p>
+          <a:p>
+            <a:r>
+              <a:rPr lang="en-US" b="0" dirty="0"/>
+              <a:t>Ecological community assembly is shaped by:</a:t>
+            </a:r>
+          </a:p>
+          <a:p>
+            <a:r>
+              <a:rPr lang="en-US" b="0" dirty="0"/>
+              <a:t>Selection from among-taxa differences in fitness (this can be homogenous or variable)</a:t>
+            </a:r>
+          </a:p>
+          <a:p>
+            <a:r>
+              <a:rPr lang="en-US" b="0" dirty="0"/>
+              <a:t>Dispersal (is a rate that may be limited when there is limited dispersal between communities, or homogenizing dispersal when there is high dispersal between communities)</a:t>
+            </a:r>
+          </a:p>
+          <a:p>
+            <a:r>
+              <a:rPr lang="en-US" b="0" dirty="0"/>
+              <a:t>Ecological drift</a:t>
+            </a:r>
+          </a:p>
+          <a:p>
+            <a:r>
+              <a:rPr lang="en-US" b="0" dirty="0"/>
+              <a:t>The relative importance of these processes varies. </a:t>
+            </a:r>
+          </a:p>
+          <a:p>
+            <a:endParaRPr lang="en-US" b="0" dirty="0"/>
+          </a:p>
+          <a:p>
+            <a:r>
+              <a:rPr lang="en-US" b="0" dirty="0"/>
+              <a:t>If environmental conditions are homogenous through space there will be constant selective pressure resulting in homogenous selection.</a:t>
+            </a:r>
+          </a:p>
+          <a:p>
+            <a:r>
+              <a:rPr lang="en-US" b="0" dirty="0"/>
+              <a:t>If environmental conditions vary across space, the fitness differences of taxa will vary across space and there will be variable selection.</a:t>
+            </a:r>
+          </a:p>
+          <a:p>
+            <a:r>
+              <a:rPr lang="en-US" b="0" dirty="0"/>
+              <a:t>High dispersal rates between communities lead to homogenous community composition if those dispersal rates overcome selective pressures, leading to homogenizing dispersal.</a:t>
+            </a:r>
+          </a:p>
+          <a:p>
+            <a:r>
+              <a:rPr lang="en-US" b="0" dirty="0"/>
+              <a:t>If selection is weak and dispersal between communities is low, ecological drift can generate significant changes in community composition. </a:t>
+            </a:r>
+          </a:p>
+          <a:p>
+            <a:r>
+              <a:rPr lang="en-US" b="0" dirty="0"/>
+              <a:t>Dispersal limitation is the situation in which low dispersal rates are the primary contributor to high community turnover.</a:t>
+            </a:r>
+          </a:p>
+          <a:p>
+            <a:r>
+              <a:rPr lang="en-US" b="0" dirty="0"/>
+              <a:t>Ecological drift is the situation in which there is a combination of moderate selection and moderate dispersal, neither process dominates so community turnover is a result of a mixture of dispersal and random birth/death events. Essentially this is where community assembly is not dominated by a particular process.</a:t>
+            </a:r>
+            <a:endParaRPr lang="en-US" b="1" dirty="0"/>
+          </a:p>
+          <a:p>
+            <a:endParaRPr lang="en-US" b="1" dirty="0"/>
+          </a:p>
+          <a:p>
+            <a:endParaRPr lang="en-US" dirty="0"/>
+          </a:p>
+          <a:p>
+            <a:r>
               <a:rPr lang="en-US" dirty="0"/>
-              <a:t>Here there is only one significant relationship between phylogenetic distance and environmental variable – so the null model may not be appropriate for this data – however, we must consider that this dataset was drastically reduced to allow the correlograms to process on my local computer. With that in mind, we continue with the null model analysis.</a:t>
-            </a:r>
+              <a:t>Stochastic processes can produce complex spatial community patterns. </a:t>
+            </a:r>
+          </a:p>
+          <a:p>
+            <a:r>
+              <a:rPr lang="en-US" dirty="0"/>
+              <a:t>Ecological drift = random birth/death events in a specific area, in the absence of selection. Ecological drift is particularly important when dispersal is limited as illustrated by island biogeography theory.</a:t>
+            </a:r>
+          </a:p>
+          <a:p>
+            <a:r>
+              <a:rPr lang="en-US" dirty="0"/>
+              <a:t>Dispersal limitation between isolated habitats promotes local extinction and ecological drift which causes initially identical communities to diverge. Ecological drift can cause communities to diverge, even when dispersal is high and selection pressure is low.</a:t>
+            </a:r>
+          </a:p>
+          <a:p>
+            <a:r>
+              <a:rPr lang="en-US" dirty="0"/>
+              <a:t>Homogenizing dispersal = high dispersal rates leading to similar communities between habitats (overcomes the impact of ecological drift and even deterministic processes)</a:t>
+            </a:r>
+          </a:p>
+          <a:p>
+            <a:endParaRPr lang="en-US" dirty="0"/>
+          </a:p>
+          <a:p>
+            <a:r>
+              <a:rPr lang="en-US" dirty="0"/>
+              <a:t>Deterministic (deterministic processes commonly mean beta diversity varies as a result of environmental characteristics – i.e. communities are more or less different due to the differences or similarities of the environments)</a:t>
+            </a:r>
+          </a:p>
+          <a:p>
+            <a:r>
+              <a:rPr lang="en-US" dirty="0"/>
+              <a:t>Variable selection – deterministic processes are driving variable composition between communities. Different areas have different environmental characteristics that select for different species.</a:t>
+            </a:r>
+          </a:p>
+          <a:p>
+            <a:r>
+              <a:rPr lang="en-US" dirty="0"/>
+              <a:t>Homogenizing selection – deterministic processes are driving homogenous composition between communities. Different areas have similar environmental characteristics that select for similar species.</a:t>
+            </a:r>
+          </a:p>
+          <a:p>
+            <a:endParaRPr lang="en-US" dirty="0"/>
+          </a:p>
+          <a:p>
+            <a:r>
+              <a:rPr lang="en-US" dirty="0"/>
+              <a:t>Dispersal limitation – stochastic dispersal limitation is driving variable composition between communities </a:t>
+            </a:r>
+          </a:p>
+          <a:p>
+            <a:r>
+              <a:rPr lang="en-US" dirty="0"/>
+              <a:t>Homogenizing dispersal – stochastic high dispersal is driving homogenous composition between communities</a:t>
+            </a:r>
+          </a:p>
+          <a:p>
+            <a:r>
+              <a:rPr lang="en-US" dirty="0"/>
+              <a:t>Ecological drift – stochastic ecological drift is driving variable composition between communities</a:t>
+            </a:r>
+          </a:p>
+          <a:p>
+            <a:endParaRPr lang="en-US" dirty="0"/>
+          </a:p>
+          <a:p>
+            <a:r>
+              <a:rPr lang="en-US" b="1" dirty="0"/>
+              <a:t>Explain how </a:t>
+            </a:r>
+            <a:r>
+              <a:rPr lang="en-US" b="1" dirty="0" err="1"/>
+              <a:t>Stegen's</a:t>
+            </a:r>
+            <a:r>
+              <a:rPr lang="en-US" b="1" dirty="0"/>
+              <a:t> Null Model works.</a:t>
+            </a:r>
+          </a:p>
+          <a:p>
+            <a:r>
+              <a:rPr lang="en-US" b="0" dirty="0"/>
+              <a:t>This framework uses the phylogenetic differences between communities to infer ecological selection. </a:t>
+            </a:r>
+          </a:p>
+          <a:p>
+            <a:endParaRPr lang="en-US" b="0" dirty="0"/>
+          </a:p>
+          <a:p>
+            <a:r>
+              <a:rPr lang="en-US" b="1" dirty="0"/>
+              <a:t>Why is phylogenetic signal important?</a:t>
+            </a:r>
+          </a:p>
+          <a:p>
+            <a:pPr marL="0" marR="0" lvl="0" indent="0" algn="l" defTabSz="914400" rtl="0" eaLnBrk="1" fontAlgn="auto" latinLnBrk="0" hangingPunct="1">
+              <a:lnSpc>
+                <a:spcPct val="100000"/>
+              </a:lnSpc>
+              <a:spcBef>
+                <a:spcPts val="0"/>
+              </a:spcBef>
+              <a:spcAft>
+                <a:spcPts val="0"/>
+              </a:spcAft>
+              <a:buClrTx/>
+              <a:buSzTx/>
+              <a:buFontTx/>
+              <a:buNone/>
+              <a:tabLst/>
+              <a:defRPr/>
+            </a:pPr>
+            <a:r>
+              <a:rPr lang="en-US" b="0" dirty="0"/>
+              <a:t>For this method to work there need to be significant phylogenetic signal – that is, taxa that are more closely phylogenetically related, exhibit ecological similarities/niche similarities. If more closely related taxa are not more ecologically similar then we cannot use their relatedness to infer if selection or stochastic processes are occurring.</a:t>
+            </a:r>
+          </a:p>
+          <a:p>
+            <a:pPr marL="0" marR="0" lvl="0" indent="0" algn="l" defTabSz="914400" rtl="0" eaLnBrk="1" fontAlgn="auto" latinLnBrk="0" hangingPunct="1">
+              <a:lnSpc>
+                <a:spcPct val="100000"/>
+              </a:lnSpc>
+              <a:spcBef>
+                <a:spcPts val="0"/>
+              </a:spcBef>
+              <a:spcAft>
+                <a:spcPts val="0"/>
+              </a:spcAft>
+              <a:buClrTx/>
+              <a:buSzTx/>
+              <a:buFontTx/>
+              <a:buNone/>
+              <a:tabLst/>
+              <a:defRPr/>
+            </a:pPr>
+            <a:endParaRPr lang="en-US" b="0" dirty="0"/>
+          </a:p>
+          <a:p>
+            <a:pPr marL="0" marR="0" lvl="0" indent="0" algn="l" defTabSz="914400" rtl="0" eaLnBrk="1" fontAlgn="auto" latinLnBrk="0" hangingPunct="1">
+              <a:lnSpc>
+                <a:spcPct val="100000"/>
+              </a:lnSpc>
+              <a:spcBef>
+                <a:spcPts val="0"/>
+              </a:spcBef>
+              <a:spcAft>
+                <a:spcPts val="0"/>
+              </a:spcAft>
+              <a:buClrTx/>
+              <a:buSzTx/>
+              <a:buFontTx/>
+              <a:buNone/>
+              <a:tabLst/>
+              <a:defRPr/>
+            </a:pPr>
+            <a:r>
+              <a:rPr lang="en-US" b="1" dirty="0"/>
+              <a:t>The process</a:t>
+            </a:r>
+            <a:endParaRPr lang="en-US" b="0" dirty="0"/>
+          </a:p>
+          <a:p>
+            <a:r>
+              <a:rPr lang="en-US" b="0" dirty="0"/>
+              <a:t>To quantify phylogenetic turnover between communities we first calculate the between-community mean-nearest-taxon-distance metric (βMNTD). This quantifies the distance between each species in one community and it’s closest relative in a second community.</a:t>
+            </a:r>
+          </a:p>
+          <a:p>
+            <a:r>
+              <a:rPr lang="en-US" b="0" dirty="0"/>
+              <a:t>For each pair of community we generate the βMNTD is selection was not driving community assembly by randomly shuffling the tips of the phylogeny and recalculating the βMNTD (repeat 999 times to get distribution of null values).</a:t>
+            </a:r>
+          </a:p>
+          <a:p>
+            <a:r>
+              <a:rPr lang="en-US" b="0" dirty="0"/>
+              <a:t>We use the observed βMNTD and the null βMNTD to generate our β-nearest-taxon-index (βNTI).</a:t>
+            </a:r>
+          </a:p>
+          <a:p>
+            <a:r>
+              <a:rPr lang="en-US" b="0" dirty="0"/>
+              <a:t>If the observed βMNTD is significantly less (i.e. βNTI &lt;-2) or greater than the null expectation (i.e. βNTI &gt;2) we would infer that homogenous selection or variable selection is shaping community assembly respectively.</a:t>
+            </a:r>
+          </a:p>
+          <a:p>
+            <a:r>
+              <a:rPr lang="en-US" b="0" dirty="0"/>
+              <a:t>If the absolute value of βNTI  is less than 2 we suggest that stochastic processes are predominantly driving community assembly.  </a:t>
+            </a:r>
+          </a:p>
+          <a:p>
+            <a:endParaRPr lang="en-US" b="0" dirty="0"/>
+          </a:p>
+          <a:p>
+            <a:r>
+              <a:rPr lang="en-US" b="0" dirty="0"/>
+              <a:t>To distinguish between homogenizing dispersal, limited dispersal and lack of dominance between selection and dispersal, we use the </a:t>
+            </a:r>
+            <a:r>
+              <a:rPr lang="en-US" b="0" dirty="0" err="1"/>
+              <a:t>Raup</a:t>
+            </a:r>
+            <a:r>
+              <a:rPr lang="en-US" b="0" dirty="0"/>
+              <a:t>-Crick metric which incorporates species relative abundances but doesn’t use phylogenetic information.</a:t>
+            </a:r>
+          </a:p>
+          <a:p>
+            <a:endParaRPr lang="en-US" b="0" dirty="0"/>
+          </a:p>
+          <a:p>
+            <a:r>
+              <a:rPr lang="en-US" b="0" dirty="0"/>
+              <a:t>To generate the RC metric, species are drawn into each sample until the observed species richness of each sample is reached.</a:t>
+            </a:r>
+          </a:p>
+          <a:p>
+            <a:r>
+              <a:rPr lang="en-US" b="0" dirty="0"/>
+              <a:t>Then individuals are draw into each species until the observed abundance is reached. This procedure approximates stochastic community assembly under the assumption of weak selection and random dispersal. Compositional differences are qualified using Bray-Curtis and this is repeated 999 times for each pair of communities to generate a null distribution of dissimilarities.</a:t>
+            </a:r>
+          </a:p>
+          <a:p>
+            <a:endParaRPr lang="en-US" b="0" dirty="0"/>
+          </a:p>
+          <a:p>
+            <a:r>
+              <a:rPr lang="en-US" b="0" dirty="0"/>
+              <a:t>Observed bray-Curtis dissimilarities are then compared to the null distribution to get the </a:t>
+            </a:r>
+            <a:r>
+              <a:rPr lang="en-US" b="0" dirty="0" err="1"/>
+              <a:t>RCbray</a:t>
+            </a:r>
+            <a:r>
+              <a:rPr lang="en-US" b="0" dirty="0"/>
+              <a:t> value. If the </a:t>
+            </a:r>
+            <a:r>
+              <a:rPr lang="en-US" b="0" dirty="0" err="1"/>
+              <a:t>Rcbray</a:t>
+            </a:r>
+            <a:r>
+              <a:rPr lang="en-US" b="0" dirty="0"/>
+              <a:t> value is less than -0.95 then the community is more homogenous than expected at random and this is driven by high dispersal rates. If the </a:t>
+            </a:r>
+            <a:r>
+              <a:rPr lang="en-US" b="0" dirty="0" err="1"/>
+              <a:t>Rcbray</a:t>
+            </a:r>
+            <a:r>
+              <a:rPr lang="en-US" b="0" dirty="0"/>
+              <a:t> value is &gt; 0.95 than the communities are more different than expected by random and they are shaped by dispersal limitation. If the absolute value of </a:t>
+            </a:r>
+            <a:r>
+              <a:rPr lang="en-US" b="0" dirty="0" err="1"/>
+              <a:t>Rcbray</a:t>
+            </a:r>
+            <a:r>
+              <a:rPr lang="en-US" b="0" dirty="0"/>
+              <a:t> is less than 0.95 then the compositional turnover between a given pair of communities is undominated by selection or dispersal.</a:t>
+            </a:r>
+          </a:p>
+          <a:p>
+            <a:endParaRPr lang="en-US" b="0" dirty="0"/>
+          </a:p>
+          <a:p>
+            <a:endParaRPr lang="en-US" b="0" dirty="0"/>
+          </a:p>
+          <a:p>
+            <a:endParaRPr lang="en-US" b="0" dirty="0"/>
+          </a:p>
+          <a:p>
+            <a:endParaRPr lang="en-US" b="1" dirty="0"/>
+          </a:p>
+          <a:p>
+            <a:endParaRPr lang="en-US" b="1" dirty="0"/>
+          </a:p>
+          <a:p>
+            <a:endParaRPr lang="en-US" dirty="0"/>
           </a:p>
         </p:txBody>
       </p:sp>
@@ -24134,7 +24323,7 @@
           <a:p>
             <a:fld id="{91AE2140-D502-214A-B76B-E0784B2C949B}" type="slidenum">
               <a:rPr lang="en-US" smtClean="0"/>
-              <a:t>22</a:t>
+              <a:t>20</a:t>
             </a:fld>
             <a:endParaRPr lang="en-US"/>
           </a:p>
@@ -24143,7 +24332,7 @@
     </p:spTree>
     <p:extLst>
       <p:ext uri="{BB962C8B-B14F-4D97-AF65-F5344CB8AC3E}">
-        <p14:creationId xmlns:p14="http://schemas.microsoft.com/office/powerpoint/2010/main" val="1424753429"/>
+        <p14:creationId xmlns:p14="http://schemas.microsoft.com/office/powerpoint/2010/main" val="4270121788"/>
       </p:ext>
     </p:extLst>
   </p:cSld>
@@ -24199,7 +24388,7 @@
           <a:p>
             <a:r>
               <a:rPr lang="en-US" dirty="0"/>
-              <a:t>Analysis of phylogenetic turnover between samples provides significant evidence that stochastic processes, specifically ecological drift and dispersal limitation, are driving community assembly.</a:t>
+              <a:t>Solid and open dots signify significant and non-significant correlations respectively. This related between ASV niche differences and between ASV phylogenetic distances. I used the cryoconite properties of chlorophyll, hole depth, pH and water content to estimate ASV environmental niches. Significant positive correlations indicates that the niche distance between ASVs increases with phylogenetic distance. </a:t>
             </a:r>
           </a:p>
           <a:p>
@@ -24208,19 +24397,32 @@
           <a:p>
             <a:r>
               <a:rPr lang="en-US" dirty="0"/>
-              <a:t>Previous studies of community assembly for abundant and rare taxa have found:</a:t>
-            </a:r>
+              <a:t>Here there is only one significant relationship between phylogenetic distance and environmental variable – so the null model may not be appropriate for this data – however, we must consider that this dataset was drastically reduced to allow the correlograms to process on my local computer. With that in mind, we continue with the null model analysis.</a:t>
+            </a:r>
+          </a:p>
+          <a:p>
+            <a:endParaRPr lang="en-US" dirty="0"/>
           </a:p>
           <a:p>
             <a:r>
               <a:rPr lang="en-US" dirty="0"/>
-              <a:t>Increased homogenous selection for rare taxa.</a:t>
-            </a:r>
-          </a:p>
-          <a:p>
+              <a:t>There are multi ways of testing for phylogenetic signal so it’d like to look into them (https://</a:t>
+            </a:r>
+            <a:r>
+              <a:rPr lang="en-US" dirty="0" err="1"/>
+              <a:t>besjournals.onlinelibrary.wiley.com</a:t>
+            </a:r>
             <a:r>
               <a:rPr lang="en-US" dirty="0"/>
-              <a:t>Increased dispersal limitation and variable selection for abundant taxa.</a:t>
+              <a:t>/</a:t>
+            </a:r>
+            <a:r>
+              <a:rPr lang="en-US" dirty="0" err="1"/>
+              <a:t>doi</a:t>
+            </a:r>
+            <a:r>
+              <a:rPr lang="en-US" dirty="0"/>
+              <a:t>/full/10.1111/j.2041-210X.2012.00196.x) </a:t>
             </a:r>
           </a:p>
         </p:txBody>
@@ -24242,7 +24444,7 @@
           <a:p>
             <a:fld id="{91AE2140-D502-214A-B76B-E0784B2C949B}" type="slidenum">
               <a:rPr lang="en-US" smtClean="0"/>
-              <a:t>23</a:t>
+              <a:t>22</a:t>
             </a:fld>
             <a:endParaRPr lang="en-US"/>
           </a:p>
@@ -24251,7 +24453,7 @@
     </p:spTree>
     <p:extLst>
       <p:ext uri="{BB962C8B-B14F-4D97-AF65-F5344CB8AC3E}">
-        <p14:creationId xmlns:p14="http://schemas.microsoft.com/office/powerpoint/2010/main" val="1369074605"/>
+        <p14:creationId xmlns:p14="http://schemas.microsoft.com/office/powerpoint/2010/main" val="1424753429"/>
       </p:ext>
     </p:extLst>
   </p:cSld>
@@ -24305,6 +24507,121 @@
           <a:bodyPr/>
           <a:lstStyle/>
           <a:p>
+            <a:r>
+              <a:rPr lang="en-US" dirty="0"/>
+              <a:t>Here we see that when I compared the composition of each community to the composition of all other communities, the absolute values of the </a:t>
+            </a:r>
+            <a:r>
+              <a:rPr lang="en-US" b="0" dirty="0"/>
+              <a:t>β-nearest-taxon-index (βNTI) were generally &lt; 2, suggesting that community assembly is predominantly driven by homogenizing dispersal, limiting dispersal or is undominated/a result of drift.</a:t>
+            </a:r>
+            <a:endParaRPr lang="en-US" dirty="0"/>
+          </a:p>
+          <a:p>
+            <a:endParaRPr lang="en-US" dirty="0"/>
+          </a:p>
+          <a:p>
+            <a:r>
+              <a:rPr lang="en-US" b="0" dirty="0"/>
+              <a:t>βNTI combined with </a:t>
+            </a:r>
+            <a:r>
+              <a:rPr lang="en-US" b="0" dirty="0" err="1"/>
+              <a:t>Rcbray</a:t>
+            </a:r>
+            <a:r>
+              <a:rPr lang="en-US" b="0" dirty="0"/>
+              <a:t> scores indicated that communities on both glaciers were shaped by a combination of dispersal limitation (making the communities less similar than would be expected by chance) and drift (where neither selection or dispersal are particularly strong).</a:t>
+            </a:r>
+          </a:p>
+          <a:p>
+            <a:endParaRPr lang="en-US" b="0" dirty="0"/>
+          </a:p>
+          <a:p>
+            <a:r>
+              <a:rPr lang="en-US" b="0" dirty="0"/>
+              <a:t>The dominance of stochastic processes is in keeping with the results of my neutral model analysis which suggested a large portion of the variation between communities could be explained by stochastic processes. Moreover, this is consistent with my CAP analysis that suggested cryoconite hole area and water content explained a low level of variation in community composition. </a:t>
+            </a:r>
+            <a:endParaRPr lang="en-US" dirty="0"/>
+          </a:p>
+          <a:p>
+            <a:endParaRPr lang="en-US" dirty="0"/>
+          </a:p>
+          <a:p>
+            <a:r>
+              <a:rPr lang="en-US" b="1" dirty="0"/>
+              <a:t>What would I expect to see for abundant/rare, active/bulk communities? What would I infer from this?</a:t>
+            </a:r>
+          </a:p>
+          <a:p>
+            <a:endParaRPr lang="en-US" dirty="0"/>
+          </a:p>
+          <a:p>
+            <a:r>
+              <a:rPr lang="en-US" dirty="0"/>
+              <a:t>Previous studies of community assembly for abundant and rare taxa have found:</a:t>
+            </a:r>
+          </a:p>
+          <a:p>
+            <a:r>
+              <a:rPr lang="en-US" dirty="0"/>
+              <a:t>Increased homogenous selection for rare taxa.</a:t>
+            </a:r>
+          </a:p>
+          <a:p>
+            <a:r>
+              <a:rPr lang="en-US" dirty="0"/>
+              <a:t>Increased dispersal limitation and variable selection for abundant taxa.</a:t>
+            </a:r>
+          </a:p>
+          <a:p>
+            <a:endParaRPr lang="en-US" dirty="0"/>
+          </a:p>
+          <a:p>
+            <a:r>
+              <a:rPr lang="en-US" dirty="0"/>
+              <a:t>Other studies have found selection more dominant for abundant taxa and drift more dominant for rare taxa.</a:t>
+            </a:r>
+          </a:p>
+          <a:p>
+            <a:endParaRPr lang="en-US" dirty="0"/>
+          </a:p>
+          <a:p>
+            <a:r>
+              <a:rPr lang="en-US" dirty="0"/>
+              <a:t>These processes very depending on environment. Because as far as I know null modelling with abundant/rare sub-communities hasn’t been applied to the supraglacial environment so it’s s mystery. </a:t>
+            </a:r>
+          </a:p>
+          <a:p>
+            <a:endParaRPr lang="en-US" dirty="0"/>
+          </a:p>
+          <a:p>
+            <a:pPr marL="0" marR="0" lvl="0" indent="0" algn="l" defTabSz="914400" rtl="0" eaLnBrk="1" fontAlgn="auto" latinLnBrk="0" hangingPunct="1">
+              <a:lnSpc>
+                <a:spcPct val="100000"/>
+              </a:lnSpc>
+              <a:spcBef>
+                <a:spcPts val="0"/>
+              </a:spcBef>
+              <a:spcAft>
+                <a:spcPts val="0"/>
+              </a:spcAft>
+              <a:buClrTx/>
+              <a:buSzTx/>
+              <a:buFontTx/>
+              <a:buNone/>
+              <a:tabLst/>
+              <a:defRPr/>
+            </a:pPr>
+            <a:r>
+              <a:rPr lang="en-US" strike="noStrike" dirty="0"/>
+              <a:t>I predict that stochastic processes will drive more variation in the bulk community than the active community as selection will only occur on active species. I also predict that Selection will be more important for rare than abundant taxa as abundant taxa may experience higher immigration rates that overcomes selection processes.</a:t>
+            </a:r>
+          </a:p>
+          <a:p>
+            <a:endParaRPr lang="en-US" dirty="0"/>
+          </a:p>
+          <a:p>
             <a:endParaRPr lang="en-US" dirty="0"/>
           </a:p>
         </p:txBody>
@@ -24326,7 +24643,7 @@
           <a:p>
             <a:fld id="{91AE2140-D502-214A-B76B-E0784B2C949B}" type="slidenum">
               <a:rPr lang="en-US" smtClean="0"/>
-              <a:t>24</a:t>
+              <a:t>23</a:t>
             </a:fld>
             <a:endParaRPr lang="en-US"/>
           </a:p>
@@ -24335,7 +24652,7 @@
     </p:spTree>
     <p:extLst>
       <p:ext uri="{BB962C8B-B14F-4D97-AF65-F5344CB8AC3E}">
-        <p14:creationId xmlns:p14="http://schemas.microsoft.com/office/powerpoint/2010/main" val="2121078948"/>
+        <p14:creationId xmlns:p14="http://schemas.microsoft.com/office/powerpoint/2010/main" val="1369074605"/>
       </p:ext>
     </p:extLst>
   </p:cSld>
@@ -24390,8 +24707,14 @@
           <a:lstStyle/>
           <a:p>
             <a:r>
+              <a:rPr lang="en-US" b="1" dirty="0"/>
+              <a:t>Why is network analysis important?</a:t>
+            </a:r>
+          </a:p>
+          <a:p>
+            <a:r>
               <a:rPr lang="en-US" dirty="0"/>
-              <a:t>Whilst multivariate analysis can assist us in investigating abiotic selection, microbial community assembly is also shaped by biotic selection. </a:t>
+              <a:t>Network analysis allows us to explore biotic selection, that is the interactions between microbial taxa that may drive microbial community assembly.</a:t>
             </a:r>
           </a:p>
           <a:p>
@@ -24400,42 +24723,7 @@
           <a:p>
             <a:r>
               <a:rPr lang="en-US" dirty="0"/>
-              <a:t>Biotic interactions may include top-down control through viral lysis and grazing, as well as microbe-microbe interactions.</a:t>
-            </a:r>
-          </a:p>
-          <a:p>
-            <a:endParaRPr lang="en-US" dirty="0"/>
-          </a:p>
-          <a:p>
-            <a:r>
-              <a:rPr lang="en-US" dirty="0"/>
-              <a:t>Due to technological restrictions, investigations of microbe-microbe interactions have typically been limited. With access to high-throughout sequencing, we can now construct co-occurrence networks in an attempt to decipher intra- and inter-specific interactions within communities.</a:t>
-            </a:r>
-          </a:p>
-          <a:p>
-            <a:endParaRPr lang="en-US" dirty="0"/>
-          </a:p>
-          <a:p>
-            <a:r>
-              <a:rPr lang="en-US" dirty="0"/>
-              <a:t>Previous research has indicated that microbial communities exhibit non-random co-occurrence patterns and module structures, suggesting that biotic selection plays a strong role in shaping community assembly.</a:t>
-            </a:r>
-          </a:p>
-          <a:p>
-            <a:endParaRPr lang="en-US" dirty="0"/>
-          </a:p>
-          <a:p>
-            <a:r>
-              <a:rPr lang="en-US" dirty="0"/>
-              <a:t>Communities may even </a:t>
-            </a:r>
-            <a:r>
-              <a:rPr lang="en-US" dirty="0" err="1"/>
-              <a:t>centre</a:t>
-            </a:r>
-            <a:r>
-              <a:rPr lang="en-US" dirty="0"/>
-              <a:t> around keystone species, that maintain the functioning of the community as a whole. </a:t>
+              <a:t>If we see a low number of significant taxon co-occurrence patterns this may support our theory that community assembly is primarily stochastic. If there are high numbers of significant taxon co-occurrence patterns this may lend support to deterministic processes driving community assembly.</a:t>
             </a:r>
           </a:p>
         </p:txBody>
@@ -24457,7 +24745,7 @@
           <a:p>
             <a:fld id="{91AE2140-D502-214A-B76B-E0784B2C949B}" type="slidenum">
               <a:rPr lang="en-US" smtClean="0"/>
-              <a:t>25</a:t>
+              <a:t>24</a:t>
             </a:fld>
             <a:endParaRPr lang="en-US"/>
           </a:p>
@@ -24466,7 +24754,7 @@
     </p:spTree>
     <p:extLst>
       <p:ext uri="{BB962C8B-B14F-4D97-AF65-F5344CB8AC3E}">
-        <p14:creationId xmlns:p14="http://schemas.microsoft.com/office/powerpoint/2010/main" val="2107534487"/>
+        <p14:creationId xmlns:p14="http://schemas.microsoft.com/office/powerpoint/2010/main" val="2121078948"/>
       </p:ext>
     </p:extLst>
   </p:cSld>
@@ -24522,42 +24810,34 @@
           <a:p>
             <a:r>
               <a:rPr lang="en-US" dirty="0"/>
-              <a:t>Centrality – how close is a node to the network as a whole </a:t>
-            </a:r>
-          </a:p>
-          <a:p>
-            <a:pPr marL="0" marR="0" lvl="0" indent="0" algn="l" defTabSz="914400" rtl="0" eaLnBrk="1" fontAlgn="auto" latinLnBrk="0" hangingPunct="1">
-              <a:lnSpc>
-                <a:spcPct val="100000"/>
-              </a:lnSpc>
-              <a:spcBef>
-                <a:spcPts val="0"/>
-              </a:spcBef>
-              <a:spcAft>
-                <a:spcPts val="0"/>
-              </a:spcAft>
-              <a:buClrTx/>
-              <a:buSzTx/>
-              <a:buFontTx/>
-              <a:buNone/>
-              <a:tabLst/>
-              <a:defRPr/>
-            </a:pPr>
+              <a:t>Whilst multivariate analysis can assist us in investigating abiotic selection, microbial community assembly is also shaped by biotic selection. </a:t>
+            </a:r>
+          </a:p>
+          <a:p>
+            <a:endParaRPr lang="en-US" dirty="0"/>
+          </a:p>
+          <a:p>
             <a:r>
               <a:rPr lang="en-US" dirty="0"/>
-              <a:t>Degree Centrality – number of links connected to a node (who has the most friends?)</a:t>
-            </a:r>
+              <a:t>Biotic interactions may include top-down control through viral lysis and grazing, as well as microbe-microbe interactions.</a:t>
+            </a:r>
+          </a:p>
+          <a:p>
+            <a:endParaRPr lang="en-US" dirty="0"/>
           </a:p>
           <a:p>
             <a:r>
               <a:rPr lang="en-US" dirty="0"/>
-              <a:t>Closeness Centrality -  average length of the shortest path between the node and all other nodes in the graph (how long does it take me on average to reach another node)</a:t>
-            </a:r>
+              <a:t>Due to technological restrictions, investigations of microbe-microbe interactions have typically been limited. With access to high-throughout sequencing, we can now construct co-occurrence networks in an attempt to decipher intra- and inter-specific interactions within communities.</a:t>
+            </a:r>
+          </a:p>
+          <a:p>
+            <a:endParaRPr lang="en-US" dirty="0"/>
           </a:p>
           <a:p>
             <a:r>
               <a:rPr lang="en-US" dirty="0"/>
-              <a:t>Betweenness Centrality – the number of times a node is crossed by each of the shortest routes between nodes (between any two nodes there is a shortest distance to travel. How many shortest distances is the node of interest within?)</a:t>
+              <a:t>Previous research has indicated that microbial communities exhibit non-random co-occurrence patterns and module structures, suggesting that biotic selection plays a strong role in shaping community assembly.</a:t>
             </a:r>
           </a:p>
           <a:p>
@@ -24566,32 +24846,16 @@
           <a:p>
             <a:r>
               <a:rPr lang="en-US" dirty="0"/>
-              <a:t>Clustering</a:t>
-            </a:r>
-          </a:p>
-          <a:p>
+              <a:t>Communities may even </a:t>
+            </a:r>
+            <a:r>
+              <a:rPr lang="en-US" dirty="0" err="1"/>
+              <a:t>centre</a:t>
+            </a:r>
             <a:r>
               <a:rPr lang="en-US" dirty="0"/>
-              <a:t>What groups are within the network?</a:t>
-            </a:r>
-          </a:p>
-          <a:p>
-            <a:r>
-              <a:rPr lang="en-US" dirty="0"/>
-              <a:t>Clustering coefficient – how many connections are there to other nodes, compared to the POTENTIAL number of connections to other nodes within the group?</a:t>
-            </a:r>
-          </a:p>
-          <a:p>
-            <a:r>
-              <a:rPr lang="en-US" dirty="0"/>
-              <a:t>Clustering coefficient = 1 means there is a clique, so all nodes are connected to each other in a group</a:t>
-            </a:r>
-          </a:p>
-          <a:p>
-            <a:endParaRPr lang="en-US" dirty="0"/>
-          </a:p>
-          <a:p>
-            <a:endParaRPr lang="en-US" dirty="0"/>
+              <a:t> around keystone species, that maintain the functioning of the community as a whole. </a:t>
+            </a:r>
           </a:p>
         </p:txBody>
       </p:sp>
@@ -24612,7 +24876,7 @@
           <a:p>
             <a:fld id="{91AE2140-D502-214A-B76B-E0784B2C949B}" type="slidenum">
               <a:rPr lang="en-US" smtClean="0"/>
-              <a:t>26</a:t>
+              <a:t>25</a:t>
             </a:fld>
             <a:endParaRPr lang="en-US"/>
           </a:p>
@@ -24621,7 +24885,7 @@
     </p:spTree>
     <p:extLst>
       <p:ext uri="{BB962C8B-B14F-4D97-AF65-F5344CB8AC3E}">
-        <p14:creationId xmlns:p14="http://schemas.microsoft.com/office/powerpoint/2010/main" val="553393038"/>
+        <p14:creationId xmlns:p14="http://schemas.microsoft.com/office/powerpoint/2010/main" val="2107534487"/>
       </p:ext>
     </p:extLst>
   </p:cSld>
@@ -24676,82 +24940,57 @@
           <a:lstStyle/>
           <a:p>
             <a:r>
-              <a:rPr lang="en-US" dirty="0"/>
-              <a:t>I chose this dataset on which to develop my analysis pipeline because it included recently published cryoconite community data and cryoconite communities are of specific interest to me as they are a hotspot of biological activity on the glacier surface. Also, they act as discrete microcosms which can be measured in terms of area, therefore have the advantage of being used to explore the present of island-species area relationships.</a:t>
-            </a:r>
-          </a:p>
-          <a:p>
-            <a:endParaRPr lang="en-US" dirty="0"/>
-          </a:p>
-          <a:p>
-            <a:pPr marL="0" marR="0" lvl="0" indent="0" algn="l" defTabSz="914400" rtl="0" eaLnBrk="1" fontAlgn="auto" latinLnBrk="0" hangingPunct="1">
-              <a:lnSpc>
-                <a:spcPct val="100000"/>
-              </a:lnSpc>
-              <a:spcBef>
-                <a:spcPts val="0"/>
-              </a:spcBef>
-              <a:spcAft>
-                <a:spcPts val="0"/>
-              </a:spcAft>
-              <a:buClrTx/>
-              <a:buSzTx/>
-              <a:buFontTx/>
-              <a:buNone/>
-              <a:tabLst/>
-              <a:defRPr/>
-            </a:pPr>
-            <a:r>
-              <a:rPr lang="en-US" dirty="0"/>
-              <a:t>The fact that ISAR had already been investigated in this dataset meant that I could carry out my own analyses and compare the results to ensure that I was analyzing the data correctly. </a:t>
-            </a:r>
-          </a:p>
-          <a:p>
-            <a:endParaRPr lang="en-US" dirty="0"/>
-          </a:p>
-          <a:p>
-            <a:pPr marL="0" marR="0" lvl="0" indent="0" algn="l" defTabSz="914400" rtl="0" eaLnBrk="1" fontAlgn="auto" latinLnBrk="0" hangingPunct="1">
-              <a:lnSpc>
-                <a:spcPct val="100000"/>
-              </a:lnSpc>
-              <a:spcBef>
-                <a:spcPts val="0"/>
-              </a:spcBef>
-              <a:spcAft>
-                <a:spcPts val="0"/>
-              </a:spcAft>
-              <a:buClrTx/>
-              <a:buSzTx/>
-              <a:buFontTx/>
-              <a:buNone/>
-              <a:tabLst/>
-              <a:defRPr/>
-            </a:pPr>
-            <a:r>
-              <a:rPr lang="en-US" dirty="0"/>
-              <a:t>The paper included information on sequence processing that I was able to use in my first QIIME workflow. </a:t>
-            </a:r>
-          </a:p>
-          <a:p>
-            <a:endParaRPr lang="en-US" dirty="0"/>
-          </a:p>
-          <a:p>
-            <a:r>
-              <a:rPr lang="en-US" dirty="0"/>
-              <a:t>It gave me the opportunity to work with 16S and 18S data (although here I have only analyzed the 16S data) </a:t>
-            </a:r>
-          </a:p>
-          <a:p>
-            <a:endParaRPr lang="en-US" dirty="0"/>
-          </a:p>
-          <a:p>
-            <a:r>
-              <a:rPr lang="en-US" dirty="0"/>
-              <a:t>The data could also be grouped by glacier which was useful for comparative analyses.</a:t>
-            </a:r>
-          </a:p>
-          <a:p>
-            <a:endParaRPr lang="en-US" dirty="0"/>
+              <a:rPr lang="en-US" b="1" dirty="0"/>
+              <a:t>Why am I using this analysis workflow?</a:t>
+            </a:r>
+          </a:p>
+          <a:p>
+            <a:r>
+              <a:rPr lang="en-US" b="0" dirty="0"/>
+              <a:t>I am combining multiple analytical techniques in order to collect a wide range of evidence pointing towards the drivers of community assembly.</a:t>
+            </a:r>
+          </a:p>
+          <a:p>
+            <a:endParaRPr lang="en-US" b="0" dirty="0"/>
+          </a:p>
+          <a:p>
+            <a:r>
+              <a:rPr lang="en-US" b="0" dirty="0"/>
+              <a:t>Each method used in isolate may have its caveats, but used in combination we can build a robust picture of the processes at play in our environment of interest.</a:t>
+            </a:r>
+          </a:p>
+          <a:p>
+            <a:endParaRPr lang="en-US" b="0" dirty="0"/>
+          </a:p>
+          <a:p>
+            <a:r>
+              <a:rPr lang="en-US" b="0" dirty="0"/>
+              <a:t>Multivariate analysis looks primarily at deterministic drivers of community assembly (e.g. environmental factors)</a:t>
+            </a:r>
+          </a:p>
+          <a:p>
+            <a:r>
+              <a:rPr lang="en-US" b="0" dirty="0"/>
+              <a:t>Neutral model looks at how much of the patterns we see can be explained by stochastic processes alone.</a:t>
+            </a:r>
+          </a:p>
+          <a:p>
+            <a:r>
+              <a:rPr lang="en-US" b="0" dirty="0"/>
+              <a:t>Null model takes a phylogenetic approach to look at deviation between our observed communities are what we expect at random to investigate both deterministic and stochastic processes.</a:t>
+            </a:r>
+          </a:p>
+          <a:p>
+            <a:r>
+              <a:rPr lang="en-US" b="0" dirty="0"/>
+              <a:t>Network analysis allows us to explore biotic selection as a deterministic process of community assembly. </a:t>
+            </a:r>
+          </a:p>
+          <a:p>
+            <a:endParaRPr lang="en-US" b="0" dirty="0"/>
+          </a:p>
+          <a:p>
+            <a:endParaRPr lang="en-US" b="0" dirty="0"/>
           </a:p>
         </p:txBody>
       </p:sp>
@@ -24772,7 +25011,7 @@
           <a:p>
             <a:fld id="{91AE2140-D502-214A-B76B-E0784B2C949B}" type="slidenum">
               <a:rPr lang="en-US" smtClean="0"/>
-              <a:t>5</a:t>
+              <a:t>4</a:t>
             </a:fld>
             <a:endParaRPr lang="en-US"/>
           </a:p>
@@ -24781,7 +25020,7 @@
     </p:spTree>
     <p:extLst>
       <p:ext uri="{BB962C8B-B14F-4D97-AF65-F5344CB8AC3E}">
-        <p14:creationId xmlns:p14="http://schemas.microsoft.com/office/powerpoint/2010/main" val="29509610"/>
+        <p14:creationId xmlns:p14="http://schemas.microsoft.com/office/powerpoint/2010/main" val="2176468290"/>
       </p:ext>
     </p:extLst>
   </p:cSld>
@@ -24836,28 +25075,9 @@
           <a:lstStyle/>
           <a:p>
             <a:r>
-              <a:rPr lang="en-GB" dirty="0"/>
-              <a:t>Based on correlation analysis, for the positive co-occurrence network, 6526 edges, which depict significant and strong pairwise correlations between species (Spearman's </a:t>
-            </a:r>
-            <a:r>
-              <a:rPr lang="el-GR" i="1" dirty="0"/>
-              <a:t>ρ</a:t>
-            </a:r>
-            <a:r>
-              <a:rPr lang="el-GR" dirty="0"/>
-              <a:t> ≥ 0.6, </a:t>
-            </a:r>
-            <a:r>
-              <a:rPr lang="en-GB" i="1" dirty="0"/>
-              <a:t>P</a:t>
-            </a:r>
-            <a:r>
-              <a:rPr lang="en-GB" dirty="0"/>
-              <a:t> &lt; 0.01), were captured between 554 nodes (i.e. ASVs).</a:t>
-            </a:r>
-          </a:p>
-          <a:p>
-            <a:endParaRPr lang="en-GB" dirty="0"/>
+              <a:rPr lang="en-US" dirty="0"/>
+              <a:t>Centrality – how close is a node to the network as a whole </a:t>
+            </a:r>
           </a:p>
           <a:p>
             <a:pPr marL="0" marR="0" lvl="0" indent="0" algn="l" defTabSz="914400" rtl="0" eaLnBrk="1" fontAlgn="auto" latinLnBrk="0" hangingPunct="1">
@@ -24878,31 +25098,51 @@
               <a:defRPr/>
             </a:pPr>
             <a:r>
-              <a:rPr lang="en-GB" dirty="0"/>
-              <a:t>Based on correlation analysis, for the negative co-occurrence network, 1780 edges, which depict significant and strong pairwise correlations between species (Spearman's </a:t>
-            </a:r>
-            <a:r>
-              <a:rPr lang="el-GR" i="1" dirty="0"/>
-              <a:t>ρ</a:t>
-            </a:r>
-            <a:r>
-              <a:rPr lang="el-GR" dirty="0"/>
-              <a:t> ≥ 0.6, </a:t>
-            </a:r>
-            <a:r>
-              <a:rPr lang="en-GB" i="1" dirty="0"/>
-              <a:t>P</a:t>
-            </a:r>
-            <a:r>
-              <a:rPr lang="en-GB" dirty="0"/>
-              <a:t> &lt; 0.01), were captured between 299 nodes (i.e. ASVs).</a:t>
-            </a:r>
-          </a:p>
-          <a:p>
-            <a:endParaRPr lang="en-GB" dirty="0"/>
-          </a:p>
-          <a:p>
-            <a:endParaRPr lang="en-GB" dirty="0"/>
+              <a:rPr lang="en-US" dirty="0"/>
+              <a:t>Degree Centrality – number of links connected to a node (who has the most friends?)</a:t>
+            </a:r>
+          </a:p>
+          <a:p>
+            <a:r>
+              <a:rPr lang="en-US" dirty="0"/>
+              <a:t>Closeness Centrality -  average length of the shortest path between the node and all other nodes in the graph (how long does it take me on average to reach another node)</a:t>
+            </a:r>
+          </a:p>
+          <a:p>
+            <a:r>
+              <a:rPr lang="en-US" dirty="0"/>
+              <a:t>Betweenness Centrality – the number of times a node is crossed by each of the shortest routes between nodes (between any two nodes there is a shortest distance to travel. How many shortest distances is the node of interest within?)</a:t>
+            </a:r>
+          </a:p>
+          <a:p>
+            <a:endParaRPr lang="en-US" dirty="0"/>
+          </a:p>
+          <a:p>
+            <a:r>
+              <a:rPr lang="en-US" dirty="0"/>
+              <a:t>Clustering</a:t>
+            </a:r>
+          </a:p>
+          <a:p>
+            <a:r>
+              <a:rPr lang="en-US" dirty="0"/>
+              <a:t>What groups are within the network?</a:t>
+            </a:r>
+          </a:p>
+          <a:p>
+            <a:r>
+              <a:rPr lang="en-US" dirty="0"/>
+              <a:t>Clustering coefficient – how many connections are there to other nodes, compared to the POTENTIAL number of connections to other nodes within the group?</a:t>
+            </a:r>
+          </a:p>
+          <a:p>
+            <a:r>
+              <a:rPr lang="en-US" dirty="0"/>
+              <a:t>Clustering coefficient = 1 means there is a clique, so all nodes are connected to each other in a group</a:t>
+            </a:r>
+          </a:p>
+          <a:p>
+            <a:endParaRPr lang="en-US" dirty="0"/>
           </a:p>
           <a:p>
             <a:endParaRPr lang="en-US" dirty="0"/>
@@ -24926,6 +25166,160 @@
           <a:p>
             <a:fld id="{91AE2140-D502-214A-B76B-E0784B2C949B}" type="slidenum">
               <a:rPr lang="en-US" smtClean="0"/>
+              <a:t>26</a:t>
+            </a:fld>
+            <a:endParaRPr lang="en-US"/>
+          </a:p>
+        </p:txBody>
+      </p:sp>
+    </p:spTree>
+    <p:extLst>
+      <p:ext uri="{BB962C8B-B14F-4D97-AF65-F5344CB8AC3E}">
+        <p14:creationId xmlns:p14="http://schemas.microsoft.com/office/powerpoint/2010/main" val="553393038"/>
+      </p:ext>
+    </p:extLst>
+  </p:cSld>
+  <p:clrMapOvr>
+    <a:masterClrMapping/>
+  </p:clrMapOvr>
+</p:notes>
+</file>
+
+<file path=ppt/notesSlides/notesSlide21.xml><?xml version="1.0" encoding="utf-8"?>
+<p:notes xmlns:a="http://schemas.openxmlformats.org/drawingml/2006/main" xmlns:r="http://schemas.openxmlformats.org/officeDocument/2006/relationships" xmlns:p="http://schemas.openxmlformats.org/presentationml/2006/main">
+  <p:cSld>
+    <p:spTree>
+      <p:nvGrpSpPr>
+        <p:cNvPr id="1" name=""/>
+        <p:cNvGrpSpPr/>
+        <p:nvPr/>
+      </p:nvGrpSpPr>
+      <p:grpSpPr>
+        <a:xfrm>
+          <a:off x="0" y="0"/>
+          <a:ext cx="0" cy="0"/>
+          <a:chOff x="0" y="0"/>
+          <a:chExt cx="0" cy="0"/>
+        </a:xfrm>
+      </p:grpSpPr>
+      <p:sp>
+        <p:nvSpPr>
+          <p:cNvPr id="2" name="Slide Image Placeholder 1"/>
+          <p:cNvSpPr>
+            <a:spLocks noGrp="1" noRot="1" noChangeAspect="1"/>
+          </p:cNvSpPr>
+          <p:nvPr>
+            <p:ph type="sldImg"/>
+          </p:nvPr>
+        </p:nvSpPr>
+        <p:spPr/>
+      </p:sp>
+      <p:sp>
+        <p:nvSpPr>
+          <p:cNvPr id="3" name="Notes Placeholder 2"/>
+          <p:cNvSpPr>
+            <a:spLocks noGrp="1"/>
+          </p:cNvSpPr>
+          <p:nvPr>
+            <p:ph type="body" idx="1"/>
+          </p:nvPr>
+        </p:nvSpPr>
+        <p:spPr/>
+        <p:txBody>
+          <a:bodyPr/>
+          <a:lstStyle/>
+          <a:p>
+            <a:r>
+              <a:rPr lang="en-GB" dirty="0"/>
+              <a:t>Based on correlation analysis, for the positive co-occurrence network, 6526 edges, which depict significant and strong pairwise correlations between species (Spearman's </a:t>
+            </a:r>
+            <a:r>
+              <a:rPr lang="el-GR" i="1" dirty="0"/>
+              <a:t>ρ</a:t>
+            </a:r>
+            <a:r>
+              <a:rPr lang="el-GR" dirty="0"/>
+              <a:t> ≥ 0.6, </a:t>
+            </a:r>
+            <a:r>
+              <a:rPr lang="en-GB" i="1" dirty="0"/>
+              <a:t>P</a:t>
+            </a:r>
+            <a:r>
+              <a:rPr lang="en-GB" dirty="0"/>
+              <a:t> &lt; 0.01), were captured between 554 nodes (i.e. ASVs).</a:t>
+            </a:r>
+          </a:p>
+          <a:p>
+            <a:endParaRPr lang="en-GB" dirty="0"/>
+          </a:p>
+          <a:p>
+            <a:pPr marL="0" marR="0" lvl="0" indent="0" algn="l" defTabSz="914400" rtl="0" eaLnBrk="1" fontAlgn="auto" latinLnBrk="0" hangingPunct="1">
+              <a:lnSpc>
+                <a:spcPct val="100000"/>
+              </a:lnSpc>
+              <a:spcBef>
+                <a:spcPts val="0"/>
+              </a:spcBef>
+              <a:spcAft>
+                <a:spcPts val="0"/>
+              </a:spcAft>
+              <a:buClrTx/>
+              <a:buSzTx/>
+              <a:buFontTx/>
+              <a:buNone/>
+              <a:tabLst/>
+              <a:defRPr/>
+            </a:pPr>
+            <a:r>
+              <a:rPr lang="en-GB" dirty="0"/>
+              <a:t>Based on correlation analysis, for the negative co-occurrence network, 1780 edges, which depict significant and strong pairwise correlations between species (Spearman's </a:t>
+            </a:r>
+            <a:r>
+              <a:rPr lang="el-GR" i="1" dirty="0"/>
+              <a:t>ρ</a:t>
+            </a:r>
+            <a:r>
+              <a:rPr lang="el-GR" dirty="0"/>
+              <a:t> ≥ 0.6, </a:t>
+            </a:r>
+            <a:r>
+              <a:rPr lang="en-GB" i="1" dirty="0"/>
+              <a:t>P</a:t>
+            </a:r>
+            <a:r>
+              <a:rPr lang="en-GB" dirty="0"/>
+              <a:t> &lt; 0.01), were captured between 299 nodes (i.e. ASVs).</a:t>
+            </a:r>
+          </a:p>
+          <a:p>
+            <a:endParaRPr lang="en-GB" dirty="0"/>
+          </a:p>
+          <a:p>
+            <a:endParaRPr lang="en-GB" dirty="0"/>
+          </a:p>
+          <a:p>
+            <a:endParaRPr lang="en-US" dirty="0"/>
+          </a:p>
+        </p:txBody>
+      </p:sp>
+      <p:sp>
+        <p:nvSpPr>
+          <p:cNvPr id="4" name="Slide Number Placeholder 3"/>
+          <p:cNvSpPr>
+            <a:spLocks noGrp="1"/>
+          </p:cNvSpPr>
+          <p:nvPr>
+            <p:ph type="sldNum" sz="quarter" idx="5"/>
+          </p:nvPr>
+        </p:nvSpPr>
+        <p:spPr/>
+        <p:txBody>
+          <a:bodyPr/>
+          <a:lstStyle/>
+          <a:p>
+            <a:fld id="{91AE2140-D502-214A-B76B-E0784B2C949B}" type="slidenum">
+              <a:rPr lang="en-US" smtClean="0"/>
               <a:t>27</a:t>
             </a:fld>
             <a:endParaRPr lang="en-US"/>
@@ -24945,7 +25339,7 @@
 </p:notes>
 </file>
 
-<file path=ppt/notesSlides/notesSlide21.xml><?xml version="1.0" encoding="utf-8"?>
+<file path=ppt/notesSlides/notesSlide22.xml><?xml version="1.0" encoding="utf-8"?>
 <p:notes xmlns:a="http://schemas.openxmlformats.org/drawingml/2006/main" xmlns:r="http://schemas.openxmlformats.org/officeDocument/2006/relationships" xmlns:p="http://schemas.openxmlformats.org/presentationml/2006/main">
   <p:cSld>
     <p:spTree>
@@ -25125,704 +25519,77 @@
           <a:p>
             <a:r>
               <a:rPr lang="en-US" dirty="0"/>
-              <a:t>In QIIME2 on my local computer I downloaded Sequence Read Archive (SRA) toolbox that allowed me to prefetch the sequence data from the SRA website using the archive umber supplied by the paper, splitting the flies into forward and reverse reads and saving them to my laptop.</a:t>
+              <a:t>I chose this dataset on which to develop my analysis pipeline because it included recently published cryoconite community data and cryoconite communities are of specific interest to me as they are a hotspot of biological activity on the glacier surface. Also, they act as discrete microcosms which can be measured in terms of area, therefore have the advantage of being used to explore the present of island-species area relationships.</a:t>
             </a:r>
           </a:p>
           <a:p>
             <a:endParaRPr lang="en-US" dirty="0"/>
           </a:p>
           <a:p>
+            <a:pPr marL="0" marR="0" lvl="0" indent="0" algn="l" defTabSz="914400" rtl="0" eaLnBrk="1" fontAlgn="auto" latinLnBrk="0" hangingPunct="1">
+              <a:lnSpc>
+                <a:spcPct val="100000"/>
+              </a:lnSpc>
+              <a:spcBef>
+                <a:spcPts val="0"/>
+              </a:spcBef>
+              <a:spcAft>
+                <a:spcPts val="0"/>
+              </a:spcAft>
+              <a:buClrTx/>
+              <a:buSzTx/>
+              <a:buFontTx/>
+              <a:buNone/>
+              <a:tabLst/>
+              <a:defRPr/>
+            </a:pPr>
             <a:r>
               <a:rPr lang="en-US" dirty="0"/>
-              <a:t>I renamed the sequence files and modified the metadata file into formats expected by QIIME2.</a:t>
+              <a:t>The fact that ISAR had already been investigated in this dataset meant that I could carry out my own analyses and compare the results to ensure that I was analyzing the data correctly. </a:t>
             </a:r>
           </a:p>
           <a:p>
             <a:endParaRPr lang="en-US" dirty="0"/>
           </a:p>
           <a:p>
-            <a:r>
-              <a:rPr lang="en-GB" sz="1200" kern="1200" dirty="0">
-                <a:solidFill>
-                  <a:schemeClr val="tx1"/>
-                </a:solidFill>
-                <a:effectLst/>
-                <a:latin typeface="+mn-lt"/>
-                <a:ea typeface="+mn-ea"/>
-                <a:cs typeface="+mn-cs"/>
-              </a:rPr>
-              <a:t>Import </a:t>
-            </a:r>
-            <a:r>
-              <a:rPr lang="en-GB" sz="1200" kern="1200" dirty="0" err="1">
-                <a:solidFill>
-                  <a:schemeClr val="tx1"/>
-                </a:solidFill>
-                <a:effectLst/>
-                <a:latin typeface="+mn-lt"/>
-                <a:ea typeface="+mn-ea"/>
-                <a:cs typeface="+mn-cs"/>
-              </a:rPr>
-              <a:t>fastq</a:t>
-            </a:r>
-            <a:r>
-              <a:rPr lang="en-GB" sz="1200" kern="1200" dirty="0">
-                <a:solidFill>
-                  <a:schemeClr val="tx1"/>
-                </a:solidFill>
-                <a:effectLst/>
-                <a:latin typeface="+mn-lt"/>
-                <a:ea typeface="+mn-ea"/>
-                <a:cs typeface="+mn-cs"/>
-              </a:rPr>
-              <a:t> files and convert them into a format </a:t>
-            </a:r>
-            <a:r>
-              <a:rPr lang="en-GB" sz="1200" kern="1200" dirty="0" err="1">
-                <a:solidFill>
-                  <a:schemeClr val="tx1"/>
-                </a:solidFill>
-                <a:effectLst/>
-                <a:latin typeface="+mn-lt"/>
-                <a:ea typeface="+mn-ea"/>
-                <a:cs typeface="+mn-cs"/>
-              </a:rPr>
-              <a:t>Qiime</a:t>
-            </a:r>
-            <a:r>
-              <a:rPr lang="en-GB" sz="1200" kern="1200" dirty="0">
-                <a:solidFill>
-                  <a:schemeClr val="tx1"/>
-                </a:solidFill>
-                <a:effectLst/>
-                <a:latin typeface="+mn-lt"/>
-                <a:ea typeface="+mn-ea"/>
-                <a:cs typeface="+mn-cs"/>
-              </a:rPr>
-              <a:t> wants to work with.</a:t>
-            </a:r>
-            <a:r>
-              <a:rPr lang="en-GB" dirty="0">
-                <a:effectLst/>
-              </a:rPr>
-              <a:t> </a:t>
-            </a:r>
-          </a:p>
-          <a:p>
-            <a:endParaRPr lang="en-GB" dirty="0">
-              <a:effectLst/>
-            </a:endParaRPr>
-          </a:p>
-          <a:p>
-            <a:r>
-              <a:rPr lang="en-GB" sz="1200" kern="1200" dirty="0">
-                <a:solidFill>
-                  <a:schemeClr val="tx1"/>
-                </a:solidFill>
-                <a:effectLst/>
-                <a:latin typeface="+mn-lt"/>
-                <a:ea typeface="+mn-ea"/>
-                <a:cs typeface="+mn-cs"/>
-              </a:rPr>
-              <a:t>Remove primers. I'm getting the primers from https://</a:t>
-            </a:r>
-            <a:r>
-              <a:rPr lang="en-GB" sz="1200" kern="1200" dirty="0" err="1">
-                <a:solidFill>
-                  <a:schemeClr val="tx1"/>
-                </a:solidFill>
-                <a:effectLst/>
-                <a:latin typeface="+mn-lt"/>
-                <a:ea typeface="+mn-ea"/>
-                <a:cs typeface="+mn-cs"/>
-              </a:rPr>
-              <a:t>earthmicrobiome.org</a:t>
-            </a:r>
-            <a:r>
-              <a:rPr lang="en-GB" sz="1200" kern="1200" dirty="0">
-                <a:solidFill>
-                  <a:schemeClr val="tx1"/>
-                </a:solidFill>
-                <a:effectLst/>
-                <a:latin typeface="+mn-lt"/>
-                <a:ea typeface="+mn-ea"/>
-                <a:cs typeface="+mn-cs"/>
-              </a:rPr>
-              <a:t>/protocols-and-standards/16s/ as described by Sommers et al., (2020)</a:t>
-            </a:r>
-          </a:p>
-          <a:p>
-            <a:r>
-              <a:rPr lang="en-GB" sz="1200" kern="1200" dirty="0">
-                <a:solidFill>
-                  <a:schemeClr val="tx1"/>
-                </a:solidFill>
-                <a:effectLst/>
-                <a:latin typeface="+mn-lt"/>
-                <a:ea typeface="+mn-ea"/>
-                <a:cs typeface="+mn-cs"/>
-              </a:rPr>
-              <a:t>The primer sequences are :</a:t>
-            </a:r>
-          </a:p>
-          <a:p>
-            <a:r>
-              <a:rPr lang="en-GB" sz="1200" kern="1200" dirty="0">
-                <a:solidFill>
-                  <a:schemeClr val="tx1"/>
-                </a:solidFill>
-                <a:effectLst/>
-                <a:latin typeface="+mn-lt"/>
-                <a:ea typeface="+mn-ea"/>
-                <a:cs typeface="+mn-cs"/>
-              </a:rPr>
-              <a:t>Updated sequences: 515F (</a:t>
-            </a:r>
-            <a:r>
-              <a:rPr lang="en-GB" sz="1200" kern="1200" dirty="0" err="1">
-                <a:solidFill>
-                  <a:schemeClr val="tx1"/>
-                </a:solidFill>
-                <a:effectLst/>
-                <a:latin typeface="+mn-lt"/>
-                <a:ea typeface="+mn-ea"/>
-                <a:cs typeface="+mn-cs"/>
-              </a:rPr>
-              <a:t>Parada</a:t>
-            </a:r>
-            <a:r>
-              <a:rPr lang="en-GB" sz="1200" kern="1200" dirty="0">
-                <a:solidFill>
-                  <a:schemeClr val="tx1"/>
-                </a:solidFill>
-                <a:effectLst/>
-                <a:latin typeface="+mn-lt"/>
-                <a:ea typeface="+mn-ea"/>
-                <a:cs typeface="+mn-cs"/>
-              </a:rPr>
-              <a:t>)–806R (</a:t>
-            </a:r>
-            <a:r>
-              <a:rPr lang="en-GB" sz="1200" kern="1200" dirty="0" err="1">
-                <a:solidFill>
-                  <a:schemeClr val="tx1"/>
-                </a:solidFill>
-                <a:effectLst/>
-                <a:latin typeface="+mn-lt"/>
-                <a:ea typeface="+mn-ea"/>
-                <a:cs typeface="+mn-cs"/>
-              </a:rPr>
-              <a:t>Apprill</a:t>
-            </a:r>
-            <a:r>
-              <a:rPr lang="en-GB" sz="1200" kern="1200" dirty="0">
-                <a:solidFill>
-                  <a:schemeClr val="tx1"/>
-                </a:solidFill>
-                <a:effectLst/>
-                <a:latin typeface="+mn-lt"/>
-                <a:ea typeface="+mn-ea"/>
-                <a:cs typeface="+mn-cs"/>
-              </a:rPr>
-              <a:t>), forward-barcoded:</a:t>
-            </a:r>
-          </a:p>
-          <a:p>
-            <a:r>
-              <a:rPr lang="en-GB" sz="1200" kern="1200" dirty="0">
-                <a:solidFill>
-                  <a:schemeClr val="tx1"/>
-                </a:solidFill>
-                <a:effectLst/>
-                <a:latin typeface="+mn-lt"/>
-                <a:ea typeface="+mn-ea"/>
-                <a:cs typeface="+mn-cs"/>
-              </a:rPr>
-              <a:t>FWD:GTGYCAGCMGCCGCGGTAA; REV:GGACTACNVGGGTWTCTAAT </a:t>
-            </a:r>
-          </a:p>
-          <a:p>
-            <a:endParaRPr lang="en-GB" sz="1200" kern="1200" dirty="0">
-              <a:solidFill>
-                <a:schemeClr val="tx1"/>
-              </a:solidFill>
-              <a:effectLst/>
-              <a:latin typeface="+mn-lt"/>
-              <a:ea typeface="+mn-ea"/>
-              <a:cs typeface="+mn-cs"/>
-            </a:endParaRPr>
-          </a:p>
-          <a:p>
-            <a:r>
-              <a:rPr lang="en-GB" sz="1200" kern="1200" dirty="0">
-                <a:solidFill>
-                  <a:schemeClr val="tx1"/>
-                </a:solidFill>
-                <a:effectLst/>
-                <a:latin typeface="+mn-lt"/>
-                <a:ea typeface="+mn-ea"/>
-                <a:cs typeface="+mn-cs"/>
-              </a:rPr>
-              <a:t>Check the quality of trimmed reads and visualise.</a:t>
-            </a:r>
-            <a:r>
-              <a:rPr lang="en-GB" dirty="0">
-                <a:effectLst/>
-              </a:rPr>
-              <a:t> </a:t>
-            </a:r>
-          </a:p>
-          <a:p>
-            <a:endParaRPr lang="en-GB" dirty="0">
-              <a:effectLst/>
-            </a:endParaRPr>
-          </a:p>
-          <a:p>
-            <a:r>
-              <a:rPr lang="en-GB" sz="1200" kern="1200" dirty="0">
-                <a:solidFill>
-                  <a:schemeClr val="tx1"/>
-                </a:solidFill>
-                <a:effectLst/>
-                <a:latin typeface="+mn-lt"/>
-                <a:ea typeface="+mn-ea"/>
-                <a:cs typeface="+mn-cs"/>
-              </a:rPr>
-              <a:t>Call DADA2.  Where are the adaptors? Front or back? Use trim in DADA2 to cut them, in stead of QIIME2 </a:t>
-            </a:r>
-            <a:r>
-              <a:rPr lang="en-GB" sz="1200" kern="1200" dirty="0" err="1">
-                <a:solidFill>
-                  <a:schemeClr val="tx1"/>
-                </a:solidFill>
-                <a:effectLst/>
-                <a:latin typeface="+mn-lt"/>
-                <a:ea typeface="+mn-ea"/>
-                <a:cs typeface="+mn-cs"/>
-              </a:rPr>
-              <a:t>cutadapt</a:t>
-            </a:r>
-            <a:endParaRPr lang="en-GB" sz="1200" kern="1200" dirty="0">
-              <a:solidFill>
-                <a:schemeClr val="tx1"/>
-              </a:solidFill>
-              <a:effectLst/>
-              <a:latin typeface="+mn-lt"/>
-              <a:ea typeface="+mn-ea"/>
-              <a:cs typeface="+mn-cs"/>
-            </a:endParaRPr>
-          </a:p>
-          <a:p>
-            <a:r>
-              <a:rPr lang="en-GB" sz="1200" kern="1200" dirty="0" err="1">
-                <a:solidFill>
-                  <a:schemeClr val="tx1"/>
-                </a:solidFill>
-                <a:effectLst/>
-                <a:latin typeface="+mn-lt"/>
-                <a:ea typeface="+mn-ea"/>
-                <a:cs typeface="+mn-cs"/>
-              </a:rPr>
-              <a:t>FastQC</a:t>
-            </a:r>
-            <a:r>
-              <a:rPr lang="en-GB" sz="1200" kern="1200" dirty="0">
-                <a:solidFill>
-                  <a:schemeClr val="tx1"/>
-                </a:solidFill>
-                <a:effectLst/>
-                <a:latin typeface="+mn-lt"/>
-                <a:ea typeface="+mn-ea"/>
-                <a:cs typeface="+mn-cs"/>
-              </a:rPr>
-              <a:t> - look at for adaptor - if adaptor isn't there then don't worry about it! Warning: Not all adaptors are picked up by </a:t>
-            </a:r>
-            <a:r>
-              <a:rPr lang="en-GB" sz="1200" kern="1200" dirty="0" err="1">
-                <a:solidFill>
-                  <a:schemeClr val="tx1"/>
-                </a:solidFill>
-                <a:effectLst/>
-                <a:latin typeface="+mn-lt"/>
-                <a:ea typeface="+mn-ea"/>
-                <a:cs typeface="+mn-cs"/>
-              </a:rPr>
-              <a:t>FastQC</a:t>
-            </a:r>
-            <a:r>
-              <a:rPr lang="en-GB" sz="1200" kern="1200" dirty="0">
-                <a:solidFill>
-                  <a:schemeClr val="tx1"/>
-                </a:solidFill>
-                <a:effectLst/>
-                <a:latin typeface="+mn-lt"/>
-                <a:ea typeface="+mn-ea"/>
-                <a:cs typeface="+mn-cs"/>
-              </a:rPr>
-              <a:t>.</a:t>
-            </a:r>
-          </a:p>
-          <a:p>
-            <a:r>
-              <a:rPr lang="en-GB" sz="1200" b="1" kern="1200" dirty="0">
-                <a:solidFill>
-                  <a:schemeClr val="tx1"/>
-                </a:solidFill>
-                <a:effectLst/>
-                <a:latin typeface="+mn-lt"/>
-                <a:ea typeface="+mn-ea"/>
-                <a:cs typeface="+mn-cs"/>
-              </a:rPr>
-              <a:t> </a:t>
-            </a:r>
-            <a:endParaRPr lang="en-GB" sz="1200" kern="1200" dirty="0">
-              <a:solidFill>
-                <a:schemeClr val="tx1"/>
-              </a:solidFill>
-              <a:effectLst/>
-              <a:latin typeface="+mn-lt"/>
-              <a:ea typeface="+mn-ea"/>
-              <a:cs typeface="+mn-cs"/>
-            </a:endParaRPr>
-          </a:p>
-          <a:p>
-            <a:r>
-              <a:rPr lang="en-GB" sz="1200" kern="1200" dirty="0">
-                <a:solidFill>
-                  <a:schemeClr val="tx1"/>
-                </a:solidFill>
-                <a:effectLst/>
-                <a:latin typeface="+mn-lt"/>
-                <a:ea typeface="+mn-ea"/>
-                <a:cs typeface="+mn-cs"/>
-              </a:rPr>
-              <a:t>Denoise data and check results of this step.</a:t>
-            </a:r>
-          </a:p>
-          <a:p>
-            <a:endParaRPr lang="en-GB" sz="1200" kern="1200" dirty="0">
-              <a:solidFill>
-                <a:schemeClr val="tx1"/>
-              </a:solidFill>
-              <a:effectLst/>
-              <a:latin typeface="+mn-lt"/>
-              <a:ea typeface="+mn-ea"/>
-              <a:cs typeface="+mn-cs"/>
-            </a:endParaRPr>
-          </a:p>
-          <a:p>
-            <a:r>
-              <a:rPr lang="en-GB" sz="1200" kern="1200" dirty="0">
-                <a:solidFill>
-                  <a:schemeClr val="tx1"/>
-                </a:solidFill>
-                <a:effectLst/>
-                <a:latin typeface="+mn-lt"/>
-                <a:ea typeface="+mn-ea"/>
-                <a:cs typeface="+mn-cs"/>
-              </a:rPr>
-              <a:t>Summarise remaining reads after denoising and visualise.  Through the sequence table generated below you can click on a representative sequence and BLAST it.</a:t>
-            </a:r>
-            <a:r>
-              <a:rPr lang="en-GB" dirty="0">
-                <a:effectLst/>
-              </a:rPr>
-              <a:t> </a:t>
-            </a:r>
-          </a:p>
-          <a:p>
-            <a:endParaRPr lang="en-GB" sz="1200" kern="1200" dirty="0">
-              <a:solidFill>
-                <a:schemeClr val="tx1"/>
-              </a:solidFill>
-              <a:effectLst/>
-              <a:latin typeface="+mn-lt"/>
-              <a:ea typeface="+mn-ea"/>
-              <a:cs typeface="+mn-cs"/>
-            </a:endParaRPr>
-          </a:p>
-          <a:p>
-            <a:r>
-              <a:rPr lang="en-GB" sz="1200" kern="1200" dirty="0">
-                <a:solidFill>
-                  <a:schemeClr val="tx1"/>
-                </a:solidFill>
-                <a:effectLst/>
-                <a:latin typeface="+mn-lt"/>
-                <a:ea typeface="+mn-ea"/>
-                <a:cs typeface="+mn-cs"/>
-              </a:rPr>
-              <a:t>Generate a feature table and visualise. </a:t>
-            </a:r>
-          </a:p>
-          <a:p>
-            <a:endParaRPr lang="en-GB" sz="1200" kern="1200" dirty="0">
-              <a:solidFill>
-                <a:schemeClr val="tx1"/>
-              </a:solidFill>
-              <a:effectLst/>
-              <a:latin typeface="+mn-lt"/>
-              <a:ea typeface="+mn-ea"/>
-              <a:cs typeface="+mn-cs"/>
-            </a:endParaRPr>
-          </a:p>
-          <a:p>
-            <a:r>
-              <a:rPr lang="en-GB" sz="1200" kern="1200" dirty="0">
-                <a:solidFill>
-                  <a:schemeClr val="tx1"/>
-                </a:solidFill>
-                <a:effectLst/>
-                <a:latin typeface="+mn-lt"/>
-                <a:ea typeface="+mn-ea"/>
-                <a:cs typeface="+mn-cs"/>
-              </a:rPr>
-              <a:t>Download Silva classifier and move to work folder.</a:t>
-            </a:r>
-            <a:r>
-              <a:rPr lang="en-GB" dirty="0">
-                <a:effectLst/>
-              </a:rPr>
-              <a:t> </a:t>
-            </a:r>
-          </a:p>
-          <a:p>
-            <a:endParaRPr lang="en-GB" sz="1200" kern="1200" dirty="0">
-              <a:solidFill>
-                <a:schemeClr val="tx1"/>
-              </a:solidFill>
-              <a:effectLst/>
-              <a:latin typeface="+mn-lt"/>
-              <a:ea typeface="+mn-ea"/>
-              <a:cs typeface="+mn-cs"/>
-            </a:endParaRPr>
-          </a:p>
-          <a:p>
-            <a:r>
-              <a:rPr lang="en-GB" sz="1200" kern="1200" dirty="0">
-                <a:solidFill>
-                  <a:schemeClr val="tx1"/>
-                </a:solidFill>
-                <a:effectLst/>
-                <a:latin typeface="+mn-lt"/>
-                <a:ea typeface="+mn-ea"/>
-                <a:cs typeface="+mn-cs"/>
-              </a:rPr>
-              <a:t>Classify representative sequences and visualise.</a:t>
-            </a:r>
-            <a:r>
-              <a:rPr lang="en-GB" dirty="0">
-                <a:effectLst/>
-              </a:rPr>
-              <a:t> </a:t>
-            </a:r>
-          </a:p>
-          <a:p>
-            <a:endParaRPr lang="en-GB" sz="1200" kern="1200" dirty="0">
-              <a:solidFill>
-                <a:schemeClr val="tx1"/>
-              </a:solidFill>
-              <a:effectLst/>
-              <a:latin typeface="+mn-lt"/>
-              <a:ea typeface="+mn-ea"/>
-              <a:cs typeface="+mn-cs"/>
-            </a:endParaRPr>
-          </a:p>
-          <a:p>
-            <a:r>
-              <a:rPr lang="en-GB" sz="1200" kern="1200" dirty="0">
-                <a:solidFill>
-                  <a:schemeClr val="tx1"/>
-                </a:solidFill>
-                <a:effectLst/>
-                <a:latin typeface="+mn-lt"/>
-                <a:ea typeface="+mn-ea"/>
-                <a:cs typeface="+mn-cs"/>
-              </a:rPr>
-              <a:t>Make a multiple sequence alignment with MAFFT.</a:t>
-            </a:r>
-            <a:r>
-              <a:rPr lang="en-GB" dirty="0">
-                <a:effectLst/>
-              </a:rPr>
-              <a:t> </a:t>
-            </a:r>
-          </a:p>
-          <a:p>
-            <a:endParaRPr lang="en-GB" sz="1200" kern="1200" dirty="0">
-              <a:solidFill>
-                <a:schemeClr val="tx1"/>
-              </a:solidFill>
-              <a:effectLst/>
-              <a:latin typeface="+mn-lt"/>
-              <a:ea typeface="+mn-ea"/>
-              <a:cs typeface="+mn-cs"/>
-            </a:endParaRPr>
-          </a:p>
-          <a:p>
-            <a:r>
-              <a:rPr lang="en-GB" sz="1200" kern="1200" dirty="0">
-                <a:solidFill>
-                  <a:schemeClr val="tx1"/>
-                </a:solidFill>
-                <a:effectLst/>
-                <a:latin typeface="+mn-lt"/>
-                <a:ea typeface="+mn-ea"/>
-                <a:cs typeface="+mn-cs"/>
-              </a:rPr>
-              <a:t>Now mask the alignment.</a:t>
-            </a:r>
-            <a:r>
-              <a:rPr lang="en-GB" dirty="0">
-                <a:effectLst/>
-              </a:rPr>
-              <a:t> </a:t>
-            </a:r>
-          </a:p>
-          <a:p>
-            <a:endParaRPr lang="en-GB" sz="1200" kern="1200" dirty="0">
-              <a:solidFill>
-                <a:schemeClr val="tx1"/>
-              </a:solidFill>
-              <a:effectLst/>
-              <a:latin typeface="+mn-lt"/>
-              <a:ea typeface="+mn-ea"/>
-              <a:cs typeface="+mn-cs"/>
-            </a:endParaRPr>
-          </a:p>
-          <a:p>
-            <a:r>
-              <a:rPr lang="en-GB" sz="1200" kern="1200" dirty="0">
-                <a:solidFill>
-                  <a:schemeClr val="tx1"/>
-                </a:solidFill>
-                <a:effectLst/>
-                <a:latin typeface="+mn-lt"/>
-                <a:ea typeface="+mn-ea"/>
-                <a:cs typeface="+mn-cs"/>
-              </a:rPr>
-              <a:t>Construct the phylogenetic tree and root.</a:t>
-            </a:r>
-          </a:p>
-          <a:p>
-            <a:endParaRPr lang="en-GB" sz="1200" kern="1200" dirty="0">
-              <a:solidFill>
-                <a:schemeClr val="tx1"/>
-              </a:solidFill>
-              <a:effectLst/>
-              <a:latin typeface="+mn-lt"/>
-              <a:ea typeface="+mn-ea"/>
-              <a:cs typeface="+mn-cs"/>
-            </a:endParaRPr>
-          </a:p>
-          <a:p>
-            <a:r>
-              <a:rPr lang="en-GB" sz="1200" kern="1200" dirty="0">
-                <a:solidFill>
-                  <a:schemeClr val="tx1"/>
-                </a:solidFill>
-                <a:effectLst/>
-                <a:latin typeface="+mn-lt"/>
-                <a:ea typeface="+mn-ea"/>
-                <a:cs typeface="+mn-cs"/>
-              </a:rPr>
-              <a:t>Export feature table (Feature table of the remaining sequences after denoising that tells us how many samples we have, how many features (ASVs) we have, how frequent (how many individual cells there are) per sample, how many ASVs we see per sample</a:t>
-            </a:r>
-            <a:r>
-              <a:rPr lang="en-GB" dirty="0">
-                <a:effectLst/>
-              </a:rPr>
-              <a:t> ) </a:t>
-            </a:r>
-            <a:r>
-              <a:rPr lang="en-GB" sz="1200" kern="1200" dirty="0">
-                <a:solidFill>
-                  <a:schemeClr val="tx1"/>
-                </a:solidFill>
-                <a:effectLst/>
-                <a:latin typeface="+mn-lt"/>
-                <a:ea typeface="+mn-ea"/>
-                <a:cs typeface="+mn-cs"/>
-              </a:rPr>
-              <a:t>, ASV count table (ASV count table with sample as columns and ASV as row</a:t>
-            </a:r>
-            <a:r>
-              <a:rPr lang="en-GB" dirty="0">
-                <a:effectLst/>
-              </a:rPr>
-              <a:t> )</a:t>
-            </a:r>
-            <a:r>
-              <a:rPr lang="en-GB" sz="1200" kern="1200" dirty="0">
-                <a:solidFill>
-                  <a:schemeClr val="tx1"/>
-                </a:solidFill>
-                <a:effectLst/>
-                <a:latin typeface="+mn-lt"/>
-                <a:ea typeface="+mn-ea"/>
-                <a:cs typeface="+mn-cs"/>
-              </a:rPr>
-              <a:t>, representative sequences (The remaining representative sequences after denoising (i.e. a list of all the unique base pair sequences present in the denoised dataset), exported as a </a:t>
-            </a:r>
-            <a:r>
-              <a:rPr lang="en-GB" sz="1200" kern="1200" dirty="0" err="1">
-                <a:solidFill>
-                  <a:schemeClr val="tx1"/>
-                </a:solidFill>
-                <a:effectLst/>
-                <a:latin typeface="+mn-lt"/>
-                <a:ea typeface="+mn-ea"/>
-                <a:cs typeface="+mn-cs"/>
-              </a:rPr>
-              <a:t>fasta</a:t>
-            </a:r>
-            <a:r>
-              <a:rPr lang="en-GB" sz="1200" kern="1200" dirty="0">
-                <a:solidFill>
-                  <a:schemeClr val="tx1"/>
-                </a:solidFill>
-                <a:effectLst/>
-                <a:latin typeface="+mn-lt"/>
-                <a:ea typeface="+mn-ea"/>
-                <a:cs typeface="+mn-cs"/>
-              </a:rPr>
-              <a:t> file</a:t>
-            </a:r>
-            <a:r>
-              <a:rPr lang="en-GB" dirty="0">
-                <a:effectLst/>
-              </a:rPr>
-              <a:t>)</a:t>
-            </a:r>
-            <a:r>
-              <a:rPr lang="en-GB" sz="1200" kern="1200" dirty="0">
-                <a:solidFill>
-                  <a:schemeClr val="tx1"/>
-                </a:solidFill>
-                <a:effectLst/>
-                <a:latin typeface="+mn-lt"/>
-                <a:ea typeface="+mn-ea"/>
-                <a:cs typeface="+mn-cs"/>
-              </a:rPr>
-              <a:t>, taxonomy table (Table of feature (ASV) IDs and their taxonomic classifications</a:t>
-            </a:r>
-            <a:r>
-              <a:rPr lang="en-GB" dirty="0">
-                <a:effectLst/>
-              </a:rPr>
-              <a:t> ) </a:t>
-            </a:r>
-            <a:r>
-              <a:rPr lang="en-GB" sz="1200" kern="1200" dirty="0">
-                <a:solidFill>
-                  <a:schemeClr val="tx1"/>
-                </a:solidFill>
-                <a:effectLst/>
-                <a:latin typeface="+mn-lt"/>
-                <a:ea typeface="+mn-ea"/>
-                <a:cs typeface="+mn-cs"/>
-              </a:rPr>
-              <a:t>and phylogenetic tree.</a:t>
+            <a:pPr marL="0" marR="0" lvl="0" indent="0" algn="l" defTabSz="914400" rtl="0" eaLnBrk="1" fontAlgn="auto" latinLnBrk="0" hangingPunct="1">
+              <a:lnSpc>
+                <a:spcPct val="100000"/>
+              </a:lnSpc>
+              <a:spcBef>
+                <a:spcPts val="0"/>
+              </a:spcBef>
+              <a:spcAft>
+                <a:spcPts val="0"/>
+              </a:spcAft>
+              <a:buClrTx/>
+              <a:buSzTx/>
+              <a:buFontTx/>
+              <a:buNone/>
+              <a:tabLst/>
+              <a:defRPr/>
+            </a:pPr>
+            <a:r>
+              <a:rPr lang="en-US" dirty="0"/>
+              <a:t>The paper included information on sequence processing that I was able to use in my first QIIME workflow. </a:t>
+            </a:r>
+          </a:p>
+          <a:p>
+            <a:endParaRPr lang="en-US" dirty="0"/>
+          </a:p>
+          <a:p>
+            <a:r>
+              <a:rPr lang="en-US" dirty="0"/>
+              <a:t>It gave me the opportunity to work with 16S and 18S data (although here I have only analyzed the 16S data) </a:t>
+            </a:r>
+          </a:p>
+          <a:p>
+            <a:endParaRPr lang="en-US" dirty="0"/>
+          </a:p>
+          <a:p>
+            <a:r>
+              <a:rPr lang="en-US" dirty="0"/>
+              <a:t>The data could also be grouped by glacier which was useful for comparative analyses.</a:t>
             </a:r>
           </a:p>
           <a:p>
@@ -25847,7 +25614,7 @@
           <a:p>
             <a:fld id="{91AE2140-D502-214A-B76B-E0784B2C949B}" type="slidenum">
               <a:rPr lang="en-US" smtClean="0"/>
-              <a:t>6</a:t>
+              <a:t>5</a:t>
             </a:fld>
             <a:endParaRPr lang="en-US"/>
           </a:p>
@@ -25856,7 +25623,7 @@
     </p:spTree>
     <p:extLst>
       <p:ext uri="{BB962C8B-B14F-4D97-AF65-F5344CB8AC3E}">
-        <p14:creationId xmlns:p14="http://schemas.microsoft.com/office/powerpoint/2010/main" val="2819534113"/>
+        <p14:creationId xmlns:p14="http://schemas.microsoft.com/office/powerpoint/2010/main" val="29509610"/>
       </p:ext>
     </p:extLst>
   </p:cSld>
@@ -25910,6 +25677,709 @@
           <a:bodyPr/>
           <a:lstStyle/>
           <a:p>
+            <a:r>
+              <a:rPr lang="en-US" dirty="0"/>
+              <a:t>In QIIME2 on my local computer I downloaded Sequence Read Archive (SRA) toolbox that allowed me to prefetch the sequence data from the SRA website using the archive umber supplied by the paper, splitting the flies into forward and reverse reads and saving them to my laptop.</a:t>
+            </a:r>
+          </a:p>
+          <a:p>
+            <a:endParaRPr lang="en-US" dirty="0"/>
+          </a:p>
+          <a:p>
+            <a:r>
+              <a:rPr lang="en-US" dirty="0"/>
+              <a:t>I renamed the sequence files and modified the metadata file into formats expected by QIIME2.</a:t>
+            </a:r>
+          </a:p>
+          <a:p>
+            <a:endParaRPr lang="en-US" dirty="0"/>
+          </a:p>
+          <a:p>
+            <a:r>
+              <a:rPr lang="en-GB" sz="1200" kern="1200" dirty="0">
+                <a:solidFill>
+                  <a:schemeClr val="tx1"/>
+                </a:solidFill>
+                <a:effectLst/>
+                <a:latin typeface="+mn-lt"/>
+                <a:ea typeface="+mn-ea"/>
+                <a:cs typeface="+mn-cs"/>
+              </a:rPr>
+              <a:t>Import </a:t>
+            </a:r>
+            <a:r>
+              <a:rPr lang="en-GB" sz="1200" kern="1200" dirty="0" err="1">
+                <a:solidFill>
+                  <a:schemeClr val="tx1"/>
+                </a:solidFill>
+                <a:effectLst/>
+                <a:latin typeface="+mn-lt"/>
+                <a:ea typeface="+mn-ea"/>
+                <a:cs typeface="+mn-cs"/>
+              </a:rPr>
+              <a:t>fastq</a:t>
+            </a:r>
+            <a:r>
+              <a:rPr lang="en-GB" sz="1200" kern="1200" dirty="0">
+                <a:solidFill>
+                  <a:schemeClr val="tx1"/>
+                </a:solidFill>
+                <a:effectLst/>
+                <a:latin typeface="+mn-lt"/>
+                <a:ea typeface="+mn-ea"/>
+                <a:cs typeface="+mn-cs"/>
+              </a:rPr>
+              <a:t> files and convert them into a format </a:t>
+            </a:r>
+            <a:r>
+              <a:rPr lang="en-GB" sz="1200" kern="1200" dirty="0" err="1">
+                <a:solidFill>
+                  <a:schemeClr val="tx1"/>
+                </a:solidFill>
+                <a:effectLst/>
+                <a:latin typeface="+mn-lt"/>
+                <a:ea typeface="+mn-ea"/>
+                <a:cs typeface="+mn-cs"/>
+              </a:rPr>
+              <a:t>Qiime</a:t>
+            </a:r>
+            <a:r>
+              <a:rPr lang="en-GB" sz="1200" kern="1200" dirty="0">
+                <a:solidFill>
+                  <a:schemeClr val="tx1"/>
+                </a:solidFill>
+                <a:effectLst/>
+                <a:latin typeface="+mn-lt"/>
+                <a:ea typeface="+mn-ea"/>
+                <a:cs typeface="+mn-cs"/>
+              </a:rPr>
+              <a:t> wants to work with.</a:t>
+            </a:r>
+            <a:r>
+              <a:rPr lang="en-GB" dirty="0">
+                <a:effectLst/>
+              </a:rPr>
+              <a:t> </a:t>
+            </a:r>
+          </a:p>
+          <a:p>
+            <a:endParaRPr lang="en-GB" dirty="0">
+              <a:effectLst/>
+            </a:endParaRPr>
+          </a:p>
+          <a:p>
+            <a:r>
+              <a:rPr lang="en-GB" sz="1200" kern="1200" dirty="0">
+                <a:solidFill>
+                  <a:schemeClr val="tx1"/>
+                </a:solidFill>
+                <a:effectLst/>
+                <a:latin typeface="+mn-lt"/>
+                <a:ea typeface="+mn-ea"/>
+                <a:cs typeface="+mn-cs"/>
+              </a:rPr>
+              <a:t>Remove primers. I'm getting the primers from https://</a:t>
+            </a:r>
+            <a:r>
+              <a:rPr lang="en-GB" sz="1200" kern="1200" dirty="0" err="1">
+                <a:solidFill>
+                  <a:schemeClr val="tx1"/>
+                </a:solidFill>
+                <a:effectLst/>
+                <a:latin typeface="+mn-lt"/>
+                <a:ea typeface="+mn-ea"/>
+                <a:cs typeface="+mn-cs"/>
+              </a:rPr>
+              <a:t>earthmicrobiome.org</a:t>
+            </a:r>
+            <a:r>
+              <a:rPr lang="en-GB" sz="1200" kern="1200" dirty="0">
+                <a:solidFill>
+                  <a:schemeClr val="tx1"/>
+                </a:solidFill>
+                <a:effectLst/>
+                <a:latin typeface="+mn-lt"/>
+                <a:ea typeface="+mn-ea"/>
+                <a:cs typeface="+mn-cs"/>
+              </a:rPr>
+              <a:t>/protocols-and-standards/16s/ as described by Sommers et al., (2020)</a:t>
+            </a:r>
+          </a:p>
+          <a:p>
+            <a:r>
+              <a:rPr lang="en-GB" sz="1200" kern="1200" dirty="0">
+                <a:solidFill>
+                  <a:schemeClr val="tx1"/>
+                </a:solidFill>
+                <a:effectLst/>
+                <a:latin typeface="+mn-lt"/>
+                <a:ea typeface="+mn-ea"/>
+                <a:cs typeface="+mn-cs"/>
+              </a:rPr>
+              <a:t>The primer sequences are :</a:t>
+            </a:r>
+          </a:p>
+          <a:p>
+            <a:r>
+              <a:rPr lang="en-GB" sz="1200" kern="1200" dirty="0">
+                <a:solidFill>
+                  <a:schemeClr val="tx1"/>
+                </a:solidFill>
+                <a:effectLst/>
+                <a:latin typeface="+mn-lt"/>
+                <a:ea typeface="+mn-ea"/>
+                <a:cs typeface="+mn-cs"/>
+              </a:rPr>
+              <a:t>Updated sequences: 515F (</a:t>
+            </a:r>
+            <a:r>
+              <a:rPr lang="en-GB" sz="1200" kern="1200" dirty="0" err="1">
+                <a:solidFill>
+                  <a:schemeClr val="tx1"/>
+                </a:solidFill>
+                <a:effectLst/>
+                <a:latin typeface="+mn-lt"/>
+                <a:ea typeface="+mn-ea"/>
+                <a:cs typeface="+mn-cs"/>
+              </a:rPr>
+              <a:t>Parada</a:t>
+            </a:r>
+            <a:r>
+              <a:rPr lang="en-GB" sz="1200" kern="1200" dirty="0">
+                <a:solidFill>
+                  <a:schemeClr val="tx1"/>
+                </a:solidFill>
+                <a:effectLst/>
+                <a:latin typeface="+mn-lt"/>
+                <a:ea typeface="+mn-ea"/>
+                <a:cs typeface="+mn-cs"/>
+              </a:rPr>
+              <a:t>)–806R (</a:t>
+            </a:r>
+            <a:r>
+              <a:rPr lang="en-GB" sz="1200" kern="1200" dirty="0" err="1">
+                <a:solidFill>
+                  <a:schemeClr val="tx1"/>
+                </a:solidFill>
+                <a:effectLst/>
+                <a:latin typeface="+mn-lt"/>
+                <a:ea typeface="+mn-ea"/>
+                <a:cs typeface="+mn-cs"/>
+              </a:rPr>
+              <a:t>Apprill</a:t>
+            </a:r>
+            <a:r>
+              <a:rPr lang="en-GB" sz="1200" kern="1200" dirty="0">
+                <a:solidFill>
+                  <a:schemeClr val="tx1"/>
+                </a:solidFill>
+                <a:effectLst/>
+                <a:latin typeface="+mn-lt"/>
+                <a:ea typeface="+mn-ea"/>
+                <a:cs typeface="+mn-cs"/>
+              </a:rPr>
+              <a:t>), forward-barcoded:</a:t>
+            </a:r>
+          </a:p>
+          <a:p>
+            <a:r>
+              <a:rPr lang="en-GB" sz="1200" kern="1200" dirty="0">
+                <a:solidFill>
+                  <a:schemeClr val="tx1"/>
+                </a:solidFill>
+                <a:effectLst/>
+                <a:latin typeface="+mn-lt"/>
+                <a:ea typeface="+mn-ea"/>
+                <a:cs typeface="+mn-cs"/>
+              </a:rPr>
+              <a:t>FWD:GTGYCAGCMGCCGCGGTAA; REV:GGACTACNVGGGTWTCTAAT </a:t>
+            </a:r>
+          </a:p>
+          <a:p>
+            <a:endParaRPr lang="en-GB" sz="1200" kern="1200" dirty="0">
+              <a:solidFill>
+                <a:schemeClr val="tx1"/>
+              </a:solidFill>
+              <a:effectLst/>
+              <a:latin typeface="+mn-lt"/>
+              <a:ea typeface="+mn-ea"/>
+              <a:cs typeface="+mn-cs"/>
+            </a:endParaRPr>
+          </a:p>
+          <a:p>
+            <a:r>
+              <a:rPr lang="en-GB" sz="1200" kern="1200" dirty="0">
+                <a:solidFill>
+                  <a:schemeClr val="tx1"/>
+                </a:solidFill>
+                <a:effectLst/>
+                <a:latin typeface="+mn-lt"/>
+                <a:ea typeface="+mn-ea"/>
+                <a:cs typeface="+mn-cs"/>
+              </a:rPr>
+              <a:t>Check the quality of trimmed reads and visualise.</a:t>
+            </a:r>
+            <a:r>
+              <a:rPr lang="en-GB" dirty="0">
+                <a:effectLst/>
+              </a:rPr>
+              <a:t> </a:t>
+            </a:r>
+          </a:p>
+          <a:p>
+            <a:endParaRPr lang="en-GB" dirty="0">
+              <a:effectLst/>
+            </a:endParaRPr>
+          </a:p>
+          <a:p>
+            <a:r>
+              <a:rPr lang="en-GB" sz="1200" kern="1200" dirty="0">
+                <a:solidFill>
+                  <a:schemeClr val="tx1"/>
+                </a:solidFill>
+                <a:effectLst/>
+                <a:latin typeface="+mn-lt"/>
+                <a:ea typeface="+mn-ea"/>
+                <a:cs typeface="+mn-cs"/>
+              </a:rPr>
+              <a:t>Call DADA2.  Where are the adaptors? Front or back? Use trim in DADA2 to cut them, in stead of QIIME2 </a:t>
+            </a:r>
+            <a:r>
+              <a:rPr lang="en-GB" sz="1200" kern="1200" dirty="0" err="1">
+                <a:solidFill>
+                  <a:schemeClr val="tx1"/>
+                </a:solidFill>
+                <a:effectLst/>
+                <a:latin typeface="+mn-lt"/>
+                <a:ea typeface="+mn-ea"/>
+                <a:cs typeface="+mn-cs"/>
+              </a:rPr>
+              <a:t>cutadapt</a:t>
+            </a:r>
+            <a:endParaRPr lang="en-GB" sz="1200" kern="1200" dirty="0">
+              <a:solidFill>
+                <a:schemeClr val="tx1"/>
+              </a:solidFill>
+              <a:effectLst/>
+              <a:latin typeface="+mn-lt"/>
+              <a:ea typeface="+mn-ea"/>
+              <a:cs typeface="+mn-cs"/>
+            </a:endParaRPr>
+          </a:p>
+          <a:p>
+            <a:r>
+              <a:rPr lang="en-GB" sz="1200" kern="1200" dirty="0" err="1">
+                <a:solidFill>
+                  <a:schemeClr val="tx1"/>
+                </a:solidFill>
+                <a:effectLst/>
+                <a:latin typeface="+mn-lt"/>
+                <a:ea typeface="+mn-ea"/>
+                <a:cs typeface="+mn-cs"/>
+              </a:rPr>
+              <a:t>FastQC</a:t>
+            </a:r>
+            <a:r>
+              <a:rPr lang="en-GB" sz="1200" kern="1200" dirty="0">
+                <a:solidFill>
+                  <a:schemeClr val="tx1"/>
+                </a:solidFill>
+                <a:effectLst/>
+                <a:latin typeface="+mn-lt"/>
+                <a:ea typeface="+mn-ea"/>
+                <a:cs typeface="+mn-cs"/>
+              </a:rPr>
+              <a:t> - look at for adaptor - if adaptor isn't there then don't worry about it! Warning: Not all adaptors are picked up by </a:t>
+            </a:r>
+            <a:r>
+              <a:rPr lang="en-GB" sz="1200" kern="1200" dirty="0" err="1">
+                <a:solidFill>
+                  <a:schemeClr val="tx1"/>
+                </a:solidFill>
+                <a:effectLst/>
+                <a:latin typeface="+mn-lt"/>
+                <a:ea typeface="+mn-ea"/>
+                <a:cs typeface="+mn-cs"/>
+              </a:rPr>
+              <a:t>FastQC</a:t>
+            </a:r>
+            <a:r>
+              <a:rPr lang="en-GB" sz="1200" kern="1200" dirty="0">
+                <a:solidFill>
+                  <a:schemeClr val="tx1"/>
+                </a:solidFill>
+                <a:effectLst/>
+                <a:latin typeface="+mn-lt"/>
+                <a:ea typeface="+mn-ea"/>
+                <a:cs typeface="+mn-cs"/>
+              </a:rPr>
+              <a:t>.</a:t>
+            </a:r>
+          </a:p>
+          <a:p>
+            <a:r>
+              <a:rPr lang="en-GB" sz="1200" b="1" kern="1200" dirty="0">
+                <a:solidFill>
+                  <a:schemeClr val="tx1"/>
+                </a:solidFill>
+                <a:effectLst/>
+                <a:latin typeface="+mn-lt"/>
+                <a:ea typeface="+mn-ea"/>
+                <a:cs typeface="+mn-cs"/>
+              </a:rPr>
+              <a:t> </a:t>
+            </a:r>
+            <a:endParaRPr lang="en-GB" sz="1200" kern="1200" dirty="0">
+              <a:solidFill>
+                <a:schemeClr val="tx1"/>
+              </a:solidFill>
+              <a:effectLst/>
+              <a:latin typeface="+mn-lt"/>
+              <a:ea typeface="+mn-ea"/>
+              <a:cs typeface="+mn-cs"/>
+            </a:endParaRPr>
+          </a:p>
+          <a:p>
+            <a:r>
+              <a:rPr lang="en-GB" sz="1200" kern="1200" dirty="0">
+                <a:solidFill>
+                  <a:schemeClr val="tx1"/>
+                </a:solidFill>
+                <a:effectLst/>
+                <a:latin typeface="+mn-lt"/>
+                <a:ea typeface="+mn-ea"/>
+                <a:cs typeface="+mn-cs"/>
+              </a:rPr>
+              <a:t>Denoise data and check results of this step.</a:t>
+            </a:r>
+          </a:p>
+          <a:p>
+            <a:endParaRPr lang="en-GB" sz="1200" kern="1200" dirty="0">
+              <a:solidFill>
+                <a:schemeClr val="tx1"/>
+              </a:solidFill>
+              <a:effectLst/>
+              <a:latin typeface="+mn-lt"/>
+              <a:ea typeface="+mn-ea"/>
+              <a:cs typeface="+mn-cs"/>
+            </a:endParaRPr>
+          </a:p>
+          <a:p>
+            <a:r>
+              <a:rPr lang="en-GB" sz="1200" kern="1200" dirty="0">
+                <a:solidFill>
+                  <a:schemeClr val="tx1"/>
+                </a:solidFill>
+                <a:effectLst/>
+                <a:latin typeface="+mn-lt"/>
+                <a:ea typeface="+mn-ea"/>
+                <a:cs typeface="+mn-cs"/>
+              </a:rPr>
+              <a:t>Summarise remaining reads after denoising and visualise.  Through the sequence table generated below you can click on a representative sequence and BLAST it.</a:t>
+            </a:r>
+            <a:r>
+              <a:rPr lang="en-GB" dirty="0">
+                <a:effectLst/>
+              </a:rPr>
+              <a:t> </a:t>
+            </a:r>
+          </a:p>
+          <a:p>
+            <a:endParaRPr lang="en-GB" sz="1200" kern="1200" dirty="0">
+              <a:solidFill>
+                <a:schemeClr val="tx1"/>
+              </a:solidFill>
+              <a:effectLst/>
+              <a:latin typeface="+mn-lt"/>
+              <a:ea typeface="+mn-ea"/>
+              <a:cs typeface="+mn-cs"/>
+            </a:endParaRPr>
+          </a:p>
+          <a:p>
+            <a:r>
+              <a:rPr lang="en-GB" sz="1200" kern="1200" dirty="0">
+                <a:solidFill>
+                  <a:schemeClr val="tx1"/>
+                </a:solidFill>
+                <a:effectLst/>
+                <a:latin typeface="+mn-lt"/>
+                <a:ea typeface="+mn-ea"/>
+                <a:cs typeface="+mn-cs"/>
+              </a:rPr>
+              <a:t>Generate a feature table and visualise. </a:t>
+            </a:r>
+          </a:p>
+          <a:p>
+            <a:endParaRPr lang="en-GB" sz="1200" kern="1200" dirty="0">
+              <a:solidFill>
+                <a:schemeClr val="tx1"/>
+              </a:solidFill>
+              <a:effectLst/>
+              <a:latin typeface="+mn-lt"/>
+              <a:ea typeface="+mn-ea"/>
+              <a:cs typeface="+mn-cs"/>
+            </a:endParaRPr>
+          </a:p>
+          <a:p>
+            <a:r>
+              <a:rPr lang="en-GB" sz="1200" kern="1200" dirty="0">
+                <a:solidFill>
+                  <a:schemeClr val="tx1"/>
+                </a:solidFill>
+                <a:effectLst/>
+                <a:latin typeface="+mn-lt"/>
+                <a:ea typeface="+mn-ea"/>
+                <a:cs typeface="+mn-cs"/>
+              </a:rPr>
+              <a:t>Download Silva classifier and move to work folder.</a:t>
+            </a:r>
+            <a:r>
+              <a:rPr lang="en-GB" dirty="0">
+                <a:effectLst/>
+              </a:rPr>
+              <a:t> </a:t>
+            </a:r>
+          </a:p>
+          <a:p>
+            <a:endParaRPr lang="en-GB" sz="1200" kern="1200" dirty="0">
+              <a:solidFill>
+                <a:schemeClr val="tx1"/>
+              </a:solidFill>
+              <a:effectLst/>
+              <a:latin typeface="+mn-lt"/>
+              <a:ea typeface="+mn-ea"/>
+              <a:cs typeface="+mn-cs"/>
+            </a:endParaRPr>
+          </a:p>
+          <a:p>
+            <a:r>
+              <a:rPr lang="en-GB" sz="1200" kern="1200" dirty="0">
+                <a:solidFill>
+                  <a:schemeClr val="tx1"/>
+                </a:solidFill>
+                <a:effectLst/>
+                <a:latin typeface="+mn-lt"/>
+                <a:ea typeface="+mn-ea"/>
+                <a:cs typeface="+mn-cs"/>
+              </a:rPr>
+              <a:t>Classify representative sequences and visualise.</a:t>
+            </a:r>
+            <a:r>
+              <a:rPr lang="en-GB" dirty="0">
+                <a:effectLst/>
+              </a:rPr>
+              <a:t> </a:t>
+            </a:r>
+          </a:p>
+          <a:p>
+            <a:endParaRPr lang="en-GB" sz="1200" kern="1200" dirty="0">
+              <a:solidFill>
+                <a:schemeClr val="tx1"/>
+              </a:solidFill>
+              <a:effectLst/>
+              <a:latin typeface="+mn-lt"/>
+              <a:ea typeface="+mn-ea"/>
+              <a:cs typeface="+mn-cs"/>
+            </a:endParaRPr>
+          </a:p>
+          <a:p>
+            <a:r>
+              <a:rPr lang="en-GB" sz="1200" kern="1200" dirty="0">
+                <a:solidFill>
+                  <a:schemeClr val="tx1"/>
+                </a:solidFill>
+                <a:effectLst/>
+                <a:latin typeface="+mn-lt"/>
+                <a:ea typeface="+mn-ea"/>
+                <a:cs typeface="+mn-cs"/>
+              </a:rPr>
+              <a:t>Make a multiple sequence alignment with MAFFT.</a:t>
+            </a:r>
+            <a:r>
+              <a:rPr lang="en-GB" dirty="0">
+                <a:effectLst/>
+              </a:rPr>
+              <a:t> </a:t>
+            </a:r>
+          </a:p>
+          <a:p>
+            <a:endParaRPr lang="en-GB" sz="1200" kern="1200" dirty="0">
+              <a:solidFill>
+                <a:schemeClr val="tx1"/>
+              </a:solidFill>
+              <a:effectLst/>
+              <a:latin typeface="+mn-lt"/>
+              <a:ea typeface="+mn-ea"/>
+              <a:cs typeface="+mn-cs"/>
+            </a:endParaRPr>
+          </a:p>
+          <a:p>
+            <a:r>
+              <a:rPr lang="en-GB" sz="1200" kern="1200" dirty="0">
+                <a:solidFill>
+                  <a:schemeClr val="tx1"/>
+                </a:solidFill>
+                <a:effectLst/>
+                <a:latin typeface="+mn-lt"/>
+                <a:ea typeface="+mn-ea"/>
+                <a:cs typeface="+mn-cs"/>
+              </a:rPr>
+              <a:t>Now mask the alignment.</a:t>
+            </a:r>
+            <a:r>
+              <a:rPr lang="en-GB" dirty="0">
+                <a:effectLst/>
+              </a:rPr>
+              <a:t> </a:t>
+            </a:r>
+          </a:p>
+          <a:p>
+            <a:endParaRPr lang="en-GB" sz="1200" kern="1200" dirty="0">
+              <a:solidFill>
+                <a:schemeClr val="tx1"/>
+              </a:solidFill>
+              <a:effectLst/>
+              <a:latin typeface="+mn-lt"/>
+              <a:ea typeface="+mn-ea"/>
+              <a:cs typeface="+mn-cs"/>
+            </a:endParaRPr>
+          </a:p>
+          <a:p>
+            <a:r>
+              <a:rPr lang="en-GB" sz="1200" kern="1200" dirty="0">
+                <a:solidFill>
+                  <a:schemeClr val="tx1"/>
+                </a:solidFill>
+                <a:effectLst/>
+                <a:latin typeface="+mn-lt"/>
+                <a:ea typeface="+mn-ea"/>
+                <a:cs typeface="+mn-cs"/>
+              </a:rPr>
+              <a:t>Construct the phylogenetic tree and root.</a:t>
+            </a:r>
+          </a:p>
+          <a:p>
+            <a:endParaRPr lang="en-GB" sz="1200" kern="1200" dirty="0">
+              <a:solidFill>
+                <a:schemeClr val="tx1"/>
+              </a:solidFill>
+              <a:effectLst/>
+              <a:latin typeface="+mn-lt"/>
+              <a:ea typeface="+mn-ea"/>
+              <a:cs typeface="+mn-cs"/>
+            </a:endParaRPr>
+          </a:p>
+          <a:p>
+            <a:r>
+              <a:rPr lang="en-GB" sz="1200" kern="1200" dirty="0">
+                <a:solidFill>
+                  <a:schemeClr val="tx1"/>
+                </a:solidFill>
+                <a:effectLst/>
+                <a:latin typeface="+mn-lt"/>
+                <a:ea typeface="+mn-ea"/>
+                <a:cs typeface="+mn-cs"/>
+              </a:rPr>
+              <a:t>Export feature table (Feature table of the remaining sequences after denoising that tells us how many samples we have, how many features (ASVs) we have, how frequent (how many individual cells there are) per sample, how many ASVs we see per sample</a:t>
+            </a:r>
+            <a:r>
+              <a:rPr lang="en-GB" dirty="0">
+                <a:effectLst/>
+              </a:rPr>
+              <a:t> ) </a:t>
+            </a:r>
+            <a:r>
+              <a:rPr lang="en-GB" sz="1200" kern="1200" dirty="0">
+                <a:solidFill>
+                  <a:schemeClr val="tx1"/>
+                </a:solidFill>
+                <a:effectLst/>
+                <a:latin typeface="+mn-lt"/>
+                <a:ea typeface="+mn-ea"/>
+                <a:cs typeface="+mn-cs"/>
+              </a:rPr>
+              <a:t>, ASV count table (ASV count table with sample as columns and ASV as row</a:t>
+            </a:r>
+            <a:r>
+              <a:rPr lang="en-GB" dirty="0">
+                <a:effectLst/>
+              </a:rPr>
+              <a:t> )</a:t>
+            </a:r>
+            <a:r>
+              <a:rPr lang="en-GB" sz="1200" kern="1200" dirty="0">
+                <a:solidFill>
+                  <a:schemeClr val="tx1"/>
+                </a:solidFill>
+                <a:effectLst/>
+                <a:latin typeface="+mn-lt"/>
+                <a:ea typeface="+mn-ea"/>
+                <a:cs typeface="+mn-cs"/>
+              </a:rPr>
+              <a:t>, representative sequences (The remaining representative sequences after denoising (i.e. a list of all the unique base pair sequences present in the denoised dataset), exported as a </a:t>
+            </a:r>
+            <a:r>
+              <a:rPr lang="en-GB" sz="1200" kern="1200" dirty="0" err="1">
+                <a:solidFill>
+                  <a:schemeClr val="tx1"/>
+                </a:solidFill>
+                <a:effectLst/>
+                <a:latin typeface="+mn-lt"/>
+                <a:ea typeface="+mn-ea"/>
+                <a:cs typeface="+mn-cs"/>
+              </a:rPr>
+              <a:t>fasta</a:t>
+            </a:r>
+            <a:r>
+              <a:rPr lang="en-GB" sz="1200" kern="1200" dirty="0">
+                <a:solidFill>
+                  <a:schemeClr val="tx1"/>
+                </a:solidFill>
+                <a:effectLst/>
+                <a:latin typeface="+mn-lt"/>
+                <a:ea typeface="+mn-ea"/>
+                <a:cs typeface="+mn-cs"/>
+              </a:rPr>
+              <a:t> file</a:t>
+            </a:r>
+            <a:r>
+              <a:rPr lang="en-GB" dirty="0">
+                <a:effectLst/>
+              </a:rPr>
+              <a:t>)</a:t>
+            </a:r>
+            <a:r>
+              <a:rPr lang="en-GB" sz="1200" kern="1200" dirty="0">
+                <a:solidFill>
+                  <a:schemeClr val="tx1"/>
+                </a:solidFill>
+                <a:effectLst/>
+                <a:latin typeface="+mn-lt"/>
+                <a:ea typeface="+mn-ea"/>
+                <a:cs typeface="+mn-cs"/>
+              </a:rPr>
+              <a:t>, taxonomy table (Table of feature (ASV) IDs and their taxonomic classifications</a:t>
+            </a:r>
+            <a:r>
+              <a:rPr lang="en-GB" dirty="0">
+                <a:effectLst/>
+              </a:rPr>
+              <a:t> ) </a:t>
+            </a:r>
+            <a:r>
+              <a:rPr lang="en-GB" sz="1200" kern="1200" dirty="0">
+                <a:solidFill>
+                  <a:schemeClr val="tx1"/>
+                </a:solidFill>
+                <a:effectLst/>
+                <a:latin typeface="+mn-lt"/>
+                <a:ea typeface="+mn-ea"/>
+                <a:cs typeface="+mn-cs"/>
+              </a:rPr>
+              <a:t>and phylogenetic tree.</a:t>
+            </a:r>
+          </a:p>
+          <a:p>
             <a:endParaRPr lang="en-US" dirty="0"/>
           </a:p>
         </p:txBody>
@@ -25931,7 +26401,7 @@
           <a:p>
             <a:fld id="{91AE2140-D502-214A-B76B-E0784B2C949B}" type="slidenum">
               <a:rPr lang="en-US" smtClean="0"/>
-              <a:t>7</a:t>
+              <a:t>6</a:t>
             </a:fld>
             <a:endParaRPr lang="en-US"/>
           </a:p>
@@ -25940,7 +26410,7 @@
     </p:spTree>
     <p:extLst>
       <p:ext uri="{BB962C8B-B14F-4D97-AF65-F5344CB8AC3E}">
-        <p14:creationId xmlns:p14="http://schemas.microsoft.com/office/powerpoint/2010/main" val="791841475"/>
+        <p14:creationId xmlns:p14="http://schemas.microsoft.com/office/powerpoint/2010/main" val="2819534113"/>
       </p:ext>
     </p:extLst>
   </p:cSld>
@@ -25994,52 +26464,6 @@
           <a:bodyPr/>
           <a:lstStyle/>
           <a:p>
-            <a:r>
-              <a:rPr lang="en-US" sz="1200" dirty="0"/>
-              <a:t>Calculated ASV richness and Shannon Diversity Index for each Glacier</a:t>
-            </a:r>
-          </a:p>
-          <a:p>
-            <a:r>
-              <a:rPr lang="en-US" sz="1200" dirty="0"/>
-              <a:t>Used Two Samples T-Test to compare ASV richness between glaciers (as count data was normally distributed) </a:t>
-            </a:r>
-          </a:p>
-          <a:p>
-            <a:r>
-              <a:rPr lang="en-US" sz="1200" dirty="0"/>
-              <a:t>Result: No significant difference between ASV richness (</a:t>
-            </a:r>
-            <a:r>
-              <a:rPr lang="en-US" sz="1200" i="1" dirty="0"/>
-              <a:t>p=0.052</a:t>
-            </a:r>
-            <a:r>
-              <a:rPr lang="en-US" sz="1200" dirty="0"/>
-              <a:t>) </a:t>
-            </a:r>
-          </a:p>
-          <a:p>
-            <a:r>
-              <a:rPr lang="en-US" sz="1200" dirty="0"/>
-              <a:t>Used Two Samples Wilcoxon Test to compare Shannon Diversity Index for each glacier (as index data was not normally distribute)</a:t>
-            </a:r>
-          </a:p>
-          <a:p>
-            <a:r>
-              <a:rPr lang="en-US" sz="1200" dirty="0"/>
-              <a:t>Result: No significant difference between Shannon Diversity (</a:t>
-            </a:r>
-            <a:r>
-              <a:rPr lang="en-US" sz="1200" i="1" dirty="0"/>
-              <a:t>p=0.581</a:t>
-            </a:r>
-            <a:r>
-              <a:rPr lang="en-US" sz="1200" dirty="0"/>
-              <a:t>)</a:t>
-            </a:r>
-          </a:p>
-          <a:p>
             <a:endParaRPr lang="en-US" dirty="0"/>
           </a:p>
         </p:txBody>
@@ -26061,7 +26485,7 @@
           <a:p>
             <a:fld id="{91AE2140-D502-214A-B76B-E0784B2C949B}" type="slidenum">
               <a:rPr lang="en-US" smtClean="0"/>
-              <a:t>9</a:t>
+              <a:t>7</a:t>
             </a:fld>
             <a:endParaRPr lang="en-US"/>
           </a:p>
@@ -26070,7 +26494,7 @@
     </p:spTree>
     <p:extLst>
       <p:ext uri="{BB962C8B-B14F-4D97-AF65-F5344CB8AC3E}">
-        <p14:creationId xmlns:p14="http://schemas.microsoft.com/office/powerpoint/2010/main" val="547813623"/>
+        <p14:creationId xmlns:p14="http://schemas.microsoft.com/office/powerpoint/2010/main" val="791841475"/>
       </p:ext>
     </p:extLst>
   </p:cSld>
@@ -26125,40 +26549,52 @@
           <a:lstStyle/>
           <a:p>
             <a:r>
-              <a:rPr lang="en-US" dirty="0"/>
-              <a:t>I calculated the beta diversity between glaciers using weighted </a:t>
-            </a:r>
-            <a:r>
-              <a:rPr lang="en-US" dirty="0" err="1"/>
-              <a:t>unifrac</a:t>
-            </a:r>
-            <a:r>
-              <a:rPr lang="en-US" dirty="0"/>
-              <a:t> distances used the distance function in </a:t>
-            </a:r>
-            <a:r>
-              <a:rPr lang="en-US" dirty="0" err="1"/>
-              <a:t>phyloseq</a:t>
-            </a:r>
-            <a:r>
-              <a:rPr lang="en-US" dirty="0"/>
-              <a:t> package.</a:t>
-            </a:r>
-          </a:p>
-          <a:p>
-            <a:r>
-              <a:rPr lang="en-US" dirty="0"/>
-              <a:t>I used permutational multivariate analysis of variance (PERMANOVA) to find if community composition significantly varied between glaciers using 999 permutations</a:t>
+              <a:rPr lang="en-US" sz="1200" dirty="0"/>
+              <a:t>Calculated ASV richness and Shannon Diversity Index for each Glacier</a:t>
+            </a:r>
+          </a:p>
+          <a:p>
+            <a:r>
+              <a:rPr lang="en-US" sz="1200" dirty="0"/>
+              <a:t>Used Two Samples T-Test to compare ASV richness between glaciers (as count data was normally distributed) </a:t>
+            </a:r>
+          </a:p>
+          <a:p>
+            <a:r>
+              <a:rPr lang="en-US" sz="1200" dirty="0"/>
+              <a:t>Result: No significant difference between ASV richness (</a:t>
+            </a:r>
+            <a:r>
+              <a:rPr lang="en-US" sz="1200" i="1" dirty="0"/>
+              <a:t>p=0.052</a:t>
+            </a:r>
+            <a:r>
+              <a:rPr lang="en-US" sz="1200" dirty="0"/>
+              <a:t>) </a:t>
+            </a:r>
+          </a:p>
+          <a:p>
+            <a:r>
+              <a:rPr lang="en-US" sz="1200" dirty="0"/>
+              <a:t>Used Two Samples Wilcoxon Test to compare Shannon Diversity Index for each glacier (as index data was not normally distribute)</a:t>
+            </a:r>
+          </a:p>
+          <a:p>
+            <a:r>
+              <a:rPr lang="en-US" sz="1200" dirty="0"/>
+              <a:t>Result: No significant difference between Shannon Diversity (</a:t>
+            </a:r>
+            <a:r>
+              <a:rPr lang="en-US" sz="1200" i="1" dirty="0"/>
+              <a:t>p=0.581</a:t>
+            </a:r>
+            <a:r>
+              <a:rPr lang="en-US" sz="1200" dirty="0"/>
+              <a:t>)</a:t>
             </a:r>
           </a:p>
           <a:p>
             <a:endParaRPr lang="en-US" dirty="0"/>
-          </a:p>
-          <a:p>
-            <a:r>
-              <a:rPr lang="en-US" dirty="0"/>
-              <a:t>Estimates of beta diversity based on phylogenetic dissimilarity show significant variation between glaciers.</a:t>
-            </a:r>
           </a:p>
         </p:txBody>
       </p:sp>
@@ -26179,7 +26615,7 @@
           <a:p>
             <a:fld id="{91AE2140-D502-214A-B76B-E0784B2C949B}" type="slidenum">
               <a:rPr lang="en-US" smtClean="0"/>
-              <a:t>10</a:t>
+              <a:t>9</a:t>
             </a:fld>
             <a:endParaRPr lang="en-US"/>
           </a:p>
@@ -26188,7 +26624,7 @@
     </p:spTree>
     <p:extLst>
       <p:ext uri="{BB962C8B-B14F-4D97-AF65-F5344CB8AC3E}">
-        <p14:creationId xmlns:p14="http://schemas.microsoft.com/office/powerpoint/2010/main" val="4132672607"/>
+        <p14:creationId xmlns:p14="http://schemas.microsoft.com/office/powerpoint/2010/main" val="547813623"/>
       </p:ext>
     </p:extLst>
   </p:cSld>
@@ -26243,101 +26679,40 @@
           <a:lstStyle/>
           <a:p>
             <a:r>
-              <a:rPr lang="en-US" sz="1200" dirty="0"/>
-              <a:t>Wilcoxon test used to compare cryoconite hole area (cm2) between glaciers. No significant difference detected (W = 134, p=0.7966).</a:t>
-            </a:r>
-          </a:p>
-          <a:p>
-            <a:pPr marL="0" marR="0" lvl="0" indent="0" algn="l" defTabSz="914400" rtl="0" eaLnBrk="1" fontAlgn="auto" latinLnBrk="0" hangingPunct="1">
-              <a:lnSpc>
-                <a:spcPct val="100000"/>
-              </a:lnSpc>
-              <a:spcBef>
-                <a:spcPts val="0"/>
-              </a:spcBef>
-              <a:spcAft>
-                <a:spcPts val="0"/>
-              </a:spcAft>
-              <a:buClrTx/>
-              <a:buSzTx/>
-              <a:buFontTx/>
-              <a:buNone/>
-              <a:tabLst/>
-              <a:defRPr/>
-            </a:pPr>
-            <a:r>
-              <a:rPr lang="en-US" sz="1200" dirty="0"/>
-              <a:t>Wilcoxon test used to compare chlorophyll between glaciers. No significant difference detected (W = 160, p=0.141).</a:t>
-            </a:r>
-          </a:p>
-          <a:p>
-            <a:pPr marL="0" marR="0" lvl="0" indent="0" algn="l" defTabSz="914400" rtl="0" eaLnBrk="1" fontAlgn="auto" latinLnBrk="0" hangingPunct="1">
-              <a:lnSpc>
-                <a:spcPct val="100000"/>
-              </a:lnSpc>
-              <a:spcBef>
-                <a:spcPts val="0"/>
-              </a:spcBef>
-              <a:spcAft>
-                <a:spcPts val="0"/>
-              </a:spcAft>
-              <a:buClrTx/>
-              <a:buSzTx/>
-              <a:buFontTx/>
-              <a:buNone/>
-              <a:tabLst/>
-              <a:defRPr/>
-            </a:pPr>
-            <a:r>
-              <a:rPr lang="en-US" sz="1200" dirty="0"/>
-              <a:t>Wilcoxon test used to compare DNA content between glaciers. Significant difference detected (W = 251, p&lt;0.05).</a:t>
-            </a:r>
-          </a:p>
-          <a:p>
-            <a:pPr marL="0" marR="0" lvl="0" indent="0" algn="l" defTabSz="914400" rtl="0" eaLnBrk="1" fontAlgn="auto" latinLnBrk="0" hangingPunct="1">
-              <a:lnSpc>
-                <a:spcPct val="100000"/>
-              </a:lnSpc>
-              <a:spcBef>
-                <a:spcPts val="0"/>
-              </a:spcBef>
-              <a:spcAft>
-                <a:spcPts val="0"/>
-              </a:spcAft>
-              <a:buClrTx/>
-              <a:buSzTx/>
-              <a:buFontTx/>
-              <a:buNone/>
-              <a:tabLst/>
-              <a:defRPr/>
-            </a:pPr>
-            <a:r>
-              <a:rPr lang="en-US" sz="1200" dirty="0"/>
-              <a:t>Wilcoxon test used to compare organic matter content between glaciers. Significant difference detected (W = 220, p&lt;0.05).</a:t>
-            </a:r>
-          </a:p>
-          <a:p>
-            <a:r>
-              <a:rPr lang="en-US" sz="1200" dirty="0"/>
-              <a:t>Welch Two Sample T-Test used to compare pH between glaciers. Significant difference detected (t=2.193, </a:t>
-            </a:r>
-            <a:r>
-              <a:rPr lang="en-US" sz="1200" dirty="0" err="1"/>
-              <a:t>df</a:t>
-            </a:r>
-            <a:r>
-              <a:rPr lang="en-US" sz="1200" dirty="0"/>
-              <a:t>=11.766, p=0.0492).</a:t>
-            </a:r>
-          </a:p>
-          <a:p>
-            <a:r>
-              <a:rPr lang="en-US" sz="1200" dirty="0"/>
-              <a:t>Wilcoxon test used to compare water content between glaciers. Significant difference detected (W = 220, p&lt;0.05).</a:t>
+              <a:rPr lang="en-US" dirty="0"/>
+              <a:t>I calculated the beta diversity between glaciers using weighted </a:t>
+            </a:r>
+            <a:r>
+              <a:rPr lang="en-US" dirty="0" err="1"/>
+              <a:t>unifrac</a:t>
+            </a:r>
+            <a:r>
+              <a:rPr lang="en-US" dirty="0"/>
+              <a:t> distances used the distance function in </a:t>
+            </a:r>
+            <a:r>
+              <a:rPr lang="en-US" dirty="0" err="1"/>
+              <a:t>phyloseq</a:t>
+            </a:r>
+            <a:r>
+              <a:rPr lang="en-US" dirty="0"/>
+              <a:t> package.</a:t>
+            </a:r>
+          </a:p>
+          <a:p>
+            <a:r>
+              <a:rPr lang="en-US" dirty="0"/>
+              <a:t>I used permutational multivariate analysis of variance (PERMANOVA) to find if community composition significantly varied between glaciers using 999 permutations</a:t>
             </a:r>
           </a:p>
           <a:p>
             <a:endParaRPr lang="en-US" dirty="0"/>
+          </a:p>
+          <a:p>
+            <a:r>
+              <a:rPr lang="en-US" dirty="0"/>
+              <a:t>Estimates of beta diversity based on phylogenetic dissimilarity show significant variation between glaciers.</a:t>
+            </a:r>
           </a:p>
         </p:txBody>
       </p:sp>
@@ -26358,7 +26733,7 @@
           <a:p>
             <a:fld id="{91AE2140-D502-214A-B76B-E0784B2C949B}" type="slidenum">
               <a:rPr lang="en-US" smtClean="0"/>
-              <a:t>13</a:t>
+              <a:t>10</a:t>
             </a:fld>
             <a:endParaRPr lang="en-US"/>
           </a:p>
@@ -26367,7 +26742,7 @@
     </p:spTree>
     <p:extLst>
       <p:ext uri="{BB962C8B-B14F-4D97-AF65-F5344CB8AC3E}">
-        <p14:creationId xmlns:p14="http://schemas.microsoft.com/office/powerpoint/2010/main" val="2425932987"/>
+        <p14:creationId xmlns:p14="http://schemas.microsoft.com/office/powerpoint/2010/main" val="4132672607"/>
       </p:ext>
     </p:extLst>
   </p:cSld>
@@ -26422,9 +26797,101 @@
           <a:lstStyle/>
           <a:p>
             <a:r>
-              <a:rPr lang="en-US" dirty="0"/>
-              <a:t>I have used canonical analysis of principal coordinates (CAP) to explore how differences in community composition are explained by environmental variables</a:t>
-            </a:r>
+              <a:rPr lang="en-US" sz="1200" dirty="0"/>
+              <a:t>Wilcoxon test used to compare cryoconite hole area (cm2) between glaciers. No significant difference detected (W = 134, p=0.7966).</a:t>
+            </a:r>
+          </a:p>
+          <a:p>
+            <a:pPr marL="0" marR="0" lvl="0" indent="0" algn="l" defTabSz="914400" rtl="0" eaLnBrk="1" fontAlgn="auto" latinLnBrk="0" hangingPunct="1">
+              <a:lnSpc>
+                <a:spcPct val="100000"/>
+              </a:lnSpc>
+              <a:spcBef>
+                <a:spcPts val="0"/>
+              </a:spcBef>
+              <a:spcAft>
+                <a:spcPts val="0"/>
+              </a:spcAft>
+              <a:buClrTx/>
+              <a:buSzTx/>
+              <a:buFontTx/>
+              <a:buNone/>
+              <a:tabLst/>
+              <a:defRPr/>
+            </a:pPr>
+            <a:r>
+              <a:rPr lang="en-US" sz="1200" dirty="0"/>
+              <a:t>Wilcoxon test used to compare chlorophyll between glaciers. No significant difference detected (W = 160, p=0.141).</a:t>
+            </a:r>
+          </a:p>
+          <a:p>
+            <a:pPr marL="0" marR="0" lvl="0" indent="0" algn="l" defTabSz="914400" rtl="0" eaLnBrk="1" fontAlgn="auto" latinLnBrk="0" hangingPunct="1">
+              <a:lnSpc>
+                <a:spcPct val="100000"/>
+              </a:lnSpc>
+              <a:spcBef>
+                <a:spcPts val="0"/>
+              </a:spcBef>
+              <a:spcAft>
+                <a:spcPts val="0"/>
+              </a:spcAft>
+              <a:buClrTx/>
+              <a:buSzTx/>
+              <a:buFontTx/>
+              <a:buNone/>
+              <a:tabLst/>
+              <a:defRPr/>
+            </a:pPr>
+            <a:r>
+              <a:rPr lang="en-US" sz="1200" dirty="0"/>
+              <a:t>Wilcoxon test used to compare DNA content between glaciers. Significant difference detected (W = 251, p&lt;0.05).</a:t>
+            </a:r>
+          </a:p>
+          <a:p>
+            <a:pPr marL="0" marR="0" lvl="0" indent="0" algn="l" defTabSz="914400" rtl="0" eaLnBrk="1" fontAlgn="auto" latinLnBrk="0" hangingPunct="1">
+              <a:lnSpc>
+                <a:spcPct val="100000"/>
+              </a:lnSpc>
+              <a:spcBef>
+                <a:spcPts val="0"/>
+              </a:spcBef>
+              <a:spcAft>
+                <a:spcPts val="0"/>
+              </a:spcAft>
+              <a:buClrTx/>
+              <a:buSzTx/>
+              <a:buFontTx/>
+              <a:buNone/>
+              <a:tabLst/>
+              <a:defRPr/>
+            </a:pPr>
+            <a:r>
+              <a:rPr lang="en-US" sz="1200" dirty="0"/>
+              <a:t>Wilcoxon test used to compare organic matter content between glaciers. Significant difference detected (W = 220, p&lt;0.05).</a:t>
+            </a:r>
+          </a:p>
+          <a:p>
+            <a:r>
+              <a:rPr lang="en-US" sz="1200" dirty="0"/>
+              <a:t>Welch Two Sample T-Test used to compare pH between glaciers. Significant difference detected (t=2.193, </a:t>
+            </a:r>
+            <a:r>
+              <a:rPr lang="en-US" sz="1200" dirty="0" err="1"/>
+              <a:t>df</a:t>
+            </a:r>
+            <a:r>
+              <a:rPr lang="en-US" sz="1200" dirty="0"/>
+              <a:t>=11.766, p=0.0492).</a:t>
+            </a:r>
+          </a:p>
+          <a:p>
+            <a:r>
+              <a:rPr lang="en-US" sz="1200" dirty="0"/>
+              <a:t>Wilcoxon test used to compare water content between glaciers. Significant difference detected (W = 220, p&lt;0.05).</a:t>
+            </a:r>
+          </a:p>
+          <a:p>
+            <a:endParaRPr lang="en-US" dirty="0"/>
           </a:p>
         </p:txBody>
       </p:sp>
@@ -26445,7 +26912,7 @@
           <a:p>
             <a:fld id="{91AE2140-D502-214A-B76B-E0784B2C949B}" type="slidenum">
               <a:rPr lang="en-US" smtClean="0"/>
-              <a:t>14</a:t>
+              <a:t>13</a:t>
             </a:fld>
             <a:endParaRPr lang="en-US"/>
           </a:p>
@@ -26454,7 +26921,7 @@
     </p:spTree>
     <p:extLst>
       <p:ext uri="{BB962C8B-B14F-4D97-AF65-F5344CB8AC3E}">
-        <p14:creationId xmlns:p14="http://schemas.microsoft.com/office/powerpoint/2010/main" val="1733676401"/>
+        <p14:creationId xmlns:p14="http://schemas.microsoft.com/office/powerpoint/2010/main" val="2425932987"/>
       </p:ext>
     </p:extLst>
   </p:cSld>
@@ -26510,83 +26977,7 @@
           <a:p>
             <a:r>
               <a:rPr lang="en-US" dirty="0"/>
-              <a:t>Sloan et al., (2006)</a:t>
-            </a:r>
-          </a:p>
-          <a:p>
-            <a:r>
-              <a:rPr lang="en-US" i="1" dirty="0"/>
-              <a:t>‘The microbial world is hard to observe. It is only recently</a:t>
-            </a:r>
-          </a:p>
-          <a:p>
-            <a:r>
-              <a:rPr lang="en-US" i="1" dirty="0"/>
-              <a:t>that the techniques in microbial ecology have advanced</a:t>
-            </a:r>
-          </a:p>
-          <a:p>
-            <a:r>
-              <a:rPr lang="en-US" i="1" dirty="0"/>
-              <a:t>to the point that patterns such as species area curves</a:t>
-            </a:r>
-          </a:p>
-          <a:p>
-            <a:r>
-              <a:rPr lang="en-US" i="1" dirty="0"/>
-              <a:t>have been reported for prokaryotic communities (Green</a:t>
-            </a:r>
-          </a:p>
-          <a:p>
-            <a:r>
-              <a:rPr lang="en-US" i="1" dirty="0"/>
-              <a:t>et al</a:t>
-            </a:r>
-          </a:p>
-          <a:p>
-            <a:r>
-              <a:rPr lang="en-US" i="1" dirty="0"/>
-              <a:t>., 2004; Horner-Devine </a:t>
-            </a:r>
-          </a:p>
-          <a:p>
-            <a:r>
-              <a:rPr lang="en-US" i="1" dirty="0"/>
-              <a:t>et al</a:t>
-            </a:r>
-          </a:p>
-          <a:p>
-            <a:r>
-              <a:rPr lang="en-US" i="1" dirty="0"/>
-              <a:t>., 2004), at least 83 years</a:t>
-            </a:r>
-          </a:p>
-          <a:p>
-            <a:r>
-              <a:rPr lang="en-US" i="1" dirty="0"/>
-              <a:t>after the observation was ﬁrst made in communities of</a:t>
-            </a:r>
-          </a:p>
-          <a:p>
-            <a:r>
-              <a:rPr lang="en-US" i="1" dirty="0" err="1"/>
-              <a:t>arger</a:t>
-            </a:r>
-            <a:r>
-              <a:rPr lang="en-US" i="1" dirty="0"/>
-              <a:t> organisms. Species area curves led directly to the</a:t>
-            </a:r>
-          </a:p>
-          <a:p>
-            <a:r>
-              <a:rPr lang="en-US" i="1" dirty="0"/>
-              <a:t>development of the ﬁrst theories of community assembly</a:t>
-            </a:r>
-          </a:p>
-          <a:p>
-            <a:r>
-              <a:rPr lang="en-US" i="1" dirty="0"/>
-              <a:t>(MacArthur and Wilson, 1967). ‘</a:t>
+              <a:t>I have used canonical analysis of principal coordinates (CAP) to explore how differences in community composition are explained by environmental variables</a:t>
             </a:r>
           </a:p>
         </p:txBody>
@@ -26608,7 +26999,7 @@
           <a:p>
             <a:fld id="{91AE2140-D502-214A-B76B-E0784B2C949B}" type="slidenum">
               <a:rPr lang="en-US" smtClean="0"/>
-              <a:t>15</a:t>
+              <a:t>14</a:t>
             </a:fld>
             <a:endParaRPr lang="en-US"/>
           </a:p>
@@ -26617,7 +27008,7 @@
     </p:spTree>
     <p:extLst>
       <p:ext uri="{BB962C8B-B14F-4D97-AF65-F5344CB8AC3E}">
-        <p14:creationId xmlns:p14="http://schemas.microsoft.com/office/powerpoint/2010/main" val="776258569"/>
+        <p14:creationId xmlns:p14="http://schemas.microsoft.com/office/powerpoint/2010/main" val="1733676401"/>
       </p:ext>
     </p:extLst>
   </p:cSld>
@@ -30674,7 +31065,7 @@
         </p:blipFill>
         <p:spPr>
           <a:xfrm>
-            <a:off x="4095750" y="4512027"/>
+            <a:off x="4095750" y="4362627"/>
             <a:ext cx="2438400" cy="1950720"/>
           </a:xfrm>
           <a:prstGeom prst="rect">
@@ -30740,7 +31131,7 @@
         </p:blipFill>
         <p:spPr>
           <a:xfrm>
-            <a:off x="3706018" y="1825625"/>
+            <a:off x="3706018" y="1690688"/>
             <a:ext cx="4779964" cy="2247382"/>
           </a:xfrm>
           <a:prstGeom prst="rect">
@@ -30805,7 +31196,7 @@
         </p:blipFill>
         <p:spPr>
           <a:xfrm>
-            <a:off x="6534150" y="4512027"/>
+            <a:off x="6534150" y="4362627"/>
             <a:ext cx="2366963" cy="1893570"/>
           </a:xfrm>
           <a:prstGeom prst="rect">
@@ -30827,8 +31218,8 @@
         </p:nvSpPr>
         <p:spPr>
           <a:xfrm>
-            <a:off x="3890963" y="6340348"/>
-            <a:ext cx="5657850" cy="369332"/>
+            <a:off x="1442197" y="6251563"/>
+            <a:ext cx="10183906" cy="646331"/>
           </a:xfrm>
           <a:prstGeom prst="rect">
             <a:avLst/>
@@ -30843,7 +31234,7 @@
           <a:p>
             <a:r>
               <a:rPr lang="en-US" dirty="0"/>
-              <a:t>Figure. Results graphs from my analyses (16S only)</a:t>
+              <a:t>Figure. Left: log10 cryoconite area plotted against log10 ASV richness, Right: Cryoconite hole area plotted against ASV richness (Canada </a:t>
             </a:r>
           </a:p>
         </p:txBody>
@@ -33085,18 +33476,13 @@
           <a:lstStyle/>
           <a:p>
             <a:r>
-              <a:rPr lang="en-US" dirty="0" err="1">
+              <a:rPr lang="en-US" dirty="0">
                 <a:solidFill>
                   <a:schemeClr val="bg1"/>
                 </a:solidFill>
               </a:rPr>
-              <a:t>Gephi</a:t>
-            </a:r>
-            <a:endParaRPr lang="en-US" dirty="0">
-              <a:solidFill>
-                <a:schemeClr val="bg1"/>
-              </a:solidFill>
-            </a:endParaRPr>
+              <a:t>Co-Occurrence Network Analysis</a:t>
+            </a:r>
           </a:p>
         </p:txBody>
       </p:sp>
@@ -33792,7 +34178,7 @@
         </p:xfrm>
         <a:graphic>
           <a:graphicData uri="http://schemas.openxmlformats.org/drawingml/2006/diagram">
-            <dgm:relIds xmlns:dgm="http://schemas.openxmlformats.org/drawingml/2006/diagram" xmlns:r="http://schemas.openxmlformats.org/officeDocument/2006/relationships" r:dm="rId2" r:lo="rId3" r:qs="rId4" r:cs="rId5"/>
+            <dgm:relIds xmlns:dgm="http://schemas.openxmlformats.org/drawingml/2006/diagram" xmlns:r="http://schemas.openxmlformats.org/officeDocument/2006/relationships" r:dm="rId3" r:lo="rId4" r:qs="rId5" r:cs="rId6"/>
           </a:graphicData>
         </a:graphic>
       </p:graphicFrame>
@@ -34204,7 +34590,7 @@
             </a:pPr>
             <a:r>
               <a:rPr lang="en-US" sz="4000" dirty="0"/>
-              <a:t>Linear Models (including ISAR and DDR)</a:t>
+              <a:t>ISAR and DDR</a:t>
             </a:r>
           </a:p>
         </p:txBody>

--- a/Projects/Chapter1/community-assembly-edit.pptx
+++ b/Projects/Chapter1/community-assembly-edit.pptx
@@ -5,7 +5,7 @@
     <p:sldMasterId id="2147483648" r:id="rId1"/>
   </p:sldMasterIdLst>
   <p:notesMasterIdLst>
-    <p:notesMasterId r:id="rId31"/>
+    <p:notesMasterId r:id="rId34"/>
   </p:notesMasterIdLst>
   <p:sldIdLst>
     <p:sldId id="256" r:id="rId2"/>
@@ -15,28 +15,31 @@
     <p:sldId id="281" r:id="rId6"/>
     <p:sldId id="283" r:id="rId7"/>
     <p:sldId id="282" r:id="rId8"/>
-    <p:sldId id="287" r:id="rId9"/>
-    <p:sldId id="299" r:id="rId10"/>
-    <p:sldId id="300" r:id="rId11"/>
-    <p:sldId id="301" r:id="rId12"/>
-    <p:sldId id="302" r:id="rId13"/>
-    <p:sldId id="309" r:id="rId14"/>
-    <p:sldId id="310" r:id="rId15"/>
-    <p:sldId id="258" r:id="rId16"/>
-    <p:sldId id="259" r:id="rId17"/>
-    <p:sldId id="261" r:id="rId18"/>
-    <p:sldId id="277" r:id="rId19"/>
-    <p:sldId id="278" r:id="rId20"/>
-    <p:sldId id="265" r:id="rId21"/>
-    <p:sldId id="293" r:id="rId22"/>
-    <p:sldId id="271" r:id="rId23"/>
-    <p:sldId id="260" r:id="rId24"/>
-    <p:sldId id="295" r:id="rId25"/>
-    <p:sldId id="262" r:id="rId26"/>
-    <p:sldId id="294" r:id="rId27"/>
-    <p:sldId id="298" r:id="rId28"/>
-    <p:sldId id="296" r:id="rId29"/>
-    <p:sldId id="297" r:id="rId30"/>
+    <p:sldId id="312" r:id="rId9"/>
+    <p:sldId id="313" r:id="rId10"/>
+    <p:sldId id="314" r:id="rId11"/>
+    <p:sldId id="287" r:id="rId12"/>
+    <p:sldId id="299" r:id="rId13"/>
+    <p:sldId id="300" r:id="rId14"/>
+    <p:sldId id="301" r:id="rId15"/>
+    <p:sldId id="302" r:id="rId16"/>
+    <p:sldId id="309" r:id="rId17"/>
+    <p:sldId id="310" r:id="rId18"/>
+    <p:sldId id="258" r:id="rId19"/>
+    <p:sldId id="259" r:id="rId20"/>
+    <p:sldId id="261" r:id="rId21"/>
+    <p:sldId id="277" r:id="rId22"/>
+    <p:sldId id="278" r:id="rId23"/>
+    <p:sldId id="265" r:id="rId24"/>
+    <p:sldId id="293" r:id="rId25"/>
+    <p:sldId id="271" r:id="rId26"/>
+    <p:sldId id="260" r:id="rId27"/>
+    <p:sldId id="295" r:id="rId28"/>
+    <p:sldId id="262" r:id="rId29"/>
+    <p:sldId id="294" r:id="rId30"/>
+    <p:sldId id="298" r:id="rId31"/>
+    <p:sldId id="296" r:id="rId32"/>
+    <p:sldId id="297" r:id="rId33"/>
   </p:sldIdLst>
   <p:sldSz cx="12192000" cy="6858000"/>
   <p:notesSz cx="6858000" cy="9144000"/>
@@ -6228,7 +6231,7 @@
         <a:lstStyle/>
         <a:p>
           <a:r>
-            <a:rPr lang="en-US" dirty="0"/>
+            <a:rPr lang="en-US" strike="sngStrike" dirty="0"/>
             <a:t>Remove singletons</a:t>
           </a:r>
         </a:p>
@@ -6301,7 +6304,11 @@
         <a:p>
           <a:r>
             <a:rPr lang="en-US" dirty="0"/>
-            <a:t>Remove ambiguous annotations and low abundance phyla</a:t>
+            <a:t>Remove ambiguous annotations </a:t>
+          </a:r>
+          <a:r>
+            <a:rPr lang="en-US" strike="sngStrike" dirty="0"/>
+            <a:t>and low abundance phyla</a:t>
           </a:r>
         </a:p>
       </dgm:t>
@@ -10479,7 +10486,7 @@
             <a:buNone/>
           </a:pPr>
           <a:r>
-            <a:rPr lang="en-US" sz="1700" kern="1200" dirty="0"/>
+            <a:rPr lang="en-US" sz="1700" strike="sngStrike" kern="1200" dirty="0"/>
             <a:t>Remove singletons</a:t>
           </a:r>
         </a:p>
@@ -10629,7 +10636,11 @@
           </a:pPr>
           <a:r>
             <a:rPr lang="en-US" sz="1700" kern="1200" dirty="0"/>
-            <a:t>Remove ambiguous annotations and low abundance phyla</a:t>
+            <a:t>Remove ambiguous annotations </a:t>
+          </a:r>
+          <a:r>
+            <a:rPr lang="en-US" sz="1700" strike="sngStrike" kern="1200" dirty="0"/>
+            <a:t>and low abundance phyla</a:t>
           </a:r>
         </a:p>
       </dsp:txBody>
@@ -22323,7 +22334,7 @@
           <a:p>
             <a:fld id="{50055017-D10A-7E41-A628-FFBA6D86E32F}" type="datetimeFigureOut">
               <a:rPr lang="en-US" smtClean="0"/>
-              <a:t>4/22/21</a:t>
+              <a:t>4/28/21</a:t>
             </a:fld>
             <a:endParaRPr lang="en-US"/>
           </a:p>
@@ -22889,7 +22900,7 @@
           <a:p>
             <a:fld id="{91AE2140-D502-214A-B76B-E0784B2C949B}" type="slidenum">
               <a:rPr lang="en-US" smtClean="0"/>
-              <a:t>15</a:t>
+              <a:t>18</a:t>
             </a:fld>
             <a:endParaRPr lang="en-US"/>
           </a:p>
@@ -23030,7 +23041,7 @@
           <a:p>
             <a:fld id="{91AE2140-D502-214A-B76B-E0784B2C949B}" type="slidenum">
               <a:rPr lang="en-US" smtClean="0"/>
-              <a:t>16</a:t>
+              <a:t>19</a:t>
             </a:fld>
             <a:endParaRPr lang="en-US"/>
           </a:p>
@@ -23343,7 +23354,7 @@
           <a:p>
             <a:fld id="{91AE2140-D502-214A-B76B-E0784B2C949B}" type="slidenum">
               <a:rPr lang="en-US" smtClean="0"/>
-              <a:t>17</a:t>
+              <a:t>20</a:t>
             </a:fld>
             <a:endParaRPr lang="en-US"/>
           </a:p>
@@ -23530,7 +23541,7 @@
           <a:p>
             <a:fld id="{91AE2140-D502-214A-B76B-E0784B2C949B}" type="slidenum">
               <a:rPr lang="en-US" smtClean="0"/>
-              <a:t>18</a:t>
+              <a:t>21</a:t>
             </a:fld>
             <a:endParaRPr lang="en-US"/>
           </a:p>
@@ -23866,7 +23877,7 @@
           <a:p>
             <a:fld id="{91AE2140-D502-214A-B76B-E0784B2C949B}" type="slidenum">
               <a:rPr lang="en-US" smtClean="0"/>
-              <a:t>19</a:t>
+              <a:t>22</a:t>
             </a:fld>
             <a:endParaRPr lang="en-US"/>
           </a:p>
@@ -24323,7 +24334,7 @@
           <a:p>
             <a:fld id="{91AE2140-D502-214A-B76B-E0784B2C949B}" type="slidenum">
               <a:rPr lang="en-US" smtClean="0"/>
-              <a:t>20</a:t>
+              <a:t>23</a:t>
             </a:fld>
             <a:endParaRPr lang="en-US"/>
           </a:p>
@@ -24444,7 +24455,7 @@
           <a:p>
             <a:fld id="{91AE2140-D502-214A-B76B-E0784B2C949B}" type="slidenum">
               <a:rPr lang="en-US" smtClean="0"/>
-              <a:t>22</a:t>
+              <a:t>25</a:t>
             </a:fld>
             <a:endParaRPr lang="en-US"/>
           </a:p>
@@ -24643,7 +24654,7 @@
           <a:p>
             <a:fld id="{91AE2140-D502-214A-B76B-E0784B2C949B}" type="slidenum">
               <a:rPr lang="en-US" smtClean="0"/>
-              <a:t>23</a:t>
+              <a:t>26</a:t>
             </a:fld>
             <a:endParaRPr lang="en-US"/>
           </a:p>
@@ -24745,7 +24756,7 @@
           <a:p>
             <a:fld id="{91AE2140-D502-214A-B76B-E0784B2C949B}" type="slidenum">
               <a:rPr lang="en-US" smtClean="0"/>
-              <a:t>24</a:t>
+              <a:t>27</a:t>
             </a:fld>
             <a:endParaRPr lang="en-US"/>
           </a:p>
@@ -24876,7 +24887,7 @@
           <a:p>
             <a:fld id="{91AE2140-D502-214A-B76B-E0784B2C949B}" type="slidenum">
               <a:rPr lang="en-US" smtClean="0"/>
-              <a:t>25</a:t>
+              <a:t>28</a:t>
             </a:fld>
             <a:endParaRPr lang="en-US"/>
           </a:p>
@@ -25166,7 +25177,7 @@
           <a:p>
             <a:fld id="{91AE2140-D502-214A-B76B-E0784B2C949B}" type="slidenum">
               <a:rPr lang="en-US" smtClean="0"/>
-              <a:t>26</a:t>
+              <a:t>29</a:t>
             </a:fld>
             <a:endParaRPr lang="en-US"/>
           </a:p>
@@ -25320,7 +25331,7 @@
           <a:p>
             <a:fld id="{91AE2140-D502-214A-B76B-E0784B2C949B}" type="slidenum">
               <a:rPr lang="en-US" smtClean="0"/>
-              <a:t>27</a:t>
+              <a:t>30</a:t>
             </a:fld>
             <a:endParaRPr lang="en-US"/>
           </a:p>
@@ -25454,7 +25465,7 @@
           <a:p>
             <a:fld id="{91AE2140-D502-214A-B76B-E0784B2C949B}" type="slidenum">
               <a:rPr lang="en-US" smtClean="0"/>
-              <a:t>28</a:t>
+              <a:t>31</a:t>
             </a:fld>
             <a:endParaRPr lang="en-US"/>
           </a:p>
@@ -26615,7 +26626,7 @@
           <a:p>
             <a:fld id="{91AE2140-D502-214A-B76B-E0784B2C949B}" type="slidenum">
               <a:rPr lang="en-US" smtClean="0"/>
-              <a:t>9</a:t>
+              <a:t>12</a:t>
             </a:fld>
             <a:endParaRPr lang="en-US"/>
           </a:p>
@@ -26733,7 +26744,7 @@
           <a:p>
             <a:fld id="{91AE2140-D502-214A-B76B-E0784B2C949B}" type="slidenum">
               <a:rPr lang="en-US" smtClean="0"/>
-              <a:t>10</a:t>
+              <a:t>13</a:t>
             </a:fld>
             <a:endParaRPr lang="en-US"/>
           </a:p>
@@ -26912,7 +26923,7 @@
           <a:p>
             <a:fld id="{91AE2140-D502-214A-B76B-E0784B2C949B}" type="slidenum">
               <a:rPr lang="en-US" smtClean="0"/>
-              <a:t>13</a:t>
+              <a:t>16</a:t>
             </a:fld>
             <a:endParaRPr lang="en-US"/>
           </a:p>
@@ -26999,7 +27010,7 @@
           <a:p>
             <a:fld id="{91AE2140-D502-214A-B76B-E0784B2C949B}" type="slidenum">
               <a:rPr lang="en-US" smtClean="0"/>
-              <a:t>14</a:t>
+              <a:t>17</a:t>
             </a:fld>
             <a:endParaRPr lang="en-US"/>
           </a:p>
@@ -27165,7 +27176,7 @@
           <a:p>
             <a:fld id="{630F8F96-A0AC-FA40-A1E6-5325FF9AFD7F}" type="datetimeFigureOut">
               <a:rPr lang="en-US" smtClean="0"/>
-              <a:t>4/22/21</a:t>
+              <a:t>4/28/21</a:t>
             </a:fld>
             <a:endParaRPr lang="en-US"/>
           </a:p>
@@ -27363,7 +27374,7 @@
           <a:p>
             <a:fld id="{630F8F96-A0AC-FA40-A1E6-5325FF9AFD7F}" type="datetimeFigureOut">
               <a:rPr lang="en-US" smtClean="0"/>
-              <a:t>4/22/21</a:t>
+              <a:t>4/28/21</a:t>
             </a:fld>
             <a:endParaRPr lang="en-US"/>
           </a:p>
@@ -27571,7 +27582,7 @@
           <a:p>
             <a:fld id="{630F8F96-A0AC-FA40-A1E6-5325FF9AFD7F}" type="datetimeFigureOut">
               <a:rPr lang="en-US" smtClean="0"/>
-              <a:t>4/22/21</a:t>
+              <a:t>4/28/21</a:t>
             </a:fld>
             <a:endParaRPr lang="en-US"/>
           </a:p>
@@ -27769,7 +27780,7 @@
           <a:p>
             <a:fld id="{630F8F96-A0AC-FA40-A1E6-5325FF9AFD7F}" type="datetimeFigureOut">
               <a:rPr lang="en-US" smtClean="0"/>
-              <a:t>4/22/21</a:t>
+              <a:t>4/28/21</a:t>
             </a:fld>
             <a:endParaRPr lang="en-US"/>
           </a:p>
@@ -28044,7 +28055,7 @@
           <a:p>
             <a:fld id="{630F8F96-A0AC-FA40-A1E6-5325FF9AFD7F}" type="datetimeFigureOut">
               <a:rPr lang="en-US" smtClean="0"/>
-              <a:t>4/22/21</a:t>
+              <a:t>4/28/21</a:t>
             </a:fld>
             <a:endParaRPr lang="en-US"/>
           </a:p>
@@ -28309,7 +28320,7 @@
           <a:p>
             <a:fld id="{630F8F96-A0AC-FA40-A1E6-5325FF9AFD7F}" type="datetimeFigureOut">
               <a:rPr lang="en-US" smtClean="0"/>
-              <a:t>4/22/21</a:t>
+              <a:t>4/28/21</a:t>
             </a:fld>
             <a:endParaRPr lang="en-US"/>
           </a:p>
@@ -28721,7 +28732,7 @@
           <a:p>
             <a:fld id="{630F8F96-A0AC-FA40-A1E6-5325FF9AFD7F}" type="datetimeFigureOut">
               <a:rPr lang="en-US" smtClean="0"/>
-              <a:t>4/22/21</a:t>
+              <a:t>4/28/21</a:t>
             </a:fld>
             <a:endParaRPr lang="en-US"/>
           </a:p>
@@ -28862,7 +28873,7 @@
           <a:p>
             <a:fld id="{630F8F96-A0AC-FA40-A1E6-5325FF9AFD7F}" type="datetimeFigureOut">
               <a:rPr lang="en-US" smtClean="0"/>
-              <a:t>4/22/21</a:t>
+              <a:t>4/28/21</a:t>
             </a:fld>
             <a:endParaRPr lang="en-US"/>
           </a:p>
@@ -28975,7 +28986,7 @@
           <a:p>
             <a:fld id="{630F8F96-A0AC-FA40-A1E6-5325FF9AFD7F}" type="datetimeFigureOut">
               <a:rPr lang="en-US" smtClean="0"/>
-              <a:t>4/22/21</a:t>
+              <a:t>4/28/21</a:t>
             </a:fld>
             <a:endParaRPr lang="en-US"/>
           </a:p>
@@ -29286,7 +29297,7 @@
           <a:p>
             <a:fld id="{630F8F96-A0AC-FA40-A1E6-5325FF9AFD7F}" type="datetimeFigureOut">
               <a:rPr lang="en-US" smtClean="0"/>
-              <a:t>4/22/21</a:t>
+              <a:t>4/28/21</a:t>
             </a:fld>
             <a:endParaRPr lang="en-US"/>
           </a:p>
@@ -29574,7 +29585,7 @@
           <a:p>
             <a:fld id="{630F8F96-A0AC-FA40-A1E6-5325FF9AFD7F}" type="datetimeFigureOut">
               <a:rPr lang="en-US" smtClean="0"/>
-              <a:t>4/22/21</a:t>
+              <a:t>4/28/21</a:t>
             </a:fld>
             <a:endParaRPr lang="en-US"/>
           </a:p>
@@ -29815,7 +29826,7 @@
           <a:p>
             <a:fld id="{630F8F96-A0AC-FA40-A1E6-5325FF9AFD7F}" type="datetimeFigureOut">
               <a:rPr lang="en-US" smtClean="0"/>
-              <a:t>4/22/21</a:t>
+              <a:t>4/28/21</a:t>
             </a:fld>
             <a:endParaRPr lang="en-US"/>
           </a:p>
@@ -30340,6 +30351,461 @@
           <p:cNvPr id="2" name="Title 1">
             <a:extLst>
               <a:ext uri="{FF2B5EF4-FFF2-40B4-BE49-F238E27FC236}">
+                <a16:creationId xmlns:a16="http://schemas.microsoft.com/office/drawing/2014/main" id="{7DF1C9DD-11DF-4E44-985B-21C037761EC9}"/>
+              </a:ext>
+            </a:extLst>
+          </p:cNvPr>
+          <p:cNvSpPr>
+            <a:spLocks noGrp="1"/>
+          </p:cNvSpPr>
+          <p:nvPr>
+            <p:ph type="title"/>
+          </p:nvPr>
+        </p:nvSpPr>
+        <p:spPr/>
+        <p:txBody>
+          <a:bodyPr/>
+          <a:lstStyle/>
+          <a:p>
+            <a:r>
+              <a:rPr lang="en-US" dirty="0"/>
+              <a:t>Shannon Diversity</a:t>
+            </a:r>
+          </a:p>
+        </p:txBody>
+      </p:sp>
+      <p:sp>
+        <p:nvSpPr>
+          <p:cNvPr id="4" name="TextBox 3">
+            <a:extLst>
+              <a:ext uri="{FF2B5EF4-FFF2-40B4-BE49-F238E27FC236}">
+                <a16:creationId xmlns:a16="http://schemas.microsoft.com/office/drawing/2014/main" id="{3965FD7F-B96E-6340-AFDE-61B01C5D8419}"/>
+              </a:ext>
+            </a:extLst>
+          </p:cNvPr>
+          <p:cNvSpPr txBox="1"/>
+          <p:nvPr/>
+        </p:nvSpPr>
+        <p:spPr>
+          <a:xfrm>
+            <a:off x="624468" y="1952793"/>
+            <a:ext cx="4958576" cy="3970318"/>
+          </a:xfrm>
+          <a:prstGeom prst="rect">
+            <a:avLst/>
+          </a:prstGeom>
+          <a:noFill/>
+        </p:spPr>
+        <p:txBody>
+          <a:bodyPr wrap="square" rtlCol="0">
+            <a:spAutoFit/>
+          </a:bodyPr>
+          <a:lstStyle/>
+          <a:p>
+            <a:r>
+              <a:rPr lang="en-US" dirty="0"/>
+              <a:t>Comparison of Shannon between Canada and Taylor glaciers</a:t>
+            </a:r>
+          </a:p>
+          <a:p>
+            <a:endParaRPr lang="en-US" dirty="0"/>
+          </a:p>
+          <a:p>
+            <a:r>
+              <a:rPr lang="en-US" dirty="0"/>
+              <a:t>Total community: Parametric assumptions not met. Unpaired two samples Wilcoxon test showed no significant difference (W=141, p= 0.61)</a:t>
+            </a:r>
+          </a:p>
+          <a:p>
+            <a:endParaRPr lang="en-US" dirty="0"/>
+          </a:p>
+          <a:p>
+            <a:r>
+              <a:rPr lang="en-US" dirty="0"/>
+              <a:t>Abundant community: Parametric assumptions not met. Unpaired two samples Wilcoxon test showed no significant difference (W=123, p= 0.91)</a:t>
+            </a:r>
+          </a:p>
+          <a:p>
+            <a:endParaRPr lang="en-US" dirty="0"/>
+          </a:p>
+          <a:p>
+            <a:r>
+              <a:rPr lang="en-US" dirty="0"/>
+              <a:t>Rare community: Parametric assumptions met. Unpaired two-sample t-test showed no significant difference (t=0.88, </a:t>
+            </a:r>
+            <a:r>
+              <a:rPr lang="en-US" dirty="0" err="1"/>
+              <a:t>df</a:t>
+            </a:r>
+            <a:r>
+              <a:rPr lang="en-US" dirty="0"/>
+              <a:t>=32, p=0.39)</a:t>
+            </a:r>
+          </a:p>
+        </p:txBody>
+      </p:sp>
+      <p:pic>
+        <p:nvPicPr>
+          <p:cNvPr id="7" name="Picture 6">
+            <a:extLst>
+              <a:ext uri="{FF2B5EF4-FFF2-40B4-BE49-F238E27FC236}">
+                <a16:creationId xmlns:a16="http://schemas.microsoft.com/office/drawing/2014/main" id="{F4D4DB36-92A8-DE48-92A8-AF3420263B6A}"/>
+              </a:ext>
+            </a:extLst>
+          </p:cNvPr>
+          <p:cNvPicPr>
+            <a:picLocks noChangeAspect="1"/>
+          </p:cNvPicPr>
+          <p:nvPr/>
+        </p:nvPicPr>
+        <p:blipFill>
+          <a:blip r:embed="rId2"/>
+          <a:stretch>
+            <a:fillRect/>
+          </a:stretch>
+        </p:blipFill>
+        <p:spPr>
+          <a:xfrm>
+            <a:off x="5874834" y="752707"/>
+            <a:ext cx="5486400" cy="5486400"/>
+          </a:xfrm>
+          <a:prstGeom prst="rect">
+            <a:avLst/>
+          </a:prstGeom>
+        </p:spPr>
+      </p:pic>
+      <p:pic>
+        <p:nvPicPr>
+          <p:cNvPr id="9" name="Picture 8">
+            <a:extLst>
+              <a:ext uri="{FF2B5EF4-FFF2-40B4-BE49-F238E27FC236}">
+                <a16:creationId xmlns:a16="http://schemas.microsoft.com/office/drawing/2014/main" id="{39BEE36E-189C-514C-8954-1457C1DB586C}"/>
+              </a:ext>
+            </a:extLst>
+          </p:cNvPr>
+          <p:cNvPicPr>
+            <a:picLocks noChangeAspect="1"/>
+          </p:cNvPicPr>
+          <p:nvPr/>
+        </p:nvPicPr>
+        <p:blipFill>
+          <a:blip r:embed="rId3"/>
+          <a:stretch>
+            <a:fillRect/>
+          </a:stretch>
+        </p:blipFill>
+        <p:spPr>
+          <a:xfrm>
+            <a:off x="8519531" y="4064127"/>
+            <a:ext cx="3464617" cy="1599809"/>
+          </a:xfrm>
+          <a:prstGeom prst="rect">
+            <a:avLst/>
+          </a:prstGeom>
+        </p:spPr>
+      </p:pic>
+    </p:spTree>
+    <p:extLst>
+      <p:ext uri="{BB962C8B-B14F-4D97-AF65-F5344CB8AC3E}">
+        <p14:creationId xmlns:p14="http://schemas.microsoft.com/office/powerpoint/2010/main" val="2000788017"/>
+      </p:ext>
+    </p:extLst>
+  </p:cSld>
+  <p:clrMapOvr>
+    <a:masterClrMapping/>
+  </p:clrMapOvr>
+</p:sld>
+</file>
+
+<file path=ppt/slides/slide11.xml><?xml version="1.0" encoding="utf-8"?>
+<p:sld xmlns:a="http://schemas.openxmlformats.org/drawingml/2006/main" xmlns:r="http://schemas.openxmlformats.org/officeDocument/2006/relationships" xmlns:p="http://schemas.openxmlformats.org/presentationml/2006/main">
+  <p:cSld>
+    <p:spTree>
+      <p:nvGrpSpPr>
+        <p:cNvPr id="1" name=""/>
+        <p:cNvGrpSpPr/>
+        <p:nvPr/>
+      </p:nvGrpSpPr>
+      <p:grpSpPr>
+        <a:xfrm>
+          <a:off x="0" y="0"/>
+          <a:ext cx="0" cy="0"/>
+          <a:chOff x="0" y="0"/>
+          <a:chExt cx="0" cy="0"/>
+        </a:xfrm>
+      </p:grpSpPr>
+      <p:sp>
+        <p:nvSpPr>
+          <p:cNvPr id="2" name="Title 1">
+            <a:extLst>
+              <a:ext uri="{FF2B5EF4-FFF2-40B4-BE49-F238E27FC236}">
+                <a16:creationId xmlns:a16="http://schemas.microsoft.com/office/drawing/2014/main" id="{F8883892-3D96-014B-BA22-D3A4750E524A}"/>
+              </a:ext>
+            </a:extLst>
+          </p:cNvPr>
+          <p:cNvSpPr>
+            <a:spLocks noGrp="1"/>
+          </p:cNvSpPr>
+          <p:nvPr>
+            <p:ph type="title"/>
+          </p:nvPr>
+        </p:nvSpPr>
+        <p:spPr>
+          <a:solidFill>
+            <a:srgbClr val="FFC003"/>
+          </a:solidFill>
+        </p:spPr>
+        <p:txBody>
+          <a:bodyPr/>
+          <a:lstStyle/>
+          <a:p>
+            <a:r>
+              <a:rPr lang="en-US" dirty="0">
+                <a:solidFill>
+                  <a:schemeClr val="bg1"/>
+                </a:solidFill>
+              </a:rPr>
+              <a:t>Multivariate Analysis</a:t>
+            </a:r>
+          </a:p>
+        </p:txBody>
+      </p:sp>
+      <p:sp>
+        <p:nvSpPr>
+          <p:cNvPr id="3" name="Content Placeholder 2">
+            <a:extLst>
+              <a:ext uri="{FF2B5EF4-FFF2-40B4-BE49-F238E27FC236}">
+                <a16:creationId xmlns:a16="http://schemas.microsoft.com/office/drawing/2014/main" id="{057D77B9-9D78-E74A-8AAE-82071815FD34}"/>
+              </a:ext>
+            </a:extLst>
+          </p:cNvPr>
+          <p:cNvSpPr>
+            <a:spLocks noGrp="1"/>
+          </p:cNvSpPr>
+          <p:nvPr>
+            <p:ph idx="1"/>
+          </p:nvPr>
+        </p:nvSpPr>
+        <p:spPr/>
+        <p:txBody>
+          <a:bodyPr>
+            <a:normAutofit/>
+          </a:bodyPr>
+          <a:lstStyle/>
+          <a:p>
+            <a:pPr marL="742950" indent="-742950">
+              <a:buFont typeface="+mj-lt"/>
+              <a:buAutoNum type="arabicPeriod"/>
+            </a:pPr>
+            <a:r>
+              <a:rPr lang="en-US" sz="4000" dirty="0"/>
+              <a:t>Alpha Diversity </a:t>
+            </a:r>
+          </a:p>
+          <a:p>
+            <a:pPr marL="742950" indent="-742950">
+              <a:buFont typeface="+mj-lt"/>
+              <a:buAutoNum type="arabicPeriod"/>
+            </a:pPr>
+            <a:r>
+              <a:rPr lang="en-US" sz="4000" dirty="0"/>
+              <a:t>Beta Diversity &amp; Ordination</a:t>
+            </a:r>
+          </a:p>
+          <a:p>
+            <a:pPr marL="742950" indent="-742950">
+              <a:buFont typeface="+mj-lt"/>
+              <a:buAutoNum type="arabicPeriod"/>
+            </a:pPr>
+            <a:r>
+              <a:rPr lang="en-US" sz="4000" dirty="0"/>
+              <a:t>ISAR and DDR</a:t>
+            </a:r>
+          </a:p>
+        </p:txBody>
+      </p:sp>
+    </p:spTree>
+    <p:extLst>
+      <p:ext uri="{BB962C8B-B14F-4D97-AF65-F5344CB8AC3E}">
+        <p14:creationId xmlns:p14="http://schemas.microsoft.com/office/powerpoint/2010/main" val="542213217"/>
+      </p:ext>
+    </p:extLst>
+  </p:cSld>
+  <p:clrMapOvr>
+    <a:masterClrMapping/>
+  </p:clrMapOvr>
+</p:sld>
+</file>
+
+<file path=ppt/slides/slide12.xml><?xml version="1.0" encoding="utf-8"?>
+<p:sld xmlns:a="http://schemas.openxmlformats.org/drawingml/2006/main" xmlns:r="http://schemas.openxmlformats.org/officeDocument/2006/relationships" xmlns:p="http://schemas.openxmlformats.org/presentationml/2006/main">
+  <p:cSld>
+    <p:spTree>
+      <p:nvGrpSpPr>
+        <p:cNvPr id="1" name=""/>
+        <p:cNvGrpSpPr/>
+        <p:nvPr/>
+      </p:nvGrpSpPr>
+      <p:grpSpPr>
+        <a:xfrm>
+          <a:off x="0" y="0"/>
+          <a:ext cx="0" cy="0"/>
+          <a:chOff x="0" y="0"/>
+          <a:chExt cx="0" cy="0"/>
+        </a:xfrm>
+      </p:grpSpPr>
+      <p:sp>
+        <p:nvSpPr>
+          <p:cNvPr id="2" name="Title 1">
+            <a:extLst>
+              <a:ext uri="{FF2B5EF4-FFF2-40B4-BE49-F238E27FC236}">
+                <a16:creationId xmlns:a16="http://schemas.microsoft.com/office/drawing/2014/main" id="{8A32E773-3623-2B44-B116-7AD110CA92ED}"/>
+              </a:ext>
+            </a:extLst>
+          </p:cNvPr>
+          <p:cNvSpPr>
+            <a:spLocks noGrp="1"/>
+          </p:cNvSpPr>
+          <p:nvPr>
+            <p:ph type="title"/>
+          </p:nvPr>
+        </p:nvSpPr>
+        <p:spPr>
+          <a:solidFill>
+            <a:srgbClr val="FFC003"/>
+          </a:solidFill>
+        </p:spPr>
+        <p:txBody>
+          <a:bodyPr/>
+          <a:lstStyle/>
+          <a:p>
+            <a:r>
+              <a:rPr lang="en-US" dirty="0">
+                <a:solidFill>
+                  <a:schemeClr val="bg1"/>
+                </a:solidFill>
+              </a:rPr>
+              <a:t>Alpha Diversity</a:t>
+            </a:r>
+          </a:p>
+        </p:txBody>
+      </p:sp>
+      <p:sp>
+        <p:nvSpPr>
+          <p:cNvPr id="3" name="Content Placeholder 2">
+            <a:extLst>
+              <a:ext uri="{FF2B5EF4-FFF2-40B4-BE49-F238E27FC236}">
+                <a16:creationId xmlns:a16="http://schemas.microsoft.com/office/drawing/2014/main" id="{C8B28687-3A56-724D-832B-D6AF3CD1B17E}"/>
+              </a:ext>
+            </a:extLst>
+          </p:cNvPr>
+          <p:cNvSpPr>
+            <a:spLocks noGrp="1"/>
+          </p:cNvSpPr>
+          <p:nvPr>
+            <p:ph idx="1"/>
+          </p:nvPr>
+        </p:nvSpPr>
+        <p:spPr>
+          <a:xfrm>
+            <a:off x="838200" y="5557837"/>
+            <a:ext cx="10515600" cy="619125"/>
+          </a:xfrm>
+        </p:spPr>
+        <p:txBody>
+          <a:bodyPr>
+            <a:normAutofit fontScale="92500" lnSpcReduction="20000"/>
+          </a:bodyPr>
+          <a:lstStyle/>
+          <a:p>
+            <a:pPr marL="0" indent="0" algn="ctr">
+              <a:buNone/>
+            </a:pPr>
+            <a:r>
+              <a:rPr lang="en-US" sz="2400" dirty="0"/>
+              <a:t>Figure : </a:t>
+            </a:r>
+            <a:r>
+              <a:rPr lang="en-GB" sz="2400" dirty="0"/>
+              <a:t>Plots of ASV richness (A) and Shannon Diversity Index (B) for each glacier (richness: t = 2.0202, </a:t>
+            </a:r>
+            <a:r>
+              <a:rPr lang="en-GB" sz="2400" dirty="0" err="1"/>
+              <a:t>df</a:t>
+            </a:r>
+            <a:r>
+              <a:rPr lang="en-GB" sz="2400" dirty="0"/>
+              <a:t> = 32, p=0.0518, Shannon: W = 142, p=0.5808)</a:t>
+            </a:r>
+            <a:endParaRPr lang="en-US" sz="2400" dirty="0"/>
+          </a:p>
+        </p:txBody>
+      </p:sp>
+      <p:pic>
+        <p:nvPicPr>
+          <p:cNvPr id="5" name="Picture 4">
+            <a:extLst>
+              <a:ext uri="{FF2B5EF4-FFF2-40B4-BE49-F238E27FC236}">
+                <a16:creationId xmlns:a16="http://schemas.microsoft.com/office/drawing/2014/main" id="{4FB688A8-5093-E44A-998C-E2EA4D158E52}"/>
+              </a:ext>
+            </a:extLst>
+          </p:cNvPr>
+          <p:cNvPicPr>
+            <a:picLocks noChangeAspect="1"/>
+          </p:cNvPicPr>
+          <p:nvPr/>
+        </p:nvPicPr>
+        <p:blipFill>
+          <a:blip r:embed="rId3"/>
+          <a:stretch>
+            <a:fillRect/>
+          </a:stretch>
+        </p:blipFill>
+        <p:spPr>
+          <a:xfrm>
+            <a:off x="2438400" y="1795463"/>
+            <a:ext cx="7315200" cy="3657600"/>
+          </a:xfrm>
+          <a:prstGeom prst="rect">
+            <a:avLst/>
+          </a:prstGeom>
+        </p:spPr>
+      </p:pic>
+    </p:spTree>
+    <p:extLst>
+      <p:ext uri="{BB962C8B-B14F-4D97-AF65-F5344CB8AC3E}">
+        <p14:creationId xmlns:p14="http://schemas.microsoft.com/office/powerpoint/2010/main" val="3700840866"/>
+      </p:ext>
+    </p:extLst>
+  </p:cSld>
+  <p:clrMapOvr>
+    <a:masterClrMapping/>
+  </p:clrMapOvr>
+</p:sld>
+</file>
+
+<file path=ppt/slides/slide13.xml><?xml version="1.0" encoding="utf-8"?>
+<p:sld xmlns:a="http://schemas.openxmlformats.org/drawingml/2006/main" xmlns:r="http://schemas.openxmlformats.org/officeDocument/2006/relationships" xmlns:p="http://schemas.openxmlformats.org/presentationml/2006/main">
+  <p:cSld>
+    <p:spTree>
+      <p:nvGrpSpPr>
+        <p:cNvPr id="1" name=""/>
+        <p:cNvGrpSpPr/>
+        <p:nvPr/>
+      </p:nvGrpSpPr>
+      <p:grpSpPr>
+        <a:xfrm>
+          <a:off x="0" y="0"/>
+          <a:ext cx="0" cy="0"/>
+          <a:chOff x="0" y="0"/>
+          <a:chExt cx="0" cy="0"/>
+        </a:xfrm>
+      </p:grpSpPr>
+      <p:sp>
+        <p:nvSpPr>
+          <p:cNvPr id="2" name="Title 1">
+            <a:extLst>
+              <a:ext uri="{FF2B5EF4-FFF2-40B4-BE49-F238E27FC236}">
                 <a16:creationId xmlns:a16="http://schemas.microsoft.com/office/drawing/2014/main" id="{B782A0EB-033A-2548-B24B-9258C1B51CB6}"/>
               </a:ext>
             </a:extLst>
@@ -30489,7 +30955,7 @@
 </p:sld>
 </file>
 
-<file path=ppt/slides/slide11.xml><?xml version="1.0" encoding="utf-8"?>
+<file path=ppt/slides/slide14.xml><?xml version="1.0" encoding="utf-8"?>
 <p:sld xmlns:a="http://schemas.openxmlformats.org/drawingml/2006/main" xmlns:r="http://schemas.openxmlformats.org/officeDocument/2006/relationships" xmlns:p="http://schemas.openxmlformats.org/presentationml/2006/main">
   <p:cSld>
     <p:spTree>
@@ -30656,7 +31122,7 @@
 </p:sld>
 </file>
 
-<file path=ppt/slides/slide12.xml><?xml version="1.0" encoding="utf-8"?>
+<file path=ppt/slides/slide15.xml><?xml version="1.0" encoding="utf-8"?>
 <p:sld xmlns:a="http://schemas.openxmlformats.org/drawingml/2006/main" xmlns:r="http://schemas.openxmlformats.org/officeDocument/2006/relationships" xmlns:p="http://schemas.openxmlformats.org/presentationml/2006/main">
   <p:cSld>
     <p:spTree>
@@ -30799,7 +31265,7 @@
 </p:sld>
 </file>
 
-<file path=ppt/slides/slide13.xml><?xml version="1.0" encoding="utf-8"?>
+<file path=ppt/slides/slide16.xml><?xml version="1.0" encoding="utf-8"?>
 <p:sld xmlns:a="http://schemas.openxmlformats.org/drawingml/2006/main" xmlns:r="http://schemas.openxmlformats.org/officeDocument/2006/relationships" xmlns:p="http://schemas.openxmlformats.org/presentationml/2006/main">
   <p:cSld>
     <p:spTree>
@@ -30895,7 +31361,7 @@
 </p:sld>
 </file>
 
-<file path=ppt/slides/slide14.xml><?xml version="1.0" encoding="utf-8"?>
+<file path=ppt/slides/slide17.xml><?xml version="1.0" encoding="utf-8"?>
 <p:sld xmlns:a="http://schemas.openxmlformats.org/drawingml/2006/main" xmlns:r="http://schemas.openxmlformats.org/officeDocument/2006/relationships" xmlns:p="http://schemas.openxmlformats.org/presentationml/2006/main">
   <p:cSld>
     <p:spTree>
@@ -31026,7 +31492,7 @@
 </p:sld>
 </file>
 
-<file path=ppt/slides/slide15.xml><?xml version="1.0" encoding="utf-8"?>
+<file path=ppt/slides/slide18.xml><?xml version="1.0" encoding="utf-8"?>
 <p:sld xmlns:a="http://schemas.openxmlformats.org/drawingml/2006/main" xmlns:r="http://schemas.openxmlformats.org/officeDocument/2006/relationships" xmlns:p="http://schemas.openxmlformats.org/presentationml/2006/main">
   <p:cSld>
     <p:spTree>
@@ -31252,7 +31718,7 @@
 </p:sld>
 </file>
 
-<file path=ppt/slides/slide16.xml><?xml version="1.0" encoding="utf-8"?>
+<file path=ppt/slides/slide19.xml><?xml version="1.0" encoding="utf-8"?>
 <p:sld xmlns:a="http://schemas.openxmlformats.org/drawingml/2006/main" xmlns:r="http://schemas.openxmlformats.org/officeDocument/2006/relationships" xmlns:p="http://schemas.openxmlformats.org/presentationml/2006/main">
   <p:cSld>
     <p:spTree>
@@ -31318,7 +31784,100 @@
 </p:sld>
 </file>
 
-<file path=ppt/slides/slide17.xml><?xml version="1.0" encoding="utf-8"?>
+<file path=ppt/slides/slide2.xml><?xml version="1.0" encoding="utf-8"?>
+<p:sld xmlns:a="http://schemas.openxmlformats.org/drawingml/2006/main" xmlns:r="http://schemas.openxmlformats.org/officeDocument/2006/relationships" xmlns:p="http://schemas.openxmlformats.org/presentationml/2006/main">
+  <p:cSld>
+    <p:spTree>
+      <p:nvGrpSpPr>
+        <p:cNvPr id="1" name=""/>
+        <p:cNvGrpSpPr/>
+        <p:nvPr/>
+      </p:nvGrpSpPr>
+      <p:grpSpPr>
+        <a:xfrm>
+          <a:off x="0" y="0"/>
+          <a:ext cx="0" cy="0"/>
+          <a:chOff x="0" y="0"/>
+          <a:chExt cx="0" cy="0"/>
+        </a:xfrm>
+      </p:grpSpPr>
+      <p:sp>
+        <p:nvSpPr>
+          <p:cNvPr id="2" name="Title 1">
+            <a:extLst>
+              <a:ext uri="{FF2B5EF4-FFF2-40B4-BE49-F238E27FC236}">
+                <a16:creationId xmlns:a16="http://schemas.microsoft.com/office/drawing/2014/main" id="{45EBAA57-4779-4A41-AFFB-BF6247B0B39E}"/>
+              </a:ext>
+            </a:extLst>
+          </p:cNvPr>
+          <p:cNvSpPr>
+            <a:spLocks noGrp="1"/>
+          </p:cNvSpPr>
+          <p:nvPr>
+            <p:ph type="title"/>
+          </p:nvPr>
+        </p:nvSpPr>
+        <p:spPr/>
+        <p:txBody>
+          <a:bodyPr/>
+          <a:lstStyle/>
+          <a:p>
+            <a:r>
+              <a:rPr lang="en-US" dirty="0"/>
+              <a:t>Neutral Theory</a:t>
+            </a:r>
+          </a:p>
+        </p:txBody>
+      </p:sp>
+      <p:sp>
+        <p:nvSpPr>
+          <p:cNvPr id="4" name="TextBox 3">
+            <a:extLst>
+              <a:ext uri="{FF2B5EF4-FFF2-40B4-BE49-F238E27FC236}">
+                <a16:creationId xmlns:a16="http://schemas.microsoft.com/office/drawing/2014/main" id="{DD47A41A-0904-514B-99DB-4E5E573D0747}"/>
+              </a:ext>
+            </a:extLst>
+          </p:cNvPr>
+          <p:cNvSpPr txBox="1"/>
+          <p:nvPr/>
+        </p:nvSpPr>
+        <p:spPr>
+          <a:xfrm>
+            <a:off x="838200" y="6239319"/>
+            <a:ext cx="10787743" cy="369332"/>
+          </a:xfrm>
+          <a:prstGeom prst="rect">
+            <a:avLst/>
+          </a:prstGeom>
+          <a:noFill/>
+        </p:spPr>
+        <p:txBody>
+          <a:bodyPr wrap="square" rtlCol="0">
+            <a:spAutoFit/>
+          </a:bodyPr>
+          <a:lstStyle/>
+          <a:p>
+            <a:r>
+              <a:rPr lang="en-US" dirty="0"/>
+              <a:t>Sloan et al., (2006) Quantifying the roles of immigration and chance in shaping prokaryote community structure</a:t>
+            </a:r>
+          </a:p>
+        </p:txBody>
+      </p:sp>
+    </p:spTree>
+    <p:extLst>
+      <p:ext uri="{BB962C8B-B14F-4D97-AF65-F5344CB8AC3E}">
+        <p14:creationId xmlns:p14="http://schemas.microsoft.com/office/powerpoint/2010/main" val="2186134876"/>
+      </p:ext>
+    </p:extLst>
+  </p:cSld>
+  <p:clrMapOvr>
+    <a:masterClrMapping/>
+  </p:clrMapOvr>
+</p:sld>
+</file>
+
+<file path=ppt/slides/slide20.xml><?xml version="1.0" encoding="utf-8"?>
 <p:sld xmlns:a="http://schemas.openxmlformats.org/drawingml/2006/main" xmlns:r="http://schemas.openxmlformats.org/officeDocument/2006/relationships" xmlns:p="http://schemas.openxmlformats.org/presentationml/2006/main">
   <p:cSld>
     <p:spTree>
@@ -32232,8 +32791,8 @@
           </a:p>
         </p:txBody>
       </p:sp>
-      <mc:AlternateContent xmlns:mc="http://schemas.openxmlformats.org/markup-compatibility/2006">
-        <mc:Choice xmlns:a14="http://schemas.microsoft.com/office/drawing/2010/main" Requires="a14">
+      <mc:AlternateContent xmlns:mc="http://schemas.openxmlformats.org/markup-compatibility/2006" xmlns:a14="http://schemas.microsoft.com/office/drawing/2010/main">
+        <mc:Choice Requires="a14">
           <p:sp>
             <p:nvSpPr>
               <p:cNvPr id="39" name="TextBox 38">
@@ -32339,7 +32898,7 @@
             </p:txBody>
           </p:sp>
         </mc:Choice>
-        <mc:Fallback>
+        <mc:Fallback xmlns="">
           <p:sp>
             <p:nvSpPr>
               <p:cNvPr id="39" name="TextBox 38">
@@ -32432,7 +32991,7 @@
 </p:sld>
 </file>
 
-<file path=ppt/slides/slide18.xml><?xml version="1.0" encoding="utf-8"?>
+<file path=ppt/slides/slide21.xml><?xml version="1.0" encoding="utf-8"?>
 <p:sld xmlns:a="http://schemas.openxmlformats.org/drawingml/2006/main" xmlns:r="http://schemas.openxmlformats.org/officeDocument/2006/relationships" xmlns:p="http://schemas.openxmlformats.org/presentationml/2006/main">
   <p:cSld>
     <p:spTree>
@@ -32791,7 +33350,7 @@
 </p:sld>
 </file>
 
-<file path=ppt/slides/slide19.xml><?xml version="1.0" encoding="utf-8"?>
+<file path=ppt/slides/slide22.xml><?xml version="1.0" encoding="utf-8"?>
 <p:sld xmlns:a="http://schemas.openxmlformats.org/drawingml/2006/main" xmlns:r="http://schemas.openxmlformats.org/officeDocument/2006/relationships" xmlns:p="http://schemas.openxmlformats.org/presentationml/2006/main">
   <p:cSld>
     <p:spTree>
@@ -32887,100 +33446,7 @@
 </p:sld>
 </file>
 
-<file path=ppt/slides/slide2.xml><?xml version="1.0" encoding="utf-8"?>
-<p:sld xmlns:a="http://schemas.openxmlformats.org/drawingml/2006/main" xmlns:r="http://schemas.openxmlformats.org/officeDocument/2006/relationships" xmlns:p="http://schemas.openxmlformats.org/presentationml/2006/main">
-  <p:cSld>
-    <p:spTree>
-      <p:nvGrpSpPr>
-        <p:cNvPr id="1" name=""/>
-        <p:cNvGrpSpPr/>
-        <p:nvPr/>
-      </p:nvGrpSpPr>
-      <p:grpSpPr>
-        <a:xfrm>
-          <a:off x="0" y="0"/>
-          <a:ext cx="0" cy="0"/>
-          <a:chOff x="0" y="0"/>
-          <a:chExt cx="0" cy="0"/>
-        </a:xfrm>
-      </p:grpSpPr>
-      <p:sp>
-        <p:nvSpPr>
-          <p:cNvPr id="2" name="Title 1">
-            <a:extLst>
-              <a:ext uri="{FF2B5EF4-FFF2-40B4-BE49-F238E27FC236}">
-                <a16:creationId xmlns:a16="http://schemas.microsoft.com/office/drawing/2014/main" id="{45EBAA57-4779-4A41-AFFB-BF6247B0B39E}"/>
-              </a:ext>
-            </a:extLst>
-          </p:cNvPr>
-          <p:cNvSpPr>
-            <a:spLocks noGrp="1"/>
-          </p:cNvSpPr>
-          <p:nvPr>
-            <p:ph type="title"/>
-          </p:nvPr>
-        </p:nvSpPr>
-        <p:spPr/>
-        <p:txBody>
-          <a:bodyPr/>
-          <a:lstStyle/>
-          <a:p>
-            <a:r>
-              <a:rPr lang="en-US" dirty="0"/>
-              <a:t>Neutral Theory</a:t>
-            </a:r>
-          </a:p>
-        </p:txBody>
-      </p:sp>
-      <p:sp>
-        <p:nvSpPr>
-          <p:cNvPr id="4" name="TextBox 3">
-            <a:extLst>
-              <a:ext uri="{FF2B5EF4-FFF2-40B4-BE49-F238E27FC236}">
-                <a16:creationId xmlns:a16="http://schemas.microsoft.com/office/drawing/2014/main" id="{DD47A41A-0904-514B-99DB-4E5E573D0747}"/>
-              </a:ext>
-            </a:extLst>
-          </p:cNvPr>
-          <p:cNvSpPr txBox="1"/>
-          <p:nvPr/>
-        </p:nvSpPr>
-        <p:spPr>
-          <a:xfrm>
-            <a:off x="838200" y="6239319"/>
-            <a:ext cx="10787743" cy="369332"/>
-          </a:xfrm>
-          <a:prstGeom prst="rect">
-            <a:avLst/>
-          </a:prstGeom>
-          <a:noFill/>
-        </p:spPr>
-        <p:txBody>
-          <a:bodyPr wrap="square" rtlCol="0">
-            <a:spAutoFit/>
-          </a:bodyPr>
-          <a:lstStyle/>
-          <a:p>
-            <a:r>
-              <a:rPr lang="en-US" dirty="0"/>
-              <a:t>Sloan et al., (2006) Quantifying the roles of immigration and chance in shaping prokaryote community structure</a:t>
-            </a:r>
-          </a:p>
-        </p:txBody>
-      </p:sp>
-    </p:spTree>
-    <p:extLst>
-      <p:ext uri="{BB962C8B-B14F-4D97-AF65-F5344CB8AC3E}">
-        <p14:creationId xmlns:p14="http://schemas.microsoft.com/office/powerpoint/2010/main" val="2186134876"/>
-      </p:ext>
-    </p:extLst>
-  </p:cSld>
-  <p:clrMapOvr>
-    <a:masterClrMapping/>
-  </p:clrMapOvr>
-</p:sld>
-</file>
-
-<file path=ppt/slides/slide20.xml><?xml version="1.0" encoding="utf-8"?>
+<file path=ppt/slides/slide23.xml><?xml version="1.0" encoding="utf-8"?>
 <p:sld xmlns:a="http://schemas.openxmlformats.org/drawingml/2006/main" xmlns:r="http://schemas.openxmlformats.org/officeDocument/2006/relationships" xmlns:p="http://schemas.openxmlformats.org/presentationml/2006/main">
   <p:cSld>
     <p:spTree>
@@ -33144,7 +33610,7 @@
 </p:sld>
 </file>
 
-<file path=ppt/slides/slide21.xml><?xml version="1.0" encoding="utf-8"?>
+<file path=ppt/slides/slide24.xml><?xml version="1.0" encoding="utf-8"?>
 <p:sld xmlns:a="http://schemas.openxmlformats.org/drawingml/2006/main" xmlns:r="http://schemas.openxmlformats.org/officeDocument/2006/relationships" xmlns:p="http://schemas.openxmlformats.org/presentationml/2006/main">
   <p:cSld>
     <p:spTree>
@@ -33242,7 +33708,7 @@
 </p:sld>
 </file>
 
-<file path=ppt/slides/slide22.xml><?xml version="1.0" encoding="utf-8"?>
+<file path=ppt/slides/slide25.xml><?xml version="1.0" encoding="utf-8"?>
 <p:sld xmlns:a="http://schemas.openxmlformats.org/drawingml/2006/main" xmlns:r="http://schemas.openxmlformats.org/officeDocument/2006/relationships" xmlns:p="http://schemas.openxmlformats.org/presentationml/2006/main">
   <p:cSld>
     <p:spTree>
@@ -33337,7 +33803,7 @@
 </p:sld>
 </file>
 
-<file path=ppt/slides/slide23.xml><?xml version="1.0" encoding="utf-8"?>
+<file path=ppt/slides/slide26.xml><?xml version="1.0" encoding="utf-8"?>
 <p:sld xmlns:a="http://schemas.openxmlformats.org/drawingml/2006/main" xmlns:r="http://schemas.openxmlformats.org/officeDocument/2006/relationships" xmlns:p="http://schemas.openxmlformats.org/presentationml/2006/main">
   <p:cSld>
     <p:spTree>
@@ -33433,7 +33899,7 @@
 </p:sld>
 </file>
 
-<file path=ppt/slides/slide24.xml><?xml version="1.0" encoding="utf-8"?>
+<file path=ppt/slides/slide27.xml><?xml version="1.0" encoding="utf-8"?>
 <p:sld xmlns:a="http://schemas.openxmlformats.org/drawingml/2006/main" xmlns:r="http://schemas.openxmlformats.org/officeDocument/2006/relationships" xmlns:p="http://schemas.openxmlformats.org/presentationml/2006/main">
   <p:cSld>
     <p:spTree>
@@ -33529,7 +33995,7 @@
 </p:sld>
 </file>
 
-<file path=ppt/slides/slide25.xml><?xml version="1.0" encoding="utf-8"?>
+<file path=ppt/slides/slide28.xml><?xml version="1.0" encoding="utf-8"?>
 <p:sld xmlns:a="http://schemas.openxmlformats.org/drawingml/2006/main" xmlns:r="http://schemas.openxmlformats.org/officeDocument/2006/relationships" xmlns:p="http://schemas.openxmlformats.org/presentationml/2006/main">
   <p:cSld>
     <p:spTree>
@@ -33595,7 +34061,7 @@
 </p:sld>
 </file>
 
-<file path=ppt/slides/slide26.xml><?xml version="1.0" encoding="utf-8"?>
+<file path=ppt/slides/slide29.xml><?xml version="1.0" encoding="utf-8"?>
 <p:sld xmlns:a="http://schemas.openxmlformats.org/drawingml/2006/main" xmlns:r="http://schemas.openxmlformats.org/officeDocument/2006/relationships" xmlns:p="http://schemas.openxmlformats.org/presentationml/2006/main">
   <p:cSld>
     <p:spTree>
@@ -33701,296 +34167,6 @@
     <p:extLst>
       <p:ext uri="{BB962C8B-B14F-4D97-AF65-F5344CB8AC3E}">
         <p14:creationId xmlns:p14="http://schemas.microsoft.com/office/powerpoint/2010/main" val="3748687434"/>
-      </p:ext>
-    </p:extLst>
-  </p:cSld>
-  <p:clrMapOvr>
-    <a:masterClrMapping/>
-  </p:clrMapOvr>
-</p:sld>
-</file>
-
-<file path=ppt/slides/slide27.xml><?xml version="1.0" encoding="utf-8"?>
-<p:sld xmlns:a="http://schemas.openxmlformats.org/drawingml/2006/main" xmlns:r="http://schemas.openxmlformats.org/officeDocument/2006/relationships" xmlns:p="http://schemas.openxmlformats.org/presentationml/2006/main">
-  <p:cSld>
-    <p:spTree>
-      <p:nvGrpSpPr>
-        <p:cNvPr id="1" name=""/>
-        <p:cNvGrpSpPr/>
-        <p:nvPr/>
-      </p:nvGrpSpPr>
-      <p:grpSpPr>
-        <a:xfrm>
-          <a:off x="0" y="0"/>
-          <a:ext cx="0" cy="0"/>
-          <a:chOff x="0" y="0"/>
-          <a:chExt cx="0" cy="0"/>
-        </a:xfrm>
-      </p:grpSpPr>
-      <p:sp>
-        <p:nvSpPr>
-          <p:cNvPr id="2" name="Title 1">
-            <a:extLst>
-              <a:ext uri="{FF2B5EF4-FFF2-40B4-BE49-F238E27FC236}">
-                <a16:creationId xmlns:a16="http://schemas.microsoft.com/office/drawing/2014/main" id="{147D2BF3-8D20-3347-8C3A-FC5C22DAA765}"/>
-              </a:ext>
-            </a:extLst>
-          </p:cNvPr>
-          <p:cNvSpPr>
-            <a:spLocks noGrp="1"/>
-          </p:cNvSpPr>
-          <p:nvPr>
-            <p:ph type="title"/>
-          </p:nvPr>
-        </p:nvSpPr>
-        <p:spPr>
-          <a:solidFill>
-            <a:srgbClr val="5C9BD5"/>
-          </a:solidFill>
-          <a:ln>
-            <a:solidFill>
-              <a:schemeClr val="accent1"/>
-            </a:solidFill>
-          </a:ln>
-        </p:spPr>
-        <p:txBody>
-          <a:bodyPr/>
-          <a:lstStyle/>
-          <a:p>
-            <a:r>
-              <a:rPr lang="en-US" dirty="0"/>
-              <a:t>Results</a:t>
-            </a:r>
-          </a:p>
-        </p:txBody>
-      </p:sp>
-      <p:sp>
-        <p:nvSpPr>
-          <p:cNvPr id="3" name="Content Placeholder 2">
-            <a:extLst>
-              <a:ext uri="{FF2B5EF4-FFF2-40B4-BE49-F238E27FC236}">
-                <a16:creationId xmlns:a16="http://schemas.microsoft.com/office/drawing/2014/main" id="{F9534A9C-B446-AB47-AFCB-FC722EBB3FD3}"/>
-              </a:ext>
-            </a:extLst>
-          </p:cNvPr>
-          <p:cNvSpPr>
-            <a:spLocks noGrp="1"/>
-          </p:cNvSpPr>
-          <p:nvPr>
-            <p:ph idx="1"/>
-          </p:nvPr>
-        </p:nvSpPr>
-        <p:spPr/>
-        <p:txBody>
-          <a:bodyPr/>
-          <a:lstStyle/>
-          <a:p>
-            <a:endParaRPr lang="en-US"/>
-          </a:p>
-        </p:txBody>
-      </p:sp>
-    </p:spTree>
-    <p:extLst>
-      <p:ext uri="{BB962C8B-B14F-4D97-AF65-F5344CB8AC3E}">
-        <p14:creationId xmlns:p14="http://schemas.microsoft.com/office/powerpoint/2010/main" val="3629005695"/>
-      </p:ext>
-    </p:extLst>
-  </p:cSld>
-  <p:clrMapOvr>
-    <a:masterClrMapping/>
-  </p:clrMapOvr>
-</p:sld>
-</file>
-
-<file path=ppt/slides/slide28.xml><?xml version="1.0" encoding="utf-8"?>
-<p:sld xmlns:a="http://schemas.openxmlformats.org/drawingml/2006/main" xmlns:r="http://schemas.openxmlformats.org/officeDocument/2006/relationships" xmlns:p="http://schemas.openxmlformats.org/presentationml/2006/main">
-  <p:cSld>
-    <p:spTree>
-      <p:nvGrpSpPr>
-        <p:cNvPr id="1" name=""/>
-        <p:cNvGrpSpPr/>
-        <p:nvPr/>
-      </p:nvGrpSpPr>
-      <p:grpSpPr>
-        <a:xfrm>
-          <a:off x="0" y="0"/>
-          <a:ext cx="0" cy="0"/>
-          <a:chOff x="0" y="0"/>
-          <a:chExt cx="0" cy="0"/>
-        </a:xfrm>
-      </p:grpSpPr>
-      <p:sp>
-        <p:nvSpPr>
-          <p:cNvPr id="2" name="Title 1">
-            <a:extLst>
-              <a:ext uri="{FF2B5EF4-FFF2-40B4-BE49-F238E27FC236}">
-                <a16:creationId xmlns:a16="http://schemas.microsoft.com/office/drawing/2014/main" id="{174D7E04-7C38-FB49-A0A0-EF5E49EDA455}"/>
-              </a:ext>
-            </a:extLst>
-          </p:cNvPr>
-          <p:cNvSpPr>
-            <a:spLocks noGrp="1"/>
-          </p:cNvSpPr>
-          <p:nvPr>
-            <p:ph type="title"/>
-          </p:nvPr>
-        </p:nvSpPr>
-        <p:spPr>
-          <a:solidFill>
-            <a:srgbClr val="5C9BD5"/>
-          </a:solidFill>
-        </p:spPr>
-        <p:txBody>
-          <a:bodyPr>
-            <a:noAutofit/>
-          </a:bodyPr>
-          <a:lstStyle/>
-          <a:p>
-            <a:r>
-              <a:rPr lang="en-GB" sz="2800" b="1" dirty="0">
-                <a:solidFill>
-                  <a:schemeClr val="bg1"/>
-                </a:solidFill>
-              </a:rPr>
-              <a:t>Hu et al., (2017) Strong impact of anthropogenic contamination on the co‐occurrence patterns of a riverine microbial community</a:t>
-            </a:r>
-            <a:br>
-              <a:rPr lang="en-GB" sz="2800" b="1" dirty="0">
-                <a:solidFill>
-                  <a:schemeClr val="bg1"/>
-                </a:solidFill>
-              </a:rPr>
-            </a:br>
-            <a:endParaRPr lang="en-US" sz="2800" dirty="0">
-              <a:solidFill>
-                <a:schemeClr val="bg1"/>
-              </a:solidFill>
-            </a:endParaRPr>
-          </a:p>
-        </p:txBody>
-      </p:sp>
-    </p:spTree>
-    <p:extLst>
-      <p:ext uri="{BB962C8B-B14F-4D97-AF65-F5344CB8AC3E}">
-        <p14:creationId xmlns:p14="http://schemas.microsoft.com/office/powerpoint/2010/main" val="2136607666"/>
-      </p:ext>
-    </p:extLst>
-  </p:cSld>
-  <p:clrMapOvr>
-    <a:masterClrMapping/>
-  </p:clrMapOvr>
-</p:sld>
-</file>
-
-<file path=ppt/slides/slide29.xml><?xml version="1.0" encoding="utf-8"?>
-<p:sld xmlns:a="http://schemas.openxmlformats.org/drawingml/2006/main" xmlns:r="http://schemas.openxmlformats.org/officeDocument/2006/relationships" xmlns:p="http://schemas.openxmlformats.org/presentationml/2006/main">
-  <p:cSld>
-    <p:spTree>
-      <p:nvGrpSpPr>
-        <p:cNvPr id="1" name=""/>
-        <p:cNvGrpSpPr/>
-        <p:nvPr/>
-      </p:nvGrpSpPr>
-      <p:grpSpPr>
-        <a:xfrm>
-          <a:off x="0" y="0"/>
-          <a:ext cx="0" cy="0"/>
-          <a:chOff x="0" y="0"/>
-          <a:chExt cx="0" cy="0"/>
-        </a:xfrm>
-      </p:grpSpPr>
-      <p:sp>
-        <p:nvSpPr>
-          <p:cNvPr id="2" name="Title 1">
-            <a:extLst>
-              <a:ext uri="{FF2B5EF4-FFF2-40B4-BE49-F238E27FC236}">
-                <a16:creationId xmlns:a16="http://schemas.microsoft.com/office/drawing/2014/main" id="{4C2DA027-B72B-4144-A731-E9B94EB5EDDD}"/>
-              </a:ext>
-            </a:extLst>
-          </p:cNvPr>
-          <p:cNvSpPr>
-            <a:spLocks noGrp="1"/>
-          </p:cNvSpPr>
-          <p:nvPr>
-            <p:ph type="title"/>
-          </p:nvPr>
-        </p:nvSpPr>
-        <p:spPr/>
-        <p:txBody>
-          <a:bodyPr/>
-          <a:lstStyle/>
-          <a:p>
-            <a:endParaRPr lang="en-US"/>
-          </a:p>
-        </p:txBody>
-      </p:sp>
-      <p:sp>
-        <p:nvSpPr>
-          <p:cNvPr id="3" name="Content Placeholder 2">
-            <a:extLst>
-              <a:ext uri="{FF2B5EF4-FFF2-40B4-BE49-F238E27FC236}">
-                <a16:creationId xmlns:a16="http://schemas.microsoft.com/office/drawing/2014/main" id="{9F9B51A7-07A9-CA41-AA95-F674E4BEFDE9}"/>
-              </a:ext>
-            </a:extLst>
-          </p:cNvPr>
-          <p:cNvSpPr>
-            <a:spLocks noGrp="1"/>
-          </p:cNvSpPr>
-          <p:nvPr>
-            <p:ph idx="1"/>
-          </p:nvPr>
-        </p:nvSpPr>
-        <p:spPr/>
-        <p:txBody>
-          <a:bodyPr/>
-          <a:lstStyle/>
-          <a:p>
-            <a:pPr marL="514350" indent="-514350">
-              <a:buFont typeface="+mj-lt"/>
-              <a:buAutoNum type="arabicPeriod"/>
-            </a:pPr>
-            <a:r>
-              <a:rPr lang="en-US" dirty="0"/>
-              <a:t>Transpose </a:t>
-            </a:r>
-            <a:r>
-              <a:rPr lang="en-US" dirty="0" err="1"/>
-              <a:t>asv</a:t>
-            </a:r>
-            <a:r>
-              <a:rPr lang="en-US" dirty="0"/>
-              <a:t> table (</a:t>
-            </a:r>
-            <a:r>
-              <a:rPr lang="en-US" dirty="0" err="1"/>
-              <a:t>asv</a:t>
-            </a:r>
-            <a:r>
-              <a:rPr lang="en-US" dirty="0"/>
-              <a:t> = rows, samples = columns) and compute a matrix of Spearman’s rho rank correlation coefficients for all possible pairs of columns (</a:t>
-            </a:r>
-            <a:r>
-              <a:rPr lang="en-US" dirty="0" err="1"/>
-              <a:t>asvs</a:t>
-            </a:r>
-            <a:r>
-              <a:rPr lang="en-US" dirty="0"/>
-              <a:t>).</a:t>
-            </a:r>
-          </a:p>
-          <a:p>
-            <a:pPr marL="514350" indent="-514350">
-              <a:buFont typeface="+mj-lt"/>
-              <a:buAutoNum type="arabicPeriod"/>
-            </a:pPr>
-            <a:endParaRPr lang="en-US" dirty="0"/>
-          </a:p>
-        </p:txBody>
-      </p:sp>
-    </p:spTree>
-    <p:extLst>
-      <p:ext uri="{BB962C8B-B14F-4D97-AF65-F5344CB8AC3E}">
-        <p14:creationId xmlns:p14="http://schemas.microsoft.com/office/powerpoint/2010/main" val="1057470918"/>
       </p:ext>
     </p:extLst>
   </p:cSld>
@@ -34100,6 +34276,296 @@
     <p:extLst>
       <p:ext uri="{BB962C8B-B14F-4D97-AF65-F5344CB8AC3E}">
         <p14:creationId xmlns:p14="http://schemas.microsoft.com/office/powerpoint/2010/main" val="3966638715"/>
+      </p:ext>
+    </p:extLst>
+  </p:cSld>
+  <p:clrMapOvr>
+    <a:masterClrMapping/>
+  </p:clrMapOvr>
+</p:sld>
+</file>
+
+<file path=ppt/slides/slide30.xml><?xml version="1.0" encoding="utf-8"?>
+<p:sld xmlns:a="http://schemas.openxmlformats.org/drawingml/2006/main" xmlns:r="http://schemas.openxmlformats.org/officeDocument/2006/relationships" xmlns:p="http://schemas.openxmlformats.org/presentationml/2006/main">
+  <p:cSld>
+    <p:spTree>
+      <p:nvGrpSpPr>
+        <p:cNvPr id="1" name=""/>
+        <p:cNvGrpSpPr/>
+        <p:nvPr/>
+      </p:nvGrpSpPr>
+      <p:grpSpPr>
+        <a:xfrm>
+          <a:off x="0" y="0"/>
+          <a:ext cx="0" cy="0"/>
+          <a:chOff x="0" y="0"/>
+          <a:chExt cx="0" cy="0"/>
+        </a:xfrm>
+      </p:grpSpPr>
+      <p:sp>
+        <p:nvSpPr>
+          <p:cNvPr id="2" name="Title 1">
+            <a:extLst>
+              <a:ext uri="{FF2B5EF4-FFF2-40B4-BE49-F238E27FC236}">
+                <a16:creationId xmlns:a16="http://schemas.microsoft.com/office/drawing/2014/main" id="{147D2BF3-8D20-3347-8C3A-FC5C22DAA765}"/>
+              </a:ext>
+            </a:extLst>
+          </p:cNvPr>
+          <p:cNvSpPr>
+            <a:spLocks noGrp="1"/>
+          </p:cNvSpPr>
+          <p:nvPr>
+            <p:ph type="title"/>
+          </p:nvPr>
+        </p:nvSpPr>
+        <p:spPr>
+          <a:solidFill>
+            <a:srgbClr val="5C9BD5"/>
+          </a:solidFill>
+          <a:ln>
+            <a:solidFill>
+              <a:schemeClr val="accent1"/>
+            </a:solidFill>
+          </a:ln>
+        </p:spPr>
+        <p:txBody>
+          <a:bodyPr/>
+          <a:lstStyle/>
+          <a:p>
+            <a:r>
+              <a:rPr lang="en-US" dirty="0"/>
+              <a:t>Results</a:t>
+            </a:r>
+          </a:p>
+        </p:txBody>
+      </p:sp>
+      <p:sp>
+        <p:nvSpPr>
+          <p:cNvPr id="3" name="Content Placeholder 2">
+            <a:extLst>
+              <a:ext uri="{FF2B5EF4-FFF2-40B4-BE49-F238E27FC236}">
+                <a16:creationId xmlns:a16="http://schemas.microsoft.com/office/drawing/2014/main" id="{F9534A9C-B446-AB47-AFCB-FC722EBB3FD3}"/>
+              </a:ext>
+            </a:extLst>
+          </p:cNvPr>
+          <p:cNvSpPr>
+            <a:spLocks noGrp="1"/>
+          </p:cNvSpPr>
+          <p:nvPr>
+            <p:ph idx="1"/>
+          </p:nvPr>
+        </p:nvSpPr>
+        <p:spPr/>
+        <p:txBody>
+          <a:bodyPr/>
+          <a:lstStyle/>
+          <a:p>
+            <a:endParaRPr lang="en-US"/>
+          </a:p>
+        </p:txBody>
+      </p:sp>
+    </p:spTree>
+    <p:extLst>
+      <p:ext uri="{BB962C8B-B14F-4D97-AF65-F5344CB8AC3E}">
+        <p14:creationId xmlns:p14="http://schemas.microsoft.com/office/powerpoint/2010/main" val="3629005695"/>
+      </p:ext>
+    </p:extLst>
+  </p:cSld>
+  <p:clrMapOvr>
+    <a:masterClrMapping/>
+  </p:clrMapOvr>
+</p:sld>
+</file>
+
+<file path=ppt/slides/slide31.xml><?xml version="1.0" encoding="utf-8"?>
+<p:sld xmlns:a="http://schemas.openxmlformats.org/drawingml/2006/main" xmlns:r="http://schemas.openxmlformats.org/officeDocument/2006/relationships" xmlns:p="http://schemas.openxmlformats.org/presentationml/2006/main">
+  <p:cSld>
+    <p:spTree>
+      <p:nvGrpSpPr>
+        <p:cNvPr id="1" name=""/>
+        <p:cNvGrpSpPr/>
+        <p:nvPr/>
+      </p:nvGrpSpPr>
+      <p:grpSpPr>
+        <a:xfrm>
+          <a:off x="0" y="0"/>
+          <a:ext cx="0" cy="0"/>
+          <a:chOff x="0" y="0"/>
+          <a:chExt cx="0" cy="0"/>
+        </a:xfrm>
+      </p:grpSpPr>
+      <p:sp>
+        <p:nvSpPr>
+          <p:cNvPr id="2" name="Title 1">
+            <a:extLst>
+              <a:ext uri="{FF2B5EF4-FFF2-40B4-BE49-F238E27FC236}">
+                <a16:creationId xmlns:a16="http://schemas.microsoft.com/office/drawing/2014/main" id="{174D7E04-7C38-FB49-A0A0-EF5E49EDA455}"/>
+              </a:ext>
+            </a:extLst>
+          </p:cNvPr>
+          <p:cNvSpPr>
+            <a:spLocks noGrp="1"/>
+          </p:cNvSpPr>
+          <p:nvPr>
+            <p:ph type="title"/>
+          </p:nvPr>
+        </p:nvSpPr>
+        <p:spPr>
+          <a:solidFill>
+            <a:srgbClr val="5C9BD5"/>
+          </a:solidFill>
+        </p:spPr>
+        <p:txBody>
+          <a:bodyPr>
+            <a:noAutofit/>
+          </a:bodyPr>
+          <a:lstStyle/>
+          <a:p>
+            <a:r>
+              <a:rPr lang="en-GB" sz="2800" b="1" dirty="0">
+                <a:solidFill>
+                  <a:schemeClr val="bg1"/>
+                </a:solidFill>
+              </a:rPr>
+              <a:t>Hu et al., (2017) Strong impact of anthropogenic contamination on the co‐occurrence patterns of a riverine microbial community</a:t>
+            </a:r>
+            <a:br>
+              <a:rPr lang="en-GB" sz="2800" b="1" dirty="0">
+                <a:solidFill>
+                  <a:schemeClr val="bg1"/>
+                </a:solidFill>
+              </a:rPr>
+            </a:br>
+            <a:endParaRPr lang="en-US" sz="2800" dirty="0">
+              <a:solidFill>
+                <a:schemeClr val="bg1"/>
+              </a:solidFill>
+            </a:endParaRPr>
+          </a:p>
+        </p:txBody>
+      </p:sp>
+    </p:spTree>
+    <p:extLst>
+      <p:ext uri="{BB962C8B-B14F-4D97-AF65-F5344CB8AC3E}">
+        <p14:creationId xmlns:p14="http://schemas.microsoft.com/office/powerpoint/2010/main" val="2136607666"/>
+      </p:ext>
+    </p:extLst>
+  </p:cSld>
+  <p:clrMapOvr>
+    <a:masterClrMapping/>
+  </p:clrMapOvr>
+</p:sld>
+</file>
+
+<file path=ppt/slides/slide32.xml><?xml version="1.0" encoding="utf-8"?>
+<p:sld xmlns:a="http://schemas.openxmlformats.org/drawingml/2006/main" xmlns:r="http://schemas.openxmlformats.org/officeDocument/2006/relationships" xmlns:p="http://schemas.openxmlformats.org/presentationml/2006/main">
+  <p:cSld>
+    <p:spTree>
+      <p:nvGrpSpPr>
+        <p:cNvPr id="1" name=""/>
+        <p:cNvGrpSpPr/>
+        <p:nvPr/>
+      </p:nvGrpSpPr>
+      <p:grpSpPr>
+        <a:xfrm>
+          <a:off x="0" y="0"/>
+          <a:ext cx="0" cy="0"/>
+          <a:chOff x="0" y="0"/>
+          <a:chExt cx="0" cy="0"/>
+        </a:xfrm>
+      </p:grpSpPr>
+      <p:sp>
+        <p:nvSpPr>
+          <p:cNvPr id="2" name="Title 1">
+            <a:extLst>
+              <a:ext uri="{FF2B5EF4-FFF2-40B4-BE49-F238E27FC236}">
+                <a16:creationId xmlns:a16="http://schemas.microsoft.com/office/drawing/2014/main" id="{4C2DA027-B72B-4144-A731-E9B94EB5EDDD}"/>
+              </a:ext>
+            </a:extLst>
+          </p:cNvPr>
+          <p:cNvSpPr>
+            <a:spLocks noGrp="1"/>
+          </p:cNvSpPr>
+          <p:nvPr>
+            <p:ph type="title"/>
+          </p:nvPr>
+        </p:nvSpPr>
+        <p:spPr/>
+        <p:txBody>
+          <a:bodyPr/>
+          <a:lstStyle/>
+          <a:p>
+            <a:endParaRPr lang="en-US"/>
+          </a:p>
+        </p:txBody>
+      </p:sp>
+      <p:sp>
+        <p:nvSpPr>
+          <p:cNvPr id="3" name="Content Placeholder 2">
+            <a:extLst>
+              <a:ext uri="{FF2B5EF4-FFF2-40B4-BE49-F238E27FC236}">
+                <a16:creationId xmlns:a16="http://schemas.microsoft.com/office/drawing/2014/main" id="{9F9B51A7-07A9-CA41-AA95-F674E4BEFDE9}"/>
+              </a:ext>
+            </a:extLst>
+          </p:cNvPr>
+          <p:cNvSpPr>
+            <a:spLocks noGrp="1"/>
+          </p:cNvSpPr>
+          <p:nvPr>
+            <p:ph idx="1"/>
+          </p:nvPr>
+        </p:nvSpPr>
+        <p:spPr/>
+        <p:txBody>
+          <a:bodyPr/>
+          <a:lstStyle/>
+          <a:p>
+            <a:pPr marL="514350" indent="-514350">
+              <a:buFont typeface="+mj-lt"/>
+              <a:buAutoNum type="arabicPeriod"/>
+            </a:pPr>
+            <a:r>
+              <a:rPr lang="en-US" dirty="0"/>
+              <a:t>Transpose </a:t>
+            </a:r>
+            <a:r>
+              <a:rPr lang="en-US" dirty="0" err="1"/>
+              <a:t>asv</a:t>
+            </a:r>
+            <a:r>
+              <a:rPr lang="en-US" dirty="0"/>
+              <a:t> table (</a:t>
+            </a:r>
+            <a:r>
+              <a:rPr lang="en-US" dirty="0" err="1"/>
+              <a:t>asv</a:t>
+            </a:r>
+            <a:r>
+              <a:rPr lang="en-US" dirty="0"/>
+              <a:t> = rows, samples = columns) and compute a matrix of Spearman’s rho rank correlation coefficients for all possible pairs of columns (</a:t>
+            </a:r>
+            <a:r>
+              <a:rPr lang="en-US" dirty="0" err="1"/>
+              <a:t>asvs</a:t>
+            </a:r>
+            <a:r>
+              <a:rPr lang="en-US" dirty="0"/>
+              <a:t>).</a:t>
+            </a:r>
+          </a:p>
+          <a:p>
+            <a:pPr marL="514350" indent="-514350">
+              <a:buFont typeface="+mj-lt"/>
+              <a:buAutoNum type="arabicPeriod"/>
+            </a:pPr>
+            <a:endParaRPr lang="en-US" dirty="0"/>
+          </a:p>
+        </p:txBody>
+      </p:sp>
+    </p:spTree>
+    <p:extLst>
+      <p:ext uri="{BB962C8B-B14F-4D97-AF65-F5344CB8AC3E}">
+        <p14:creationId xmlns:p14="http://schemas.microsoft.com/office/powerpoint/2010/main" val="1057470918"/>
       </p:ext>
     </p:extLst>
   </p:cSld>
@@ -34460,7 +34926,7 @@
           <p:nvPr>
             <p:extLst>
               <p:ext uri="{D42A27DB-BD31-4B8C-83A1-F6EECF244321}">
-                <p14:modId xmlns:p14="http://schemas.microsoft.com/office/powerpoint/2010/main" val="2036473356"/>
+                <p14:modId xmlns:p14="http://schemas.microsoft.com/office/powerpoint/2010/main" val="1814273274"/>
               </p:ext>
             </p:extLst>
           </p:nvPr>
@@ -34510,7 +34976,7 @@
           <p:cNvPr id="2" name="Title 1">
             <a:extLst>
               <a:ext uri="{FF2B5EF4-FFF2-40B4-BE49-F238E27FC236}">
-                <a16:creationId xmlns:a16="http://schemas.microsoft.com/office/drawing/2014/main" id="{F8883892-3D96-014B-BA22-D3A4750E524A}"/>
+                <a16:creationId xmlns:a16="http://schemas.microsoft.com/office/drawing/2014/main" id="{E54A1066-9CC5-E14D-8897-07704940C8FB}"/>
               </a:ext>
             </a:extLst>
           </p:cNvPr>
@@ -34521,22 +34987,14 @@
             <p:ph type="title"/>
           </p:nvPr>
         </p:nvSpPr>
-        <p:spPr>
-          <a:solidFill>
-            <a:srgbClr val="FFC003"/>
-          </a:solidFill>
-        </p:spPr>
+        <p:spPr/>
         <p:txBody>
           <a:bodyPr/>
           <a:lstStyle/>
           <a:p>
             <a:r>
-              <a:rPr lang="en-US" dirty="0">
-                <a:solidFill>
-                  <a:schemeClr val="bg1"/>
-                </a:solidFill>
-              </a:rPr>
-              <a:t>Multivariate Analysis</a:t>
+              <a:rPr lang="en-US" dirty="0"/>
+              <a:t>Abundant and rare taxa</a:t>
             </a:r>
           </a:p>
         </p:txBody>
@@ -34546,7 +35004,7 @@
           <p:cNvPr id="3" name="Content Placeholder 2">
             <a:extLst>
               <a:ext uri="{FF2B5EF4-FFF2-40B4-BE49-F238E27FC236}">
-                <a16:creationId xmlns:a16="http://schemas.microsoft.com/office/drawing/2014/main" id="{057D77B9-9D78-E74A-8AAE-82071815FD34}"/>
+                <a16:creationId xmlns:a16="http://schemas.microsoft.com/office/drawing/2014/main" id="{77E46C54-EBE1-BB4E-BACB-6A3C6120FCEF}"/>
               </a:ext>
             </a:extLst>
           </p:cNvPr>
@@ -34557,48 +35015,113 @@
             <p:ph idx="1"/>
           </p:nvPr>
         </p:nvSpPr>
-        <p:spPr/>
+        <p:spPr>
+          <a:xfrm>
+            <a:off x="838200" y="1825625"/>
+            <a:ext cx="10515600" cy="3973009"/>
+          </a:xfrm>
+        </p:spPr>
         <p:txBody>
-          <a:bodyPr>
-            <a:normAutofit/>
+          <a:bodyPr/>
+          <a:lstStyle/>
+          <a:p>
+            <a:r>
+              <a:rPr lang="en-US" dirty="0"/>
+              <a:t>Rarefied </a:t>
+            </a:r>
+            <a:r>
+              <a:rPr lang="en-US" dirty="0" err="1"/>
+              <a:t>phyloseq</a:t>
+            </a:r>
+            <a:r>
+              <a:rPr lang="en-US" dirty="0"/>
+              <a:t> object to even sampling depth</a:t>
+            </a:r>
+          </a:p>
+          <a:p>
+            <a:r>
+              <a:rPr lang="en-US" dirty="0"/>
+              <a:t>Get local (within sample) relative abundances</a:t>
+            </a:r>
+          </a:p>
+          <a:p>
+            <a:r>
+              <a:rPr lang="en-US" dirty="0"/>
+              <a:t>Find the regional (between sample) relative abundances = mean of local relative abundances </a:t>
+            </a:r>
+          </a:p>
+          <a:p>
+            <a:r>
+              <a:rPr lang="en-US" dirty="0"/>
+              <a:t>Locally abundant taxa &gt; 1% relative abundance</a:t>
+            </a:r>
+          </a:p>
+          <a:p>
+            <a:r>
+              <a:rPr lang="en-US" dirty="0"/>
+              <a:t>Locally rare taxa &lt; 0.01% relative abundance</a:t>
+            </a:r>
+          </a:p>
+          <a:p>
+            <a:r>
+              <a:rPr lang="en-US" dirty="0"/>
+              <a:t>Regionally abundant taxa &gt; 0.1% mean relative abundance</a:t>
+            </a:r>
+          </a:p>
+          <a:p>
+            <a:r>
+              <a:rPr lang="en-US" dirty="0"/>
+              <a:t>Regionally rare taxa &lt; 0.01% mean relative abundance</a:t>
+            </a:r>
+          </a:p>
+        </p:txBody>
+      </p:sp>
+      <p:sp>
+        <p:nvSpPr>
+          <p:cNvPr id="4" name="TextBox 3">
+            <a:extLst>
+              <a:ext uri="{FF2B5EF4-FFF2-40B4-BE49-F238E27FC236}">
+                <a16:creationId xmlns:a16="http://schemas.microsoft.com/office/drawing/2014/main" id="{35487150-8A79-7B40-A578-3DD8B0E30FDC}"/>
+              </a:ext>
+            </a:extLst>
+          </p:cNvPr>
+          <p:cNvSpPr txBox="1"/>
+          <p:nvPr/>
+        </p:nvSpPr>
+        <p:spPr>
+          <a:xfrm>
+            <a:off x="602166" y="6021659"/>
+            <a:ext cx="10751634" cy="923330"/>
+          </a:xfrm>
+          <a:prstGeom prst="rect">
+            <a:avLst/>
+          </a:prstGeom>
+          <a:noFill/>
+        </p:spPr>
+        <p:txBody>
+          <a:bodyPr wrap="square" rtlCol="0">
+            <a:spAutoFit/>
           </a:bodyPr>
           <a:lstStyle/>
           <a:p>
-            <a:pPr marL="742950" indent="-742950">
-              <a:buFont typeface="+mj-lt"/>
-              <a:buAutoNum type="arabicPeriod"/>
-            </a:pPr>
-            <a:r>
-              <a:rPr lang="en-US" sz="4000" dirty="0"/>
-              <a:t>Alpha Diversity </a:t>
-            </a:r>
-          </a:p>
-          <a:p>
-            <a:pPr marL="742950" indent="-742950">
-              <a:buFont typeface="+mj-lt"/>
-              <a:buAutoNum type="arabicPeriod"/>
-            </a:pPr>
-            <a:r>
-              <a:rPr lang="en-US" sz="4000" dirty="0"/>
-              <a:t>Beta Diversity &amp; Ordination</a:t>
-            </a:r>
-          </a:p>
-          <a:p>
-            <a:pPr marL="742950" indent="-742950">
-              <a:buFont typeface="+mj-lt"/>
-              <a:buAutoNum type="arabicPeriod"/>
-            </a:pPr>
-            <a:r>
-              <a:rPr lang="en-US" sz="4000" dirty="0"/>
-              <a:t>ISAR and DDR</a:t>
-            </a:r>
+            <a:r>
+              <a:rPr lang="en-US" dirty="0"/>
+              <a:t>Li et al., (2021) </a:t>
+            </a:r>
+            <a:r>
+              <a:rPr lang="en-GB" dirty="0"/>
+              <a:t>Active bacterial and archaeal communities in coastal sediments: Biogeography pattern, assembly process and co-occurrence relationship</a:t>
+            </a:r>
+          </a:p>
+          <a:p>
+            <a:endParaRPr lang="en-US" dirty="0"/>
           </a:p>
         </p:txBody>
       </p:sp>
     </p:spTree>
     <p:extLst>
       <p:ext uri="{BB962C8B-B14F-4D97-AF65-F5344CB8AC3E}">
-        <p14:creationId xmlns:p14="http://schemas.microsoft.com/office/powerpoint/2010/main" val="542213217"/>
+        <p14:creationId xmlns:p14="http://schemas.microsoft.com/office/powerpoint/2010/main" val="901630170"/>
       </p:ext>
     </p:extLst>
   </p:cSld>
@@ -34630,7 +35153,7 @@
           <p:cNvPr id="2" name="Title 1">
             <a:extLst>
               <a:ext uri="{FF2B5EF4-FFF2-40B4-BE49-F238E27FC236}">
-                <a16:creationId xmlns:a16="http://schemas.microsoft.com/office/drawing/2014/main" id="{8A32E773-3623-2B44-B116-7AD110CA92ED}"/>
+                <a16:creationId xmlns:a16="http://schemas.microsoft.com/office/drawing/2014/main" id="{AAACA58D-E097-5841-8D42-79DD96D96DD8}"/>
               </a:ext>
             </a:extLst>
           </p:cNvPr>
@@ -34641,83 +35164,132 @@
             <p:ph type="title"/>
           </p:nvPr>
         </p:nvSpPr>
-        <p:spPr>
-          <a:solidFill>
-            <a:srgbClr val="FFC003"/>
-          </a:solidFill>
-        </p:spPr>
+        <p:spPr/>
         <p:txBody>
           <a:bodyPr/>
           <a:lstStyle/>
           <a:p>
             <a:r>
-              <a:rPr lang="en-US" dirty="0">
-                <a:solidFill>
-                  <a:schemeClr val="bg1"/>
-                </a:solidFill>
-              </a:rPr>
-              <a:t>Alpha Diversity</a:t>
+              <a:rPr lang="en-US" dirty="0"/>
+              <a:t>ASV Richness</a:t>
             </a:r>
           </a:p>
         </p:txBody>
       </p:sp>
       <p:sp>
         <p:nvSpPr>
-          <p:cNvPr id="3" name="Content Placeholder 2">
+          <p:cNvPr id="6" name="TextBox 5">
             <a:extLst>
               <a:ext uri="{FF2B5EF4-FFF2-40B4-BE49-F238E27FC236}">
-                <a16:creationId xmlns:a16="http://schemas.microsoft.com/office/drawing/2014/main" id="{C8B28687-3A56-724D-832B-D6AF3CD1B17E}"/>
+                <a16:creationId xmlns:a16="http://schemas.microsoft.com/office/drawing/2014/main" id="{4AB9F72C-AE09-4F49-B874-949F669B1D4D}"/>
               </a:ext>
             </a:extLst>
           </p:cNvPr>
-          <p:cNvSpPr>
-            <a:spLocks noGrp="1"/>
-          </p:cNvSpPr>
-          <p:nvPr>
-            <p:ph idx="1"/>
-          </p:nvPr>
+          <p:cNvSpPr txBox="1"/>
+          <p:nvPr/>
         </p:nvSpPr>
         <p:spPr>
           <a:xfrm>
-            <a:off x="838200" y="5557837"/>
-            <a:ext cx="10515600" cy="619125"/>
+            <a:off x="624468" y="1952793"/>
+            <a:ext cx="4958576" cy="3970318"/>
           </a:xfrm>
+          <a:prstGeom prst="rect">
+            <a:avLst/>
+          </a:prstGeom>
+          <a:noFill/>
         </p:spPr>
         <p:txBody>
-          <a:bodyPr>
-            <a:normAutofit fontScale="92500" lnSpcReduction="20000"/>
+          <a:bodyPr wrap="square" rtlCol="0">
+            <a:spAutoFit/>
           </a:bodyPr>
           <a:lstStyle/>
           <a:p>
-            <a:pPr marL="0" indent="0" algn="ctr">
-              <a:buNone/>
-            </a:pPr>
-            <a:r>
-              <a:rPr lang="en-US" sz="2400" dirty="0"/>
-              <a:t>Figure : </a:t>
-            </a:r>
-            <a:r>
-              <a:rPr lang="en-GB" sz="2400" dirty="0"/>
-              <a:t>Plots of ASV richness (A) and Shannon Diversity Index (B) for each glacier (richness: t = 2.0202, </a:t>
-            </a:r>
-            <a:r>
-              <a:rPr lang="en-GB" sz="2400" dirty="0" err="1"/>
+            <a:r>
+              <a:rPr lang="en-US" dirty="0"/>
+              <a:t>Comparison of ASV richness between Canada and Taylor glaciers</a:t>
+            </a:r>
+          </a:p>
+          <a:p>
+            <a:endParaRPr lang="en-US" dirty="0"/>
+          </a:p>
+          <a:p>
+            <a:r>
+              <a:rPr lang="en-US" dirty="0"/>
+              <a:t>Total community: Parametric assumptions met. Unpaired two-sample t-test showed no significant difference (t=1.97, </a:t>
+            </a:r>
+            <a:r>
+              <a:rPr lang="en-US" dirty="0" err="1"/>
               <a:t>df</a:t>
             </a:r>
             <a:r>
-              <a:rPr lang="en-GB" sz="2400" dirty="0"/>
-              <a:t> = 32, p=0.0518, Shannon: W = 142, p=0.5808)</a:t>
-            </a:r>
-            <a:endParaRPr lang="en-US" sz="2400" dirty="0"/>
+              <a:rPr lang="en-US" dirty="0"/>
+              <a:t>=32, p=0.57)</a:t>
+            </a:r>
+          </a:p>
+          <a:p>
+            <a:endParaRPr lang="en-US" dirty="0"/>
+          </a:p>
+          <a:p>
+            <a:r>
+              <a:rPr lang="en-US" dirty="0"/>
+              <a:t>Abundant community: Parametric assumptions not met. Unpaired two samples Wilcoxon test showed no significant difference (W=179.5, p= 0.053)</a:t>
+            </a:r>
+          </a:p>
+          <a:p>
+            <a:endParaRPr lang="en-US" dirty="0"/>
+          </a:p>
+          <a:p>
+            <a:r>
+              <a:rPr lang="en-US" dirty="0"/>
+              <a:t>Rare community: Parametric assumptions met. Unpaired two-sample t-test showed no significant difference (t=1.04, </a:t>
+            </a:r>
+            <a:r>
+              <a:rPr lang="en-US" dirty="0" err="1"/>
+              <a:t>df</a:t>
+            </a:r>
+            <a:r>
+              <a:rPr lang="en-US" dirty="0"/>
+              <a:t>=32, p=0.31)</a:t>
+            </a:r>
           </a:p>
         </p:txBody>
       </p:sp>
       <p:pic>
         <p:nvPicPr>
-          <p:cNvPr id="5" name="Picture 4">
+          <p:cNvPr id="9" name="Picture 8">
             <a:extLst>
               <a:ext uri="{FF2B5EF4-FFF2-40B4-BE49-F238E27FC236}">
-                <a16:creationId xmlns:a16="http://schemas.microsoft.com/office/drawing/2014/main" id="{4FB688A8-5093-E44A-998C-E2EA4D158E52}"/>
+                <a16:creationId xmlns:a16="http://schemas.microsoft.com/office/drawing/2014/main" id="{F87AF4B3-4B97-A444-B02D-FC78B4B63752}"/>
+              </a:ext>
+            </a:extLst>
+          </p:cNvPr>
+          <p:cNvPicPr>
+            <a:picLocks noChangeAspect="1"/>
+          </p:cNvPicPr>
+          <p:nvPr/>
+        </p:nvPicPr>
+        <p:blipFill>
+          <a:blip r:embed="rId2"/>
+          <a:stretch>
+            <a:fillRect/>
+          </a:stretch>
+        </p:blipFill>
+        <p:spPr>
+          <a:xfrm>
+            <a:off x="5583044" y="602166"/>
+            <a:ext cx="5885182" cy="5885182"/>
+          </a:xfrm>
+          <a:prstGeom prst="rect">
+            <a:avLst/>
+          </a:prstGeom>
+        </p:spPr>
+      </p:pic>
+      <p:pic>
+        <p:nvPicPr>
+          <p:cNvPr id="11" name="Picture 10">
+            <a:extLst>
+              <a:ext uri="{FF2B5EF4-FFF2-40B4-BE49-F238E27FC236}">
+                <a16:creationId xmlns:a16="http://schemas.microsoft.com/office/drawing/2014/main" id="{8063C75D-FC2C-4340-B1EE-BF4C87B7B4F2}"/>
               </a:ext>
             </a:extLst>
           </p:cNvPr>
@@ -34734,8 +35306,8 @@
         </p:blipFill>
         <p:spPr>
           <a:xfrm>
-            <a:off x="2438400" y="1795463"/>
-            <a:ext cx="7315200" cy="3657600"/>
+            <a:off x="8377216" y="3969835"/>
+            <a:ext cx="3429758" cy="1534864"/>
           </a:xfrm>
           <a:prstGeom prst="rect">
             <a:avLst/>
@@ -34745,7 +35317,7 @@
     </p:spTree>
     <p:extLst>
       <p:ext uri="{BB962C8B-B14F-4D97-AF65-F5344CB8AC3E}">
-        <p14:creationId xmlns:p14="http://schemas.microsoft.com/office/powerpoint/2010/main" val="3700840866"/>
+        <p14:creationId xmlns:p14="http://schemas.microsoft.com/office/powerpoint/2010/main" val="3422781684"/>
       </p:ext>
     </p:extLst>
   </p:cSld>

--- a/Projects/Chapter1/community-assembly-edit.pptx
+++ b/Projects/Chapter1/community-assembly-edit.pptx
@@ -5,7 +5,7 @@
     <p:sldMasterId id="2147483648" r:id="rId1"/>
   </p:sldMasterIdLst>
   <p:notesMasterIdLst>
-    <p:notesMasterId r:id="rId34"/>
+    <p:notesMasterId r:id="rId35"/>
   </p:notesMasterIdLst>
   <p:sldIdLst>
     <p:sldId id="256" r:id="rId2"/>
@@ -18,28 +18,29 @@
     <p:sldId id="312" r:id="rId9"/>
     <p:sldId id="313" r:id="rId10"/>
     <p:sldId id="314" r:id="rId11"/>
-    <p:sldId id="287" r:id="rId12"/>
-    <p:sldId id="299" r:id="rId13"/>
-    <p:sldId id="300" r:id="rId14"/>
-    <p:sldId id="301" r:id="rId15"/>
-    <p:sldId id="302" r:id="rId16"/>
-    <p:sldId id="309" r:id="rId17"/>
-    <p:sldId id="310" r:id="rId18"/>
-    <p:sldId id="258" r:id="rId19"/>
-    <p:sldId id="259" r:id="rId20"/>
-    <p:sldId id="261" r:id="rId21"/>
-    <p:sldId id="277" r:id="rId22"/>
-    <p:sldId id="278" r:id="rId23"/>
-    <p:sldId id="265" r:id="rId24"/>
-    <p:sldId id="293" r:id="rId25"/>
-    <p:sldId id="271" r:id="rId26"/>
-    <p:sldId id="260" r:id="rId27"/>
-    <p:sldId id="295" r:id="rId28"/>
-    <p:sldId id="262" r:id="rId29"/>
-    <p:sldId id="294" r:id="rId30"/>
-    <p:sldId id="298" r:id="rId31"/>
-    <p:sldId id="296" r:id="rId32"/>
-    <p:sldId id="297" r:id="rId33"/>
+    <p:sldId id="315" r:id="rId12"/>
+    <p:sldId id="287" r:id="rId13"/>
+    <p:sldId id="299" r:id="rId14"/>
+    <p:sldId id="300" r:id="rId15"/>
+    <p:sldId id="301" r:id="rId16"/>
+    <p:sldId id="302" r:id="rId17"/>
+    <p:sldId id="309" r:id="rId18"/>
+    <p:sldId id="310" r:id="rId19"/>
+    <p:sldId id="258" r:id="rId20"/>
+    <p:sldId id="259" r:id="rId21"/>
+    <p:sldId id="261" r:id="rId22"/>
+    <p:sldId id="277" r:id="rId23"/>
+    <p:sldId id="278" r:id="rId24"/>
+    <p:sldId id="265" r:id="rId25"/>
+    <p:sldId id="293" r:id="rId26"/>
+    <p:sldId id="271" r:id="rId27"/>
+    <p:sldId id="260" r:id="rId28"/>
+    <p:sldId id="295" r:id="rId29"/>
+    <p:sldId id="262" r:id="rId30"/>
+    <p:sldId id="294" r:id="rId31"/>
+    <p:sldId id="298" r:id="rId32"/>
+    <p:sldId id="296" r:id="rId33"/>
+    <p:sldId id="297" r:id="rId34"/>
   </p:sldIdLst>
   <p:sldSz cx="12192000" cy="6858000"/>
   <p:notesSz cx="6858000" cy="9144000"/>
@@ -22900,7 +22901,7 @@
           <a:p>
             <a:fld id="{91AE2140-D502-214A-B76B-E0784B2C949B}" type="slidenum">
               <a:rPr lang="en-US" smtClean="0"/>
-              <a:t>18</a:t>
+              <a:t>19</a:t>
             </a:fld>
             <a:endParaRPr lang="en-US"/>
           </a:p>
@@ -23041,7 +23042,7 @@
           <a:p>
             <a:fld id="{91AE2140-D502-214A-B76B-E0784B2C949B}" type="slidenum">
               <a:rPr lang="en-US" smtClean="0"/>
-              <a:t>19</a:t>
+              <a:t>20</a:t>
             </a:fld>
             <a:endParaRPr lang="en-US"/>
           </a:p>
@@ -23354,7 +23355,7 @@
           <a:p>
             <a:fld id="{91AE2140-D502-214A-B76B-E0784B2C949B}" type="slidenum">
               <a:rPr lang="en-US" smtClean="0"/>
-              <a:t>20</a:t>
+              <a:t>21</a:t>
             </a:fld>
             <a:endParaRPr lang="en-US"/>
           </a:p>
@@ -23541,7 +23542,7 @@
           <a:p>
             <a:fld id="{91AE2140-D502-214A-B76B-E0784B2C949B}" type="slidenum">
               <a:rPr lang="en-US" smtClean="0"/>
-              <a:t>21</a:t>
+              <a:t>22</a:t>
             </a:fld>
             <a:endParaRPr lang="en-US"/>
           </a:p>
@@ -23877,7 +23878,7 @@
           <a:p>
             <a:fld id="{91AE2140-D502-214A-B76B-E0784B2C949B}" type="slidenum">
               <a:rPr lang="en-US" smtClean="0"/>
-              <a:t>22</a:t>
+              <a:t>23</a:t>
             </a:fld>
             <a:endParaRPr lang="en-US"/>
           </a:p>
@@ -24334,7 +24335,7 @@
           <a:p>
             <a:fld id="{91AE2140-D502-214A-B76B-E0784B2C949B}" type="slidenum">
               <a:rPr lang="en-US" smtClean="0"/>
-              <a:t>23</a:t>
+              <a:t>24</a:t>
             </a:fld>
             <a:endParaRPr lang="en-US"/>
           </a:p>
@@ -24455,7 +24456,7 @@
           <a:p>
             <a:fld id="{91AE2140-D502-214A-B76B-E0784B2C949B}" type="slidenum">
               <a:rPr lang="en-US" smtClean="0"/>
-              <a:t>25</a:t>
+              <a:t>26</a:t>
             </a:fld>
             <a:endParaRPr lang="en-US"/>
           </a:p>
@@ -24654,7 +24655,7 @@
           <a:p>
             <a:fld id="{91AE2140-D502-214A-B76B-E0784B2C949B}" type="slidenum">
               <a:rPr lang="en-US" smtClean="0"/>
-              <a:t>26</a:t>
+              <a:t>27</a:t>
             </a:fld>
             <a:endParaRPr lang="en-US"/>
           </a:p>
@@ -24756,7 +24757,7 @@
           <a:p>
             <a:fld id="{91AE2140-D502-214A-B76B-E0784B2C949B}" type="slidenum">
               <a:rPr lang="en-US" smtClean="0"/>
-              <a:t>27</a:t>
+              <a:t>28</a:t>
             </a:fld>
             <a:endParaRPr lang="en-US"/>
           </a:p>
@@ -24887,7 +24888,7 @@
           <a:p>
             <a:fld id="{91AE2140-D502-214A-B76B-E0784B2C949B}" type="slidenum">
               <a:rPr lang="en-US" smtClean="0"/>
-              <a:t>28</a:t>
+              <a:t>29</a:t>
             </a:fld>
             <a:endParaRPr lang="en-US"/>
           </a:p>
@@ -25177,7 +25178,7 @@
           <a:p>
             <a:fld id="{91AE2140-D502-214A-B76B-E0784B2C949B}" type="slidenum">
               <a:rPr lang="en-US" smtClean="0"/>
-              <a:t>29</a:t>
+              <a:t>30</a:t>
             </a:fld>
             <a:endParaRPr lang="en-US"/>
           </a:p>
@@ -25331,7 +25332,7 @@
           <a:p>
             <a:fld id="{91AE2140-D502-214A-B76B-E0784B2C949B}" type="slidenum">
               <a:rPr lang="en-US" smtClean="0"/>
-              <a:t>30</a:t>
+              <a:t>31</a:t>
             </a:fld>
             <a:endParaRPr lang="en-US"/>
           </a:p>
@@ -25465,7 +25466,7 @@
           <a:p>
             <a:fld id="{91AE2140-D502-214A-B76B-E0784B2C949B}" type="slidenum">
               <a:rPr lang="en-US" smtClean="0"/>
-              <a:t>31</a:t>
+              <a:t>32</a:t>
             </a:fld>
             <a:endParaRPr lang="en-US"/>
           </a:p>
@@ -26626,7 +26627,7 @@
           <a:p>
             <a:fld id="{91AE2140-D502-214A-B76B-E0784B2C949B}" type="slidenum">
               <a:rPr lang="en-US" smtClean="0"/>
-              <a:t>12</a:t>
+              <a:t>13</a:t>
             </a:fld>
             <a:endParaRPr lang="en-US"/>
           </a:p>
@@ -26744,7 +26745,7 @@
           <a:p>
             <a:fld id="{91AE2140-D502-214A-B76B-E0784B2C949B}" type="slidenum">
               <a:rPr lang="en-US" smtClean="0"/>
-              <a:t>13</a:t>
+              <a:t>14</a:t>
             </a:fld>
             <a:endParaRPr lang="en-US"/>
           </a:p>
@@ -26923,7 +26924,7 @@
           <a:p>
             <a:fld id="{91AE2140-D502-214A-B76B-E0784B2C949B}" type="slidenum">
               <a:rPr lang="en-US" smtClean="0"/>
-              <a:t>16</a:t>
+              <a:t>17</a:t>
             </a:fld>
             <a:endParaRPr lang="en-US"/>
           </a:p>
@@ -27010,7 +27011,7 @@
           <a:p>
             <a:fld id="{91AE2140-D502-214A-B76B-E0784B2C949B}" type="slidenum">
               <a:rPr lang="en-US" smtClean="0"/>
-              <a:t>17</a:t>
+              <a:t>18</a:t>
             </a:fld>
             <a:endParaRPr lang="en-US"/>
           </a:p>
@@ -30539,6 +30540,125 @@
           <p:cNvPr id="2" name="Title 1">
             <a:extLst>
               <a:ext uri="{FF2B5EF4-FFF2-40B4-BE49-F238E27FC236}">
+                <a16:creationId xmlns:a16="http://schemas.microsoft.com/office/drawing/2014/main" id="{70FCF38B-19E6-2C4A-8371-F24C1BE8AC71}"/>
+              </a:ext>
+            </a:extLst>
+          </p:cNvPr>
+          <p:cNvSpPr>
+            <a:spLocks noGrp="1"/>
+          </p:cNvSpPr>
+          <p:nvPr>
+            <p:ph type="title"/>
+          </p:nvPr>
+        </p:nvSpPr>
+        <p:spPr/>
+        <p:txBody>
+          <a:bodyPr/>
+          <a:lstStyle/>
+          <a:p>
+            <a:r>
+              <a:rPr lang="en-US" dirty="0"/>
+              <a:t>Other Diversity Metrics</a:t>
+            </a:r>
+          </a:p>
+        </p:txBody>
+      </p:sp>
+      <p:sp>
+        <p:nvSpPr>
+          <p:cNvPr id="3" name="Content Placeholder 2">
+            <a:extLst>
+              <a:ext uri="{FF2B5EF4-FFF2-40B4-BE49-F238E27FC236}">
+                <a16:creationId xmlns:a16="http://schemas.microsoft.com/office/drawing/2014/main" id="{48B45EDA-EF44-9C41-81BF-0C4381692058}"/>
+              </a:ext>
+            </a:extLst>
+          </p:cNvPr>
+          <p:cNvSpPr>
+            <a:spLocks noGrp="1"/>
+          </p:cNvSpPr>
+          <p:nvPr>
+            <p:ph idx="1"/>
+          </p:nvPr>
+        </p:nvSpPr>
+        <p:spPr/>
+        <p:txBody>
+          <a:bodyPr>
+            <a:normAutofit lnSpcReduction="10000"/>
+          </a:bodyPr>
+          <a:lstStyle/>
+          <a:p>
+            <a:r>
+              <a:rPr lang="en-US" sz="2400" dirty="0"/>
+              <a:t>Faith: Total community = No difference. Abundant community = No difference (significant difference with non-parametric). Rare community = No difference.</a:t>
+            </a:r>
+          </a:p>
+          <a:p>
+            <a:endParaRPr lang="en-US" sz="2400" dirty="0"/>
+          </a:p>
+          <a:p>
+            <a:r>
+              <a:rPr lang="en-US" sz="2400" dirty="0"/>
+              <a:t>Simpson: Total community = No difference. Abundant community = Significant difference (no difference with non-parametric). Rare community = No difference.</a:t>
+            </a:r>
+          </a:p>
+          <a:p>
+            <a:endParaRPr lang="en-US" sz="2400" dirty="0"/>
+          </a:p>
+          <a:p>
+            <a:r>
+              <a:rPr lang="en-US" sz="2400" dirty="0"/>
+              <a:t>Inverse Simpson: Total community = No difference. Abundant community = No difference. Rare community = No difference.</a:t>
+            </a:r>
+          </a:p>
+          <a:p>
+            <a:endParaRPr lang="en-US" sz="2400" dirty="0"/>
+          </a:p>
+          <a:p>
+            <a:r>
+              <a:rPr lang="en-US" sz="2400" dirty="0" err="1"/>
+              <a:t>Pilou</a:t>
+            </a:r>
+            <a:r>
+              <a:rPr lang="en-US" sz="2400" dirty="0"/>
+              <a:t>: Total community = Significant difference. Abundant community = Significant difference. Rare community = No difference.</a:t>
+            </a:r>
+          </a:p>
+        </p:txBody>
+      </p:sp>
+    </p:spTree>
+    <p:extLst>
+      <p:ext uri="{BB962C8B-B14F-4D97-AF65-F5344CB8AC3E}">
+        <p14:creationId xmlns:p14="http://schemas.microsoft.com/office/powerpoint/2010/main" val="2406373659"/>
+      </p:ext>
+    </p:extLst>
+  </p:cSld>
+  <p:clrMapOvr>
+    <a:masterClrMapping/>
+  </p:clrMapOvr>
+</p:sld>
+</file>
+
+<file path=ppt/slides/slide12.xml><?xml version="1.0" encoding="utf-8"?>
+<p:sld xmlns:a="http://schemas.openxmlformats.org/drawingml/2006/main" xmlns:r="http://schemas.openxmlformats.org/officeDocument/2006/relationships" xmlns:p="http://schemas.openxmlformats.org/presentationml/2006/main">
+  <p:cSld>
+    <p:spTree>
+      <p:nvGrpSpPr>
+        <p:cNvPr id="1" name=""/>
+        <p:cNvGrpSpPr/>
+        <p:nvPr/>
+      </p:nvGrpSpPr>
+      <p:grpSpPr>
+        <a:xfrm>
+          <a:off x="0" y="0"/>
+          <a:ext cx="0" cy="0"/>
+          <a:chOff x="0" y="0"/>
+          <a:chExt cx="0" cy="0"/>
+        </a:xfrm>
+      </p:grpSpPr>
+      <p:sp>
+        <p:nvSpPr>
+          <p:cNvPr id="2" name="Title 1">
+            <a:extLst>
+              <a:ext uri="{FF2B5EF4-FFF2-40B4-BE49-F238E27FC236}">
                 <a16:creationId xmlns:a16="http://schemas.microsoft.com/office/drawing/2014/main" id="{F8883892-3D96-014B-BA22-D3A4750E524A}"/>
               </a:ext>
             </a:extLst>
@@ -30637,7 +30757,7 @@
 </p:sld>
 </file>
 
-<file path=ppt/slides/slide12.xml><?xml version="1.0" encoding="utf-8"?>
+<file path=ppt/slides/slide13.xml><?xml version="1.0" encoding="utf-8"?>
 <p:sld xmlns:a="http://schemas.openxmlformats.org/drawingml/2006/main" xmlns:r="http://schemas.openxmlformats.org/officeDocument/2006/relationships" xmlns:p="http://schemas.openxmlformats.org/presentationml/2006/main">
   <p:cSld>
     <p:spTree>
@@ -30784,7 +30904,7 @@
 </p:sld>
 </file>
 
-<file path=ppt/slides/slide13.xml><?xml version="1.0" encoding="utf-8"?>
+<file path=ppt/slides/slide14.xml><?xml version="1.0" encoding="utf-8"?>
 <p:sld xmlns:a="http://schemas.openxmlformats.org/drawingml/2006/main" xmlns:r="http://schemas.openxmlformats.org/officeDocument/2006/relationships" xmlns:p="http://schemas.openxmlformats.org/presentationml/2006/main">
   <p:cSld>
     <p:spTree>
@@ -30955,7 +31075,7 @@
 </p:sld>
 </file>
 
-<file path=ppt/slides/slide14.xml><?xml version="1.0" encoding="utf-8"?>
+<file path=ppt/slides/slide15.xml><?xml version="1.0" encoding="utf-8"?>
 <p:sld xmlns:a="http://schemas.openxmlformats.org/drawingml/2006/main" xmlns:r="http://schemas.openxmlformats.org/officeDocument/2006/relationships" xmlns:p="http://schemas.openxmlformats.org/presentationml/2006/main">
   <p:cSld>
     <p:spTree>
@@ -31122,7 +31242,7 @@
 </p:sld>
 </file>
 
-<file path=ppt/slides/slide15.xml><?xml version="1.0" encoding="utf-8"?>
+<file path=ppt/slides/slide16.xml><?xml version="1.0" encoding="utf-8"?>
 <p:sld xmlns:a="http://schemas.openxmlformats.org/drawingml/2006/main" xmlns:r="http://schemas.openxmlformats.org/officeDocument/2006/relationships" xmlns:p="http://schemas.openxmlformats.org/presentationml/2006/main">
   <p:cSld>
     <p:spTree>
@@ -31265,7 +31385,7 @@
 </p:sld>
 </file>
 
-<file path=ppt/slides/slide16.xml><?xml version="1.0" encoding="utf-8"?>
+<file path=ppt/slides/slide17.xml><?xml version="1.0" encoding="utf-8"?>
 <p:sld xmlns:a="http://schemas.openxmlformats.org/drawingml/2006/main" xmlns:r="http://schemas.openxmlformats.org/officeDocument/2006/relationships" xmlns:p="http://schemas.openxmlformats.org/presentationml/2006/main">
   <p:cSld>
     <p:spTree>
@@ -31361,7 +31481,7 @@
 </p:sld>
 </file>
 
-<file path=ppt/slides/slide17.xml><?xml version="1.0" encoding="utf-8"?>
+<file path=ppt/slides/slide18.xml><?xml version="1.0" encoding="utf-8"?>
 <p:sld xmlns:a="http://schemas.openxmlformats.org/drawingml/2006/main" xmlns:r="http://schemas.openxmlformats.org/officeDocument/2006/relationships" xmlns:p="http://schemas.openxmlformats.org/presentationml/2006/main">
   <p:cSld>
     <p:spTree>
@@ -31492,7 +31612,7 @@
 </p:sld>
 </file>
 
-<file path=ppt/slides/slide18.xml><?xml version="1.0" encoding="utf-8"?>
+<file path=ppt/slides/slide19.xml><?xml version="1.0" encoding="utf-8"?>
 <p:sld xmlns:a="http://schemas.openxmlformats.org/drawingml/2006/main" xmlns:r="http://schemas.openxmlformats.org/officeDocument/2006/relationships" xmlns:p="http://schemas.openxmlformats.org/presentationml/2006/main">
   <p:cSld>
     <p:spTree>
@@ -31718,7 +31838,100 @@
 </p:sld>
 </file>
 
-<file path=ppt/slides/slide19.xml><?xml version="1.0" encoding="utf-8"?>
+<file path=ppt/slides/slide2.xml><?xml version="1.0" encoding="utf-8"?>
+<p:sld xmlns:a="http://schemas.openxmlformats.org/drawingml/2006/main" xmlns:r="http://schemas.openxmlformats.org/officeDocument/2006/relationships" xmlns:p="http://schemas.openxmlformats.org/presentationml/2006/main">
+  <p:cSld>
+    <p:spTree>
+      <p:nvGrpSpPr>
+        <p:cNvPr id="1" name=""/>
+        <p:cNvGrpSpPr/>
+        <p:nvPr/>
+      </p:nvGrpSpPr>
+      <p:grpSpPr>
+        <a:xfrm>
+          <a:off x="0" y="0"/>
+          <a:ext cx="0" cy="0"/>
+          <a:chOff x="0" y="0"/>
+          <a:chExt cx="0" cy="0"/>
+        </a:xfrm>
+      </p:grpSpPr>
+      <p:sp>
+        <p:nvSpPr>
+          <p:cNvPr id="2" name="Title 1">
+            <a:extLst>
+              <a:ext uri="{FF2B5EF4-FFF2-40B4-BE49-F238E27FC236}">
+                <a16:creationId xmlns:a16="http://schemas.microsoft.com/office/drawing/2014/main" id="{45EBAA57-4779-4A41-AFFB-BF6247B0B39E}"/>
+              </a:ext>
+            </a:extLst>
+          </p:cNvPr>
+          <p:cNvSpPr>
+            <a:spLocks noGrp="1"/>
+          </p:cNvSpPr>
+          <p:nvPr>
+            <p:ph type="title"/>
+          </p:nvPr>
+        </p:nvSpPr>
+        <p:spPr/>
+        <p:txBody>
+          <a:bodyPr/>
+          <a:lstStyle/>
+          <a:p>
+            <a:r>
+              <a:rPr lang="en-US" dirty="0"/>
+              <a:t>Neutral Theory</a:t>
+            </a:r>
+          </a:p>
+        </p:txBody>
+      </p:sp>
+      <p:sp>
+        <p:nvSpPr>
+          <p:cNvPr id="4" name="TextBox 3">
+            <a:extLst>
+              <a:ext uri="{FF2B5EF4-FFF2-40B4-BE49-F238E27FC236}">
+                <a16:creationId xmlns:a16="http://schemas.microsoft.com/office/drawing/2014/main" id="{DD47A41A-0904-514B-99DB-4E5E573D0747}"/>
+              </a:ext>
+            </a:extLst>
+          </p:cNvPr>
+          <p:cNvSpPr txBox="1"/>
+          <p:nvPr/>
+        </p:nvSpPr>
+        <p:spPr>
+          <a:xfrm>
+            <a:off x="838200" y="6239319"/>
+            <a:ext cx="10787743" cy="369332"/>
+          </a:xfrm>
+          <a:prstGeom prst="rect">
+            <a:avLst/>
+          </a:prstGeom>
+          <a:noFill/>
+        </p:spPr>
+        <p:txBody>
+          <a:bodyPr wrap="square" rtlCol="0">
+            <a:spAutoFit/>
+          </a:bodyPr>
+          <a:lstStyle/>
+          <a:p>
+            <a:r>
+              <a:rPr lang="en-US" dirty="0"/>
+              <a:t>Sloan et al., (2006) Quantifying the roles of immigration and chance in shaping prokaryote community structure</a:t>
+            </a:r>
+          </a:p>
+        </p:txBody>
+      </p:sp>
+    </p:spTree>
+    <p:extLst>
+      <p:ext uri="{BB962C8B-B14F-4D97-AF65-F5344CB8AC3E}">
+        <p14:creationId xmlns:p14="http://schemas.microsoft.com/office/powerpoint/2010/main" val="2186134876"/>
+      </p:ext>
+    </p:extLst>
+  </p:cSld>
+  <p:clrMapOvr>
+    <a:masterClrMapping/>
+  </p:clrMapOvr>
+</p:sld>
+</file>
+
+<file path=ppt/slides/slide20.xml><?xml version="1.0" encoding="utf-8"?>
 <p:sld xmlns:a="http://schemas.openxmlformats.org/drawingml/2006/main" xmlns:r="http://schemas.openxmlformats.org/officeDocument/2006/relationships" xmlns:p="http://schemas.openxmlformats.org/presentationml/2006/main">
   <p:cSld>
     <p:spTree>
@@ -31784,100 +31997,7 @@
 </p:sld>
 </file>
 
-<file path=ppt/slides/slide2.xml><?xml version="1.0" encoding="utf-8"?>
-<p:sld xmlns:a="http://schemas.openxmlformats.org/drawingml/2006/main" xmlns:r="http://schemas.openxmlformats.org/officeDocument/2006/relationships" xmlns:p="http://schemas.openxmlformats.org/presentationml/2006/main">
-  <p:cSld>
-    <p:spTree>
-      <p:nvGrpSpPr>
-        <p:cNvPr id="1" name=""/>
-        <p:cNvGrpSpPr/>
-        <p:nvPr/>
-      </p:nvGrpSpPr>
-      <p:grpSpPr>
-        <a:xfrm>
-          <a:off x="0" y="0"/>
-          <a:ext cx="0" cy="0"/>
-          <a:chOff x="0" y="0"/>
-          <a:chExt cx="0" cy="0"/>
-        </a:xfrm>
-      </p:grpSpPr>
-      <p:sp>
-        <p:nvSpPr>
-          <p:cNvPr id="2" name="Title 1">
-            <a:extLst>
-              <a:ext uri="{FF2B5EF4-FFF2-40B4-BE49-F238E27FC236}">
-                <a16:creationId xmlns:a16="http://schemas.microsoft.com/office/drawing/2014/main" id="{45EBAA57-4779-4A41-AFFB-BF6247B0B39E}"/>
-              </a:ext>
-            </a:extLst>
-          </p:cNvPr>
-          <p:cNvSpPr>
-            <a:spLocks noGrp="1"/>
-          </p:cNvSpPr>
-          <p:nvPr>
-            <p:ph type="title"/>
-          </p:nvPr>
-        </p:nvSpPr>
-        <p:spPr/>
-        <p:txBody>
-          <a:bodyPr/>
-          <a:lstStyle/>
-          <a:p>
-            <a:r>
-              <a:rPr lang="en-US" dirty="0"/>
-              <a:t>Neutral Theory</a:t>
-            </a:r>
-          </a:p>
-        </p:txBody>
-      </p:sp>
-      <p:sp>
-        <p:nvSpPr>
-          <p:cNvPr id="4" name="TextBox 3">
-            <a:extLst>
-              <a:ext uri="{FF2B5EF4-FFF2-40B4-BE49-F238E27FC236}">
-                <a16:creationId xmlns:a16="http://schemas.microsoft.com/office/drawing/2014/main" id="{DD47A41A-0904-514B-99DB-4E5E573D0747}"/>
-              </a:ext>
-            </a:extLst>
-          </p:cNvPr>
-          <p:cNvSpPr txBox="1"/>
-          <p:nvPr/>
-        </p:nvSpPr>
-        <p:spPr>
-          <a:xfrm>
-            <a:off x="838200" y="6239319"/>
-            <a:ext cx="10787743" cy="369332"/>
-          </a:xfrm>
-          <a:prstGeom prst="rect">
-            <a:avLst/>
-          </a:prstGeom>
-          <a:noFill/>
-        </p:spPr>
-        <p:txBody>
-          <a:bodyPr wrap="square" rtlCol="0">
-            <a:spAutoFit/>
-          </a:bodyPr>
-          <a:lstStyle/>
-          <a:p>
-            <a:r>
-              <a:rPr lang="en-US" dirty="0"/>
-              <a:t>Sloan et al., (2006) Quantifying the roles of immigration and chance in shaping prokaryote community structure</a:t>
-            </a:r>
-          </a:p>
-        </p:txBody>
-      </p:sp>
-    </p:spTree>
-    <p:extLst>
-      <p:ext uri="{BB962C8B-B14F-4D97-AF65-F5344CB8AC3E}">
-        <p14:creationId xmlns:p14="http://schemas.microsoft.com/office/powerpoint/2010/main" val="2186134876"/>
-      </p:ext>
-    </p:extLst>
-  </p:cSld>
-  <p:clrMapOvr>
-    <a:masterClrMapping/>
-  </p:clrMapOvr>
-</p:sld>
-</file>
-
-<file path=ppt/slides/slide20.xml><?xml version="1.0" encoding="utf-8"?>
+<file path=ppt/slides/slide21.xml><?xml version="1.0" encoding="utf-8"?>
 <p:sld xmlns:a="http://schemas.openxmlformats.org/drawingml/2006/main" xmlns:r="http://schemas.openxmlformats.org/officeDocument/2006/relationships" xmlns:p="http://schemas.openxmlformats.org/presentationml/2006/main">
   <p:cSld>
     <p:spTree>
@@ -32991,7 +33111,7 @@
 </p:sld>
 </file>
 
-<file path=ppt/slides/slide21.xml><?xml version="1.0" encoding="utf-8"?>
+<file path=ppt/slides/slide22.xml><?xml version="1.0" encoding="utf-8"?>
 <p:sld xmlns:a="http://schemas.openxmlformats.org/drawingml/2006/main" xmlns:r="http://schemas.openxmlformats.org/officeDocument/2006/relationships" xmlns:p="http://schemas.openxmlformats.org/presentationml/2006/main">
   <p:cSld>
     <p:spTree>
@@ -33350,7 +33470,7 @@
 </p:sld>
 </file>
 
-<file path=ppt/slides/slide22.xml><?xml version="1.0" encoding="utf-8"?>
+<file path=ppt/slides/slide23.xml><?xml version="1.0" encoding="utf-8"?>
 <p:sld xmlns:a="http://schemas.openxmlformats.org/drawingml/2006/main" xmlns:r="http://schemas.openxmlformats.org/officeDocument/2006/relationships" xmlns:p="http://schemas.openxmlformats.org/presentationml/2006/main">
   <p:cSld>
     <p:spTree>
@@ -33446,7 +33566,7 @@
 </p:sld>
 </file>
 
-<file path=ppt/slides/slide23.xml><?xml version="1.0" encoding="utf-8"?>
+<file path=ppt/slides/slide24.xml><?xml version="1.0" encoding="utf-8"?>
 <p:sld xmlns:a="http://schemas.openxmlformats.org/drawingml/2006/main" xmlns:r="http://schemas.openxmlformats.org/officeDocument/2006/relationships" xmlns:p="http://schemas.openxmlformats.org/presentationml/2006/main">
   <p:cSld>
     <p:spTree>
@@ -33610,7 +33730,7 @@
 </p:sld>
 </file>
 
-<file path=ppt/slides/slide24.xml><?xml version="1.0" encoding="utf-8"?>
+<file path=ppt/slides/slide25.xml><?xml version="1.0" encoding="utf-8"?>
 <p:sld xmlns:a="http://schemas.openxmlformats.org/drawingml/2006/main" xmlns:r="http://schemas.openxmlformats.org/officeDocument/2006/relationships" xmlns:p="http://schemas.openxmlformats.org/presentationml/2006/main">
   <p:cSld>
     <p:spTree>
@@ -33708,7 +33828,7 @@
 </p:sld>
 </file>
 
-<file path=ppt/slides/slide25.xml><?xml version="1.0" encoding="utf-8"?>
+<file path=ppt/slides/slide26.xml><?xml version="1.0" encoding="utf-8"?>
 <p:sld xmlns:a="http://schemas.openxmlformats.org/drawingml/2006/main" xmlns:r="http://schemas.openxmlformats.org/officeDocument/2006/relationships" xmlns:p="http://schemas.openxmlformats.org/presentationml/2006/main">
   <p:cSld>
     <p:spTree>
@@ -33803,7 +33923,7 @@
 </p:sld>
 </file>
 
-<file path=ppt/slides/slide26.xml><?xml version="1.0" encoding="utf-8"?>
+<file path=ppt/slides/slide27.xml><?xml version="1.0" encoding="utf-8"?>
 <p:sld xmlns:a="http://schemas.openxmlformats.org/drawingml/2006/main" xmlns:r="http://schemas.openxmlformats.org/officeDocument/2006/relationships" xmlns:p="http://schemas.openxmlformats.org/presentationml/2006/main">
   <p:cSld>
     <p:spTree>
@@ -33899,7 +34019,7 @@
 </p:sld>
 </file>
 
-<file path=ppt/slides/slide27.xml><?xml version="1.0" encoding="utf-8"?>
+<file path=ppt/slides/slide28.xml><?xml version="1.0" encoding="utf-8"?>
 <p:sld xmlns:a="http://schemas.openxmlformats.org/drawingml/2006/main" xmlns:r="http://schemas.openxmlformats.org/officeDocument/2006/relationships" xmlns:p="http://schemas.openxmlformats.org/presentationml/2006/main">
   <p:cSld>
     <p:spTree>
@@ -33995,7 +34115,7 @@
 </p:sld>
 </file>
 
-<file path=ppt/slides/slide28.xml><?xml version="1.0" encoding="utf-8"?>
+<file path=ppt/slides/slide29.xml><?xml version="1.0" encoding="utf-8"?>
 <p:sld xmlns:a="http://schemas.openxmlformats.org/drawingml/2006/main" xmlns:r="http://schemas.openxmlformats.org/officeDocument/2006/relationships" xmlns:p="http://schemas.openxmlformats.org/presentationml/2006/main">
   <p:cSld>
     <p:spTree>
@@ -34052,121 +34172,6 @@
     <p:extLst>
       <p:ext uri="{BB962C8B-B14F-4D97-AF65-F5344CB8AC3E}">
         <p14:creationId xmlns:p14="http://schemas.microsoft.com/office/powerpoint/2010/main" val="1804698877"/>
-      </p:ext>
-    </p:extLst>
-  </p:cSld>
-  <p:clrMapOvr>
-    <a:masterClrMapping/>
-  </p:clrMapOvr>
-</p:sld>
-</file>
-
-<file path=ppt/slides/slide29.xml><?xml version="1.0" encoding="utf-8"?>
-<p:sld xmlns:a="http://schemas.openxmlformats.org/drawingml/2006/main" xmlns:r="http://schemas.openxmlformats.org/officeDocument/2006/relationships" xmlns:p="http://schemas.openxmlformats.org/presentationml/2006/main">
-  <p:cSld>
-    <p:spTree>
-      <p:nvGrpSpPr>
-        <p:cNvPr id="1" name=""/>
-        <p:cNvGrpSpPr/>
-        <p:nvPr/>
-      </p:nvGrpSpPr>
-      <p:grpSpPr>
-        <a:xfrm>
-          <a:off x="0" y="0"/>
-          <a:ext cx="0" cy="0"/>
-          <a:chOff x="0" y="0"/>
-          <a:chExt cx="0" cy="0"/>
-        </a:xfrm>
-      </p:grpSpPr>
-      <p:sp>
-        <p:nvSpPr>
-          <p:cNvPr id="2" name="Title 1">
-            <a:extLst>
-              <a:ext uri="{FF2B5EF4-FFF2-40B4-BE49-F238E27FC236}">
-                <a16:creationId xmlns:a16="http://schemas.microsoft.com/office/drawing/2014/main" id="{91708ED6-3AC3-C74A-BC09-4ACE99BE8CEA}"/>
-              </a:ext>
-            </a:extLst>
-          </p:cNvPr>
-          <p:cNvSpPr>
-            <a:spLocks noGrp="1"/>
-          </p:cNvSpPr>
-          <p:nvPr>
-            <p:ph type="title"/>
-          </p:nvPr>
-        </p:nvSpPr>
-        <p:spPr>
-          <a:solidFill>
-            <a:srgbClr val="5C9BD5"/>
-          </a:solidFill>
-        </p:spPr>
-        <p:txBody>
-          <a:bodyPr/>
-          <a:lstStyle/>
-          <a:p>
-            <a:r>
-              <a:rPr lang="en-US" dirty="0">
-                <a:solidFill>
-                  <a:schemeClr val="bg1"/>
-                </a:solidFill>
-              </a:rPr>
-              <a:t>Centrality and Clustering</a:t>
-            </a:r>
-          </a:p>
-        </p:txBody>
-      </p:sp>
-      <p:sp>
-        <p:nvSpPr>
-          <p:cNvPr id="3" name="Content Placeholder 2">
-            <a:extLst>
-              <a:ext uri="{FF2B5EF4-FFF2-40B4-BE49-F238E27FC236}">
-                <a16:creationId xmlns:a16="http://schemas.microsoft.com/office/drawing/2014/main" id="{AE5C1FCC-630C-704F-9B87-76F833E6EB7A}"/>
-              </a:ext>
-            </a:extLst>
-          </p:cNvPr>
-          <p:cNvSpPr>
-            <a:spLocks noGrp="1"/>
-          </p:cNvSpPr>
-          <p:nvPr>
-            <p:ph idx="1"/>
-          </p:nvPr>
-        </p:nvSpPr>
-        <p:spPr/>
-        <p:txBody>
-          <a:bodyPr/>
-          <a:lstStyle/>
-          <a:p>
-            <a:r>
-              <a:rPr lang="en-US" dirty="0"/>
-              <a:t>Degree Centrality</a:t>
-            </a:r>
-          </a:p>
-          <a:p>
-            <a:r>
-              <a:rPr lang="en-US" dirty="0"/>
-              <a:t>Closeness Centrality</a:t>
-            </a:r>
-          </a:p>
-          <a:p>
-            <a:r>
-              <a:rPr lang="en-US" dirty="0"/>
-              <a:t>Betweenness Centrality</a:t>
-            </a:r>
-          </a:p>
-          <a:p>
-            <a:r>
-              <a:rPr lang="en-US" dirty="0"/>
-              <a:t>Clustering coefficient</a:t>
-            </a:r>
-          </a:p>
-          <a:p>
-            <a:endParaRPr lang="en-US" dirty="0"/>
-          </a:p>
-        </p:txBody>
-      </p:sp>
-    </p:spTree>
-    <p:extLst>
-      <p:ext uri="{BB962C8B-B14F-4D97-AF65-F5344CB8AC3E}">
-        <p14:creationId xmlns:p14="http://schemas.microsoft.com/office/powerpoint/2010/main" val="3748687434"/>
       </p:ext>
     </p:extLst>
   </p:cSld>
@@ -34307,6 +34312,121 @@
           <p:cNvPr id="2" name="Title 1">
             <a:extLst>
               <a:ext uri="{FF2B5EF4-FFF2-40B4-BE49-F238E27FC236}">
+                <a16:creationId xmlns:a16="http://schemas.microsoft.com/office/drawing/2014/main" id="{91708ED6-3AC3-C74A-BC09-4ACE99BE8CEA}"/>
+              </a:ext>
+            </a:extLst>
+          </p:cNvPr>
+          <p:cNvSpPr>
+            <a:spLocks noGrp="1"/>
+          </p:cNvSpPr>
+          <p:nvPr>
+            <p:ph type="title"/>
+          </p:nvPr>
+        </p:nvSpPr>
+        <p:spPr>
+          <a:solidFill>
+            <a:srgbClr val="5C9BD5"/>
+          </a:solidFill>
+        </p:spPr>
+        <p:txBody>
+          <a:bodyPr/>
+          <a:lstStyle/>
+          <a:p>
+            <a:r>
+              <a:rPr lang="en-US" dirty="0">
+                <a:solidFill>
+                  <a:schemeClr val="bg1"/>
+                </a:solidFill>
+              </a:rPr>
+              <a:t>Centrality and Clustering</a:t>
+            </a:r>
+          </a:p>
+        </p:txBody>
+      </p:sp>
+      <p:sp>
+        <p:nvSpPr>
+          <p:cNvPr id="3" name="Content Placeholder 2">
+            <a:extLst>
+              <a:ext uri="{FF2B5EF4-FFF2-40B4-BE49-F238E27FC236}">
+                <a16:creationId xmlns:a16="http://schemas.microsoft.com/office/drawing/2014/main" id="{AE5C1FCC-630C-704F-9B87-76F833E6EB7A}"/>
+              </a:ext>
+            </a:extLst>
+          </p:cNvPr>
+          <p:cNvSpPr>
+            <a:spLocks noGrp="1"/>
+          </p:cNvSpPr>
+          <p:nvPr>
+            <p:ph idx="1"/>
+          </p:nvPr>
+        </p:nvSpPr>
+        <p:spPr/>
+        <p:txBody>
+          <a:bodyPr/>
+          <a:lstStyle/>
+          <a:p>
+            <a:r>
+              <a:rPr lang="en-US" dirty="0"/>
+              <a:t>Degree Centrality</a:t>
+            </a:r>
+          </a:p>
+          <a:p>
+            <a:r>
+              <a:rPr lang="en-US" dirty="0"/>
+              <a:t>Closeness Centrality</a:t>
+            </a:r>
+          </a:p>
+          <a:p>
+            <a:r>
+              <a:rPr lang="en-US" dirty="0"/>
+              <a:t>Betweenness Centrality</a:t>
+            </a:r>
+          </a:p>
+          <a:p>
+            <a:r>
+              <a:rPr lang="en-US" dirty="0"/>
+              <a:t>Clustering coefficient</a:t>
+            </a:r>
+          </a:p>
+          <a:p>
+            <a:endParaRPr lang="en-US" dirty="0"/>
+          </a:p>
+        </p:txBody>
+      </p:sp>
+    </p:spTree>
+    <p:extLst>
+      <p:ext uri="{BB962C8B-B14F-4D97-AF65-F5344CB8AC3E}">
+        <p14:creationId xmlns:p14="http://schemas.microsoft.com/office/powerpoint/2010/main" val="3748687434"/>
+      </p:ext>
+    </p:extLst>
+  </p:cSld>
+  <p:clrMapOvr>
+    <a:masterClrMapping/>
+  </p:clrMapOvr>
+</p:sld>
+</file>
+
+<file path=ppt/slides/slide31.xml><?xml version="1.0" encoding="utf-8"?>
+<p:sld xmlns:a="http://schemas.openxmlformats.org/drawingml/2006/main" xmlns:r="http://schemas.openxmlformats.org/officeDocument/2006/relationships" xmlns:p="http://schemas.openxmlformats.org/presentationml/2006/main">
+  <p:cSld>
+    <p:spTree>
+      <p:nvGrpSpPr>
+        <p:cNvPr id="1" name=""/>
+        <p:cNvGrpSpPr/>
+        <p:nvPr/>
+      </p:nvGrpSpPr>
+      <p:grpSpPr>
+        <a:xfrm>
+          <a:off x="0" y="0"/>
+          <a:ext cx="0" cy="0"/>
+          <a:chOff x="0" y="0"/>
+          <a:chExt cx="0" cy="0"/>
+        </a:xfrm>
+      </p:grpSpPr>
+      <p:sp>
+        <p:nvSpPr>
+          <p:cNvPr id="2" name="Title 1">
+            <a:extLst>
+              <a:ext uri="{FF2B5EF4-FFF2-40B4-BE49-F238E27FC236}">
                 <a16:creationId xmlns:a16="http://schemas.microsoft.com/office/drawing/2014/main" id="{147D2BF3-8D20-3347-8C3A-FC5C22DAA765}"/>
               </a:ext>
             </a:extLst>
@@ -34377,7 +34497,7 @@
 </p:sld>
 </file>
 
-<file path=ppt/slides/slide31.xml><?xml version="1.0" encoding="utf-8"?>
+<file path=ppt/slides/slide32.xml><?xml version="1.0" encoding="utf-8"?>
 <p:sld xmlns:a="http://schemas.openxmlformats.org/drawingml/2006/main" xmlns:r="http://schemas.openxmlformats.org/officeDocument/2006/relationships" xmlns:p="http://schemas.openxmlformats.org/presentationml/2006/main">
   <p:cSld>
     <p:spTree>
@@ -34457,7 +34577,7 @@
 </p:sld>
 </file>
 
-<file path=ppt/slides/slide32.xml><?xml version="1.0" encoding="utf-8"?>
+<file path=ppt/slides/slide33.xml><?xml version="1.0" encoding="utf-8"?>
 <p:sld xmlns:a="http://schemas.openxmlformats.org/drawingml/2006/main" xmlns:r="http://schemas.openxmlformats.org/officeDocument/2006/relationships" xmlns:p="http://schemas.openxmlformats.org/presentationml/2006/main">
   <p:cSld>
     <p:spTree>
